--- a/RTB/PRESENTAZIONE RTB/Presentazione RTB.pptx
+++ b/RTB/PRESENTAZIONE RTB/Presentazione RTB.pptx
@@ -5,7 +5,7 @@
     <p:sldMasterId id="2147483648" r:id="rId1"/>
   </p:sldMasterIdLst>
   <p:notesMasterIdLst>
-    <p:notesMasterId r:id="rId11"/>
+    <p:notesMasterId r:id="rId12"/>
   </p:notesMasterIdLst>
   <p:sldIdLst>
     <p:sldId id="256" r:id="rId2"/>
@@ -17,29 +17,30 @@
     <p:sldId id="275" r:id="rId8"/>
     <p:sldId id="276" r:id="rId9"/>
     <p:sldId id="277" r:id="rId10"/>
+    <p:sldId id="278" r:id="rId11"/>
   </p:sldIdLst>
   <p:sldSz cx="18288000" cy="10287000"/>
   <p:notesSz cx="6858000" cy="9144000"/>
   <p:embeddedFontLst>
     <p:embeddedFont>
       <p:font typeface="Goudy" panose="020B0604020202020204" charset="0"/>
-      <p:regular r:id="rId12"/>
+      <p:regular r:id="rId13"/>
     </p:embeddedFont>
     <p:embeddedFont>
       <p:font typeface="Neue Montreal" panose="020B0604020202020204" charset="0"/>
-      <p:regular r:id="rId13"/>
+      <p:regular r:id="rId14"/>
     </p:embeddedFont>
     <p:embeddedFont>
       <p:font typeface="Neue Montreal Bold" panose="020B0604020202020204" charset="0"/>
-      <p:regular r:id="rId14"/>
+      <p:regular r:id="rId15"/>
     </p:embeddedFont>
     <p:embeddedFont>
       <p:font typeface="Overpass" panose="020B0604020202020204" charset="0"/>
-      <p:regular r:id="rId15"/>
+      <p:regular r:id="rId16"/>
     </p:embeddedFont>
     <p:embeddedFont>
       <p:font typeface="Tenor Sans" panose="020B0604020202020204" charset="0"/>
-      <p:regular r:id="rId16"/>
+      <p:regular r:id="rId17"/>
     </p:embeddedFont>
   </p:embeddedFontLst>
   <p:defaultTextStyle>
@@ -1392,6 +1393,121 @@
     <p:extLst>
       <p:ext uri="{BB962C8B-B14F-4D97-AF65-F5344CB8AC3E}">
         <p14:creationId xmlns:p14="http://schemas.microsoft.com/office/powerpoint/2010/main" val="1267499908"/>
+      </p:ext>
+    </p:extLst>
+  </p:cSld>
+  <p:clrMapOvr>
+    <a:masterClrMapping/>
+  </p:clrMapOvr>
+</p:notes>
+</file>
+
+<file path=ppt/notesSlides/notesSlide9.xml><?xml version="1.0" encoding="utf-8"?>
+<p:notes xmlns:a="http://schemas.openxmlformats.org/drawingml/2006/main" xmlns:r="http://schemas.openxmlformats.org/officeDocument/2006/relationships" xmlns:p="http://schemas.openxmlformats.org/presentationml/2006/main">
+  <p:cSld>
+    <p:spTree>
+      <p:nvGrpSpPr>
+        <p:cNvPr id="1" name="">
+          <a:extLst>
+            <a:ext uri="{FF2B5EF4-FFF2-40B4-BE49-F238E27FC236}">
+              <a16:creationId xmlns:a16="http://schemas.microsoft.com/office/drawing/2014/main" id="{A8FE5F2A-E41C-8FB7-F77D-375E5484B024}"/>
+            </a:ext>
+          </a:extLst>
+        </p:cNvPr>
+        <p:cNvGrpSpPr/>
+        <p:nvPr/>
+      </p:nvGrpSpPr>
+      <p:grpSpPr>
+        <a:xfrm>
+          <a:off x="0" y="0"/>
+          <a:ext cx="0" cy="0"/>
+          <a:chOff x="0" y="0"/>
+          <a:chExt cx="0" cy="0"/>
+        </a:xfrm>
+      </p:grpSpPr>
+      <p:sp>
+        <p:nvSpPr>
+          <p:cNvPr id="2" name="Segnaposto immagine diapositiva 1">
+            <a:extLst>
+              <a:ext uri="{FF2B5EF4-FFF2-40B4-BE49-F238E27FC236}">
+                <a16:creationId xmlns:a16="http://schemas.microsoft.com/office/drawing/2014/main" id="{86117E72-EEBC-2213-BE3E-7C8457212987}"/>
+              </a:ext>
+            </a:extLst>
+          </p:cNvPr>
+          <p:cNvSpPr>
+            <a:spLocks noGrp="1" noRot="1" noChangeAspect="1"/>
+          </p:cNvSpPr>
+          <p:nvPr>
+            <p:ph type="sldImg"/>
+          </p:nvPr>
+        </p:nvSpPr>
+        <p:spPr/>
+        <p:txBody>
+          <a:bodyPr/>
+          <a:lstStyle/>
+          <a:p>
+            <a:endParaRPr lang="it-IT"/>
+          </a:p>
+        </p:txBody>
+      </p:sp>
+      <p:sp>
+        <p:nvSpPr>
+          <p:cNvPr id="3" name="Segnaposto note 2">
+            <a:extLst>
+              <a:ext uri="{FF2B5EF4-FFF2-40B4-BE49-F238E27FC236}">
+                <a16:creationId xmlns:a16="http://schemas.microsoft.com/office/drawing/2014/main" id="{D2463D8E-83FB-DB2D-5007-2721D2AB6D6B}"/>
+              </a:ext>
+            </a:extLst>
+          </p:cNvPr>
+          <p:cNvSpPr>
+            <a:spLocks noGrp="1"/>
+          </p:cNvSpPr>
+          <p:nvPr>
+            <p:ph type="body" idx="1"/>
+          </p:nvPr>
+        </p:nvSpPr>
+        <p:spPr/>
+        <p:txBody>
+          <a:bodyPr/>
+          <a:lstStyle/>
+          <a:p>
+            <a:endParaRPr lang="it-IT" dirty="0"/>
+          </a:p>
+        </p:txBody>
+      </p:sp>
+      <p:sp>
+        <p:nvSpPr>
+          <p:cNvPr id="4" name="Segnaposto numero diapositiva 3">
+            <a:extLst>
+              <a:ext uri="{FF2B5EF4-FFF2-40B4-BE49-F238E27FC236}">
+                <a16:creationId xmlns:a16="http://schemas.microsoft.com/office/drawing/2014/main" id="{8FB0CFA6-A5F6-6284-4AC3-B516091BAB0A}"/>
+              </a:ext>
+            </a:extLst>
+          </p:cNvPr>
+          <p:cNvSpPr>
+            <a:spLocks noGrp="1"/>
+          </p:cNvSpPr>
+          <p:nvPr>
+            <p:ph type="sldNum" sz="quarter" idx="5"/>
+          </p:nvPr>
+        </p:nvSpPr>
+        <p:spPr/>
+        <p:txBody>
+          <a:bodyPr/>
+          <a:lstStyle/>
+          <a:p>
+            <a:fld id="{2C08170C-5CFB-499E-8257-3D18EF4D2E05}" type="slidenum">
+              <a:rPr lang="it-IT" smtClean="0"/>
+              <a:t>10</a:t>
+            </a:fld>
+            <a:endParaRPr lang="it-IT"/>
+          </a:p>
+        </p:txBody>
+      </p:sp>
+    </p:spTree>
+    <p:extLst>
+      <p:ext uri="{BB962C8B-B14F-4D97-AF65-F5344CB8AC3E}">
+        <p14:creationId xmlns:p14="http://schemas.microsoft.com/office/powerpoint/2010/main" val="1039287552"/>
       </p:ext>
     </p:extLst>
   </p:cSld>
@@ -4851,6 +4967,5035 @@
 </p:sld>
 </file>
 
+<file path=ppt/slides/slide10.xml><?xml version="1.0" encoding="utf-8"?>
+<p:sld xmlns:a="http://schemas.openxmlformats.org/drawingml/2006/main" xmlns:r="http://schemas.openxmlformats.org/officeDocument/2006/relationships" xmlns:p="http://schemas.openxmlformats.org/presentationml/2006/main">
+  <p:cSld>
+    <p:bg>
+      <p:bgPr>
+        <a:solidFill>
+          <a:srgbClr val="FFFAEF"/>
+        </a:solidFill>
+        <a:effectLst/>
+      </p:bgPr>
+    </p:bg>
+    <p:spTree>
+      <p:nvGrpSpPr>
+        <p:cNvPr id="1" name="">
+          <a:extLst>
+            <a:ext uri="{FF2B5EF4-FFF2-40B4-BE49-F238E27FC236}">
+              <a16:creationId xmlns:a16="http://schemas.microsoft.com/office/drawing/2014/main" id="{A1E2D0EF-912F-B7B2-D128-0F4227BE50B4}"/>
+            </a:ext>
+          </a:extLst>
+        </p:cNvPr>
+        <p:cNvGrpSpPr/>
+        <p:nvPr/>
+      </p:nvGrpSpPr>
+      <p:grpSpPr>
+        <a:xfrm>
+          <a:off x="0" y="0"/>
+          <a:ext cx="0" cy="0"/>
+          <a:chOff x="0" y="0"/>
+          <a:chExt cx="0" cy="0"/>
+        </a:xfrm>
+      </p:grpSpPr>
+      <p:pic>
+        <p:nvPicPr>
+          <p:cNvPr id="2" name="Picture 2">
+            <a:extLst>
+              <a:ext uri="{FF2B5EF4-FFF2-40B4-BE49-F238E27FC236}">
+                <a16:creationId xmlns:a16="http://schemas.microsoft.com/office/drawing/2014/main" id="{90787627-B2AA-EB99-8F1D-4EE8F9052A4B}"/>
+              </a:ext>
+            </a:extLst>
+          </p:cNvPr>
+          <p:cNvPicPr>
+            <a:picLocks noChangeAspect="1"/>
+          </p:cNvPicPr>
+          <p:nvPr/>
+        </p:nvPicPr>
+        <p:blipFill>
+          <a:blip r:embed="rId3"/>
+          <a:srcRect l="62989" t="67035"/>
+          <a:stretch>
+            <a:fillRect/>
+          </a:stretch>
+        </p:blipFill>
+        <p:spPr>
+          <a:xfrm>
+            <a:off x="15813626" y="7962068"/>
+            <a:ext cx="2610335" cy="2324931"/>
+          </a:xfrm>
+          <a:prstGeom prst="rect">
+            <a:avLst/>
+          </a:prstGeom>
+        </p:spPr>
+      </p:pic>
+      <p:pic>
+        <p:nvPicPr>
+          <p:cNvPr id="3" name="Picture 3">
+            <a:extLst>
+              <a:ext uri="{FF2B5EF4-FFF2-40B4-BE49-F238E27FC236}">
+                <a16:creationId xmlns:a16="http://schemas.microsoft.com/office/drawing/2014/main" id="{9D61B407-D401-5A8F-E8CA-D21C66FF1672}"/>
+              </a:ext>
+            </a:extLst>
+          </p:cNvPr>
+          <p:cNvPicPr>
+            <a:picLocks noChangeAspect="1"/>
+          </p:cNvPicPr>
+          <p:nvPr/>
+        </p:nvPicPr>
+        <p:blipFill>
+          <a:blip r:embed="rId4"/>
+          <a:srcRect r="64034" b="46739"/>
+          <a:stretch>
+            <a:fillRect/>
+          </a:stretch>
+        </p:blipFill>
+        <p:spPr>
+          <a:xfrm rot="-5400000" flipH="1">
+            <a:off x="796990" y="-796989"/>
+            <a:ext cx="3314701" cy="4908680"/>
+          </a:xfrm>
+          <a:prstGeom prst="rect">
+            <a:avLst/>
+          </a:prstGeom>
+        </p:spPr>
+      </p:pic>
+      <p:grpSp>
+        <p:nvGrpSpPr>
+          <p:cNvPr id="4" name="Group 4">
+            <a:extLst>
+              <a:ext uri="{FF2B5EF4-FFF2-40B4-BE49-F238E27FC236}">
+                <a16:creationId xmlns:a16="http://schemas.microsoft.com/office/drawing/2014/main" id="{43E1120F-173E-1A26-ECC3-12A127D2BFAA}"/>
+              </a:ext>
+            </a:extLst>
+          </p:cNvPr>
+          <p:cNvGrpSpPr/>
+          <p:nvPr/>
+        </p:nvGrpSpPr>
+        <p:grpSpPr>
+          <a:xfrm>
+            <a:off x="188063" y="-152399"/>
+            <a:ext cx="17566536" cy="2171699"/>
+            <a:chOff x="0" y="-1334729"/>
+            <a:chExt cx="23422050" cy="5720429"/>
+          </a:xfrm>
+        </p:grpSpPr>
+        <p:sp>
+          <p:nvSpPr>
+            <p:cNvPr id="5" name="TextBox 5">
+              <a:extLst>
+                <a:ext uri="{FF2B5EF4-FFF2-40B4-BE49-F238E27FC236}">
+                  <a16:creationId xmlns:a16="http://schemas.microsoft.com/office/drawing/2014/main" id="{305B438E-459C-F638-136A-659146638115}"/>
+                </a:ext>
+              </a:extLst>
+            </p:cNvPr>
+            <p:cNvSpPr txBox="1"/>
+            <p:nvPr/>
+          </p:nvSpPr>
+          <p:spPr>
+            <a:xfrm>
+              <a:off x="0" y="3571631"/>
+              <a:ext cx="11609426" cy="814069"/>
+            </a:xfrm>
+            <a:prstGeom prst="rect">
+              <a:avLst/>
+            </a:prstGeom>
+          </p:spPr>
+          <p:txBody>
+            <a:bodyPr wrap="square" lIns="0" tIns="0" rIns="0" bIns="0" rtlCol="0" anchor="t">
+              <a:spAutoFit/>
+            </a:bodyPr>
+            <a:lstStyle/>
+            <a:p>
+              <a:pPr marL="587428" lvl="1" indent="-342900" algn="ctr">
+                <a:lnSpc>
+                  <a:spcPct val="150000"/>
+                </a:lnSpc>
+                <a:buFont typeface="Wingdings" panose="05000000000000000000" pitchFamily="2" charset="2"/>
+                <a:buChar char="Ø"/>
+              </a:pPr>
+              <a:endParaRPr lang="it-IT" sz="3000" noProof="0" dirty="0">
+                <a:solidFill>
+                  <a:srgbClr val="000000"/>
+                </a:solidFill>
+                <a:latin typeface="Overpass"/>
+                <a:ea typeface="Overpass"/>
+                <a:cs typeface="Arial" panose="020B0604020202020204" pitchFamily="34" charset="0"/>
+                <a:sym typeface="Overpass"/>
+              </a:endParaRPr>
+            </a:p>
+          </p:txBody>
+        </p:sp>
+        <p:sp>
+          <p:nvSpPr>
+            <p:cNvPr id="6" name="TextBox 6">
+              <a:extLst>
+                <a:ext uri="{FF2B5EF4-FFF2-40B4-BE49-F238E27FC236}">
+                  <a16:creationId xmlns:a16="http://schemas.microsoft.com/office/drawing/2014/main" id="{B0F51ACA-F2EE-1AFD-FA56-006D184A1AD3}"/>
+                </a:ext>
+              </a:extLst>
+            </p:cNvPr>
+            <p:cNvSpPr txBox="1"/>
+            <p:nvPr/>
+          </p:nvSpPr>
+          <p:spPr>
+            <a:xfrm>
+              <a:off x="0" y="-1334729"/>
+              <a:ext cx="23422050" cy="4312292"/>
+            </a:xfrm>
+            <a:prstGeom prst="rect">
+              <a:avLst/>
+            </a:prstGeom>
+          </p:spPr>
+          <p:txBody>
+            <a:bodyPr lIns="0" tIns="0" rIns="0" bIns="0" rtlCol="0" anchor="t">
+              <a:spAutoFit/>
+            </a:bodyPr>
+            <a:lstStyle/>
+            <a:p>
+              <a:pPr algn="ctr">
+                <a:lnSpc>
+                  <a:spcPts val="15212"/>
+                </a:lnSpc>
+              </a:pPr>
+              <a:r>
+                <a:rPr lang="it-IT" sz="5400" b="1" dirty="0">
+                  <a:solidFill>
+                    <a:srgbClr val="000000"/>
+                  </a:solidFill>
+                  <a:latin typeface="Arial" panose="020B0604020202020204" pitchFamily="34" charset="0"/>
+                  <a:ea typeface="Fredoka"/>
+                  <a:cs typeface="Arial" panose="020B0604020202020204" pitchFamily="34" charset="0"/>
+                  <a:sym typeface="Fredoka"/>
+                </a:rPr>
+                <a:t>NUMERO DI ORE PER MEMBRO DEL GRUPPO</a:t>
+              </a:r>
+              <a:endParaRPr lang="it-IT" sz="6000" b="1" noProof="0" dirty="0">
+                <a:solidFill>
+                  <a:srgbClr val="000000"/>
+                </a:solidFill>
+                <a:latin typeface="Arial" panose="020B0604020202020204" pitchFamily="34" charset="0"/>
+                <a:ea typeface="Fredoka"/>
+                <a:cs typeface="Arial" panose="020B0604020202020204" pitchFamily="34" charset="0"/>
+                <a:sym typeface="Fredoka"/>
+              </a:endParaRPr>
+            </a:p>
+          </p:txBody>
+        </p:sp>
+      </p:grpSp>
+      <p:graphicFrame>
+        <p:nvGraphicFramePr>
+          <p:cNvPr id="10" name="Tabella 9">
+            <a:extLst>
+              <a:ext uri="{FF2B5EF4-FFF2-40B4-BE49-F238E27FC236}">
+                <a16:creationId xmlns:a16="http://schemas.microsoft.com/office/drawing/2014/main" id="{F38B5841-F094-A81A-DA41-9D64B1B5EE02}"/>
+              </a:ext>
+            </a:extLst>
+          </p:cNvPr>
+          <p:cNvGraphicFramePr>
+            <a:graphicFrameLocks noGrp="1"/>
+          </p:cNvGraphicFramePr>
+          <p:nvPr>
+            <p:extLst>
+              <p:ext uri="{D42A27DB-BD31-4B8C-83A1-F6EECF244321}">
+                <p14:modId xmlns:p14="http://schemas.microsoft.com/office/powerpoint/2010/main" val="433448604"/>
+              </p:ext>
+            </p:extLst>
+          </p:nvPr>
+        </p:nvGraphicFramePr>
+        <p:xfrm>
+          <a:off x="1198931" y="2244832"/>
+          <a:ext cx="15544800" cy="4048342"/>
+        </p:xfrm>
+        <a:graphic>
+          <a:graphicData uri="http://schemas.openxmlformats.org/drawingml/2006/table">
+            <a:tbl>
+              <a:tblPr>
+                <a:tableStyleId>{5C22544A-7EE6-4342-B048-85BDC9FD1C3A}</a:tableStyleId>
+              </a:tblPr>
+              <a:tblGrid>
+                <a:gridCol w="1943100">
+                  <a:extLst>
+                    <a:ext uri="{9D8B030D-6E8A-4147-A177-3AD203B41FA5}">
+                      <a16:colId xmlns:a16="http://schemas.microsoft.com/office/drawing/2014/main" val="3898645536"/>
+                    </a:ext>
+                  </a:extLst>
+                </a:gridCol>
+                <a:gridCol w="1943100">
+                  <a:extLst>
+                    <a:ext uri="{9D8B030D-6E8A-4147-A177-3AD203B41FA5}">
+                      <a16:colId xmlns:a16="http://schemas.microsoft.com/office/drawing/2014/main" val="3567244114"/>
+                    </a:ext>
+                  </a:extLst>
+                </a:gridCol>
+                <a:gridCol w="1943100">
+                  <a:extLst>
+                    <a:ext uri="{9D8B030D-6E8A-4147-A177-3AD203B41FA5}">
+                      <a16:colId xmlns:a16="http://schemas.microsoft.com/office/drawing/2014/main" val="3164377366"/>
+                    </a:ext>
+                  </a:extLst>
+                </a:gridCol>
+                <a:gridCol w="1943100">
+                  <a:extLst>
+                    <a:ext uri="{9D8B030D-6E8A-4147-A177-3AD203B41FA5}">
+                      <a16:colId xmlns:a16="http://schemas.microsoft.com/office/drawing/2014/main" val="2480997553"/>
+                    </a:ext>
+                  </a:extLst>
+                </a:gridCol>
+                <a:gridCol w="1943100">
+                  <a:extLst>
+                    <a:ext uri="{9D8B030D-6E8A-4147-A177-3AD203B41FA5}">
+                      <a16:colId xmlns:a16="http://schemas.microsoft.com/office/drawing/2014/main" val="308316877"/>
+                    </a:ext>
+                  </a:extLst>
+                </a:gridCol>
+                <a:gridCol w="1943100">
+                  <a:extLst>
+                    <a:ext uri="{9D8B030D-6E8A-4147-A177-3AD203B41FA5}">
+                      <a16:colId xmlns:a16="http://schemas.microsoft.com/office/drawing/2014/main" val="2034702653"/>
+                    </a:ext>
+                  </a:extLst>
+                </a:gridCol>
+                <a:gridCol w="1943100">
+                  <a:extLst>
+                    <a:ext uri="{9D8B030D-6E8A-4147-A177-3AD203B41FA5}">
+                      <a16:colId xmlns:a16="http://schemas.microsoft.com/office/drawing/2014/main" val="931636665"/>
+                    </a:ext>
+                  </a:extLst>
+                </a:gridCol>
+                <a:gridCol w="1943100">
+                  <a:extLst>
+                    <a:ext uri="{9D8B030D-6E8A-4147-A177-3AD203B41FA5}">
+                      <a16:colId xmlns:a16="http://schemas.microsoft.com/office/drawing/2014/main" val="3471413214"/>
+                    </a:ext>
+                  </a:extLst>
+                </a:gridCol>
+              </a:tblGrid>
+              <a:tr h="439953">
+                <a:tc>
+                  <a:txBody>
+                    <a:bodyPr/>
+                    <a:lstStyle/>
+                    <a:p>
+                      <a:pPr algn="ctr" fontAlgn="b">
+                        <a:buNone/>
+                      </a:pPr>
+                      <a:r>
+                        <a:rPr lang="it-IT" sz="2000" b="1" u="none" strike="noStrike" dirty="0">
+                          <a:effectLst/>
+                        </a:rPr>
+                        <a:t>Membro</a:t>
+                      </a:r>
+                      <a:endParaRPr lang="it-IT" sz="2000" b="1" i="0" u="none" strike="noStrike" dirty="0">
+                        <a:solidFill>
+                          <a:srgbClr val="000000"/>
+                        </a:solidFill>
+                        <a:effectLst/>
+                        <a:latin typeface="Calibri" panose="020F0502020204030204" pitchFamily="34" charset="0"/>
+                      </a:endParaRPr>
+                    </a:p>
+                  </a:txBody>
+                  <a:tcPr marL="9525" marR="9525" marT="9525" marB="0" anchor="ctr">
+                    <a:lnL w="12700" cap="flat" cmpd="sng" algn="ctr">
+                      <a:solidFill>
+                        <a:schemeClr val="tx1"/>
+                      </a:solidFill>
+                      <a:prstDash val="solid"/>
+                      <a:round/>
+                      <a:headEnd type="none" w="med" len="med"/>
+                      <a:tailEnd type="none" w="med" len="med"/>
+                    </a:lnL>
+                    <a:lnR w="12700" cap="flat" cmpd="sng" algn="ctr">
+                      <a:solidFill>
+                        <a:schemeClr val="tx1"/>
+                      </a:solidFill>
+                      <a:prstDash val="solid"/>
+                      <a:round/>
+                      <a:headEnd type="none" w="med" len="med"/>
+                      <a:tailEnd type="none" w="med" len="med"/>
+                    </a:lnR>
+                    <a:lnT w="12700" cap="flat" cmpd="sng" algn="ctr">
+                      <a:solidFill>
+                        <a:schemeClr val="tx1"/>
+                      </a:solidFill>
+                      <a:prstDash val="solid"/>
+                      <a:round/>
+                      <a:headEnd type="none" w="med" len="med"/>
+                      <a:tailEnd type="none" w="med" len="med"/>
+                    </a:lnT>
+                    <a:lnB w="12700" cap="flat" cmpd="sng" algn="ctr">
+                      <a:solidFill>
+                        <a:schemeClr val="tx1"/>
+                      </a:solidFill>
+                      <a:prstDash val="solid"/>
+                      <a:round/>
+                      <a:headEnd type="none" w="med" len="med"/>
+                      <a:tailEnd type="none" w="med" len="med"/>
+                    </a:lnB>
+                    <a:solidFill>
+                      <a:srgbClr val="FFFAEF"/>
+                    </a:solidFill>
+                  </a:tcPr>
+                </a:tc>
+                <a:tc>
+                  <a:txBody>
+                    <a:bodyPr/>
+                    <a:lstStyle/>
+                    <a:p>
+                      <a:pPr algn="ctr" fontAlgn="b">
+                        <a:buNone/>
+                      </a:pPr>
+                      <a:r>
+                        <a:rPr lang="it-IT" sz="2000" b="1" u="none" strike="noStrike">
+                          <a:effectLst/>
+                        </a:rPr>
+                        <a:t>Responsabile</a:t>
+                      </a:r>
+                      <a:endParaRPr lang="it-IT" sz="2000" b="1" i="0" u="none" strike="noStrike">
+                        <a:solidFill>
+                          <a:srgbClr val="000000"/>
+                        </a:solidFill>
+                        <a:effectLst/>
+                        <a:latin typeface="Calibri" panose="020F0502020204030204" pitchFamily="34" charset="0"/>
+                      </a:endParaRPr>
+                    </a:p>
+                  </a:txBody>
+                  <a:tcPr marL="9525" marR="9525" marT="9525" marB="0" anchor="ctr">
+                    <a:lnL w="12700" cap="flat" cmpd="sng" algn="ctr">
+                      <a:solidFill>
+                        <a:schemeClr val="tx1"/>
+                      </a:solidFill>
+                      <a:prstDash val="solid"/>
+                      <a:round/>
+                      <a:headEnd type="none" w="med" len="med"/>
+                      <a:tailEnd type="none" w="med" len="med"/>
+                    </a:lnL>
+                    <a:lnR w="12700" cap="flat" cmpd="sng" algn="ctr">
+                      <a:solidFill>
+                        <a:schemeClr val="tx1"/>
+                      </a:solidFill>
+                      <a:prstDash val="solid"/>
+                      <a:round/>
+                      <a:headEnd type="none" w="med" len="med"/>
+                      <a:tailEnd type="none" w="med" len="med"/>
+                    </a:lnR>
+                    <a:lnT w="12700" cap="flat" cmpd="sng" algn="ctr">
+                      <a:solidFill>
+                        <a:schemeClr val="tx1"/>
+                      </a:solidFill>
+                      <a:prstDash val="solid"/>
+                      <a:round/>
+                      <a:headEnd type="none" w="med" len="med"/>
+                      <a:tailEnd type="none" w="med" len="med"/>
+                    </a:lnT>
+                    <a:lnB w="12700" cap="flat" cmpd="sng" algn="ctr">
+                      <a:solidFill>
+                        <a:schemeClr val="tx1"/>
+                      </a:solidFill>
+                      <a:prstDash val="solid"/>
+                      <a:round/>
+                      <a:headEnd type="none" w="med" len="med"/>
+                      <a:tailEnd type="none" w="med" len="med"/>
+                    </a:lnB>
+                    <a:solidFill>
+                      <a:srgbClr val="FFFAEF"/>
+                    </a:solidFill>
+                  </a:tcPr>
+                </a:tc>
+                <a:tc>
+                  <a:txBody>
+                    <a:bodyPr/>
+                    <a:lstStyle/>
+                    <a:p>
+                      <a:pPr algn="ctr" fontAlgn="b">
+                        <a:buNone/>
+                      </a:pPr>
+                      <a:r>
+                        <a:rPr lang="it-IT" sz="2000" b="1" u="none" strike="noStrike">
+                          <a:effectLst/>
+                        </a:rPr>
+                        <a:t>Amministratore</a:t>
+                      </a:r>
+                      <a:endParaRPr lang="it-IT" sz="2000" b="1" i="0" u="none" strike="noStrike">
+                        <a:solidFill>
+                          <a:srgbClr val="000000"/>
+                        </a:solidFill>
+                        <a:effectLst/>
+                        <a:latin typeface="Calibri" panose="020F0502020204030204" pitchFamily="34" charset="0"/>
+                      </a:endParaRPr>
+                    </a:p>
+                  </a:txBody>
+                  <a:tcPr marL="9525" marR="9525" marT="9525" marB="0" anchor="ctr">
+                    <a:lnL w="12700" cap="flat" cmpd="sng" algn="ctr">
+                      <a:solidFill>
+                        <a:schemeClr val="tx1"/>
+                      </a:solidFill>
+                      <a:prstDash val="solid"/>
+                      <a:round/>
+                      <a:headEnd type="none" w="med" len="med"/>
+                      <a:tailEnd type="none" w="med" len="med"/>
+                    </a:lnL>
+                    <a:lnR w="12700" cap="flat" cmpd="sng" algn="ctr">
+                      <a:solidFill>
+                        <a:schemeClr val="tx1"/>
+                      </a:solidFill>
+                      <a:prstDash val="solid"/>
+                      <a:round/>
+                      <a:headEnd type="none" w="med" len="med"/>
+                      <a:tailEnd type="none" w="med" len="med"/>
+                    </a:lnR>
+                    <a:lnT w="12700" cap="flat" cmpd="sng" algn="ctr">
+                      <a:solidFill>
+                        <a:schemeClr val="tx1"/>
+                      </a:solidFill>
+                      <a:prstDash val="solid"/>
+                      <a:round/>
+                      <a:headEnd type="none" w="med" len="med"/>
+                      <a:tailEnd type="none" w="med" len="med"/>
+                    </a:lnT>
+                    <a:lnB w="12700" cap="flat" cmpd="sng" algn="ctr">
+                      <a:solidFill>
+                        <a:schemeClr val="tx1"/>
+                      </a:solidFill>
+                      <a:prstDash val="solid"/>
+                      <a:round/>
+                      <a:headEnd type="none" w="med" len="med"/>
+                      <a:tailEnd type="none" w="med" len="med"/>
+                    </a:lnB>
+                    <a:solidFill>
+                      <a:srgbClr val="FFFAEF"/>
+                    </a:solidFill>
+                  </a:tcPr>
+                </a:tc>
+                <a:tc>
+                  <a:txBody>
+                    <a:bodyPr/>
+                    <a:lstStyle/>
+                    <a:p>
+                      <a:pPr algn="ctr" fontAlgn="b">
+                        <a:buNone/>
+                      </a:pPr>
+                      <a:r>
+                        <a:rPr lang="it-IT" sz="2000" b="1" u="none" strike="noStrike">
+                          <a:effectLst/>
+                        </a:rPr>
+                        <a:t>Analista</a:t>
+                      </a:r>
+                      <a:endParaRPr lang="it-IT" sz="2000" b="1" i="0" u="none" strike="noStrike">
+                        <a:solidFill>
+                          <a:srgbClr val="000000"/>
+                        </a:solidFill>
+                        <a:effectLst/>
+                        <a:latin typeface="Calibri" panose="020F0502020204030204" pitchFamily="34" charset="0"/>
+                      </a:endParaRPr>
+                    </a:p>
+                  </a:txBody>
+                  <a:tcPr marL="9525" marR="9525" marT="9525" marB="0" anchor="ctr">
+                    <a:lnL w="12700" cap="flat" cmpd="sng" algn="ctr">
+                      <a:solidFill>
+                        <a:schemeClr val="tx1"/>
+                      </a:solidFill>
+                      <a:prstDash val="solid"/>
+                      <a:round/>
+                      <a:headEnd type="none" w="med" len="med"/>
+                      <a:tailEnd type="none" w="med" len="med"/>
+                    </a:lnL>
+                    <a:lnR w="12700" cap="flat" cmpd="sng" algn="ctr">
+                      <a:solidFill>
+                        <a:schemeClr val="tx1"/>
+                      </a:solidFill>
+                      <a:prstDash val="solid"/>
+                      <a:round/>
+                      <a:headEnd type="none" w="med" len="med"/>
+                      <a:tailEnd type="none" w="med" len="med"/>
+                    </a:lnR>
+                    <a:lnT w="12700" cap="flat" cmpd="sng" algn="ctr">
+                      <a:solidFill>
+                        <a:schemeClr val="tx1"/>
+                      </a:solidFill>
+                      <a:prstDash val="solid"/>
+                      <a:round/>
+                      <a:headEnd type="none" w="med" len="med"/>
+                      <a:tailEnd type="none" w="med" len="med"/>
+                    </a:lnT>
+                    <a:lnB w="12700" cap="flat" cmpd="sng" algn="ctr">
+                      <a:solidFill>
+                        <a:schemeClr val="tx1"/>
+                      </a:solidFill>
+                      <a:prstDash val="solid"/>
+                      <a:round/>
+                      <a:headEnd type="none" w="med" len="med"/>
+                      <a:tailEnd type="none" w="med" len="med"/>
+                    </a:lnB>
+                    <a:solidFill>
+                      <a:srgbClr val="FFFAEF"/>
+                    </a:solidFill>
+                  </a:tcPr>
+                </a:tc>
+                <a:tc>
+                  <a:txBody>
+                    <a:bodyPr/>
+                    <a:lstStyle/>
+                    <a:p>
+                      <a:pPr algn="ctr" fontAlgn="b">
+                        <a:buNone/>
+                      </a:pPr>
+                      <a:r>
+                        <a:rPr lang="it-IT" sz="2000" b="1" u="none" strike="noStrike">
+                          <a:effectLst/>
+                        </a:rPr>
+                        <a:t>Progettista</a:t>
+                      </a:r>
+                      <a:endParaRPr lang="it-IT" sz="2000" b="1" i="0" u="none" strike="noStrike">
+                        <a:solidFill>
+                          <a:srgbClr val="000000"/>
+                        </a:solidFill>
+                        <a:effectLst/>
+                        <a:latin typeface="Calibri" panose="020F0502020204030204" pitchFamily="34" charset="0"/>
+                      </a:endParaRPr>
+                    </a:p>
+                  </a:txBody>
+                  <a:tcPr marL="9525" marR="9525" marT="9525" marB="0" anchor="ctr">
+                    <a:lnL w="12700" cap="flat" cmpd="sng" algn="ctr">
+                      <a:solidFill>
+                        <a:schemeClr val="tx1"/>
+                      </a:solidFill>
+                      <a:prstDash val="solid"/>
+                      <a:round/>
+                      <a:headEnd type="none" w="med" len="med"/>
+                      <a:tailEnd type="none" w="med" len="med"/>
+                    </a:lnL>
+                    <a:lnR w="12700" cap="flat" cmpd="sng" algn="ctr">
+                      <a:solidFill>
+                        <a:schemeClr val="tx1"/>
+                      </a:solidFill>
+                      <a:prstDash val="solid"/>
+                      <a:round/>
+                      <a:headEnd type="none" w="med" len="med"/>
+                      <a:tailEnd type="none" w="med" len="med"/>
+                    </a:lnR>
+                    <a:lnT w="12700" cap="flat" cmpd="sng" algn="ctr">
+                      <a:solidFill>
+                        <a:schemeClr val="tx1"/>
+                      </a:solidFill>
+                      <a:prstDash val="solid"/>
+                      <a:round/>
+                      <a:headEnd type="none" w="med" len="med"/>
+                      <a:tailEnd type="none" w="med" len="med"/>
+                    </a:lnT>
+                    <a:lnB w="12700" cap="flat" cmpd="sng" algn="ctr">
+                      <a:solidFill>
+                        <a:schemeClr val="tx1"/>
+                      </a:solidFill>
+                      <a:prstDash val="solid"/>
+                      <a:round/>
+                      <a:headEnd type="none" w="med" len="med"/>
+                      <a:tailEnd type="none" w="med" len="med"/>
+                    </a:lnB>
+                    <a:solidFill>
+                      <a:srgbClr val="FFFAEF"/>
+                    </a:solidFill>
+                  </a:tcPr>
+                </a:tc>
+                <a:tc>
+                  <a:txBody>
+                    <a:bodyPr/>
+                    <a:lstStyle/>
+                    <a:p>
+                      <a:pPr algn="ctr" fontAlgn="b">
+                        <a:buNone/>
+                      </a:pPr>
+                      <a:r>
+                        <a:rPr lang="it-IT" sz="2000" b="1" u="none" strike="noStrike">
+                          <a:effectLst/>
+                        </a:rPr>
+                        <a:t>Programmatore</a:t>
+                      </a:r>
+                      <a:endParaRPr lang="it-IT" sz="2000" b="1" i="0" u="none" strike="noStrike">
+                        <a:solidFill>
+                          <a:srgbClr val="000000"/>
+                        </a:solidFill>
+                        <a:effectLst/>
+                        <a:latin typeface="Calibri" panose="020F0502020204030204" pitchFamily="34" charset="0"/>
+                      </a:endParaRPr>
+                    </a:p>
+                  </a:txBody>
+                  <a:tcPr marL="9525" marR="9525" marT="9525" marB="0" anchor="ctr">
+                    <a:lnL w="12700" cap="flat" cmpd="sng" algn="ctr">
+                      <a:solidFill>
+                        <a:schemeClr val="tx1"/>
+                      </a:solidFill>
+                      <a:prstDash val="solid"/>
+                      <a:round/>
+                      <a:headEnd type="none" w="med" len="med"/>
+                      <a:tailEnd type="none" w="med" len="med"/>
+                    </a:lnL>
+                    <a:lnR w="12700" cap="flat" cmpd="sng" algn="ctr">
+                      <a:solidFill>
+                        <a:schemeClr val="tx1"/>
+                      </a:solidFill>
+                      <a:prstDash val="solid"/>
+                      <a:round/>
+                      <a:headEnd type="none" w="med" len="med"/>
+                      <a:tailEnd type="none" w="med" len="med"/>
+                    </a:lnR>
+                    <a:lnT w="12700" cap="flat" cmpd="sng" algn="ctr">
+                      <a:solidFill>
+                        <a:schemeClr val="tx1"/>
+                      </a:solidFill>
+                      <a:prstDash val="solid"/>
+                      <a:round/>
+                      <a:headEnd type="none" w="med" len="med"/>
+                      <a:tailEnd type="none" w="med" len="med"/>
+                    </a:lnT>
+                    <a:lnB w="12700" cap="flat" cmpd="sng" algn="ctr">
+                      <a:solidFill>
+                        <a:schemeClr val="tx1"/>
+                      </a:solidFill>
+                      <a:prstDash val="solid"/>
+                      <a:round/>
+                      <a:headEnd type="none" w="med" len="med"/>
+                      <a:tailEnd type="none" w="med" len="med"/>
+                    </a:lnB>
+                    <a:solidFill>
+                      <a:srgbClr val="FFFAEF"/>
+                    </a:solidFill>
+                  </a:tcPr>
+                </a:tc>
+                <a:tc>
+                  <a:txBody>
+                    <a:bodyPr/>
+                    <a:lstStyle/>
+                    <a:p>
+                      <a:pPr algn="ctr" fontAlgn="b">
+                        <a:buNone/>
+                      </a:pPr>
+                      <a:r>
+                        <a:rPr lang="it-IT" sz="2000" b="1" u="none" strike="noStrike">
+                          <a:effectLst/>
+                        </a:rPr>
+                        <a:t>Verificatore</a:t>
+                      </a:r>
+                      <a:endParaRPr lang="it-IT" sz="2000" b="1" i="0" u="none" strike="noStrike">
+                        <a:solidFill>
+                          <a:srgbClr val="000000"/>
+                        </a:solidFill>
+                        <a:effectLst/>
+                        <a:latin typeface="Calibri" panose="020F0502020204030204" pitchFamily="34" charset="0"/>
+                      </a:endParaRPr>
+                    </a:p>
+                  </a:txBody>
+                  <a:tcPr marL="9525" marR="9525" marT="9525" marB="0" anchor="ctr">
+                    <a:lnL w="12700" cap="flat" cmpd="sng" algn="ctr">
+                      <a:solidFill>
+                        <a:schemeClr val="tx1"/>
+                      </a:solidFill>
+                      <a:prstDash val="solid"/>
+                      <a:round/>
+                      <a:headEnd type="none" w="med" len="med"/>
+                      <a:tailEnd type="none" w="med" len="med"/>
+                    </a:lnL>
+                    <a:lnR w="12700" cap="flat" cmpd="sng" algn="ctr">
+                      <a:solidFill>
+                        <a:schemeClr val="tx1"/>
+                      </a:solidFill>
+                      <a:prstDash val="solid"/>
+                      <a:round/>
+                      <a:headEnd type="none" w="med" len="med"/>
+                      <a:tailEnd type="none" w="med" len="med"/>
+                    </a:lnR>
+                    <a:lnT w="12700" cap="flat" cmpd="sng" algn="ctr">
+                      <a:solidFill>
+                        <a:schemeClr val="tx1"/>
+                      </a:solidFill>
+                      <a:prstDash val="solid"/>
+                      <a:round/>
+                      <a:headEnd type="none" w="med" len="med"/>
+                      <a:tailEnd type="none" w="med" len="med"/>
+                    </a:lnT>
+                    <a:lnB w="12700" cap="flat" cmpd="sng" algn="ctr">
+                      <a:solidFill>
+                        <a:schemeClr val="tx1"/>
+                      </a:solidFill>
+                      <a:prstDash val="solid"/>
+                      <a:round/>
+                      <a:headEnd type="none" w="med" len="med"/>
+                      <a:tailEnd type="none" w="med" len="med"/>
+                    </a:lnB>
+                    <a:solidFill>
+                      <a:srgbClr val="FFFAEF"/>
+                    </a:solidFill>
+                  </a:tcPr>
+                </a:tc>
+                <a:tc>
+                  <a:txBody>
+                    <a:bodyPr/>
+                    <a:lstStyle/>
+                    <a:p>
+                      <a:pPr algn="ctr" fontAlgn="b">
+                        <a:buNone/>
+                      </a:pPr>
+                      <a:r>
+                        <a:rPr lang="it-IT" sz="2000" b="1" u="none" strike="noStrike" dirty="0">
+                          <a:effectLst/>
+                        </a:rPr>
+                        <a:t>Totale Ore</a:t>
+                      </a:r>
+                      <a:endParaRPr lang="it-IT" sz="2000" b="1" i="0" u="none" strike="noStrike" dirty="0">
+                        <a:solidFill>
+                          <a:srgbClr val="000000"/>
+                        </a:solidFill>
+                        <a:effectLst/>
+                        <a:latin typeface="Calibri" panose="020F0502020204030204" pitchFamily="34" charset="0"/>
+                      </a:endParaRPr>
+                    </a:p>
+                  </a:txBody>
+                  <a:tcPr marL="9525" marR="9525" marT="9525" marB="0" anchor="ctr">
+                    <a:lnL w="12700" cap="flat" cmpd="sng" algn="ctr">
+                      <a:solidFill>
+                        <a:schemeClr val="tx1"/>
+                      </a:solidFill>
+                      <a:prstDash val="solid"/>
+                      <a:round/>
+                      <a:headEnd type="none" w="med" len="med"/>
+                      <a:tailEnd type="none" w="med" len="med"/>
+                    </a:lnL>
+                    <a:lnR w="12700" cap="flat" cmpd="sng" algn="ctr">
+                      <a:solidFill>
+                        <a:schemeClr val="tx1"/>
+                      </a:solidFill>
+                      <a:prstDash val="solid"/>
+                      <a:round/>
+                      <a:headEnd type="none" w="med" len="med"/>
+                      <a:tailEnd type="none" w="med" len="med"/>
+                    </a:lnR>
+                    <a:lnT w="12700" cap="flat" cmpd="sng" algn="ctr">
+                      <a:solidFill>
+                        <a:schemeClr val="tx1"/>
+                      </a:solidFill>
+                      <a:prstDash val="solid"/>
+                      <a:round/>
+                      <a:headEnd type="none" w="med" len="med"/>
+                      <a:tailEnd type="none" w="med" len="med"/>
+                    </a:lnT>
+                    <a:lnB w="12700" cap="flat" cmpd="sng" algn="ctr">
+                      <a:solidFill>
+                        <a:schemeClr val="tx1"/>
+                      </a:solidFill>
+                      <a:prstDash val="solid"/>
+                      <a:round/>
+                      <a:headEnd type="none" w="med" len="med"/>
+                      <a:tailEnd type="none" w="med" len="med"/>
+                    </a:lnB>
+                    <a:solidFill>
+                      <a:srgbClr val="FFFAEF"/>
+                    </a:solidFill>
+                  </a:tcPr>
+                </a:tc>
+                <a:extLst>
+                  <a:ext uri="{0D108BD9-81ED-4DB2-BD59-A6C34878D82A}">
+                    <a16:rowId xmlns:a16="http://schemas.microsoft.com/office/drawing/2014/main" val="2811105988"/>
+                  </a:ext>
+                </a:extLst>
+              </a:tr>
+              <a:tr h="439953">
+                <a:tc>
+                  <a:txBody>
+                    <a:bodyPr/>
+                    <a:lstStyle/>
+                    <a:p>
+                      <a:pPr algn="ctr" fontAlgn="b">
+                        <a:buNone/>
+                      </a:pPr>
+                      <a:r>
+                        <a:rPr lang="it-IT" sz="2000" b="1" u="none" strike="noStrike" dirty="0">
+                          <a:effectLst/>
+                        </a:rPr>
+                        <a:t>Alberto Autiero</a:t>
+                      </a:r>
+                      <a:endParaRPr lang="it-IT" sz="2000" b="1" i="0" u="none" strike="noStrike" dirty="0">
+                        <a:solidFill>
+                          <a:srgbClr val="000000"/>
+                        </a:solidFill>
+                        <a:effectLst/>
+                        <a:latin typeface="Calibri" panose="020F0502020204030204" pitchFamily="34" charset="0"/>
+                      </a:endParaRPr>
+                    </a:p>
+                  </a:txBody>
+                  <a:tcPr marL="9525" marR="9525" marT="9525" marB="0" anchor="ctr">
+                    <a:lnL w="12700" cap="flat" cmpd="sng" algn="ctr">
+                      <a:solidFill>
+                        <a:schemeClr val="tx1"/>
+                      </a:solidFill>
+                      <a:prstDash val="solid"/>
+                      <a:round/>
+                      <a:headEnd type="none" w="med" len="med"/>
+                      <a:tailEnd type="none" w="med" len="med"/>
+                    </a:lnL>
+                    <a:lnR w="12700" cap="flat" cmpd="sng" algn="ctr">
+                      <a:solidFill>
+                        <a:schemeClr val="tx1"/>
+                      </a:solidFill>
+                      <a:prstDash val="solid"/>
+                      <a:round/>
+                      <a:headEnd type="none" w="med" len="med"/>
+                      <a:tailEnd type="none" w="med" len="med"/>
+                    </a:lnR>
+                    <a:lnT w="12700" cap="flat" cmpd="sng" algn="ctr">
+                      <a:solidFill>
+                        <a:schemeClr val="tx1"/>
+                      </a:solidFill>
+                      <a:prstDash val="solid"/>
+                      <a:round/>
+                      <a:headEnd type="none" w="med" len="med"/>
+                      <a:tailEnd type="none" w="med" len="med"/>
+                    </a:lnT>
+                    <a:lnB w="12700" cap="flat" cmpd="sng" algn="ctr">
+                      <a:solidFill>
+                        <a:schemeClr val="tx1"/>
+                      </a:solidFill>
+                      <a:prstDash val="solid"/>
+                      <a:round/>
+                      <a:headEnd type="none" w="med" len="med"/>
+                      <a:tailEnd type="none" w="med" len="med"/>
+                    </a:lnB>
+                    <a:solidFill>
+                      <a:srgbClr val="FFFAEF"/>
+                    </a:solidFill>
+                  </a:tcPr>
+                </a:tc>
+                <a:tc>
+                  <a:txBody>
+                    <a:bodyPr/>
+                    <a:lstStyle/>
+                    <a:p>
+                      <a:pPr algn="ctr" fontAlgn="b">
+                        <a:buNone/>
+                      </a:pPr>
+                      <a:r>
+                        <a:rPr lang="it-IT" sz="2000" u="none" strike="noStrike">
+                          <a:effectLst/>
+                        </a:rPr>
+                        <a:t>7</a:t>
+                      </a:r>
+                      <a:endParaRPr lang="it-IT" sz="2000" b="0" i="0" u="none" strike="noStrike">
+                        <a:solidFill>
+                          <a:srgbClr val="000000"/>
+                        </a:solidFill>
+                        <a:effectLst/>
+                        <a:latin typeface="Calibri" panose="020F0502020204030204" pitchFamily="34" charset="0"/>
+                      </a:endParaRPr>
+                    </a:p>
+                  </a:txBody>
+                  <a:tcPr marL="9525" marR="9525" marT="9525" marB="0" anchor="ctr">
+                    <a:lnL w="12700" cap="flat" cmpd="sng" algn="ctr">
+                      <a:solidFill>
+                        <a:schemeClr val="tx1"/>
+                      </a:solidFill>
+                      <a:prstDash val="solid"/>
+                      <a:round/>
+                      <a:headEnd type="none" w="med" len="med"/>
+                      <a:tailEnd type="none" w="med" len="med"/>
+                    </a:lnL>
+                    <a:lnR w="12700" cap="flat" cmpd="sng" algn="ctr">
+                      <a:solidFill>
+                        <a:schemeClr val="tx1"/>
+                      </a:solidFill>
+                      <a:prstDash val="solid"/>
+                      <a:round/>
+                      <a:headEnd type="none" w="med" len="med"/>
+                      <a:tailEnd type="none" w="med" len="med"/>
+                    </a:lnR>
+                    <a:lnT w="12700" cap="flat" cmpd="sng" algn="ctr">
+                      <a:solidFill>
+                        <a:schemeClr val="tx1"/>
+                      </a:solidFill>
+                      <a:prstDash val="solid"/>
+                      <a:round/>
+                      <a:headEnd type="none" w="med" len="med"/>
+                      <a:tailEnd type="none" w="med" len="med"/>
+                    </a:lnT>
+                    <a:lnB w="12700" cap="flat" cmpd="sng" algn="ctr">
+                      <a:solidFill>
+                        <a:schemeClr val="tx1"/>
+                      </a:solidFill>
+                      <a:prstDash val="solid"/>
+                      <a:round/>
+                      <a:headEnd type="none" w="med" len="med"/>
+                      <a:tailEnd type="none" w="med" len="med"/>
+                    </a:lnB>
+                    <a:solidFill>
+                      <a:srgbClr val="FFFAEF"/>
+                    </a:solidFill>
+                  </a:tcPr>
+                </a:tc>
+                <a:tc>
+                  <a:txBody>
+                    <a:bodyPr/>
+                    <a:lstStyle/>
+                    <a:p>
+                      <a:pPr algn="ctr" fontAlgn="b">
+                        <a:buNone/>
+                      </a:pPr>
+                      <a:r>
+                        <a:rPr lang="it-IT" sz="2000" u="none" strike="noStrike">
+                          <a:effectLst/>
+                        </a:rPr>
+                        <a:t>0</a:t>
+                      </a:r>
+                      <a:endParaRPr lang="it-IT" sz="2000" b="0" i="0" u="none" strike="noStrike">
+                        <a:solidFill>
+                          <a:srgbClr val="000000"/>
+                        </a:solidFill>
+                        <a:effectLst/>
+                        <a:latin typeface="Calibri" panose="020F0502020204030204" pitchFamily="34" charset="0"/>
+                      </a:endParaRPr>
+                    </a:p>
+                  </a:txBody>
+                  <a:tcPr marL="9525" marR="9525" marT="9525" marB="0" anchor="ctr">
+                    <a:lnL w="12700" cap="flat" cmpd="sng" algn="ctr">
+                      <a:solidFill>
+                        <a:schemeClr val="tx1"/>
+                      </a:solidFill>
+                      <a:prstDash val="solid"/>
+                      <a:round/>
+                      <a:headEnd type="none" w="med" len="med"/>
+                      <a:tailEnd type="none" w="med" len="med"/>
+                    </a:lnL>
+                    <a:lnR w="12700" cap="flat" cmpd="sng" algn="ctr">
+                      <a:solidFill>
+                        <a:schemeClr val="tx1"/>
+                      </a:solidFill>
+                      <a:prstDash val="solid"/>
+                      <a:round/>
+                      <a:headEnd type="none" w="med" len="med"/>
+                      <a:tailEnd type="none" w="med" len="med"/>
+                    </a:lnR>
+                    <a:lnT w="12700" cap="flat" cmpd="sng" algn="ctr">
+                      <a:solidFill>
+                        <a:schemeClr val="tx1"/>
+                      </a:solidFill>
+                      <a:prstDash val="solid"/>
+                      <a:round/>
+                      <a:headEnd type="none" w="med" len="med"/>
+                      <a:tailEnd type="none" w="med" len="med"/>
+                    </a:lnT>
+                    <a:lnB w="12700" cap="flat" cmpd="sng" algn="ctr">
+                      <a:solidFill>
+                        <a:schemeClr val="tx1"/>
+                      </a:solidFill>
+                      <a:prstDash val="solid"/>
+                      <a:round/>
+                      <a:headEnd type="none" w="med" len="med"/>
+                      <a:tailEnd type="none" w="med" len="med"/>
+                    </a:lnB>
+                    <a:solidFill>
+                      <a:srgbClr val="FFFAEF"/>
+                    </a:solidFill>
+                  </a:tcPr>
+                </a:tc>
+                <a:tc>
+                  <a:txBody>
+                    <a:bodyPr/>
+                    <a:lstStyle/>
+                    <a:p>
+                      <a:pPr algn="ctr" fontAlgn="b">
+                        <a:buNone/>
+                      </a:pPr>
+                      <a:r>
+                        <a:rPr lang="it-IT" sz="2000" u="none" strike="noStrike" dirty="0">
+                          <a:effectLst/>
+                        </a:rPr>
+                        <a:t>6</a:t>
+                      </a:r>
+                      <a:endParaRPr lang="it-IT" sz="2000" b="0" i="0" u="none" strike="noStrike" dirty="0">
+                        <a:solidFill>
+                          <a:srgbClr val="000000"/>
+                        </a:solidFill>
+                        <a:effectLst/>
+                        <a:latin typeface="Calibri" panose="020F0502020204030204" pitchFamily="34" charset="0"/>
+                      </a:endParaRPr>
+                    </a:p>
+                  </a:txBody>
+                  <a:tcPr marL="9525" marR="9525" marT="9525" marB="0" anchor="ctr">
+                    <a:lnL w="12700" cap="flat" cmpd="sng" algn="ctr">
+                      <a:solidFill>
+                        <a:schemeClr val="tx1"/>
+                      </a:solidFill>
+                      <a:prstDash val="solid"/>
+                      <a:round/>
+                      <a:headEnd type="none" w="med" len="med"/>
+                      <a:tailEnd type="none" w="med" len="med"/>
+                    </a:lnL>
+                    <a:lnR w="12700" cap="flat" cmpd="sng" algn="ctr">
+                      <a:solidFill>
+                        <a:schemeClr val="tx1"/>
+                      </a:solidFill>
+                      <a:prstDash val="solid"/>
+                      <a:round/>
+                      <a:headEnd type="none" w="med" len="med"/>
+                      <a:tailEnd type="none" w="med" len="med"/>
+                    </a:lnR>
+                    <a:lnT w="12700" cap="flat" cmpd="sng" algn="ctr">
+                      <a:solidFill>
+                        <a:schemeClr val="tx1"/>
+                      </a:solidFill>
+                      <a:prstDash val="solid"/>
+                      <a:round/>
+                      <a:headEnd type="none" w="med" len="med"/>
+                      <a:tailEnd type="none" w="med" len="med"/>
+                    </a:lnT>
+                    <a:lnB w="12700" cap="flat" cmpd="sng" algn="ctr">
+                      <a:solidFill>
+                        <a:schemeClr val="tx1"/>
+                      </a:solidFill>
+                      <a:prstDash val="solid"/>
+                      <a:round/>
+                      <a:headEnd type="none" w="med" len="med"/>
+                      <a:tailEnd type="none" w="med" len="med"/>
+                    </a:lnB>
+                    <a:solidFill>
+                      <a:srgbClr val="FFFAEF"/>
+                    </a:solidFill>
+                  </a:tcPr>
+                </a:tc>
+                <a:tc>
+                  <a:txBody>
+                    <a:bodyPr/>
+                    <a:lstStyle/>
+                    <a:p>
+                      <a:pPr algn="ctr" fontAlgn="b">
+                        <a:buNone/>
+                      </a:pPr>
+                      <a:r>
+                        <a:rPr lang="it-IT" sz="2000" u="none" strike="noStrike">
+                          <a:effectLst/>
+                        </a:rPr>
+                        <a:t>9</a:t>
+                      </a:r>
+                      <a:endParaRPr lang="it-IT" sz="2000" b="0" i="0" u="none" strike="noStrike">
+                        <a:solidFill>
+                          <a:srgbClr val="000000"/>
+                        </a:solidFill>
+                        <a:effectLst/>
+                        <a:latin typeface="Calibri" panose="020F0502020204030204" pitchFamily="34" charset="0"/>
+                      </a:endParaRPr>
+                    </a:p>
+                  </a:txBody>
+                  <a:tcPr marL="9525" marR="9525" marT="9525" marB="0" anchor="ctr">
+                    <a:lnL w="12700" cap="flat" cmpd="sng" algn="ctr">
+                      <a:solidFill>
+                        <a:schemeClr val="tx1"/>
+                      </a:solidFill>
+                      <a:prstDash val="solid"/>
+                      <a:round/>
+                      <a:headEnd type="none" w="med" len="med"/>
+                      <a:tailEnd type="none" w="med" len="med"/>
+                    </a:lnL>
+                    <a:lnR w="12700" cap="flat" cmpd="sng" algn="ctr">
+                      <a:solidFill>
+                        <a:schemeClr val="tx1"/>
+                      </a:solidFill>
+                      <a:prstDash val="solid"/>
+                      <a:round/>
+                      <a:headEnd type="none" w="med" len="med"/>
+                      <a:tailEnd type="none" w="med" len="med"/>
+                    </a:lnR>
+                    <a:lnT w="12700" cap="flat" cmpd="sng" algn="ctr">
+                      <a:solidFill>
+                        <a:schemeClr val="tx1"/>
+                      </a:solidFill>
+                      <a:prstDash val="solid"/>
+                      <a:round/>
+                      <a:headEnd type="none" w="med" len="med"/>
+                      <a:tailEnd type="none" w="med" len="med"/>
+                    </a:lnT>
+                    <a:lnB w="12700" cap="flat" cmpd="sng" algn="ctr">
+                      <a:solidFill>
+                        <a:schemeClr val="tx1"/>
+                      </a:solidFill>
+                      <a:prstDash val="solid"/>
+                      <a:round/>
+                      <a:headEnd type="none" w="med" len="med"/>
+                      <a:tailEnd type="none" w="med" len="med"/>
+                    </a:lnB>
+                    <a:solidFill>
+                      <a:srgbClr val="FFFAEF"/>
+                    </a:solidFill>
+                  </a:tcPr>
+                </a:tc>
+                <a:tc>
+                  <a:txBody>
+                    <a:bodyPr/>
+                    <a:lstStyle/>
+                    <a:p>
+                      <a:pPr algn="ctr" fontAlgn="b">
+                        <a:buNone/>
+                      </a:pPr>
+                      <a:r>
+                        <a:rPr lang="it-IT" sz="2000" u="none" strike="noStrike">
+                          <a:effectLst/>
+                        </a:rPr>
+                        <a:t>0</a:t>
+                      </a:r>
+                      <a:endParaRPr lang="it-IT" sz="2000" b="0" i="0" u="none" strike="noStrike">
+                        <a:solidFill>
+                          <a:srgbClr val="000000"/>
+                        </a:solidFill>
+                        <a:effectLst/>
+                        <a:latin typeface="Calibri" panose="020F0502020204030204" pitchFamily="34" charset="0"/>
+                      </a:endParaRPr>
+                    </a:p>
+                  </a:txBody>
+                  <a:tcPr marL="9525" marR="9525" marT="9525" marB="0" anchor="ctr">
+                    <a:lnL w="12700" cap="flat" cmpd="sng" algn="ctr">
+                      <a:solidFill>
+                        <a:schemeClr val="tx1"/>
+                      </a:solidFill>
+                      <a:prstDash val="solid"/>
+                      <a:round/>
+                      <a:headEnd type="none" w="med" len="med"/>
+                      <a:tailEnd type="none" w="med" len="med"/>
+                    </a:lnL>
+                    <a:lnR w="12700" cap="flat" cmpd="sng" algn="ctr">
+                      <a:solidFill>
+                        <a:schemeClr val="tx1"/>
+                      </a:solidFill>
+                      <a:prstDash val="solid"/>
+                      <a:round/>
+                      <a:headEnd type="none" w="med" len="med"/>
+                      <a:tailEnd type="none" w="med" len="med"/>
+                    </a:lnR>
+                    <a:lnT w="12700" cap="flat" cmpd="sng" algn="ctr">
+                      <a:solidFill>
+                        <a:schemeClr val="tx1"/>
+                      </a:solidFill>
+                      <a:prstDash val="solid"/>
+                      <a:round/>
+                      <a:headEnd type="none" w="med" len="med"/>
+                      <a:tailEnd type="none" w="med" len="med"/>
+                    </a:lnT>
+                    <a:lnB w="12700" cap="flat" cmpd="sng" algn="ctr">
+                      <a:solidFill>
+                        <a:schemeClr val="tx1"/>
+                      </a:solidFill>
+                      <a:prstDash val="solid"/>
+                      <a:round/>
+                      <a:headEnd type="none" w="med" len="med"/>
+                      <a:tailEnd type="none" w="med" len="med"/>
+                    </a:lnB>
+                    <a:solidFill>
+                      <a:srgbClr val="FFFAEF"/>
+                    </a:solidFill>
+                  </a:tcPr>
+                </a:tc>
+                <a:tc>
+                  <a:txBody>
+                    <a:bodyPr/>
+                    <a:lstStyle/>
+                    <a:p>
+                      <a:pPr algn="ctr" fontAlgn="b">
+                        <a:buNone/>
+                      </a:pPr>
+                      <a:r>
+                        <a:rPr lang="it-IT" sz="2000" u="none" strike="noStrike">
+                          <a:effectLst/>
+                        </a:rPr>
+                        <a:t>0</a:t>
+                      </a:r>
+                      <a:endParaRPr lang="it-IT" sz="2000" b="0" i="0" u="none" strike="noStrike">
+                        <a:solidFill>
+                          <a:srgbClr val="000000"/>
+                        </a:solidFill>
+                        <a:effectLst/>
+                        <a:latin typeface="Calibri" panose="020F0502020204030204" pitchFamily="34" charset="0"/>
+                      </a:endParaRPr>
+                    </a:p>
+                  </a:txBody>
+                  <a:tcPr marL="9525" marR="9525" marT="9525" marB="0" anchor="ctr">
+                    <a:lnL w="12700" cap="flat" cmpd="sng" algn="ctr">
+                      <a:solidFill>
+                        <a:schemeClr val="tx1"/>
+                      </a:solidFill>
+                      <a:prstDash val="solid"/>
+                      <a:round/>
+                      <a:headEnd type="none" w="med" len="med"/>
+                      <a:tailEnd type="none" w="med" len="med"/>
+                    </a:lnL>
+                    <a:lnR w="12700" cap="flat" cmpd="sng" algn="ctr">
+                      <a:solidFill>
+                        <a:schemeClr val="tx1"/>
+                      </a:solidFill>
+                      <a:prstDash val="solid"/>
+                      <a:round/>
+                      <a:headEnd type="none" w="med" len="med"/>
+                      <a:tailEnd type="none" w="med" len="med"/>
+                    </a:lnR>
+                    <a:lnT w="12700" cap="flat" cmpd="sng" algn="ctr">
+                      <a:solidFill>
+                        <a:schemeClr val="tx1"/>
+                      </a:solidFill>
+                      <a:prstDash val="solid"/>
+                      <a:round/>
+                      <a:headEnd type="none" w="med" len="med"/>
+                      <a:tailEnd type="none" w="med" len="med"/>
+                    </a:lnT>
+                    <a:lnB w="12700" cap="flat" cmpd="sng" algn="ctr">
+                      <a:solidFill>
+                        <a:schemeClr val="tx1"/>
+                      </a:solidFill>
+                      <a:prstDash val="solid"/>
+                      <a:round/>
+                      <a:headEnd type="none" w="med" len="med"/>
+                      <a:tailEnd type="none" w="med" len="med"/>
+                    </a:lnB>
+                    <a:solidFill>
+                      <a:srgbClr val="FFFAEF"/>
+                    </a:solidFill>
+                  </a:tcPr>
+                </a:tc>
+                <a:tc>
+                  <a:txBody>
+                    <a:bodyPr/>
+                    <a:lstStyle/>
+                    <a:p>
+                      <a:pPr algn="ctr" fontAlgn="b">
+                        <a:buNone/>
+                      </a:pPr>
+                      <a:r>
+                        <a:rPr lang="it-IT" sz="2000" b="0" i="0" u="none" strike="noStrike" dirty="0">
+                          <a:solidFill>
+                            <a:srgbClr val="000000"/>
+                          </a:solidFill>
+                          <a:effectLst/>
+                          <a:latin typeface="Calibri" panose="020F0502020204030204" pitchFamily="34" charset="0"/>
+                        </a:rPr>
+                        <a:t>22</a:t>
+                      </a:r>
+                    </a:p>
+                  </a:txBody>
+                  <a:tcPr marL="9525" marR="9525" marT="9525" marB="0" anchor="ctr">
+                    <a:lnL w="12700" cap="flat" cmpd="sng" algn="ctr">
+                      <a:solidFill>
+                        <a:schemeClr val="tx1"/>
+                      </a:solidFill>
+                      <a:prstDash val="solid"/>
+                      <a:round/>
+                      <a:headEnd type="none" w="med" len="med"/>
+                      <a:tailEnd type="none" w="med" len="med"/>
+                    </a:lnL>
+                    <a:lnR w="12700" cap="flat" cmpd="sng" algn="ctr">
+                      <a:solidFill>
+                        <a:schemeClr val="tx1"/>
+                      </a:solidFill>
+                      <a:prstDash val="solid"/>
+                      <a:round/>
+                      <a:headEnd type="none" w="med" len="med"/>
+                      <a:tailEnd type="none" w="med" len="med"/>
+                    </a:lnR>
+                    <a:lnT w="12700" cap="flat" cmpd="sng" algn="ctr">
+                      <a:solidFill>
+                        <a:schemeClr val="tx1"/>
+                      </a:solidFill>
+                      <a:prstDash val="solid"/>
+                      <a:round/>
+                      <a:headEnd type="none" w="med" len="med"/>
+                      <a:tailEnd type="none" w="med" len="med"/>
+                    </a:lnT>
+                    <a:lnB w="12700" cap="flat" cmpd="sng" algn="ctr">
+                      <a:solidFill>
+                        <a:schemeClr val="tx1"/>
+                      </a:solidFill>
+                      <a:prstDash val="solid"/>
+                      <a:round/>
+                      <a:headEnd type="none" w="med" len="med"/>
+                      <a:tailEnd type="none" w="med" len="med"/>
+                    </a:lnB>
+                    <a:solidFill>
+                      <a:srgbClr val="FFFAEF"/>
+                    </a:solidFill>
+                  </a:tcPr>
+                </a:tc>
+                <a:extLst>
+                  <a:ext uri="{0D108BD9-81ED-4DB2-BD59-A6C34878D82A}">
+                    <a16:rowId xmlns:a16="http://schemas.microsoft.com/office/drawing/2014/main" val="1699661217"/>
+                  </a:ext>
+                </a:extLst>
+              </a:tr>
+              <a:tr h="439953">
+                <a:tc>
+                  <a:txBody>
+                    <a:bodyPr/>
+                    <a:lstStyle/>
+                    <a:p>
+                      <a:pPr algn="ctr" fontAlgn="b">
+                        <a:buNone/>
+                      </a:pPr>
+                      <a:r>
+                        <a:rPr lang="it-IT" sz="2000" b="1" u="none" strike="noStrike" dirty="0">
+                          <a:effectLst/>
+                        </a:rPr>
+                        <a:t>Marco Favero</a:t>
+                      </a:r>
+                      <a:endParaRPr lang="it-IT" sz="2000" b="1" i="0" u="none" strike="noStrike" dirty="0">
+                        <a:solidFill>
+                          <a:srgbClr val="000000"/>
+                        </a:solidFill>
+                        <a:effectLst/>
+                        <a:latin typeface="Calibri" panose="020F0502020204030204" pitchFamily="34" charset="0"/>
+                      </a:endParaRPr>
+                    </a:p>
+                  </a:txBody>
+                  <a:tcPr marL="9525" marR="9525" marT="9525" marB="0" anchor="ctr">
+                    <a:lnL w="12700" cap="flat" cmpd="sng" algn="ctr">
+                      <a:solidFill>
+                        <a:schemeClr val="tx1"/>
+                      </a:solidFill>
+                      <a:prstDash val="solid"/>
+                      <a:round/>
+                      <a:headEnd type="none" w="med" len="med"/>
+                      <a:tailEnd type="none" w="med" len="med"/>
+                    </a:lnL>
+                    <a:lnR w="12700" cap="flat" cmpd="sng" algn="ctr">
+                      <a:solidFill>
+                        <a:schemeClr val="tx1"/>
+                      </a:solidFill>
+                      <a:prstDash val="solid"/>
+                      <a:round/>
+                      <a:headEnd type="none" w="med" len="med"/>
+                      <a:tailEnd type="none" w="med" len="med"/>
+                    </a:lnR>
+                    <a:lnT w="12700" cap="flat" cmpd="sng" algn="ctr">
+                      <a:solidFill>
+                        <a:schemeClr val="tx1"/>
+                      </a:solidFill>
+                      <a:prstDash val="solid"/>
+                      <a:round/>
+                      <a:headEnd type="none" w="med" len="med"/>
+                      <a:tailEnd type="none" w="med" len="med"/>
+                    </a:lnT>
+                    <a:lnB w="12700" cap="flat" cmpd="sng" algn="ctr">
+                      <a:solidFill>
+                        <a:schemeClr val="tx1"/>
+                      </a:solidFill>
+                      <a:prstDash val="solid"/>
+                      <a:round/>
+                      <a:headEnd type="none" w="med" len="med"/>
+                      <a:tailEnd type="none" w="med" len="med"/>
+                    </a:lnB>
+                    <a:solidFill>
+                      <a:srgbClr val="FFFAEF"/>
+                    </a:solidFill>
+                  </a:tcPr>
+                </a:tc>
+                <a:tc>
+                  <a:txBody>
+                    <a:bodyPr/>
+                    <a:lstStyle/>
+                    <a:p>
+                      <a:pPr algn="ctr" fontAlgn="b">
+                        <a:buNone/>
+                      </a:pPr>
+                      <a:r>
+                        <a:rPr lang="it-IT" sz="2000" u="none" strike="noStrike">
+                          <a:effectLst/>
+                        </a:rPr>
+                        <a:t>3</a:t>
+                      </a:r>
+                      <a:endParaRPr lang="it-IT" sz="2000" b="0" i="0" u="none" strike="noStrike">
+                        <a:solidFill>
+                          <a:srgbClr val="000000"/>
+                        </a:solidFill>
+                        <a:effectLst/>
+                        <a:latin typeface="Calibri" panose="020F0502020204030204" pitchFamily="34" charset="0"/>
+                      </a:endParaRPr>
+                    </a:p>
+                  </a:txBody>
+                  <a:tcPr marL="9525" marR="9525" marT="9525" marB="0" anchor="ctr">
+                    <a:lnL w="12700" cap="flat" cmpd="sng" algn="ctr">
+                      <a:solidFill>
+                        <a:schemeClr val="tx1"/>
+                      </a:solidFill>
+                      <a:prstDash val="solid"/>
+                      <a:round/>
+                      <a:headEnd type="none" w="med" len="med"/>
+                      <a:tailEnd type="none" w="med" len="med"/>
+                    </a:lnL>
+                    <a:lnR w="12700" cap="flat" cmpd="sng" algn="ctr">
+                      <a:solidFill>
+                        <a:schemeClr val="tx1"/>
+                      </a:solidFill>
+                      <a:prstDash val="solid"/>
+                      <a:round/>
+                      <a:headEnd type="none" w="med" len="med"/>
+                      <a:tailEnd type="none" w="med" len="med"/>
+                    </a:lnR>
+                    <a:lnT w="12700" cap="flat" cmpd="sng" algn="ctr">
+                      <a:solidFill>
+                        <a:schemeClr val="tx1"/>
+                      </a:solidFill>
+                      <a:prstDash val="solid"/>
+                      <a:round/>
+                      <a:headEnd type="none" w="med" len="med"/>
+                      <a:tailEnd type="none" w="med" len="med"/>
+                    </a:lnT>
+                    <a:lnB w="12700" cap="flat" cmpd="sng" algn="ctr">
+                      <a:solidFill>
+                        <a:schemeClr val="tx1"/>
+                      </a:solidFill>
+                      <a:prstDash val="solid"/>
+                      <a:round/>
+                      <a:headEnd type="none" w="med" len="med"/>
+                      <a:tailEnd type="none" w="med" len="med"/>
+                    </a:lnB>
+                    <a:solidFill>
+                      <a:srgbClr val="FFFAEF"/>
+                    </a:solidFill>
+                  </a:tcPr>
+                </a:tc>
+                <a:tc>
+                  <a:txBody>
+                    <a:bodyPr/>
+                    <a:lstStyle/>
+                    <a:p>
+                      <a:pPr algn="ctr" fontAlgn="b">
+                        <a:buNone/>
+                      </a:pPr>
+                      <a:r>
+                        <a:rPr lang="it-IT" sz="2000" u="none" strike="noStrike" dirty="0">
+                          <a:effectLst/>
+                        </a:rPr>
+                        <a:t>6</a:t>
+                      </a:r>
+                      <a:endParaRPr lang="it-IT" sz="2000" b="0" i="0" u="none" strike="noStrike" dirty="0">
+                        <a:solidFill>
+                          <a:srgbClr val="000000"/>
+                        </a:solidFill>
+                        <a:effectLst/>
+                        <a:latin typeface="Calibri" panose="020F0502020204030204" pitchFamily="34" charset="0"/>
+                      </a:endParaRPr>
+                    </a:p>
+                  </a:txBody>
+                  <a:tcPr marL="9525" marR="9525" marT="9525" marB="0" anchor="ctr">
+                    <a:lnL w="12700" cap="flat" cmpd="sng" algn="ctr">
+                      <a:solidFill>
+                        <a:schemeClr val="tx1"/>
+                      </a:solidFill>
+                      <a:prstDash val="solid"/>
+                      <a:round/>
+                      <a:headEnd type="none" w="med" len="med"/>
+                      <a:tailEnd type="none" w="med" len="med"/>
+                    </a:lnL>
+                    <a:lnR w="12700" cap="flat" cmpd="sng" algn="ctr">
+                      <a:solidFill>
+                        <a:schemeClr val="tx1"/>
+                      </a:solidFill>
+                      <a:prstDash val="solid"/>
+                      <a:round/>
+                      <a:headEnd type="none" w="med" len="med"/>
+                      <a:tailEnd type="none" w="med" len="med"/>
+                    </a:lnR>
+                    <a:lnT w="12700" cap="flat" cmpd="sng" algn="ctr">
+                      <a:solidFill>
+                        <a:schemeClr val="tx1"/>
+                      </a:solidFill>
+                      <a:prstDash val="solid"/>
+                      <a:round/>
+                      <a:headEnd type="none" w="med" len="med"/>
+                      <a:tailEnd type="none" w="med" len="med"/>
+                    </a:lnT>
+                    <a:lnB w="12700" cap="flat" cmpd="sng" algn="ctr">
+                      <a:solidFill>
+                        <a:schemeClr val="tx1"/>
+                      </a:solidFill>
+                      <a:prstDash val="solid"/>
+                      <a:round/>
+                      <a:headEnd type="none" w="med" len="med"/>
+                      <a:tailEnd type="none" w="med" len="med"/>
+                    </a:lnB>
+                    <a:solidFill>
+                      <a:srgbClr val="FFFAEF"/>
+                    </a:solidFill>
+                  </a:tcPr>
+                </a:tc>
+                <a:tc>
+                  <a:txBody>
+                    <a:bodyPr/>
+                    <a:lstStyle/>
+                    <a:p>
+                      <a:pPr algn="ctr" fontAlgn="b">
+                        <a:buNone/>
+                      </a:pPr>
+                      <a:r>
+                        <a:rPr lang="it-IT" sz="2000" u="none" strike="noStrike">
+                          <a:effectLst/>
+                        </a:rPr>
+                        <a:t>4</a:t>
+                      </a:r>
+                      <a:endParaRPr lang="it-IT" sz="2000" b="0" i="0" u="none" strike="noStrike">
+                        <a:solidFill>
+                          <a:srgbClr val="000000"/>
+                        </a:solidFill>
+                        <a:effectLst/>
+                        <a:latin typeface="Calibri" panose="020F0502020204030204" pitchFamily="34" charset="0"/>
+                      </a:endParaRPr>
+                    </a:p>
+                  </a:txBody>
+                  <a:tcPr marL="9525" marR="9525" marT="9525" marB="0" anchor="ctr">
+                    <a:lnL w="12700" cap="flat" cmpd="sng" algn="ctr">
+                      <a:solidFill>
+                        <a:schemeClr val="tx1"/>
+                      </a:solidFill>
+                      <a:prstDash val="solid"/>
+                      <a:round/>
+                      <a:headEnd type="none" w="med" len="med"/>
+                      <a:tailEnd type="none" w="med" len="med"/>
+                    </a:lnL>
+                    <a:lnR w="12700" cap="flat" cmpd="sng" algn="ctr">
+                      <a:solidFill>
+                        <a:schemeClr val="tx1"/>
+                      </a:solidFill>
+                      <a:prstDash val="solid"/>
+                      <a:round/>
+                      <a:headEnd type="none" w="med" len="med"/>
+                      <a:tailEnd type="none" w="med" len="med"/>
+                    </a:lnR>
+                    <a:lnT w="12700" cap="flat" cmpd="sng" algn="ctr">
+                      <a:solidFill>
+                        <a:schemeClr val="tx1"/>
+                      </a:solidFill>
+                      <a:prstDash val="solid"/>
+                      <a:round/>
+                      <a:headEnd type="none" w="med" len="med"/>
+                      <a:tailEnd type="none" w="med" len="med"/>
+                    </a:lnT>
+                    <a:lnB w="12700" cap="flat" cmpd="sng" algn="ctr">
+                      <a:solidFill>
+                        <a:schemeClr val="tx1"/>
+                      </a:solidFill>
+                      <a:prstDash val="solid"/>
+                      <a:round/>
+                      <a:headEnd type="none" w="med" len="med"/>
+                      <a:tailEnd type="none" w="med" len="med"/>
+                    </a:lnB>
+                    <a:solidFill>
+                      <a:srgbClr val="FFFAEF"/>
+                    </a:solidFill>
+                  </a:tcPr>
+                </a:tc>
+                <a:tc>
+                  <a:txBody>
+                    <a:bodyPr/>
+                    <a:lstStyle/>
+                    <a:p>
+                      <a:pPr algn="ctr" fontAlgn="b">
+                        <a:buNone/>
+                      </a:pPr>
+                      <a:r>
+                        <a:rPr lang="it-IT" sz="2000" u="none" strike="noStrike" dirty="0">
+                          <a:effectLst/>
+                        </a:rPr>
+                        <a:t>8</a:t>
+                      </a:r>
+                      <a:endParaRPr lang="it-IT" sz="2000" b="0" i="0" u="none" strike="noStrike" dirty="0">
+                        <a:solidFill>
+                          <a:srgbClr val="000000"/>
+                        </a:solidFill>
+                        <a:effectLst/>
+                        <a:latin typeface="Calibri" panose="020F0502020204030204" pitchFamily="34" charset="0"/>
+                      </a:endParaRPr>
+                    </a:p>
+                  </a:txBody>
+                  <a:tcPr marL="9525" marR="9525" marT="9525" marB="0" anchor="ctr">
+                    <a:lnL w="12700" cap="flat" cmpd="sng" algn="ctr">
+                      <a:solidFill>
+                        <a:schemeClr val="tx1"/>
+                      </a:solidFill>
+                      <a:prstDash val="solid"/>
+                      <a:round/>
+                      <a:headEnd type="none" w="med" len="med"/>
+                      <a:tailEnd type="none" w="med" len="med"/>
+                    </a:lnL>
+                    <a:lnR w="12700" cap="flat" cmpd="sng" algn="ctr">
+                      <a:solidFill>
+                        <a:schemeClr val="tx1"/>
+                      </a:solidFill>
+                      <a:prstDash val="solid"/>
+                      <a:round/>
+                      <a:headEnd type="none" w="med" len="med"/>
+                      <a:tailEnd type="none" w="med" len="med"/>
+                    </a:lnR>
+                    <a:lnT w="12700" cap="flat" cmpd="sng" algn="ctr">
+                      <a:solidFill>
+                        <a:schemeClr val="tx1"/>
+                      </a:solidFill>
+                      <a:prstDash val="solid"/>
+                      <a:round/>
+                      <a:headEnd type="none" w="med" len="med"/>
+                      <a:tailEnd type="none" w="med" len="med"/>
+                    </a:lnT>
+                    <a:lnB w="12700" cap="flat" cmpd="sng" algn="ctr">
+                      <a:solidFill>
+                        <a:schemeClr val="tx1"/>
+                      </a:solidFill>
+                      <a:prstDash val="solid"/>
+                      <a:round/>
+                      <a:headEnd type="none" w="med" len="med"/>
+                      <a:tailEnd type="none" w="med" len="med"/>
+                    </a:lnB>
+                    <a:solidFill>
+                      <a:srgbClr val="FFFAEF"/>
+                    </a:solidFill>
+                  </a:tcPr>
+                </a:tc>
+                <a:tc>
+                  <a:txBody>
+                    <a:bodyPr/>
+                    <a:lstStyle/>
+                    <a:p>
+                      <a:pPr algn="ctr" fontAlgn="b">
+                        <a:buNone/>
+                      </a:pPr>
+                      <a:r>
+                        <a:rPr lang="it-IT" sz="2000" u="none" strike="noStrike">
+                          <a:effectLst/>
+                        </a:rPr>
+                        <a:t>0</a:t>
+                      </a:r>
+                      <a:endParaRPr lang="it-IT" sz="2000" b="0" i="0" u="none" strike="noStrike">
+                        <a:solidFill>
+                          <a:srgbClr val="000000"/>
+                        </a:solidFill>
+                        <a:effectLst/>
+                        <a:latin typeface="Calibri" panose="020F0502020204030204" pitchFamily="34" charset="0"/>
+                      </a:endParaRPr>
+                    </a:p>
+                  </a:txBody>
+                  <a:tcPr marL="9525" marR="9525" marT="9525" marB="0" anchor="ctr">
+                    <a:lnL w="12700" cap="flat" cmpd="sng" algn="ctr">
+                      <a:solidFill>
+                        <a:schemeClr val="tx1"/>
+                      </a:solidFill>
+                      <a:prstDash val="solid"/>
+                      <a:round/>
+                      <a:headEnd type="none" w="med" len="med"/>
+                      <a:tailEnd type="none" w="med" len="med"/>
+                    </a:lnL>
+                    <a:lnR w="12700" cap="flat" cmpd="sng" algn="ctr">
+                      <a:solidFill>
+                        <a:schemeClr val="tx1"/>
+                      </a:solidFill>
+                      <a:prstDash val="solid"/>
+                      <a:round/>
+                      <a:headEnd type="none" w="med" len="med"/>
+                      <a:tailEnd type="none" w="med" len="med"/>
+                    </a:lnR>
+                    <a:lnT w="12700" cap="flat" cmpd="sng" algn="ctr">
+                      <a:solidFill>
+                        <a:schemeClr val="tx1"/>
+                      </a:solidFill>
+                      <a:prstDash val="solid"/>
+                      <a:round/>
+                      <a:headEnd type="none" w="med" len="med"/>
+                      <a:tailEnd type="none" w="med" len="med"/>
+                    </a:lnT>
+                    <a:lnB w="12700" cap="flat" cmpd="sng" algn="ctr">
+                      <a:solidFill>
+                        <a:schemeClr val="tx1"/>
+                      </a:solidFill>
+                      <a:prstDash val="solid"/>
+                      <a:round/>
+                      <a:headEnd type="none" w="med" len="med"/>
+                      <a:tailEnd type="none" w="med" len="med"/>
+                    </a:lnB>
+                    <a:solidFill>
+                      <a:srgbClr val="FFFAEF"/>
+                    </a:solidFill>
+                  </a:tcPr>
+                </a:tc>
+                <a:tc>
+                  <a:txBody>
+                    <a:bodyPr/>
+                    <a:lstStyle/>
+                    <a:p>
+                      <a:pPr algn="ctr" fontAlgn="b">
+                        <a:buNone/>
+                      </a:pPr>
+                      <a:r>
+                        <a:rPr lang="it-IT" sz="2000" u="none" strike="noStrike">
+                          <a:effectLst/>
+                        </a:rPr>
+                        <a:t>0</a:t>
+                      </a:r>
+                      <a:endParaRPr lang="it-IT" sz="2000" b="0" i="0" u="none" strike="noStrike">
+                        <a:solidFill>
+                          <a:srgbClr val="000000"/>
+                        </a:solidFill>
+                        <a:effectLst/>
+                        <a:latin typeface="Calibri" panose="020F0502020204030204" pitchFamily="34" charset="0"/>
+                      </a:endParaRPr>
+                    </a:p>
+                  </a:txBody>
+                  <a:tcPr marL="9525" marR="9525" marT="9525" marB="0" anchor="ctr">
+                    <a:lnL w="12700" cap="flat" cmpd="sng" algn="ctr">
+                      <a:solidFill>
+                        <a:schemeClr val="tx1"/>
+                      </a:solidFill>
+                      <a:prstDash val="solid"/>
+                      <a:round/>
+                      <a:headEnd type="none" w="med" len="med"/>
+                      <a:tailEnd type="none" w="med" len="med"/>
+                    </a:lnL>
+                    <a:lnR w="12700" cap="flat" cmpd="sng" algn="ctr">
+                      <a:solidFill>
+                        <a:schemeClr val="tx1"/>
+                      </a:solidFill>
+                      <a:prstDash val="solid"/>
+                      <a:round/>
+                      <a:headEnd type="none" w="med" len="med"/>
+                      <a:tailEnd type="none" w="med" len="med"/>
+                    </a:lnR>
+                    <a:lnT w="12700" cap="flat" cmpd="sng" algn="ctr">
+                      <a:solidFill>
+                        <a:schemeClr val="tx1"/>
+                      </a:solidFill>
+                      <a:prstDash val="solid"/>
+                      <a:round/>
+                      <a:headEnd type="none" w="med" len="med"/>
+                      <a:tailEnd type="none" w="med" len="med"/>
+                    </a:lnT>
+                    <a:lnB w="12700" cap="flat" cmpd="sng" algn="ctr">
+                      <a:solidFill>
+                        <a:schemeClr val="tx1"/>
+                      </a:solidFill>
+                      <a:prstDash val="solid"/>
+                      <a:round/>
+                      <a:headEnd type="none" w="med" len="med"/>
+                      <a:tailEnd type="none" w="med" len="med"/>
+                    </a:lnB>
+                    <a:solidFill>
+                      <a:srgbClr val="FFFAEF"/>
+                    </a:solidFill>
+                  </a:tcPr>
+                </a:tc>
+                <a:tc>
+                  <a:txBody>
+                    <a:bodyPr/>
+                    <a:lstStyle/>
+                    <a:p>
+                      <a:pPr algn="ctr" fontAlgn="b">
+                        <a:buNone/>
+                      </a:pPr>
+                      <a:r>
+                        <a:rPr lang="it-IT" sz="2000" b="0" i="0" u="none" strike="noStrike" dirty="0">
+                          <a:solidFill>
+                            <a:srgbClr val="000000"/>
+                          </a:solidFill>
+                          <a:effectLst/>
+                          <a:latin typeface="Calibri" panose="020F0502020204030204" pitchFamily="34" charset="0"/>
+                        </a:rPr>
+                        <a:t>21</a:t>
+                      </a:r>
+                    </a:p>
+                  </a:txBody>
+                  <a:tcPr marL="9525" marR="9525" marT="9525" marB="0" anchor="ctr">
+                    <a:lnL w="12700" cap="flat" cmpd="sng" algn="ctr">
+                      <a:solidFill>
+                        <a:schemeClr val="tx1"/>
+                      </a:solidFill>
+                      <a:prstDash val="solid"/>
+                      <a:round/>
+                      <a:headEnd type="none" w="med" len="med"/>
+                      <a:tailEnd type="none" w="med" len="med"/>
+                    </a:lnL>
+                    <a:lnR w="12700" cap="flat" cmpd="sng" algn="ctr">
+                      <a:solidFill>
+                        <a:schemeClr val="tx1"/>
+                      </a:solidFill>
+                      <a:prstDash val="solid"/>
+                      <a:round/>
+                      <a:headEnd type="none" w="med" len="med"/>
+                      <a:tailEnd type="none" w="med" len="med"/>
+                    </a:lnR>
+                    <a:lnT w="12700" cap="flat" cmpd="sng" algn="ctr">
+                      <a:solidFill>
+                        <a:schemeClr val="tx1"/>
+                      </a:solidFill>
+                      <a:prstDash val="solid"/>
+                      <a:round/>
+                      <a:headEnd type="none" w="med" len="med"/>
+                      <a:tailEnd type="none" w="med" len="med"/>
+                    </a:lnT>
+                    <a:lnB w="12700" cap="flat" cmpd="sng" algn="ctr">
+                      <a:solidFill>
+                        <a:schemeClr val="tx1"/>
+                      </a:solidFill>
+                      <a:prstDash val="solid"/>
+                      <a:round/>
+                      <a:headEnd type="none" w="med" len="med"/>
+                      <a:tailEnd type="none" w="med" len="med"/>
+                    </a:lnB>
+                    <a:solidFill>
+                      <a:srgbClr val="FFFAEF"/>
+                    </a:solidFill>
+                  </a:tcPr>
+                </a:tc>
+                <a:extLst>
+                  <a:ext uri="{0D108BD9-81ED-4DB2-BD59-A6C34878D82A}">
+                    <a16:rowId xmlns:a16="http://schemas.microsoft.com/office/drawing/2014/main" val="1060777072"/>
+                  </a:ext>
+                </a:extLst>
+              </a:tr>
+              <a:tr h="439953">
+                <a:tc>
+                  <a:txBody>
+                    <a:bodyPr/>
+                    <a:lstStyle/>
+                    <a:p>
+                      <a:pPr algn="ctr" fontAlgn="b">
+                        <a:buNone/>
+                      </a:pPr>
+                      <a:r>
+                        <a:rPr lang="it-IT" sz="2000" b="1" u="none" strike="noStrike" dirty="0">
+                          <a:effectLst/>
+                        </a:rPr>
+                        <a:t>Alberto Pignat</a:t>
+                      </a:r>
+                      <a:endParaRPr lang="it-IT" sz="2000" b="1" i="0" u="none" strike="noStrike" dirty="0">
+                        <a:solidFill>
+                          <a:srgbClr val="000000"/>
+                        </a:solidFill>
+                        <a:effectLst/>
+                        <a:latin typeface="Calibri" panose="020F0502020204030204" pitchFamily="34" charset="0"/>
+                      </a:endParaRPr>
+                    </a:p>
+                  </a:txBody>
+                  <a:tcPr marL="9525" marR="9525" marT="9525" marB="0" anchor="ctr">
+                    <a:lnL w="12700" cap="flat" cmpd="sng" algn="ctr">
+                      <a:solidFill>
+                        <a:schemeClr val="tx1"/>
+                      </a:solidFill>
+                      <a:prstDash val="solid"/>
+                      <a:round/>
+                      <a:headEnd type="none" w="med" len="med"/>
+                      <a:tailEnd type="none" w="med" len="med"/>
+                    </a:lnL>
+                    <a:lnR w="12700" cap="flat" cmpd="sng" algn="ctr">
+                      <a:solidFill>
+                        <a:schemeClr val="tx1"/>
+                      </a:solidFill>
+                      <a:prstDash val="solid"/>
+                      <a:round/>
+                      <a:headEnd type="none" w="med" len="med"/>
+                      <a:tailEnd type="none" w="med" len="med"/>
+                    </a:lnR>
+                    <a:lnT w="12700" cap="flat" cmpd="sng" algn="ctr">
+                      <a:solidFill>
+                        <a:schemeClr val="tx1"/>
+                      </a:solidFill>
+                      <a:prstDash val="solid"/>
+                      <a:round/>
+                      <a:headEnd type="none" w="med" len="med"/>
+                      <a:tailEnd type="none" w="med" len="med"/>
+                    </a:lnT>
+                    <a:lnB w="12700" cap="flat" cmpd="sng" algn="ctr">
+                      <a:solidFill>
+                        <a:schemeClr val="tx1"/>
+                      </a:solidFill>
+                      <a:prstDash val="solid"/>
+                      <a:round/>
+                      <a:headEnd type="none" w="med" len="med"/>
+                      <a:tailEnd type="none" w="med" len="med"/>
+                    </a:lnB>
+                    <a:solidFill>
+                      <a:srgbClr val="FFFAEF"/>
+                    </a:solidFill>
+                  </a:tcPr>
+                </a:tc>
+                <a:tc>
+                  <a:txBody>
+                    <a:bodyPr/>
+                    <a:lstStyle/>
+                    <a:p>
+                      <a:pPr algn="ctr" fontAlgn="b">
+                        <a:buNone/>
+                      </a:pPr>
+                      <a:r>
+                        <a:rPr lang="it-IT" sz="2000" b="0" i="0" u="none" strike="noStrike" dirty="0">
+                          <a:solidFill>
+                            <a:srgbClr val="000000"/>
+                          </a:solidFill>
+                          <a:effectLst/>
+                          <a:latin typeface="Calibri" panose="020F0502020204030204" pitchFamily="34" charset="0"/>
+                        </a:rPr>
+                        <a:t>3</a:t>
+                      </a:r>
+                    </a:p>
+                  </a:txBody>
+                  <a:tcPr marL="9525" marR="9525" marT="9525" marB="0" anchor="ctr">
+                    <a:lnL w="12700" cap="flat" cmpd="sng" algn="ctr">
+                      <a:solidFill>
+                        <a:schemeClr val="tx1"/>
+                      </a:solidFill>
+                      <a:prstDash val="solid"/>
+                      <a:round/>
+                      <a:headEnd type="none" w="med" len="med"/>
+                      <a:tailEnd type="none" w="med" len="med"/>
+                    </a:lnL>
+                    <a:lnR w="12700" cap="flat" cmpd="sng" algn="ctr">
+                      <a:solidFill>
+                        <a:schemeClr val="tx1"/>
+                      </a:solidFill>
+                      <a:prstDash val="solid"/>
+                      <a:round/>
+                      <a:headEnd type="none" w="med" len="med"/>
+                      <a:tailEnd type="none" w="med" len="med"/>
+                    </a:lnR>
+                    <a:lnT w="12700" cap="flat" cmpd="sng" algn="ctr">
+                      <a:solidFill>
+                        <a:schemeClr val="tx1"/>
+                      </a:solidFill>
+                      <a:prstDash val="solid"/>
+                      <a:round/>
+                      <a:headEnd type="none" w="med" len="med"/>
+                      <a:tailEnd type="none" w="med" len="med"/>
+                    </a:lnT>
+                    <a:lnB w="12700" cap="flat" cmpd="sng" algn="ctr">
+                      <a:solidFill>
+                        <a:schemeClr val="tx1"/>
+                      </a:solidFill>
+                      <a:prstDash val="solid"/>
+                      <a:round/>
+                      <a:headEnd type="none" w="med" len="med"/>
+                      <a:tailEnd type="none" w="med" len="med"/>
+                    </a:lnB>
+                    <a:solidFill>
+                      <a:srgbClr val="FFFAEF"/>
+                    </a:solidFill>
+                  </a:tcPr>
+                </a:tc>
+                <a:tc>
+                  <a:txBody>
+                    <a:bodyPr/>
+                    <a:lstStyle/>
+                    <a:p>
+                      <a:pPr algn="ctr" fontAlgn="b">
+                        <a:buNone/>
+                      </a:pPr>
+                      <a:r>
+                        <a:rPr lang="it-IT" sz="2000" u="none" strike="noStrike" dirty="0">
+                          <a:effectLst/>
+                        </a:rPr>
+                        <a:t>5</a:t>
+                      </a:r>
+                      <a:endParaRPr lang="it-IT" sz="2000" b="0" i="0" u="none" strike="noStrike" dirty="0">
+                        <a:solidFill>
+                          <a:srgbClr val="000000"/>
+                        </a:solidFill>
+                        <a:effectLst/>
+                        <a:latin typeface="Calibri" panose="020F0502020204030204" pitchFamily="34" charset="0"/>
+                      </a:endParaRPr>
+                    </a:p>
+                  </a:txBody>
+                  <a:tcPr marL="9525" marR="9525" marT="9525" marB="0" anchor="ctr">
+                    <a:lnL w="12700" cap="flat" cmpd="sng" algn="ctr">
+                      <a:solidFill>
+                        <a:schemeClr val="tx1"/>
+                      </a:solidFill>
+                      <a:prstDash val="solid"/>
+                      <a:round/>
+                      <a:headEnd type="none" w="med" len="med"/>
+                      <a:tailEnd type="none" w="med" len="med"/>
+                    </a:lnL>
+                    <a:lnR w="12700" cap="flat" cmpd="sng" algn="ctr">
+                      <a:solidFill>
+                        <a:schemeClr val="tx1"/>
+                      </a:solidFill>
+                      <a:prstDash val="solid"/>
+                      <a:round/>
+                      <a:headEnd type="none" w="med" len="med"/>
+                      <a:tailEnd type="none" w="med" len="med"/>
+                    </a:lnR>
+                    <a:lnT w="12700" cap="flat" cmpd="sng" algn="ctr">
+                      <a:solidFill>
+                        <a:schemeClr val="tx1"/>
+                      </a:solidFill>
+                      <a:prstDash val="solid"/>
+                      <a:round/>
+                      <a:headEnd type="none" w="med" len="med"/>
+                      <a:tailEnd type="none" w="med" len="med"/>
+                    </a:lnT>
+                    <a:lnB w="12700" cap="flat" cmpd="sng" algn="ctr">
+                      <a:solidFill>
+                        <a:schemeClr val="tx1"/>
+                      </a:solidFill>
+                      <a:prstDash val="solid"/>
+                      <a:round/>
+                      <a:headEnd type="none" w="med" len="med"/>
+                      <a:tailEnd type="none" w="med" len="med"/>
+                    </a:lnB>
+                    <a:solidFill>
+                      <a:srgbClr val="FFFAEF"/>
+                    </a:solidFill>
+                  </a:tcPr>
+                </a:tc>
+                <a:tc>
+                  <a:txBody>
+                    <a:bodyPr/>
+                    <a:lstStyle/>
+                    <a:p>
+                      <a:pPr algn="ctr" fontAlgn="b">
+                        <a:buNone/>
+                      </a:pPr>
+                      <a:r>
+                        <a:rPr lang="it-IT" sz="2000" u="none" strike="noStrike">
+                          <a:effectLst/>
+                        </a:rPr>
+                        <a:t>6</a:t>
+                      </a:r>
+                      <a:endParaRPr lang="it-IT" sz="2000" b="0" i="0" u="none" strike="noStrike">
+                        <a:solidFill>
+                          <a:srgbClr val="000000"/>
+                        </a:solidFill>
+                        <a:effectLst/>
+                        <a:latin typeface="Calibri" panose="020F0502020204030204" pitchFamily="34" charset="0"/>
+                      </a:endParaRPr>
+                    </a:p>
+                  </a:txBody>
+                  <a:tcPr marL="9525" marR="9525" marT="9525" marB="0" anchor="ctr">
+                    <a:lnL w="12700" cap="flat" cmpd="sng" algn="ctr">
+                      <a:solidFill>
+                        <a:schemeClr val="tx1"/>
+                      </a:solidFill>
+                      <a:prstDash val="solid"/>
+                      <a:round/>
+                      <a:headEnd type="none" w="med" len="med"/>
+                      <a:tailEnd type="none" w="med" len="med"/>
+                    </a:lnL>
+                    <a:lnR w="12700" cap="flat" cmpd="sng" algn="ctr">
+                      <a:solidFill>
+                        <a:schemeClr val="tx1"/>
+                      </a:solidFill>
+                      <a:prstDash val="solid"/>
+                      <a:round/>
+                      <a:headEnd type="none" w="med" len="med"/>
+                      <a:tailEnd type="none" w="med" len="med"/>
+                    </a:lnR>
+                    <a:lnT w="12700" cap="flat" cmpd="sng" algn="ctr">
+                      <a:solidFill>
+                        <a:schemeClr val="tx1"/>
+                      </a:solidFill>
+                      <a:prstDash val="solid"/>
+                      <a:round/>
+                      <a:headEnd type="none" w="med" len="med"/>
+                      <a:tailEnd type="none" w="med" len="med"/>
+                    </a:lnT>
+                    <a:lnB w="12700" cap="flat" cmpd="sng" algn="ctr">
+                      <a:solidFill>
+                        <a:schemeClr val="tx1"/>
+                      </a:solidFill>
+                      <a:prstDash val="solid"/>
+                      <a:round/>
+                      <a:headEnd type="none" w="med" len="med"/>
+                      <a:tailEnd type="none" w="med" len="med"/>
+                    </a:lnB>
+                    <a:solidFill>
+                      <a:srgbClr val="FFFAEF"/>
+                    </a:solidFill>
+                  </a:tcPr>
+                </a:tc>
+                <a:tc>
+                  <a:txBody>
+                    <a:bodyPr/>
+                    <a:lstStyle/>
+                    <a:p>
+                      <a:pPr algn="ctr" fontAlgn="b">
+                        <a:buNone/>
+                      </a:pPr>
+                      <a:r>
+                        <a:rPr lang="it-IT" sz="2000" u="none" strike="noStrike" dirty="0">
+                          <a:effectLst/>
+                        </a:rPr>
+                        <a:t>8</a:t>
+                      </a:r>
+                      <a:endParaRPr lang="it-IT" sz="2000" b="0" i="0" u="none" strike="noStrike" dirty="0">
+                        <a:solidFill>
+                          <a:srgbClr val="000000"/>
+                        </a:solidFill>
+                        <a:effectLst/>
+                        <a:latin typeface="Calibri" panose="020F0502020204030204" pitchFamily="34" charset="0"/>
+                      </a:endParaRPr>
+                    </a:p>
+                  </a:txBody>
+                  <a:tcPr marL="9525" marR="9525" marT="9525" marB="0" anchor="ctr">
+                    <a:lnL w="12700" cap="flat" cmpd="sng" algn="ctr">
+                      <a:solidFill>
+                        <a:schemeClr val="tx1"/>
+                      </a:solidFill>
+                      <a:prstDash val="solid"/>
+                      <a:round/>
+                      <a:headEnd type="none" w="med" len="med"/>
+                      <a:tailEnd type="none" w="med" len="med"/>
+                    </a:lnL>
+                    <a:lnR w="12700" cap="flat" cmpd="sng" algn="ctr">
+                      <a:solidFill>
+                        <a:schemeClr val="tx1"/>
+                      </a:solidFill>
+                      <a:prstDash val="solid"/>
+                      <a:round/>
+                      <a:headEnd type="none" w="med" len="med"/>
+                      <a:tailEnd type="none" w="med" len="med"/>
+                    </a:lnR>
+                    <a:lnT w="12700" cap="flat" cmpd="sng" algn="ctr">
+                      <a:solidFill>
+                        <a:schemeClr val="tx1"/>
+                      </a:solidFill>
+                      <a:prstDash val="solid"/>
+                      <a:round/>
+                      <a:headEnd type="none" w="med" len="med"/>
+                      <a:tailEnd type="none" w="med" len="med"/>
+                    </a:lnT>
+                    <a:lnB w="12700" cap="flat" cmpd="sng" algn="ctr">
+                      <a:solidFill>
+                        <a:schemeClr val="tx1"/>
+                      </a:solidFill>
+                      <a:prstDash val="solid"/>
+                      <a:round/>
+                      <a:headEnd type="none" w="med" len="med"/>
+                      <a:tailEnd type="none" w="med" len="med"/>
+                    </a:lnB>
+                    <a:solidFill>
+                      <a:srgbClr val="FFFAEF"/>
+                    </a:solidFill>
+                  </a:tcPr>
+                </a:tc>
+                <a:tc>
+                  <a:txBody>
+                    <a:bodyPr/>
+                    <a:lstStyle/>
+                    <a:p>
+                      <a:pPr algn="ctr" fontAlgn="b">
+                        <a:buNone/>
+                      </a:pPr>
+                      <a:r>
+                        <a:rPr lang="it-IT" sz="2000" u="none" strike="noStrike">
+                          <a:effectLst/>
+                        </a:rPr>
+                        <a:t>0</a:t>
+                      </a:r>
+                      <a:endParaRPr lang="it-IT" sz="2000" b="0" i="0" u="none" strike="noStrike">
+                        <a:solidFill>
+                          <a:srgbClr val="000000"/>
+                        </a:solidFill>
+                        <a:effectLst/>
+                        <a:latin typeface="Calibri" panose="020F0502020204030204" pitchFamily="34" charset="0"/>
+                      </a:endParaRPr>
+                    </a:p>
+                  </a:txBody>
+                  <a:tcPr marL="9525" marR="9525" marT="9525" marB="0" anchor="ctr">
+                    <a:lnL w="12700" cap="flat" cmpd="sng" algn="ctr">
+                      <a:solidFill>
+                        <a:schemeClr val="tx1"/>
+                      </a:solidFill>
+                      <a:prstDash val="solid"/>
+                      <a:round/>
+                      <a:headEnd type="none" w="med" len="med"/>
+                      <a:tailEnd type="none" w="med" len="med"/>
+                    </a:lnL>
+                    <a:lnR w="12700" cap="flat" cmpd="sng" algn="ctr">
+                      <a:solidFill>
+                        <a:schemeClr val="tx1"/>
+                      </a:solidFill>
+                      <a:prstDash val="solid"/>
+                      <a:round/>
+                      <a:headEnd type="none" w="med" len="med"/>
+                      <a:tailEnd type="none" w="med" len="med"/>
+                    </a:lnR>
+                    <a:lnT w="12700" cap="flat" cmpd="sng" algn="ctr">
+                      <a:solidFill>
+                        <a:schemeClr val="tx1"/>
+                      </a:solidFill>
+                      <a:prstDash val="solid"/>
+                      <a:round/>
+                      <a:headEnd type="none" w="med" len="med"/>
+                      <a:tailEnd type="none" w="med" len="med"/>
+                    </a:lnT>
+                    <a:lnB w="12700" cap="flat" cmpd="sng" algn="ctr">
+                      <a:solidFill>
+                        <a:schemeClr val="tx1"/>
+                      </a:solidFill>
+                      <a:prstDash val="solid"/>
+                      <a:round/>
+                      <a:headEnd type="none" w="med" len="med"/>
+                      <a:tailEnd type="none" w="med" len="med"/>
+                    </a:lnB>
+                    <a:solidFill>
+                      <a:srgbClr val="FFFAEF"/>
+                    </a:solidFill>
+                  </a:tcPr>
+                </a:tc>
+                <a:tc>
+                  <a:txBody>
+                    <a:bodyPr/>
+                    <a:lstStyle/>
+                    <a:p>
+                      <a:pPr algn="ctr" fontAlgn="b">
+                        <a:buNone/>
+                      </a:pPr>
+                      <a:r>
+                        <a:rPr lang="it-IT" sz="2000" u="none" strike="noStrike">
+                          <a:effectLst/>
+                        </a:rPr>
+                        <a:t>0</a:t>
+                      </a:r>
+                      <a:endParaRPr lang="it-IT" sz="2000" b="0" i="0" u="none" strike="noStrike">
+                        <a:solidFill>
+                          <a:srgbClr val="000000"/>
+                        </a:solidFill>
+                        <a:effectLst/>
+                        <a:latin typeface="Calibri" panose="020F0502020204030204" pitchFamily="34" charset="0"/>
+                      </a:endParaRPr>
+                    </a:p>
+                  </a:txBody>
+                  <a:tcPr marL="9525" marR="9525" marT="9525" marB="0" anchor="ctr">
+                    <a:lnL w="12700" cap="flat" cmpd="sng" algn="ctr">
+                      <a:solidFill>
+                        <a:schemeClr val="tx1"/>
+                      </a:solidFill>
+                      <a:prstDash val="solid"/>
+                      <a:round/>
+                      <a:headEnd type="none" w="med" len="med"/>
+                      <a:tailEnd type="none" w="med" len="med"/>
+                    </a:lnL>
+                    <a:lnR w="12700" cap="flat" cmpd="sng" algn="ctr">
+                      <a:solidFill>
+                        <a:schemeClr val="tx1"/>
+                      </a:solidFill>
+                      <a:prstDash val="solid"/>
+                      <a:round/>
+                      <a:headEnd type="none" w="med" len="med"/>
+                      <a:tailEnd type="none" w="med" len="med"/>
+                    </a:lnR>
+                    <a:lnT w="12700" cap="flat" cmpd="sng" algn="ctr">
+                      <a:solidFill>
+                        <a:schemeClr val="tx1"/>
+                      </a:solidFill>
+                      <a:prstDash val="solid"/>
+                      <a:round/>
+                      <a:headEnd type="none" w="med" len="med"/>
+                      <a:tailEnd type="none" w="med" len="med"/>
+                    </a:lnT>
+                    <a:lnB w="12700" cap="flat" cmpd="sng" algn="ctr">
+                      <a:solidFill>
+                        <a:schemeClr val="tx1"/>
+                      </a:solidFill>
+                      <a:prstDash val="solid"/>
+                      <a:round/>
+                      <a:headEnd type="none" w="med" len="med"/>
+                      <a:tailEnd type="none" w="med" len="med"/>
+                    </a:lnB>
+                    <a:solidFill>
+                      <a:srgbClr val="FFFAEF"/>
+                    </a:solidFill>
+                  </a:tcPr>
+                </a:tc>
+                <a:tc>
+                  <a:txBody>
+                    <a:bodyPr/>
+                    <a:lstStyle/>
+                    <a:p>
+                      <a:pPr algn="ctr" fontAlgn="b">
+                        <a:buNone/>
+                      </a:pPr>
+                      <a:r>
+                        <a:rPr lang="it-IT" sz="2000" b="0" i="0" u="none" strike="noStrike" dirty="0">
+                          <a:solidFill>
+                            <a:srgbClr val="000000"/>
+                          </a:solidFill>
+                          <a:effectLst/>
+                          <a:latin typeface="Calibri" panose="020F0502020204030204" pitchFamily="34" charset="0"/>
+                        </a:rPr>
+                        <a:t>22</a:t>
+                      </a:r>
+                    </a:p>
+                  </a:txBody>
+                  <a:tcPr marL="9525" marR="9525" marT="9525" marB="0" anchor="ctr">
+                    <a:lnL w="12700" cap="flat" cmpd="sng" algn="ctr">
+                      <a:solidFill>
+                        <a:schemeClr val="tx1"/>
+                      </a:solidFill>
+                      <a:prstDash val="solid"/>
+                      <a:round/>
+                      <a:headEnd type="none" w="med" len="med"/>
+                      <a:tailEnd type="none" w="med" len="med"/>
+                    </a:lnL>
+                    <a:lnR w="12700" cap="flat" cmpd="sng" algn="ctr">
+                      <a:solidFill>
+                        <a:schemeClr val="tx1"/>
+                      </a:solidFill>
+                      <a:prstDash val="solid"/>
+                      <a:round/>
+                      <a:headEnd type="none" w="med" len="med"/>
+                      <a:tailEnd type="none" w="med" len="med"/>
+                    </a:lnR>
+                    <a:lnT w="12700" cap="flat" cmpd="sng" algn="ctr">
+                      <a:solidFill>
+                        <a:schemeClr val="tx1"/>
+                      </a:solidFill>
+                      <a:prstDash val="solid"/>
+                      <a:round/>
+                      <a:headEnd type="none" w="med" len="med"/>
+                      <a:tailEnd type="none" w="med" len="med"/>
+                    </a:lnT>
+                    <a:lnB w="12700" cap="flat" cmpd="sng" algn="ctr">
+                      <a:solidFill>
+                        <a:schemeClr val="tx1"/>
+                      </a:solidFill>
+                      <a:prstDash val="solid"/>
+                      <a:round/>
+                      <a:headEnd type="none" w="med" len="med"/>
+                      <a:tailEnd type="none" w="med" len="med"/>
+                    </a:lnB>
+                    <a:solidFill>
+                      <a:srgbClr val="FFFAEF"/>
+                    </a:solidFill>
+                  </a:tcPr>
+                </a:tc>
+                <a:extLst>
+                  <a:ext uri="{0D108BD9-81ED-4DB2-BD59-A6C34878D82A}">
+                    <a16:rowId xmlns:a16="http://schemas.microsoft.com/office/drawing/2014/main" val="3071198408"/>
+                  </a:ext>
+                </a:extLst>
+              </a:tr>
+              <a:tr h="439953">
+                <a:tc>
+                  <a:txBody>
+                    <a:bodyPr/>
+                    <a:lstStyle/>
+                    <a:p>
+                      <a:pPr algn="ctr" fontAlgn="b">
+                        <a:buNone/>
+                      </a:pPr>
+                      <a:r>
+                        <a:rPr lang="it-IT" sz="2000" b="1" u="none" strike="noStrike" dirty="0">
+                          <a:effectLst/>
+                        </a:rPr>
+                        <a:t>Marco Piro</a:t>
+                      </a:r>
+                      <a:endParaRPr lang="it-IT" sz="2000" b="1" i="0" u="none" strike="noStrike" dirty="0">
+                        <a:solidFill>
+                          <a:srgbClr val="000000"/>
+                        </a:solidFill>
+                        <a:effectLst/>
+                        <a:latin typeface="Calibri" panose="020F0502020204030204" pitchFamily="34" charset="0"/>
+                      </a:endParaRPr>
+                    </a:p>
+                  </a:txBody>
+                  <a:tcPr marL="9525" marR="9525" marT="9525" marB="0" anchor="ctr">
+                    <a:lnL w="12700" cap="flat" cmpd="sng" algn="ctr">
+                      <a:solidFill>
+                        <a:schemeClr val="tx1"/>
+                      </a:solidFill>
+                      <a:prstDash val="solid"/>
+                      <a:round/>
+                      <a:headEnd type="none" w="med" len="med"/>
+                      <a:tailEnd type="none" w="med" len="med"/>
+                    </a:lnL>
+                    <a:lnR w="12700" cap="flat" cmpd="sng" algn="ctr">
+                      <a:solidFill>
+                        <a:schemeClr val="tx1"/>
+                      </a:solidFill>
+                      <a:prstDash val="solid"/>
+                      <a:round/>
+                      <a:headEnd type="none" w="med" len="med"/>
+                      <a:tailEnd type="none" w="med" len="med"/>
+                    </a:lnR>
+                    <a:lnT w="12700" cap="flat" cmpd="sng" algn="ctr">
+                      <a:solidFill>
+                        <a:schemeClr val="tx1"/>
+                      </a:solidFill>
+                      <a:prstDash val="solid"/>
+                      <a:round/>
+                      <a:headEnd type="none" w="med" len="med"/>
+                      <a:tailEnd type="none" w="med" len="med"/>
+                    </a:lnT>
+                    <a:lnB w="12700" cap="flat" cmpd="sng" algn="ctr">
+                      <a:solidFill>
+                        <a:schemeClr val="tx1"/>
+                      </a:solidFill>
+                      <a:prstDash val="solid"/>
+                      <a:round/>
+                      <a:headEnd type="none" w="med" len="med"/>
+                      <a:tailEnd type="none" w="med" len="med"/>
+                    </a:lnB>
+                    <a:solidFill>
+                      <a:srgbClr val="FFFAEF"/>
+                    </a:solidFill>
+                  </a:tcPr>
+                </a:tc>
+                <a:tc>
+                  <a:txBody>
+                    <a:bodyPr/>
+                    <a:lstStyle/>
+                    <a:p>
+                      <a:pPr algn="ctr" fontAlgn="b">
+                        <a:buNone/>
+                      </a:pPr>
+                      <a:r>
+                        <a:rPr lang="it-IT" sz="2000" u="none" strike="noStrike" dirty="0">
+                          <a:effectLst/>
+                        </a:rPr>
+                        <a:t>5</a:t>
+                      </a:r>
+                      <a:endParaRPr lang="it-IT" sz="2000" b="0" i="0" u="none" strike="noStrike" dirty="0">
+                        <a:solidFill>
+                          <a:srgbClr val="000000"/>
+                        </a:solidFill>
+                        <a:effectLst/>
+                        <a:latin typeface="Calibri" panose="020F0502020204030204" pitchFamily="34" charset="0"/>
+                      </a:endParaRPr>
+                    </a:p>
+                  </a:txBody>
+                  <a:tcPr marL="9525" marR="9525" marT="9525" marB="0" anchor="ctr">
+                    <a:lnL w="12700" cap="flat" cmpd="sng" algn="ctr">
+                      <a:solidFill>
+                        <a:schemeClr val="tx1"/>
+                      </a:solidFill>
+                      <a:prstDash val="solid"/>
+                      <a:round/>
+                      <a:headEnd type="none" w="med" len="med"/>
+                      <a:tailEnd type="none" w="med" len="med"/>
+                    </a:lnL>
+                    <a:lnR w="12700" cap="flat" cmpd="sng" algn="ctr">
+                      <a:solidFill>
+                        <a:schemeClr val="tx1"/>
+                      </a:solidFill>
+                      <a:prstDash val="solid"/>
+                      <a:round/>
+                      <a:headEnd type="none" w="med" len="med"/>
+                      <a:tailEnd type="none" w="med" len="med"/>
+                    </a:lnR>
+                    <a:lnT w="12700" cap="flat" cmpd="sng" algn="ctr">
+                      <a:solidFill>
+                        <a:schemeClr val="tx1"/>
+                      </a:solidFill>
+                      <a:prstDash val="solid"/>
+                      <a:round/>
+                      <a:headEnd type="none" w="med" len="med"/>
+                      <a:tailEnd type="none" w="med" len="med"/>
+                    </a:lnT>
+                    <a:lnB w="12700" cap="flat" cmpd="sng" algn="ctr">
+                      <a:solidFill>
+                        <a:schemeClr val="tx1"/>
+                      </a:solidFill>
+                      <a:prstDash val="solid"/>
+                      <a:round/>
+                      <a:headEnd type="none" w="med" len="med"/>
+                      <a:tailEnd type="none" w="med" len="med"/>
+                    </a:lnB>
+                    <a:solidFill>
+                      <a:srgbClr val="FFFAEF"/>
+                    </a:solidFill>
+                  </a:tcPr>
+                </a:tc>
+                <a:tc>
+                  <a:txBody>
+                    <a:bodyPr/>
+                    <a:lstStyle/>
+                    <a:p>
+                      <a:pPr algn="ctr" fontAlgn="b">
+                        <a:buNone/>
+                      </a:pPr>
+                      <a:r>
+                        <a:rPr lang="it-IT" sz="2000" u="none" strike="noStrike" dirty="0">
+                          <a:effectLst/>
+                        </a:rPr>
+                        <a:t>2</a:t>
+                      </a:r>
+                      <a:endParaRPr lang="it-IT" sz="2000" b="0" i="0" u="none" strike="noStrike" dirty="0">
+                        <a:solidFill>
+                          <a:srgbClr val="000000"/>
+                        </a:solidFill>
+                        <a:effectLst/>
+                        <a:latin typeface="Calibri" panose="020F0502020204030204" pitchFamily="34" charset="0"/>
+                      </a:endParaRPr>
+                    </a:p>
+                  </a:txBody>
+                  <a:tcPr marL="9525" marR="9525" marT="9525" marB="0" anchor="ctr">
+                    <a:lnL w="12700" cap="flat" cmpd="sng" algn="ctr">
+                      <a:solidFill>
+                        <a:schemeClr val="tx1"/>
+                      </a:solidFill>
+                      <a:prstDash val="solid"/>
+                      <a:round/>
+                      <a:headEnd type="none" w="med" len="med"/>
+                      <a:tailEnd type="none" w="med" len="med"/>
+                    </a:lnL>
+                    <a:lnR w="12700" cap="flat" cmpd="sng" algn="ctr">
+                      <a:solidFill>
+                        <a:schemeClr val="tx1"/>
+                      </a:solidFill>
+                      <a:prstDash val="solid"/>
+                      <a:round/>
+                      <a:headEnd type="none" w="med" len="med"/>
+                      <a:tailEnd type="none" w="med" len="med"/>
+                    </a:lnR>
+                    <a:lnT w="12700" cap="flat" cmpd="sng" algn="ctr">
+                      <a:solidFill>
+                        <a:schemeClr val="tx1"/>
+                      </a:solidFill>
+                      <a:prstDash val="solid"/>
+                      <a:round/>
+                      <a:headEnd type="none" w="med" len="med"/>
+                      <a:tailEnd type="none" w="med" len="med"/>
+                    </a:lnT>
+                    <a:lnB w="12700" cap="flat" cmpd="sng" algn="ctr">
+                      <a:solidFill>
+                        <a:schemeClr val="tx1"/>
+                      </a:solidFill>
+                      <a:prstDash val="solid"/>
+                      <a:round/>
+                      <a:headEnd type="none" w="med" len="med"/>
+                      <a:tailEnd type="none" w="med" len="med"/>
+                    </a:lnB>
+                    <a:solidFill>
+                      <a:srgbClr val="FFFAEF"/>
+                    </a:solidFill>
+                  </a:tcPr>
+                </a:tc>
+                <a:tc>
+                  <a:txBody>
+                    <a:bodyPr/>
+                    <a:lstStyle/>
+                    <a:p>
+                      <a:pPr algn="ctr" fontAlgn="b">
+                        <a:buNone/>
+                      </a:pPr>
+                      <a:r>
+                        <a:rPr lang="it-IT" sz="2000" u="none" strike="noStrike" dirty="0">
+                          <a:effectLst/>
+                        </a:rPr>
+                        <a:t>5</a:t>
+                      </a:r>
+                      <a:endParaRPr lang="it-IT" sz="2000" b="0" i="0" u="none" strike="noStrike" dirty="0">
+                        <a:solidFill>
+                          <a:srgbClr val="000000"/>
+                        </a:solidFill>
+                        <a:effectLst/>
+                        <a:latin typeface="Calibri" panose="020F0502020204030204" pitchFamily="34" charset="0"/>
+                      </a:endParaRPr>
+                    </a:p>
+                  </a:txBody>
+                  <a:tcPr marL="9525" marR="9525" marT="9525" marB="0" anchor="ctr">
+                    <a:lnL w="12700" cap="flat" cmpd="sng" algn="ctr">
+                      <a:solidFill>
+                        <a:schemeClr val="tx1"/>
+                      </a:solidFill>
+                      <a:prstDash val="solid"/>
+                      <a:round/>
+                      <a:headEnd type="none" w="med" len="med"/>
+                      <a:tailEnd type="none" w="med" len="med"/>
+                    </a:lnL>
+                    <a:lnR w="12700" cap="flat" cmpd="sng" algn="ctr">
+                      <a:solidFill>
+                        <a:schemeClr val="tx1"/>
+                      </a:solidFill>
+                      <a:prstDash val="solid"/>
+                      <a:round/>
+                      <a:headEnd type="none" w="med" len="med"/>
+                      <a:tailEnd type="none" w="med" len="med"/>
+                    </a:lnR>
+                    <a:lnT w="12700" cap="flat" cmpd="sng" algn="ctr">
+                      <a:solidFill>
+                        <a:schemeClr val="tx1"/>
+                      </a:solidFill>
+                      <a:prstDash val="solid"/>
+                      <a:round/>
+                      <a:headEnd type="none" w="med" len="med"/>
+                      <a:tailEnd type="none" w="med" len="med"/>
+                    </a:lnT>
+                    <a:lnB w="12700" cap="flat" cmpd="sng" algn="ctr">
+                      <a:solidFill>
+                        <a:schemeClr val="tx1"/>
+                      </a:solidFill>
+                      <a:prstDash val="solid"/>
+                      <a:round/>
+                      <a:headEnd type="none" w="med" len="med"/>
+                      <a:tailEnd type="none" w="med" len="med"/>
+                    </a:lnB>
+                    <a:solidFill>
+                      <a:srgbClr val="FFFAEF"/>
+                    </a:solidFill>
+                  </a:tcPr>
+                </a:tc>
+                <a:tc>
+                  <a:txBody>
+                    <a:bodyPr/>
+                    <a:lstStyle/>
+                    <a:p>
+                      <a:pPr algn="ctr" fontAlgn="b">
+                        <a:buNone/>
+                      </a:pPr>
+                      <a:r>
+                        <a:rPr lang="it-IT" sz="2000" u="none" strike="noStrike" dirty="0">
+                          <a:effectLst/>
+                        </a:rPr>
+                        <a:t>0</a:t>
+                      </a:r>
+                      <a:endParaRPr lang="it-IT" sz="2000" b="0" i="0" u="none" strike="noStrike" dirty="0">
+                        <a:solidFill>
+                          <a:srgbClr val="000000"/>
+                        </a:solidFill>
+                        <a:effectLst/>
+                        <a:latin typeface="Calibri" panose="020F0502020204030204" pitchFamily="34" charset="0"/>
+                      </a:endParaRPr>
+                    </a:p>
+                  </a:txBody>
+                  <a:tcPr marL="9525" marR="9525" marT="9525" marB="0" anchor="ctr">
+                    <a:lnL w="12700" cap="flat" cmpd="sng" algn="ctr">
+                      <a:solidFill>
+                        <a:schemeClr val="tx1"/>
+                      </a:solidFill>
+                      <a:prstDash val="solid"/>
+                      <a:round/>
+                      <a:headEnd type="none" w="med" len="med"/>
+                      <a:tailEnd type="none" w="med" len="med"/>
+                    </a:lnL>
+                    <a:lnR w="12700" cap="flat" cmpd="sng" algn="ctr">
+                      <a:solidFill>
+                        <a:schemeClr val="tx1"/>
+                      </a:solidFill>
+                      <a:prstDash val="solid"/>
+                      <a:round/>
+                      <a:headEnd type="none" w="med" len="med"/>
+                      <a:tailEnd type="none" w="med" len="med"/>
+                    </a:lnR>
+                    <a:lnT w="12700" cap="flat" cmpd="sng" algn="ctr">
+                      <a:solidFill>
+                        <a:schemeClr val="tx1"/>
+                      </a:solidFill>
+                      <a:prstDash val="solid"/>
+                      <a:round/>
+                      <a:headEnd type="none" w="med" len="med"/>
+                      <a:tailEnd type="none" w="med" len="med"/>
+                    </a:lnT>
+                    <a:lnB w="12700" cap="flat" cmpd="sng" algn="ctr">
+                      <a:solidFill>
+                        <a:schemeClr val="tx1"/>
+                      </a:solidFill>
+                      <a:prstDash val="solid"/>
+                      <a:round/>
+                      <a:headEnd type="none" w="med" len="med"/>
+                      <a:tailEnd type="none" w="med" len="med"/>
+                    </a:lnB>
+                    <a:solidFill>
+                      <a:srgbClr val="FFFAEF"/>
+                    </a:solidFill>
+                  </a:tcPr>
+                </a:tc>
+                <a:tc>
+                  <a:txBody>
+                    <a:bodyPr/>
+                    <a:lstStyle/>
+                    <a:p>
+                      <a:pPr algn="ctr" fontAlgn="b">
+                        <a:buNone/>
+                      </a:pPr>
+                      <a:r>
+                        <a:rPr lang="it-IT" sz="2000" u="none" strike="noStrike" dirty="0">
+                          <a:effectLst/>
+                        </a:rPr>
+                        <a:t>0</a:t>
+                      </a:r>
+                      <a:endParaRPr lang="it-IT" sz="2000" b="0" i="0" u="none" strike="noStrike" dirty="0">
+                        <a:solidFill>
+                          <a:srgbClr val="000000"/>
+                        </a:solidFill>
+                        <a:effectLst/>
+                        <a:latin typeface="Calibri" panose="020F0502020204030204" pitchFamily="34" charset="0"/>
+                      </a:endParaRPr>
+                    </a:p>
+                  </a:txBody>
+                  <a:tcPr marL="9525" marR="9525" marT="9525" marB="0" anchor="ctr">
+                    <a:lnL w="12700" cap="flat" cmpd="sng" algn="ctr">
+                      <a:solidFill>
+                        <a:schemeClr val="tx1"/>
+                      </a:solidFill>
+                      <a:prstDash val="solid"/>
+                      <a:round/>
+                      <a:headEnd type="none" w="med" len="med"/>
+                      <a:tailEnd type="none" w="med" len="med"/>
+                    </a:lnL>
+                    <a:lnR w="12700" cap="flat" cmpd="sng" algn="ctr">
+                      <a:solidFill>
+                        <a:schemeClr val="tx1"/>
+                      </a:solidFill>
+                      <a:prstDash val="solid"/>
+                      <a:round/>
+                      <a:headEnd type="none" w="med" len="med"/>
+                      <a:tailEnd type="none" w="med" len="med"/>
+                    </a:lnR>
+                    <a:lnT w="12700" cap="flat" cmpd="sng" algn="ctr">
+                      <a:solidFill>
+                        <a:schemeClr val="tx1"/>
+                      </a:solidFill>
+                      <a:prstDash val="solid"/>
+                      <a:round/>
+                      <a:headEnd type="none" w="med" len="med"/>
+                      <a:tailEnd type="none" w="med" len="med"/>
+                    </a:lnT>
+                    <a:lnB w="12700" cap="flat" cmpd="sng" algn="ctr">
+                      <a:solidFill>
+                        <a:schemeClr val="tx1"/>
+                      </a:solidFill>
+                      <a:prstDash val="solid"/>
+                      <a:round/>
+                      <a:headEnd type="none" w="med" len="med"/>
+                      <a:tailEnd type="none" w="med" len="med"/>
+                    </a:lnB>
+                    <a:solidFill>
+                      <a:srgbClr val="FFFAEF"/>
+                    </a:solidFill>
+                  </a:tcPr>
+                </a:tc>
+                <a:tc>
+                  <a:txBody>
+                    <a:bodyPr/>
+                    <a:lstStyle/>
+                    <a:p>
+                      <a:pPr algn="ctr" fontAlgn="b">
+                        <a:buNone/>
+                      </a:pPr>
+                      <a:r>
+                        <a:rPr lang="it-IT" sz="2000" u="none" strike="noStrike" dirty="0">
+                          <a:effectLst/>
+                        </a:rPr>
+                        <a:t>5</a:t>
+                      </a:r>
+                      <a:endParaRPr lang="it-IT" sz="2000" b="0" i="0" u="none" strike="noStrike" dirty="0">
+                        <a:solidFill>
+                          <a:srgbClr val="000000"/>
+                        </a:solidFill>
+                        <a:effectLst/>
+                        <a:latin typeface="Calibri" panose="020F0502020204030204" pitchFamily="34" charset="0"/>
+                      </a:endParaRPr>
+                    </a:p>
+                  </a:txBody>
+                  <a:tcPr marL="9525" marR="9525" marT="9525" marB="0" anchor="ctr">
+                    <a:lnL w="12700" cap="flat" cmpd="sng" algn="ctr">
+                      <a:solidFill>
+                        <a:schemeClr val="tx1"/>
+                      </a:solidFill>
+                      <a:prstDash val="solid"/>
+                      <a:round/>
+                      <a:headEnd type="none" w="med" len="med"/>
+                      <a:tailEnd type="none" w="med" len="med"/>
+                    </a:lnL>
+                    <a:lnR w="12700" cap="flat" cmpd="sng" algn="ctr">
+                      <a:solidFill>
+                        <a:schemeClr val="tx1"/>
+                      </a:solidFill>
+                      <a:prstDash val="solid"/>
+                      <a:round/>
+                      <a:headEnd type="none" w="med" len="med"/>
+                      <a:tailEnd type="none" w="med" len="med"/>
+                    </a:lnR>
+                    <a:lnT w="12700" cap="flat" cmpd="sng" algn="ctr">
+                      <a:solidFill>
+                        <a:schemeClr val="tx1"/>
+                      </a:solidFill>
+                      <a:prstDash val="solid"/>
+                      <a:round/>
+                      <a:headEnd type="none" w="med" len="med"/>
+                      <a:tailEnd type="none" w="med" len="med"/>
+                    </a:lnT>
+                    <a:lnB w="12700" cap="flat" cmpd="sng" algn="ctr">
+                      <a:solidFill>
+                        <a:schemeClr val="tx1"/>
+                      </a:solidFill>
+                      <a:prstDash val="solid"/>
+                      <a:round/>
+                      <a:headEnd type="none" w="med" len="med"/>
+                      <a:tailEnd type="none" w="med" len="med"/>
+                    </a:lnB>
+                    <a:solidFill>
+                      <a:srgbClr val="FFFAEF"/>
+                    </a:solidFill>
+                  </a:tcPr>
+                </a:tc>
+                <a:tc>
+                  <a:txBody>
+                    <a:bodyPr/>
+                    <a:lstStyle/>
+                    <a:p>
+                      <a:pPr algn="ctr" fontAlgn="b">
+                        <a:buNone/>
+                      </a:pPr>
+                      <a:r>
+                        <a:rPr lang="it-IT" sz="2000" b="0" i="0" u="none" strike="noStrike" dirty="0">
+                          <a:solidFill>
+                            <a:srgbClr val="000000"/>
+                          </a:solidFill>
+                          <a:effectLst/>
+                          <a:latin typeface="Calibri" panose="020F0502020204030204" pitchFamily="34" charset="0"/>
+                        </a:rPr>
+                        <a:t>17</a:t>
+                      </a:r>
+                    </a:p>
+                  </a:txBody>
+                  <a:tcPr marL="9525" marR="9525" marT="9525" marB="0" anchor="ctr">
+                    <a:lnL w="12700" cap="flat" cmpd="sng" algn="ctr">
+                      <a:solidFill>
+                        <a:schemeClr val="tx1"/>
+                      </a:solidFill>
+                      <a:prstDash val="solid"/>
+                      <a:round/>
+                      <a:headEnd type="none" w="med" len="med"/>
+                      <a:tailEnd type="none" w="med" len="med"/>
+                    </a:lnL>
+                    <a:lnR w="12700" cap="flat" cmpd="sng" algn="ctr">
+                      <a:solidFill>
+                        <a:schemeClr val="tx1"/>
+                      </a:solidFill>
+                      <a:prstDash val="solid"/>
+                      <a:round/>
+                      <a:headEnd type="none" w="med" len="med"/>
+                      <a:tailEnd type="none" w="med" len="med"/>
+                    </a:lnR>
+                    <a:lnT w="12700" cap="flat" cmpd="sng" algn="ctr">
+                      <a:solidFill>
+                        <a:schemeClr val="tx1"/>
+                      </a:solidFill>
+                      <a:prstDash val="solid"/>
+                      <a:round/>
+                      <a:headEnd type="none" w="med" len="med"/>
+                      <a:tailEnd type="none" w="med" len="med"/>
+                    </a:lnT>
+                    <a:lnB w="12700" cap="flat" cmpd="sng" algn="ctr">
+                      <a:solidFill>
+                        <a:schemeClr val="tx1"/>
+                      </a:solidFill>
+                      <a:prstDash val="solid"/>
+                      <a:round/>
+                      <a:headEnd type="none" w="med" len="med"/>
+                      <a:tailEnd type="none" w="med" len="med"/>
+                    </a:lnB>
+                    <a:solidFill>
+                      <a:srgbClr val="FFFAEF"/>
+                    </a:solidFill>
+                  </a:tcPr>
+                </a:tc>
+                <a:extLst>
+                  <a:ext uri="{0D108BD9-81ED-4DB2-BD59-A6C34878D82A}">
+                    <a16:rowId xmlns:a16="http://schemas.microsoft.com/office/drawing/2014/main" val="3847518722"/>
+                  </a:ext>
+                </a:extLst>
+              </a:tr>
+              <a:tr h="234493">
+                <a:tc>
+                  <a:txBody>
+                    <a:bodyPr/>
+                    <a:lstStyle/>
+                    <a:p>
+                      <a:pPr algn="ctr" fontAlgn="b">
+                        <a:buNone/>
+                      </a:pPr>
+                      <a:r>
+                        <a:rPr lang="it-IT" sz="2000" b="1" u="none" strike="noStrike" dirty="0" err="1">
+                          <a:effectLst/>
+                        </a:rPr>
+                        <a:t>Linor</a:t>
+                      </a:r>
+                      <a:r>
+                        <a:rPr lang="it-IT" sz="2000" b="1" u="none" strike="noStrike" dirty="0">
+                          <a:effectLst/>
+                        </a:rPr>
+                        <a:t> </a:t>
+                      </a:r>
+                      <a:r>
+                        <a:rPr lang="it-IT" sz="2000" b="1" u="none" strike="noStrike" dirty="0" err="1">
+                          <a:effectLst/>
+                        </a:rPr>
+                        <a:t>Sadè</a:t>
+                      </a:r>
+                      <a:endParaRPr lang="it-IT" sz="2000" b="1" i="0" u="none" strike="noStrike" dirty="0">
+                        <a:solidFill>
+                          <a:srgbClr val="000000"/>
+                        </a:solidFill>
+                        <a:effectLst/>
+                        <a:latin typeface="Calibri" panose="020F0502020204030204" pitchFamily="34" charset="0"/>
+                      </a:endParaRPr>
+                    </a:p>
+                  </a:txBody>
+                  <a:tcPr marL="9525" marR="9525" marT="9525" marB="0" anchor="ctr">
+                    <a:lnL w="12700" cap="flat" cmpd="sng" algn="ctr">
+                      <a:solidFill>
+                        <a:schemeClr val="tx1"/>
+                      </a:solidFill>
+                      <a:prstDash val="solid"/>
+                      <a:round/>
+                      <a:headEnd type="none" w="med" len="med"/>
+                      <a:tailEnd type="none" w="med" len="med"/>
+                    </a:lnL>
+                    <a:lnR w="12700" cap="flat" cmpd="sng" algn="ctr">
+                      <a:solidFill>
+                        <a:schemeClr val="tx1"/>
+                      </a:solidFill>
+                      <a:prstDash val="solid"/>
+                      <a:round/>
+                      <a:headEnd type="none" w="med" len="med"/>
+                      <a:tailEnd type="none" w="med" len="med"/>
+                    </a:lnR>
+                    <a:lnT w="12700" cap="flat" cmpd="sng" algn="ctr">
+                      <a:solidFill>
+                        <a:schemeClr val="tx1"/>
+                      </a:solidFill>
+                      <a:prstDash val="solid"/>
+                      <a:round/>
+                      <a:headEnd type="none" w="med" len="med"/>
+                      <a:tailEnd type="none" w="med" len="med"/>
+                    </a:lnT>
+                    <a:lnB w="12700" cap="flat" cmpd="sng" algn="ctr">
+                      <a:solidFill>
+                        <a:schemeClr val="tx1"/>
+                      </a:solidFill>
+                      <a:prstDash val="solid"/>
+                      <a:round/>
+                      <a:headEnd type="none" w="med" len="med"/>
+                      <a:tailEnd type="none" w="med" len="med"/>
+                    </a:lnB>
+                    <a:solidFill>
+                      <a:srgbClr val="FFFAEF"/>
+                    </a:solidFill>
+                  </a:tcPr>
+                </a:tc>
+                <a:tc>
+                  <a:txBody>
+                    <a:bodyPr/>
+                    <a:lstStyle/>
+                    <a:p>
+                      <a:pPr algn="ctr" fontAlgn="b">
+                        <a:buNone/>
+                      </a:pPr>
+                      <a:r>
+                        <a:rPr lang="it-IT" sz="2000" u="none" strike="noStrike">
+                          <a:effectLst/>
+                        </a:rPr>
+                        <a:t>0</a:t>
+                      </a:r>
+                      <a:endParaRPr lang="it-IT" sz="2000" b="0" i="0" u="none" strike="noStrike">
+                        <a:solidFill>
+                          <a:srgbClr val="000000"/>
+                        </a:solidFill>
+                        <a:effectLst/>
+                        <a:latin typeface="Calibri" panose="020F0502020204030204" pitchFamily="34" charset="0"/>
+                      </a:endParaRPr>
+                    </a:p>
+                  </a:txBody>
+                  <a:tcPr marL="9525" marR="9525" marT="9525" marB="0" anchor="ctr">
+                    <a:lnL w="12700" cap="flat" cmpd="sng" algn="ctr">
+                      <a:solidFill>
+                        <a:schemeClr val="tx1"/>
+                      </a:solidFill>
+                      <a:prstDash val="solid"/>
+                      <a:round/>
+                      <a:headEnd type="none" w="med" len="med"/>
+                      <a:tailEnd type="none" w="med" len="med"/>
+                    </a:lnL>
+                    <a:lnR w="12700" cap="flat" cmpd="sng" algn="ctr">
+                      <a:solidFill>
+                        <a:schemeClr val="tx1"/>
+                      </a:solidFill>
+                      <a:prstDash val="solid"/>
+                      <a:round/>
+                      <a:headEnd type="none" w="med" len="med"/>
+                      <a:tailEnd type="none" w="med" len="med"/>
+                    </a:lnR>
+                    <a:lnT w="12700" cap="flat" cmpd="sng" algn="ctr">
+                      <a:solidFill>
+                        <a:schemeClr val="tx1"/>
+                      </a:solidFill>
+                      <a:prstDash val="solid"/>
+                      <a:round/>
+                      <a:headEnd type="none" w="med" len="med"/>
+                      <a:tailEnd type="none" w="med" len="med"/>
+                    </a:lnT>
+                    <a:lnB w="12700" cap="flat" cmpd="sng" algn="ctr">
+                      <a:solidFill>
+                        <a:schemeClr val="tx1"/>
+                      </a:solidFill>
+                      <a:prstDash val="solid"/>
+                      <a:round/>
+                      <a:headEnd type="none" w="med" len="med"/>
+                      <a:tailEnd type="none" w="med" len="med"/>
+                    </a:lnB>
+                    <a:solidFill>
+                      <a:srgbClr val="FFFAEF"/>
+                    </a:solidFill>
+                  </a:tcPr>
+                </a:tc>
+                <a:tc>
+                  <a:txBody>
+                    <a:bodyPr/>
+                    <a:lstStyle/>
+                    <a:p>
+                      <a:pPr algn="ctr" fontAlgn="b">
+                        <a:buNone/>
+                      </a:pPr>
+                      <a:r>
+                        <a:rPr lang="it-IT" sz="2000" b="0" i="0" u="none" strike="noStrike" dirty="0">
+                          <a:solidFill>
+                            <a:srgbClr val="000000"/>
+                          </a:solidFill>
+                          <a:effectLst/>
+                          <a:latin typeface="Calibri" panose="020F0502020204030204" pitchFamily="34" charset="0"/>
+                        </a:rPr>
+                        <a:t>4</a:t>
+                      </a:r>
+                    </a:p>
+                  </a:txBody>
+                  <a:tcPr marL="9525" marR="9525" marT="9525" marB="0" anchor="ctr">
+                    <a:lnL w="12700" cap="flat" cmpd="sng" algn="ctr">
+                      <a:solidFill>
+                        <a:schemeClr val="tx1"/>
+                      </a:solidFill>
+                      <a:prstDash val="solid"/>
+                      <a:round/>
+                      <a:headEnd type="none" w="med" len="med"/>
+                      <a:tailEnd type="none" w="med" len="med"/>
+                    </a:lnL>
+                    <a:lnR w="12700" cap="flat" cmpd="sng" algn="ctr">
+                      <a:solidFill>
+                        <a:schemeClr val="tx1"/>
+                      </a:solidFill>
+                      <a:prstDash val="solid"/>
+                      <a:round/>
+                      <a:headEnd type="none" w="med" len="med"/>
+                      <a:tailEnd type="none" w="med" len="med"/>
+                    </a:lnR>
+                    <a:lnT w="12700" cap="flat" cmpd="sng" algn="ctr">
+                      <a:solidFill>
+                        <a:schemeClr val="tx1"/>
+                      </a:solidFill>
+                      <a:prstDash val="solid"/>
+                      <a:round/>
+                      <a:headEnd type="none" w="med" len="med"/>
+                      <a:tailEnd type="none" w="med" len="med"/>
+                    </a:lnT>
+                    <a:lnB w="12700" cap="flat" cmpd="sng" algn="ctr">
+                      <a:solidFill>
+                        <a:schemeClr val="tx1"/>
+                      </a:solidFill>
+                      <a:prstDash val="solid"/>
+                      <a:round/>
+                      <a:headEnd type="none" w="med" len="med"/>
+                      <a:tailEnd type="none" w="med" len="med"/>
+                    </a:lnB>
+                    <a:solidFill>
+                      <a:srgbClr val="FFFAEF"/>
+                    </a:solidFill>
+                  </a:tcPr>
+                </a:tc>
+                <a:tc>
+                  <a:txBody>
+                    <a:bodyPr/>
+                    <a:lstStyle/>
+                    <a:p>
+                      <a:pPr algn="ctr" fontAlgn="b">
+                        <a:buNone/>
+                      </a:pPr>
+                      <a:r>
+                        <a:rPr lang="it-IT" sz="2000" u="none" strike="noStrike" dirty="0">
+                          <a:effectLst/>
+                        </a:rPr>
+                        <a:t>5</a:t>
+                      </a:r>
+                      <a:endParaRPr lang="it-IT" sz="2000" b="0" i="0" u="none" strike="noStrike" dirty="0">
+                        <a:solidFill>
+                          <a:srgbClr val="000000"/>
+                        </a:solidFill>
+                        <a:effectLst/>
+                        <a:latin typeface="Calibri" panose="020F0502020204030204" pitchFamily="34" charset="0"/>
+                      </a:endParaRPr>
+                    </a:p>
+                  </a:txBody>
+                  <a:tcPr marL="9525" marR="9525" marT="9525" marB="0" anchor="ctr">
+                    <a:lnL w="12700" cap="flat" cmpd="sng" algn="ctr">
+                      <a:solidFill>
+                        <a:schemeClr val="tx1"/>
+                      </a:solidFill>
+                      <a:prstDash val="solid"/>
+                      <a:round/>
+                      <a:headEnd type="none" w="med" len="med"/>
+                      <a:tailEnd type="none" w="med" len="med"/>
+                    </a:lnL>
+                    <a:lnR w="12700" cap="flat" cmpd="sng" algn="ctr">
+                      <a:solidFill>
+                        <a:schemeClr val="tx1"/>
+                      </a:solidFill>
+                      <a:prstDash val="solid"/>
+                      <a:round/>
+                      <a:headEnd type="none" w="med" len="med"/>
+                      <a:tailEnd type="none" w="med" len="med"/>
+                    </a:lnR>
+                    <a:lnT w="12700" cap="flat" cmpd="sng" algn="ctr">
+                      <a:solidFill>
+                        <a:schemeClr val="tx1"/>
+                      </a:solidFill>
+                      <a:prstDash val="solid"/>
+                      <a:round/>
+                      <a:headEnd type="none" w="med" len="med"/>
+                      <a:tailEnd type="none" w="med" len="med"/>
+                    </a:lnT>
+                    <a:lnB w="12700" cap="flat" cmpd="sng" algn="ctr">
+                      <a:solidFill>
+                        <a:schemeClr val="tx1"/>
+                      </a:solidFill>
+                      <a:prstDash val="solid"/>
+                      <a:round/>
+                      <a:headEnd type="none" w="med" len="med"/>
+                      <a:tailEnd type="none" w="med" len="med"/>
+                    </a:lnB>
+                    <a:solidFill>
+                      <a:srgbClr val="FFFAEF"/>
+                    </a:solidFill>
+                  </a:tcPr>
+                </a:tc>
+                <a:tc>
+                  <a:txBody>
+                    <a:bodyPr/>
+                    <a:lstStyle/>
+                    <a:p>
+                      <a:pPr algn="ctr" fontAlgn="b">
+                        <a:buNone/>
+                      </a:pPr>
+                      <a:r>
+                        <a:rPr lang="it-IT" sz="2000" u="none" strike="noStrike" dirty="0">
+                          <a:effectLst/>
+                        </a:rPr>
+                        <a:t>7</a:t>
+                      </a:r>
+                      <a:endParaRPr lang="it-IT" sz="2000" b="0" i="0" u="none" strike="noStrike" dirty="0">
+                        <a:solidFill>
+                          <a:srgbClr val="000000"/>
+                        </a:solidFill>
+                        <a:effectLst/>
+                        <a:latin typeface="Calibri" panose="020F0502020204030204" pitchFamily="34" charset="0"/>
+                      </a:endParaRPr>
+                    </a:p>
+                  </a:txBody>
+                  <a:tcPr marL="9525" marR="9525" marT="9525" marB="0" anchor="ctr">
+                    <a:lnL w="12700" cap="flat" cmpd="sng" algn="ctr">
+                      <a:solidFill>
+                        <a:schemeClr val="tx1"/>
+                      </a:solidFill>
+                      <a:prstDash val="solid"/>
+                      <a:round/>
+                      <a:headEnd type="none" w="med" len="med"/>
+                      <a:tailEnd type="none" w="med" len="med"/>
+                    </a:lnL>
+                    <a:lnR w="12700" cap="flat" cmpd="sng" algn="ctr">
+                      <a:solidFill>
+                        <a:schemeClr val="tx1"/>
+                      </a:solidFill>
+                      <a:prstDash val="solid"/>
+                      <a:round/>
+                      <a:headEnd type="none" w="med" len="med"/>
+                      <a:tailEnd type="none" w="med" len="med"/>
+                    </a:lnR>
+                    <a:lnT w="12700" cap="flat" cmpd="sng" algn="ctr">
+                      <a:solidFill>
+                        <a:schemeClr val="tx1"/>
+                      </a:solidFill>
+                      <a:prstDash val="solid"/>
+                      <a:round/>
+                      <a:headEnd type="none" w="med" len="med"/>
+                      <a:tailEnd type="none" w="med" len="med"/>
+                    </a:lnT>
+                    <a:lnB w="12700" cap="flat" cmpd="sng" algn="ctr">
+                      <a:solidFill>
+                        <a:schemeClr val="tx1"/>
+                      </a:solidFill>
+                      <a:prstDash val="solid"/>
+                      <a:round/>
+                      <a:headEnd type="none" w="med" len="med"/>
+                      <a:tailEnd type="none" w="med" len="med"/>
+                    </a:lnB>
+                    <a:solidFill>
+                      <a:srgbClr val="FFFAEF"/>
+                    </a:solidFill>
+                  </a:tcPr>
+                </a:tc>
+                <a:tc>
+                  <a:txBody>
+                    <a:bodyPr/>
+                    <a:lstStyle/>
+                    <a:p>
+                      <a:pPr algn="ctr" fontAlgn="b">
+                        <a:buNone/>
+                      </a:pPr>
+                      <a:r>
+                        <a:rPr lang="it-IT" sz="2000" u="none" strike="noStrike">
+                          <a:effectLst/>
+                        </a:rPr>
+                        <a:t>0</a:t>
+                      </a:r>
+                      <a:endParaRPr lang="it-IT" sz="2000" b="0" i="0" u="none" strike="noStrike">
+                        <a:solidFill>
+                          <a:srgbClr val="000000"/>
+                        </a:solidFill>
+                        <a:effectLst/>
+                        <a:latin typeface="Calibri" panose="020F0502020204030204" pitchFamily="34" charset="0"/>
+                      </a:endParaRPr>
+                    </a:p>
+                  </a:txBody>
+                  <a:tcPr marL="9525" marR="9525" marT="9525" marB="0" anchor="ctr">
+                    <a:lnL w="12700" cap="flat" cmpd="sng" algn="ctr">
+                      <a:solidFill>
+                        <a:schemeClr val="tx1"/>
+                      </a:solidFill>
+                      <a:prstDash val="solid"/>
+                      <a:round/>
+                      <a:headEnd type="none" w="med" len="med"/>
+                      <a:tailEnd type="none" w="med" len="med"/>
+                    </a:lnL>
+                    <a:lnR w="12700" cap="flat" cmpd="sng" algn="ctr">
+                      <a:solidFill>
+                        <a:schemeClr val="tx1"/>
+                      </a:solidFill>
+                      <a:prstDash val="solid"/>
+                      <a:round/>
+                      <a:headEnd type="none" w="med" len="med"/>
+                      <a:tailEnd type="none" w="med" len="med"/>
+                    </a:lnR>
+                    <a:lnT w="12700" cap="flat" cmpd="sng" algn="ctr">
+                      <a:solidFill>
+                        <a:schemeClr val="tx1"/>
+                      </a:solidFill>
+                      <a:prstDash val="solid"/>
+                      <a:round/>
+                      <a:headEnd type="none" w="med" len="med"/>
+                      <a:tailEnd type="none" w="med" len="med"/>
+                    </a:lnT>
+                    <a:lnB w="12700" cap="flat" cmpd="sng" algn="ctr">
+                      <a:solidFill>
+                        <a:schemeClr val="tx1"/>
+                      </a:solidFill>
+                      <a:prstDash val="solid"/>
+                      <a:round/>
+                      <a:headEnd type="none" w="med" len="med"/>
+                      <a:tailEnd type="none" w="med" len="med"/>
+                    </a:lnB>
+                    <a:solidFill>
+                      <a:srgbClr val="FFFAEF"/>
+                    </a:solidFill>
+                  </a:tcPr>
+                </a:tc>
+                <a:tc>
+                  <a:txBody>
+                    <a:bodyPr/>
+                    <a:lstStyle/>
+                    <a:p>
+                      <a:pPr algn="ctr" fontAlgn="b">
+                        <a:buNone/>
+                      </a:pPr>
+                      <a:r>
+                        <a:rPr lang="it-IT" sz="2000" u="none" strike="noStrike" dirty="0">
+                          <a:effectLst/>
+                        </a:rPr>
+                        <a:t>7</a:t>
+                      </a:r>
+                      <a:endParaRPr lang="it-IT" sz="2000" b="0" i="0" u="none" strike="noStrike" dirty="0">
+                        <a:solidFill>
+                          <a:srgbClr val="000000"/>
+                        </a:solidFill>
+                        <a:effectLst/>
+                        <a:latin typeface="Calibri" panose="020F0502020204030204" pitchFamily="34" charset="0"/>
+                      </a:endParaRPr>
+                    </a:p>
+                  </a:txBody>
+                  <a:tcPr marL="9525" marR="9525" marT="9525" marB="0" anchor="ctr">
+                    <a:lnL w="12700" cap="flat" cmpd="sng" algn="ctr">
+                      <a:solidFill>
+                        <a:schemeClr val="tx1"/>
+                      </a:solidFill>
+                      <a:prstDash val="solid"/>
+                      <a:round/>
+                      <a:headEnd type="none" w="med" len="med"/>
+                      <a:tailEnd type="none" w="med" len="med"/>
+                    </a:lnL>
+                    <a:lnR w="12700" cap="flat" cmpd="sng" algn="ctr">
+                      <a:solidFill>
+                        <a:schemeClr val="tx1"/>
+                      </a:solidFill>
+                      <a:prstDash val="solid"/>
+                      <a:round/>
+                      <a:headEnd type="none" w="med" len="med"/>
+                      <a:tailEnd type="none" w="med" len="med"/>
+                    </a:lnR>
+                    <a:lnT w="12700" cap="flat" cmpd="sng" algn="ctr">
+                      <a:solidFill>
+                        <a:schemeClr val="tx1"/>
+                      </a:solidFill>
+                      <a:prstDash val="solid"/>
+                      <a:round/>
+                      <a:headEnd type="none" w="med" len="med"/>
+                      <a:tailEnd type="none" w="med" len="med"/>
+                    </a:lnT>
+                    <a:lnB w="12700" cap="flat" cmpd="sng" algn="ctr">
+                      <a:solidFill>
+                        <a:schemeClr val="tx1"/>
+                      </a:solidFill>
+                      <a:prstDash val="solid"/>
+                      <a:round/>
+                      <a:headEnd type="none" w="med" len="med"/>
+                      <a:tailEnd type="none" w="med" len="med"/>
+                    </a:lnB>
+                    <a:solidFill>
+                      <a:srgbClr val="FFFAEF"/>
+                    </a:solidFill>
+                  </a:tcPr>
+                </a:tc>
+                <a:tc>
+                  <a:txBody>
+                    <a:bodyPr/>
+                    <a:lstStyle/>
+                    <a:p>
+                      <a:pPr algn="ctr" fontAlgn="b">
+                        <a:buNone/>
+                      </a:pPr>
+                      <a:r>
+                        <a:rPr lang="it-IT" sz="2000" b="0" i="0" u="none" strike="noStrike" dirty="0">
+                          <a:solidFill>
+                            <a:srgbClr val="000000"/>
+                          </a:solidFill>
+                          <a:effectLst/>
+                          <a:latin typeface="Calibri" panose="020F0502020204030204" pitchFamily="34" charset="0"/>
+                        </a:rPr>
+                        <a:t>23</a:t>
+                      </a:r>
+                    </a:p>
+                  </a:txBody>
+                  <a:tcPr marL="9525" marR="9525" marT="9525" marB="0" anchor="ctr">
+                    <a:lnL w="12700" cap="flat" cmpd="sng" algn="ctr">
+                      <a:solidFill>
+                        <a:schemeClr val="tx1"/>
+                      </a:solidFill>
+                      <a:prstDash val="solid"/>
+                      <a:round/>
+                      <a:headEnd type="none" w="med" len="med"/>
+                      <a:tailEnd type="none" w="med" len="med"/>
+                    </a:lnL>
+                    <a:lnR w="12700" cap="flat" cmpd="sng" algn="ctr">
+                      <a:solidFill>
+                        <a:schemeClr val="tx1"/>
+                      </a:solidFill>
+                      <a:prstDash val="solid"/>
+                      <a:round/>
+                      <a:headEnd type="none" w="med" len="med"/>
+                      <a:tailEnd type="none" w="med" len="med"/>
+                    </a:lnR>
+                    <a:lnT w="12700" cap="flat" cmpd="sng" algn="ctr">
+                      <a:solidFill>
+                        <a:schemeClr val="tx1"/>
+                      </a:solidFill>
+                      <a:prstDash val="solid"/>
+                      <a:round/>
+                      <a:headEnd type="none" w="med" len="med"/>
+                      <a:tailEnd type="none" w="med" len="med"/>
+                    </a:lnT>
+                    <a:lnB w="12700" cap="flat" cmpd="sng" algn="ctr">
+                      <a:solidFill>
+                        <a:schemeClr val="tx1"/>
+                      </a:solidFill>
+                      <a:prstDash val="solid"/>
+                      <a:round/>
+                      <a:headEnd type="none" w="med" len="med"/>
+                      <a:tailEnd type="none" w="med" len="med"/>
+                    </a:lnB>
+                    <a:solidFill>
+                      <a:srgbClr val="FFFAEF"/>
+                    </a:solidFill>
+                  </a:tcPr>
+                </a:tc>
+                <a:extLst>
+                  <a:ext uri="{0D108BD9-81ED-4DB2-BD59-A6C34878D82A}">
+                    <a16:rowId xmlns:a16="http://schemas.microsoft.com/office/drawing/2014/main" val="3249415534"/>
+                  </a:ext>
+                </a:extLst>
+              </a:tr>
+              <a:tr h="439953">
+                <a:tc>
+                  <a:txBody>
+                    <a:bodyPr/>
+                    <a:lstStyle/>
+                    <a:p>
+                      <a:pPr algn="ctr" fontAlgn="b">
+                        <a:buNone/>
+                      </a:pPr>
+                      <a:r>
+                        <a:rPr lang="it-IT" sz="2000" b="1" u="none" strike="noStrike" dirty="0">
+                          <a:effectLst/>
+                        </a:rPr>
+                        <a:t>Leonardo Salviato</a:t>
+                      </a:r>
+                      <a:endParaRPr lang="it-IT" sz="2000" b="1" i="0" u="none" strike="noStrike" dirty="0">
+                        <a:solidFill>
+                          <a:srgbClr val="000000"/>
+                        </a:solidFill>
+                        <a:effectLst/>
+                        <a:latin typeface="Calibri" panose="020F0502020204030204" pitchFamily="34" charset="0"/>
+                      </a:endParaRPr>
+                    </a:p>
+                  </a:txBody>
+                  <a:tcPr marL="9525" marR="9525" marT="9525" marB="0" anchor="ctr">
+                    <a:lnL w="12700" cap="flat" cmpd="sng" algn="ctr">
+                      <a:solidFill>
+                        <a:schemeClr val="tx1"/>
+                      </a:solidFill>
+                      <a:prstDash val="solid"/>
+                      <a:round/>
+                      <a:headEnd type="none" w="med" len="med"/>
+                      <a:tailEnd type="none" w="med" len="med"/>
+                    </a:lnL>
+                    <a:lnR w="12700" cap="flat" cmpd="sng" algn="ctr">
+                      <a:solidFill>
+                        <a:schemeClr val="tx1"/>
+                      </a:solidFill>
+                      <a:prstDash val="solid"/>
+                      <a:round/>
+                      <a:headEnd type="none" w="med" len="med"/>
+                      <a:tailEnd type="none" w="med" len="med"/>
+                    </a:lnR>
+                    <a:lnT w="12700" cap="flat" cmpd="sng" algn="ctr">
+                      <a:solidFill>
+                        <a:schemeClr val="tx1"/>
+                      </a:solidFill>
+                      <a:prstDash val="solid"/>
+                      <a:round/>
+                      <a:headEnd type="none" w="med" len="med"/>
+                      <a:tailEnd type="none" w="med" len="med"/>
+                    </a:lnT>
+                    <a:lnB w="12700" cap="flat" cmpd="sng" algn="ctr">
+                      <a:solidFill>
+                        <a:schemeClr val="tx1"/>
+                      </a:solidFill>
+                      <a:prstDash val="solid"/>
+                      <a:round/>
+                      <a:headEnd type="none" w="med" len="med"/>
+                      <a:tailEnd type="none" w="med" len="med"/>
+                    </a:lnB>
+                    <a:solidFill>
+                      <a:srgbClr val="FFFAEF"/>
+                    </a:solidFill>
+                  </a:tcPr>
+                </a:tc>
+                <a:tc>
+                  <a:txBody>
+                    <a:bodyPr/>
+                    <a:lstStyle/>
+                    <a:p>
+                      <a:pPr algn="ctr" fontAlgn="b">
+                        <a:buNone/>
+                      </a:pPr>
+                      <a:r>
+                        <a:rPr lang="it-IT" sz="2000" u="none" strike="noStrike">
+                          <a:effectLst/>
+                        </a:rPr>
+                        <a:t>0</a:t>
+                      </a:r>
+                      <a:endParaRPr lang="it-IT" sz="2000" b="0" i="0" u="none" strike="noStrike">
+                        <a:solidFill>
+                          <a:srgbClr val="000000"/>
+                        </a:solidFill>
+                        <a:effectLst/>
+                        <a:latin typeface="Calibri" panose="020F0502020204030204" pitchFamily="34" charset="0"/>
+                      </a:endParaRPr>
+                    </a:p>
+                  </a:txBody>
+                  <a:tcPr marL="9525" marR="9525" marT="9525" marB="0" anchor="ctr">
+                    <a:lnL w="12700" cap="flat" cmpd="sng" algn="ctr">
+                      <a:solidFill>
+                        <a:schemeClr val="tx1"/>
+                      </a:solidFill>
+                      <a:prstDash val="solid"/>
+                      <a:round/>
+                      <a:headEnd type="none" w="med" len="med"/>
+                      <a:tailEnd type="none" w="med" len="med"/>
+                    </a:lnL>
+                    <a:lnR w="12700" cap="flat" cmpd="sng" algn="ctr">
+                      <a:solidFill>
+                        <a:schemeClr val="tx1"/>
+                      </a:solidFill>
+                      <a:prstDash val="solid"/>
+                      <a:round/>
+                      <a:headEnd type="none" w="med" len="med"/>
+                      <a:tailEnd type="none" w="med" len="med"/>
+                    </a:lnR>
+                    <a:lnT w="12700" cap="flat" cmpd="sng" algn="ctr">
+                      <a:solidFill>
+                        <a:schemeClr val="tx1"/>
+                      </a:solidFill>
+                      <a:prstDash val="solid"/>
+                      <a:round/>
+                      <a:headEnd type="none" w="med" len="med"/>
+                      <a:tailEnd type="none" w="med" len="med"/>
+                    </a:lnT>
+                    <a:lnB w="12700" cap="flat" cmpd="sng" algn="ctr">
+                      <a:solidFill>
+                        <a:schemeClr val="tx1"/>
+                      </a:solidFill>
+                      <a:prstDash val="solid"/>
+                      <a:round/>
+                      <a:headEnd type="none" w="med" len="med"/>
+                      <a:tailEnd type="none" w="med" len="med"/>
+                    </a:lnB>
+                    <a:solidFill>
+                      <a:srgbClr val="FFFAEF"/>
+                    </a:solidFill>
+                  </a:tcPr>
+                </a:tc>
+                <a:tc>
+                  <a:txBody>
+                    <a:bodyPr/>
+                    <a:lstStyle/>
+                    <a:p>
+                      <a:pPr algn="ctr" fontAlgn="b">
+                        <a:buNone/>
+                      </a:pPr>
+                      <a:r>
+                        <a:rPr lang="it-IT" sz="2000" u="none" strike="noStrike" dirty="0">
+                          <a:effectLst/>
+                        </a:rPr>
+                        <a:t>0</a:t>
+                      </a:r>
+                      <a:endParaRPr lang="it-IT" sz="2000" b="0" i="0" u="none" strike="noStrike" dirty="0">
+                        <a:solidFill>
+                          <a:srgbClr val="000000"/>
+                        </a:solidFill>
+                        <a:effectLst/>
+                        <a:latin typeface="Calibri" panose="020F0502020204030204" pitchFamily="34" charset="0"/>
+                      </a:endParaRPr>
+                    </a:p>
+                  </a:txBody>
+                  <a:tcPr marL="9525" marR="9525" marT="9525" marB="0" anchor="ctr">
+                    <a:lnL w="12700" cap="flat" cmpd="sng" algn="ctr">
+                      <a:solidFill>
+                        <a:schemeClr val="tx1"/>
+                      </a:solidFill>
+                      <a:prstDash val="solid"/>
+                      <a:round/>
+                      <a:headEnd type="none" w="med" len="med"/>
+                      <a:tailEnd type="none" w="med" len="med"/>
+                    </a:lnL>
+                    <a:lnR w="12700" cap="flat" cmpd="sng" algn="ctr">
+                      <a:solidFill>
+                        <a:schemeClr val="tx1"/>
+                      </a:solidFill>
+                      <a:prstDash val="solid"/>
+                      <a:round/>
+                      <a:headEnd type="none" w="med" len="med"/>
+                      <a:tailEnd type="none" w="med" len="med"/>
+                    </a:lnR>
+                    <a:lnT w="12700" cap="flat" cmpd="sng" algn="ctr">
+                      <a:solidFill>
+                        <a:schemeClr val="tx1"/>
+                      </a:solidFill>
+                      <a:prstDash val="solid"/>
+                      <a:round/>
+                      <a:headEnd type="none" w="med" len="med"/>
+                      <a:tailEnd type="none" w="med" len="med"/>
+                    </a:lnT>
+                    <a:lnB w="12700" cap="flat" cmpd="sng" algn="ctr">
+                      <a:solidFill>
+                        <a:schemeClr val="tx1"/>
+                      </a:solidFill>
+                      <a:prstDash val="solid"/>
+                      <a:round/>
+                      <a:headEnd type="none" w="med" len="med"/>
+                      <a:tailEnd type="none" w="med" len="med"/>
+                    </a:lnB>
+                    <a:solidFill>
+                      <a:srgbClr val="FFFAEF"/>
+                    </a:solidFill>
+                  </a:tcPr>
+                </a:tc>
+                <a:tc>
+                  <a:txBody>
+                    <a:bodyPr/>
+                    <a:lstStyle/>
+                    <a:p>
+                      <a:pPr algn="ctr" fontAlgn="b">
+                        <a:buNone/>
+                      </a:pPr>
+                      <a:r>
+                        <a:rPr lang="it-IT" sz="2000" u="none" strike="noStrike" dirty="0">
+                          <a:effectLst/>
+                        </a:rPr>
+                        <a:t>9</a:t>
+                      </a:r>
+                      <a:endParaRPr lang="it-IT" sz="2000" b="0" i="0" u="none" strike="noStrike" dirty="0">
+                        <a:solidFill>
+                          <a:srgbClr val="000000"/>
+                        </a:solidFill>
+                        <a:effectLst/>
+                        <a:latin typeface="Calibri" panose="020F0502020204030204" pitchFamily="34" charset="0"/>
+                      </a:endParaRPr>
+                    </a:p>
+                  </a:txBody>
+                  <a:tcPr marL="9525" marR="9525" marT="9525" marB="0" anchor="ctr">
+                    <a:lnL w="12700" cap="flat" cmpd="sng" algn="ctr">
+                      <a:solidFill>
+                        <a:schemeClr val="tx1"/>
+                      </a:solidFill>
+                      <a:prstDash val="solid"/>
+                      <a:round/>
+                      <a:headEnd type="none" w="med" len="med"/>
+                      <a:tailEnd type="none" w="med" len="med"/>
+                    </a:lnL>
+                    <a:lnR w="12700" cap="flat" cmpd="sng" algn="ctr">
+                      <a:solidFill>
+                        <a:schemeClr val="tx1"/>
+                      </a:solidFill>
+                      <a:prstDash val="solid"/>
+                      <a:round/>
+                      <a:headEnd type="none" w="med" len="med"/>
+                      <a:tailEnd type="none" w="med" len="med"/>
+                    </a:lnR>
+                    <a:lnT w="12700" cap="flat" cmpd="sng" algn="ctr">
+                      <a:solidFill>
+                        <a:schemeClr val="tx1"/>
+                      </a:solidFill>
+                      <a:prstDash val="solid"/>
+                      <a:round/>
+                      <a:headEnd type="none" w="med" len="med"/>
+                      <a:tailEnd type="none" w="med" len="med"/>
+                    </a:lnT>
+                    <a:lnB w="12700" cap="flat" cmpd="sng" algn="ctr">
+                      <a:solidFill>
+                        <a:schemeClr val="tx1"/>
+                      </a:solidFill>
+                      <a:prstDash val="solid"/>
+                      <a:round/>
+                      <a:headEnd type="none" w="med" len="med"/>
+                      <a:tailEnd type="none" w="med" len="med"/>
+                    </a:lnB>
+                    <a:solidFill>
+                      <a:srgbClr val="FFFAEF"/>
+                    </a:solidFill>
+                  </a:tcPr>
+                </a:tc>
+                <a:tc>
+                  <a:txBody>
+                    <a:bodyPr/>
+                    <a:lstStyle/>
+                    <a:p>
+                      <a:pPr algn="ctr" fontAlgn="b">
+                        <a:buNone/>
+                      </a:pPr>
+                      <a:r>
+                        <a:rPr lang="it-IT" sz="2000" u="none" strike="noStrike" dirty="0">
+                          <a:effectLst/>
+                        </a:rPr>
+                        <a:t>13</a:t>
+                      </a:r>
+                      <a:endParaRPr lang="it-IT" sz="2000" b="0" i="0" u="none" strike="noStrike" dirty="0">
+                        <a:solidFill>
+                          <a:srgbClr val="000000"/>
+                        </a:solidFill>
+                        <a:effectLst/>
+                        <a:latin typeface="Calibri" panose="020F0502020204030204" pitchFamily="34" charset="0"/>
+                      </a:endParaRPr>
+                    </a:p>
+                  </a:txBody>
+                  <a:tcPr marL="9525" marR="9525" marT="9525" marB="0" anchor="ctr">
+                    <a:lnL w="12700" cap="flat" cmpd="sng" algn="ctr">
+                      <a:solidFill>
+                        <a:schemeClr val="tx1"/>
+                      </a:solidFill>
+                      <a:prstDash val="solid"/>
+                      <a:round/>
+                      <a:headEnd type="none" w="med" len="med"/>
+                      <a:tailEnd type="none" w="med" len="med"/>
+                    </a:lnL>
+                    <a:lnR w="12700" cap="flat" cmpd="sng" algn="ctr">
+                      <a:solidFill>
+                        <a:schemeClr val="tx1"/>
+                      </a:solidFill>
+                      <a:prstDash val="solid"/>
+                      <a:round/>
+                      <a:headEnd type="none" w="med" len="med"/>
+                      <a:tailEnd type="none" w="med" len="med"/>
+                    </a:lnR>
+                    <a:lnT w="12700" cap="flat" cmpd="sng" algn="ctr">
+                      <a:solidFill>
+                        <a:schemeClr val="tx1"/>
+                      </a:solidFill>
+                      <a:prstDash val="solid"/>
+                      <a:round/>
+                      <a:headEnd type="none" w="med" len="med"/>
+                      <a:tailEnd type="none" w="med" len="med"/>
+                    </a:lnT>
+                    <a:lnB w="12700" cap="flat" cmpd="sng" algn="ctr">
+                      <a:solidFill>
+                        <a:schemeClr val="tx1"/>
+                      </a:solidFill>
+                      <a:prstDash val="solid"/>
+                      <a:round/>
+                      <a:headEnd type="none" w="med" len="med"/>
+                      <a:tailEnd type="none" w="med" len="med"/>
+                    </a:lnB>
+                    <a:solidFill>
+                      <a:srgbClr val="FFFAEF"/>
+                    </a:solidFill>
+                  </a:tcPr>
+                </a:tc>
+                <a:tc>
+                  <a:txBody>
+                    <a:bodyPr/>
+                    <a:lstStyle/>
+                    <a:p>
+                      <a:pPr algn="ctr" fontAlgn="b">
+                        <a:buNone/>
+                      </a:pPr>
+                      <a:r>
+                        <a:rPr lang="it-IT" sz="2000" u="none" strike="noStrike" dirty="0">
+                          <a:effectLst/>
+                        </a:rPr>
+                        <a:t>0</a:t>
+                      </a:r>
+                      <a:endParaRPr lang="it-IT" sz="2000" b="0" i="0" u="none" strike="noStrike" dirty="0">
+                        <a:solidFill>
+                          <a:srgbClr val="000000"/>
+                        </a:solidFill>
+                        <a:effectLst/>
+                        <a:latin typeface="Calibri" panose="020F0502020204030204" pitchFamily="34" charset="0"/>
+                      </a:endParaRPr>
+                    </a:p>
+                  </a:txBody>
+                  <a:tcPr marL="9525" marR="9525" marT="9525" marB="0" anchor="ctr">
+                    <a:lnL w="12700" cap="flat" cmpd="sng" algn="ctr">
+                      <a:solidFill>
+                        <a:schemeClr val="tx1"/>
+                      </a:solidFill>
+                      <a:prstDash val="solid"/>
+                      <a:round/>
+                      <a:headEnd type="none" w="med" len="med"/>
+                      <a:tailEnd type="none" w="med" len="med"/>
+                    </a:lnL>
+                    <a:lnR w="12700" cap="flat" cmpd="sng" algn="ctr">
+                      <a:solidFill>
+                        <a:schemeClr val="tx1"/>
+                      </a:solidFill>
+                      <a:prstDash val="solid"/>
+                      <a:round/>
+                      <a:headEnd type="none" w="med" len="med"/>
+                      <a:tailEnd type="none" w="med" len="med"/>
+                    </a:lnR>
+                    <a:lnT w="12700" cap="flat" cmpd="sng" algn="ctr">
+                      <a:solidFill>
+                        <a:schemeClr val="tx1"/>
+                      </a:solidFill>
+                      <a:prstDash val="solid"/>
+                      <a:round/>
+                      <a:headEnd type="none" w="med" len="med"/>
+                      <a:tailEnd type="none" w="med" len="med"/>
+                    </a:lnT>
+                    <a:lnB w="12700" cap="flat" cmpd="sng" algn="ctr">
+                      <a:solidFill>
+                        <a:schemeClr val="tx1"/>
+                      </a:solidFill>
+                      <a:prstDash val="solid"/>
+                      <a:round/>
+                      <a:headEnd type="none" w="med" len="med"/>
+                      <a:tailEnd type="none" w="med" len="med"/>
+                    </a:lnB>
+                    <a:solidFill>
+                      <a:srgbClr val="FFFAEF"/>
+                    </a:solidFill>
+                  </a:tcPr>
+                </a:tc>
+                <a:tc>
+                  <a:txBody>
+                    <a:bodyPr/>
+                    <a:lstStyle/>
+                    <a:p>
+                      <a:pPr algn="ctr" fontAlgn="b">
+                        <a:buNone/>
+                      </a:pPr>
+                      <a:r>
+                        <a:rPr lang="it-IT" sz="2000" u="none" strike="noStrike">
+                          <a:effectLst/>
+                        </a:rPr>
+                        <a:t>6</a:t>
+                      </a:r>
+                      <a:endParaRPr lang="it-IT" sz="2000" b="0" i="0" u="none" strike="noStrike">
+                        <a:solidFill>
+                          <a:srgbClr val="000000"/>
+                        </a:solidFill>
+                        <a:effectLst/>
+                        <a:latin typeface="Calibri" panose="020F0502020204030204" pitchFamily="34" charset="0"/>
+                      </a:endParaRPr>
+                    </a:p>
+                  </a:txBody>
+                  <a:tcPr marL="9525" marR="9525" marT="9525" marB="0" anchor="ctr">
+                    <a:lnL w="12700" cap="flat" cmpd="sng" algn="ctr">
+                      <a:solidFill>
+                        <a:schemeClr val="tx1"/>
+                      </a:solidFill>
+                      <a:prstDash val="solid"/>
+                      <a:round/>
+                      <a:headEnd type="none" w="med" len="med"/>
+                      <a:tailEnd type="none" w="med" len="med"/>
+                    </a:lnL>
+                    <a:lnR w="12700" cap="flat" cmpd="sng" algn="ctr">
+                      <a:solidFill>
+                        <a:schemeClr val="tx1"/>
+                      </a:solidFill>
+                      <a:prstDash val="solid"/>
+                      <a:round/>
+                      <a:headEnd type="none" w="med" len="med"/>
+                      <a:tailEnd type="none" w="med" len="med"/>
+                    </a:lnR>
+                    <a:lnT w="12700" cap="flat" cmpd="sng" algn="ctr">
+                      <a:solidFill>
+                        <a:schemeClr val="tx1"/>
+                      </a:solidFill>
+                      <a:prstDash val="solid"/>
+                      <a:round/>
+                      <a:headEnd type="none" w="med" len="med"/>
+                      <a:tailEnd type="none" w="med" len="med"/>
+                    </a:lnT>
+                    <a:lnB w="12700" cap="flat" cmpd="sng" algn="ctr">
+                      <a:solidFill>
+                        <a:schemeClr val="tx1"/>
+                      </a:solidFill>
+                      <a:prstDash val="solid"/>
+                      <a:round/>
+                      <a:headEnd type="none" w="med" len="med"/>
+                      <a:tailEnd type="none" w="med" len="med"/>
+                    </a:lnB>
+                    <a:solidFill>
+                      <a:srgbClr val="FFFAEF"/>
+                    </a:solidFill>
+                  </a:tcPr>
+                </a:tc>
+                <a:tc>
+                  <a:txBody>
+                    <a:bodyPr/>
+                    <a:lstStyle/>
+                    <a:p>
+                      <a:pPr algn="ctr" fontAlgn="b">
+                        <a:buNone/>
+                      </a:pPr>
+                      <a:r>
+                        <a:rPr lang="it-IT" sz="2000" b="0" i="0" u="none" strike="noStrike" dirty="0">
+                          <a:solidFill>
+                            <a:srgbClr val="000000"/>
+                          </a:solidFill>
+                          <a:effectLst/>
+                          <a:latin typeface="Calibri" panose="020F0502020204030204" pitchFamily="34" charset="0"/>
+                        </a:rPr>
+                        <a:t>28</a:t>
+                      </a:r>
+                    </a:p>
+                  </a:txBody>
+                  <a:tcPr marL="9525" marR="9525" marT="9525" marB="0" anchor="ctr">
+                    <a:lnL w="12700" cap="flat" cmpd="sng" algn="ctr">
+                      <a:solidFill>
+                        <a:schemeClr val="tx1"/>
+                      </a:solidFill>
+                      <a:prstDash val="solid"/>
+                      <a:round/>
+                      <a:headEnd type="none" w="med" len="med"/>
+                      <a:tailEnd type="none" w="med" len="med"/>
+                    </a:lnL>
+                    <a:lnR w="12700" cap="flat" cmpd="sng" algn="ctr">
+                      <a:solidFill>
+                        <a:schemeClr val="tx1"/>
+                      </a:solidFill>
+                      <a:prstDash val="solid"/>
+                      <a:round/>
+                      <a:headEnd type="none" w="med" len="med"/>
+                      <a:tailEnd type="none" w="med" len="med"/>
+                    </a:lnR>
+                    <a:lnT w="12700" cap="flat" cmpd="sng" algn="ctr">
+                      <a:solidFill>
+                        <a:schemeClr val="tx1"/>
+                      </a:solidFill>
+                      <a:prstDash val="solid"/>
+                      <a:round/>
+                      <a:headEnd type="none" w="med" len="med"/>
+                      <a:tailEnd type="none" w="med" len="med"/>
+                    </a:lnT>
+                    <a:lnB w="12700" cap="flat" cmpd="sng" algn="ctr">
+                      <a:solidFill>
+                        <a:schemeClr val="tx1"/>
+                      </a:solidFill>
+                      <a:prstDash val="solid"/>
+                      <a:round/>
+                      <a:headEnd type="none" w="med" len="med"/>
+                      <a:tailEnd type="none" w="med" len="med"/>
+                    </a:lnB>
+                    <a:solidFill>
+                      <a:srgbClr val="FFFAEF"/>
+                    </a:solidFill>
+                  </a:tcPr>
+                </a:tc>
+                <a:extLst>
+                  <a:ext uri="{0D108BD9-81ED-4DB2-BD59-A6C34878D82A}">
+                    <a16:rowId xmlns:a16="http://schemas.microsoft.com/office/drawing/2014/main" val="650264963"/>
+                  </a:ext>
+                </a:extLst>
+              </a:tr>
+              <a:tr h="439953">
+                <a:tc>
+                  <a:txBody>
+                    <a:bodyPr/>
+                    <a:lstStyle/>
+                    <a:p>
+                      <a:pPr algn="ctr" fontAlgn="b">
+                        <a:buNone/>
+                      </a:pPr>
+                      <a:r>
+                        <a:rPr lang="it-IT" sz="2000" b="1" u="none" strike="noStrike" dirty="0">
+                          <a:effectLst/>
+                        </a:rPr>
+                        <a:t>Luca Slongo</a:t>
+                      </a:r>
+                      <a:endParaRPr lang="it-IT" sz="2000" b="1" i="0" u="none" strike="noStrike" dirty="0">
+                        <a:solidFill>
+                          <a:srgbClr val="000000"/>
+                        </a:solidFill>
+                        <a:effectLst/>
+                        <a:latin typeface="Calibri" panose="020F0502020204030204" pitchFamily="34" charset="0"/>
+                      </a:endParaRPr>
+                    </a:p>
+                  </a:txBody>
+                  <a:tcPr marL="9525" marR="9525" marT="9525" marB="0" anchor="ctr">
+                    <a:lnL w="12700" cap="flat" cmpd="sng" algn="ctr">
+                      <a:solidFill>
+                        <a:schemeClr val="tx1"/>
+                      </a:solidFill>
+                      <a:prstDash val="solid"/>
+                      <a:round/>
+                      <a:headEnd type="none" w="med" len="med"/>
+                      <a:tailEnd type="none" w="med" len="med"/>
+                    </a:lnL>
+                    <a:lnR w="12700" cap="flat" cmpd="sng" algn="ctr">
+                      <a:solidFill>
+                        <a:schemeClr val="tx1"/>
+                      </a:solidFill>
+                      <a:prstDash val="solid"/>
+                      <a:round/>
+                      <a:headEnd type="none" w="med" len="med"/>
+                      <a:tailEnd type="none" w="med" len="med"/>
+                    </a:lnR>
+                    <a:lnT w="12700" cap="flat" cmpd="sng" algn="ctr">
+                      <a:solidFill>
+                        <a:schemeClr val="tx1"/>
+                      </a:solidFill>
+                      <a:prstDash val="solid"/>
+                      <a:round/>
+                      <a:headEnd type="none" w="med" len="med"/>
+                      <a:tailEnd type="none" w="med" len="med"/>
+                    </a:lnT>
+                    <a:lnB w="12700" cap="flat" cmpd="sng" algn="ctr">
+                      <a:solidFill>
+                        <a:schemeClr val="tx1"/>
+                      </a:solidFill>
+                      <a:prstDash val="solid"/>
+                      <a:round/>
+                      <a:headEnd type="none" w="med" len="med"/>
+                      <a:tailEnd type="none" w="med" len="med"/>
+                    </a:lnB>
+                    <a:solidFill>
+                      <a:srgbClr val="FFFAEF"/>
+                    </a:solidFill>
+                  </a:tcPr>
+                </a:tc>
+                <a:tc>
+                  <a:txBody>
+                    <a:bodyPr/>
+                    <a:lstStyle/>
+                    <a:p>
+                      <a:pPr algn="ctr" fontAlgn="b">
+                        <a:buNone/>
+                      </a:pPr>
+                      <a:r>
+                        <a:rPr lang="it-IT" sz="2000" u="none" strike="noStrike">
+                          <a:effectLst/>
+                        </a:rPr>
+                        <a:t>0</a:t>
+                      </a:r>
+                      <a:endParaRPr lang="it-IT" sz="2000" b="0" i="0" u="none" strike="noStrike">
+                        <a:solidFill>
+                          <a:srgbClr val="000000"/>
+                        </a:solidFill>
+                        <a:effectLst/>
+                        <a:latin typeface="Calibri" panose="020F0502020204030204" pitchFamily="34" charset="0"/>
+                      </a:endParaRPr>
+                    </a:p>
+                  </a:txBody>
+                  <a:tcPr marL="9525" marR="9525" marT="9525" marB="0" anchor="ctr">
+                    <a:lnL w="12700" cap="flat" cmpd="sng" algn="ctr">
+                      <a:solidFill>
+                        <a:schemeClr val="tx1"/>
+                      </a:solidFill>
+                      <a:prstDash val="solid"/>
+                      <a:round/>
+                      <a:headEnd type="none" w="med" len="med"/>
+                      <a:tailEnd type="none" w="med" len="med"/>
+                    </a:lnL>
+                    <a:lnR w="12700" cap="flat" cmpd="sng" algn="ctr">
+                      <a:solidFill>
+                        <a:schemeClr val="tx1"/>
+                      </a:solidFill>
+                      <a:prstDash val="solid"/>
+                      <a:round/>
+                      <a:headEnd type="none" w="med" len="med"/>
+                      <a:tailEnd type="none" w="med" len="med"/>
+                    </a:lnR>
+                    <a:lnT w="12700" cap="flat" cmpd="sng" algn="ctr">
+                      <a:solidFill>
+                        <a:schemeClr val="tx1"/>
+                      </a:solidFill>
+                      <a:prstDash val="solid"/>
+                      <a:round/>
+                      <a:headEnd type="none" w="med" len="med"/>
+                      <a:tailEnd type="none" w="med" len="med"/>
+                    </a:lnT>
+                    <a:lnB w="12700" cap="flat" cmpd="sng" algn="ctr">
+                      <a:solidFill>
+                        <a:schemeClr val="tx1"/>
+                      </a:solidFill>
+                      <a:prstDash val="solid"/>
+                      <a:round/>
+                      <a:headEnd type="none" w="med" len="med"/>
+                      <a:tailEnd type="none" w="med" len="med"/>
+                    </a:lnB>
+                    <a:solidFill>
+                      <a:srgbClr val="FFFAEF"/>
+                    </a:solidFill>
+                  </a:tcPr>
+                </a:tc>
+                <a:tc>
+                  <a:txBody>
+                    <a:bodyPr/>
+                    <a:lstStyle/>
+                    <a:p>
+                      <a:pPr algn="ctr" fontAlgn="b">
+                        <a:buNone/>
+                      </a:pPr>
+                      <a:r>
+                        <a:rPr lang="it-IT" sz="2000" u="none" strike="noStrike">
+                          <a:effectLst/>
+                        </a:rPr>
+                        <a:t>0</a:t>
+                      </a:r>
+                      <a:endParaRPr lang="it-IT" sz="2000" b="0" i="0" u="none" strike="noStrike">
+                        <a:solidFill>
+                          <a:srgbClr val="000000"/>
+                        </a:solidFill>
+                        <a:effectLst/>
+                        <a:latin typeface="Calibri" panose="020F0502020204030204" pitchFamily="34" charset="0"/>
+                      </a:endParaRPr>
+                    </a:p>
+                  </a:txBody>
+                  <a:tcPr marL="9525" marR="9525" marT="9525" marB="0" anchor="ctr">
+                    <a:lnL w="12700" cap="flat" cmpd="sng" algn="ctr">
+                      <a:solidFill>
+                        <a:schemeClr val="tx1"/>
+                      </a:solidFill>
+                      <a:prstDash val="solid"/>
+                      <a:round/>
+                      <a:headEnd type="none" w="med" len="med"/>
+                      <a:tailEnd type="none" w="med" len="med"/>
+                    </a:lnL>
+                    <a:lnR w="12700" cap="flat" cmpd="sng" algn="ctr">
+                      <a:solidFill>
+                        <a:schemeClr val="tx1"/>
+                      </a:solidFill>
+                      <a:prstDash val="solid"/>
+                      <a:round/>
+                      <a:headEnd type="none" w="med" len="med"/>
+                      <a:tailEnd type="none" w="med" len="med"/>
+                    </a:lnR>
+                    <a:lnT w="12700" cap="flat" cmpd="sng" algn="ctr">
+                      <a:solidFill>
+                        <a:schemeClr val="tx1"/>
+                      </a:solidFill>
+                      <a:prstDash val="solid"/>
+                      <a:round/>
+                      <a:headEnd type="none" w="med" len="med"/>
+                      <a:tailEnd type="none" w="med" len="med"/>
+                    </a:lnT>
+                    <a:lnB w="12700" cap="flat" cmpd="sng" algn="ctr">
+                      <a:solidFill>
+                        <a:schemeClr val="tx1"/>
+                      </a:solidFill>
+                      <a:prstDash val="solid"/>
+                      <a:round/>
+                      <a:headEnd type="none" w="med" len="med"/>
+                      <a:tailEnd type="none" w="med" len="med"/>
+                    </a:lnB>
+                    <a:solidFill>
+                      <a:srgbClr val="FFFAEF"/>
+                    </a:solidFill>
+                  </a:tcPr>
+                </a:tc>
+                <a:tc>
+                  <a:txBody>
+                    <a:bodyPr/>
+                    <a:lstStyle/>
+                    <a:p>
+                      <a:pPr algn="ctr" fontAlgn="b">
+                        <a:buNone/>
+                      </a:pPr>
+                      <a:r>
+                        <a:rPr lang="it-IT" sz="2000" u="none" strike="noStrike" dirty="0">
+                          <a:effectLst/>
+                        </a:rPr>
+                        <a:t>4</a:t>
+                      </a:r>
+                      <a:endParaRPr lang="it-IT" sz="2000" b="0" i="0" u="none" strike="noStrike" dirty="0">
+                        <a:solidFill>
+                          <a:srgbClr val="000000"/>
+                        </a:solidFill>
+                        <a:effectLst/>
+                        <a:latin typeface="Calibri" panose="020F0502020204030204" pitchFamily="34" charset="0"/>
+                      </a:endParaRPr>
+                    </a:p>
+                  </a:txBody>
+                  <a:tcPr marL="9525" marR="9525" marT="9525" marB="0" anchor="ctr">
+                    <a:lnL w="12700" cap="flat" cmpd="sng" algn="ctr">
+                      <a:solidFill>
+                        <a:schemeClr val="tx1"/>
+                      </a:solidFill>
+                      <a:prstDash val="solid"/>
+                      <a:round/>
+                      <a:headEnd type="none" w="med" len="med"/>
+                      <a:tailEnd type="none" w="med" len="med"/>
+                    </a:lnL>
+                    <a:lnR w="12700" cap="flat" cmpd="sng" algn="ctr">
+                      <a:solidFill>
+                        <a:schemeClr val="tx1"/>
+                      </a:solidFill>
+                      <a:prstDash val="solid"/>
+                      <a:round/>
+                      <a:headEnd type="none" w="med" len="med"/>
+                      <a:tailEnd type="none" w="med" len="med"/>
+                    </a:lnR>
+                    <a:lnT w="12700" cap="flat" cmpd="sng" algn="ctr">
+                      <a:solidFill>
+                        <a:schemeClr val="tx1"/>
+                      </a:solidFill>
+                      <a:prstDash val="solid"/>
+                      <a:round/>
+                      <a:headEnd type="none" w="med" len="med"/>
+                      <a:tailEnd type="none" w="med" len="med"/>
+                    </a:lnT>
+                    <a:lnB w="12700" cap="flat" cmpd="sng" algn="ctr">
+                      <a:solidFill>
+                        <a:schemeClr val="tx1"/>
+                      </a:solidFill>
+                      <a:prstDash val="solid"/>
+                      <a:round/>
+                      <a:headEnd type="none" w="med" len="med"/>
+                      <a:tailEnd type="none" w="med" len="med"/>
+                    </a:lnB>
+                    <a:solidFill>
+                      <a:srgbClr val="FFFAEF"/>
+                    </a:solidFill>
+                  </a:tcPr>
+                </a:tc>
+                <a:tc>
+                  <a:txBody>
+                    <a:bodyPr/>
+                    <a:lstStyle/>
+                    <a:p>
+                      <a:pPr algn="ctr" fontAlgn="b">
+                        <a:buNone/>
+                      </a:pPr>
+                      <a:r>
+                        <a:rPr lang="it-IT" sz="2000" u="none" strike="noStrike" dirty="0">
+                          <a:effectLst/>
+                        </a:rPr>
+                        <a:t>6</a:t>
+                      </a:r>
+                      <a:endParaRPr lang="it-IT" sz="2000" b="0" i="0" u="none" strike="noStrike" dirty="0">
+                        <a:solidFill>
+                          <a:srgbClr val="000000"/>
+                        </a:solidFill>
+                        <a:effectLst/>
+                        <a:latin typeface="Calibri" panose="020F0502020204030204" pitchFamily="34" charset="0"/>
+                      </a:endParaRPr>
+                    </a:p>
+                  </a:txBody>
+                  <a:tcPr marL="9525" marR="9525" marT="9525" marB="0" anchor="ctr">
+                    <a:lnL w="12700" cap="flat" cmpd="sng" algn="ctr">
+                      <a:solidFill>
+                        <a:schemeClr val="tx1"/>
+                      </a:solidFill>
+                      <a:prstDash val="solid"/>
+                      <a:round/>
+                      <a:headEnd type="none" w="med" len="med"/>
+                      <a:tailEnd type="none" w="med" len="med"/>
+                    </a:lnL>
+                    <a:lnR w="12700" cap="flat" cmpd="sng" algn="ctr">
+                      <a:solidFill>
+                        <a:schemeClr val="tx1"/>
+                      </a:solidFill>
+                      <a:prstDash val="solid"/>
+                      <a:round/>
+                      <a:headEnd type="none" w="med" len="med"/>
+                      <a:tailEnd type="none" w="med" len="med"/>
+                    </a:lnR>
+                    <a:lnT w="12700" cap="flat" cmpd="sng" algn="ctr">
+                      <a:solidFill>
+                        <a:schemeClr val="tx1"/>
+                      </a:solidFill>
+                      <a:prstDash val="solid"/>
+                      <a:round/>
+                      <a:headEnd type="none" w="med" len="med"/>
+                      <a:tailEnd type="none" w="med" len="med"/>
+                    </a:lnT>
+                    <a:lnB w="12700" cap="flat" cmpd="sng" algn="ctr">
+                      <a:solidFill>
+                        <a:schemeClr val="tx1"/>
+                      </a:solidFill>
+                      <a:prstDash val="solid"/>
+                      <a:round/>
+                      <a:headEnd type="none" w="med" len="med"/>
+                      <a:tailEnd type="none" w="med" len="med"/>
+                    </a:lnB>
+                    <a:solidFill>
+                      <a:srgbClr val="FFFAEF"/>
+                    </a:solidFill>
+                  </a:tcPr>
+                </a:tc>
+                <a:tc>
+                  <a:txBody>
+                    <a:bodyPr/>
+                    <a:lstStyle/>
+                    <a:p>
+                      <a:pPr algn="ctr" fontAlgn="b">
+                        <a:buNone/>
+                      </a:pPr>
+                      <a:r>
+                        <a:rPr lang="it-IT" sz="2000" u="none" strike="noStrike">
+                          <a:effectLst/>
+                        </a:rPr>
+                        <a:t>0</a:t>
+                      </a:r>
+                      <a:endParaRPr lang="it-IT" sz="2000" b="0" i="0" u="none" strike="noStrike">
+                        <a:solidFill>
+                          <a:srgbClr val="000000"/>
+                        </a:solidFill>
+                        <a:effectLst/>
+                        <a:latin typeface="Calibri" panose="020F0502020204030204" pitchFamily="34" charset="0"/>
+                      </a:endParaRPr>
+                    </a:p>
+                  </a:txBody>
+                  <a:tcPr marL="9525" marR="9525" marT="9525" marB="0" anchor="ctr">
+                    <a:lnL w="12700" cap="flat" cmpd="sng" algn="ctr">
+                      <a:solidFill>
+                        <a:schemeClr val="tx1"/>
+                      </a:solidFill>
+                      <a:prstDash val="solid"/>
+                      <a:round/>
+                      <a:headEnd type="none" w="med" len="med"/>
+                      <a:tailEnd type="none" w="med" len="med"/>
+                    </a:lnL>
+                    <a:lnR w="12700" cap="flat" cmpd="sng" algn="ctr">
+                      <a:solidFill>
+                        <a:schemeClr val="tx1"/>
+                      </a:solidFill>
+                      <a:prstDash val="solid"/>
+                      <a:round/>
+                      <a:headEnd type="none" w="med" len="med"/>
+                      <a:tailEnd type="none" w="med" len="med"/>
+                    </a:lnR>
+                    <a:lnT w="12700" cap="flat" cmpd="sng" algn="ctr">
+                      <a:solidFill>
+                        <a:schemeClr val="tx1"/>
+                      </a:solidFill>
+                      <a:prstDash val="solid"/>
+                      <a:round/>
+                      <a:headEnd type="none" w="med" len="med"/>
+                      <a:tailEnd type="none" w="med" len="med"/>
+                    </a:lnT>
+                    <a:lnB w="12700" cap="flat" cmpd="sng" algn="ctr">
+                      <a:solidFill>
+                        <a:schemeClr val="tx1"/>
+                      </a:solidFill>
+                      <a:prstDash val="solid"/>
+                      <a:round/>
+                      <a:headEnd type="none" w="med" len="med"/>
+                      <a:tailEnd type="none" w="med" len="med"/>
+                    </a:lnB>
+                    <a:solidFill>
+                      <a:srgbClr val="FFFAEF"/>
+                    </a:solidFill>
+                  </a:tcPr>
+                </a:tc>
+                <a:tc>
+                  <a:txBody>
+                    <a:bodyPr/>
+                    <a:lstStyle/>
+                    <a:p>
+                      <a:pPr algn="ctr" fontAlgn="b">
+                        <a:buNone/>
+                      </a:pPr>
+                      <a:r>
+                        <a:rPr lang="it-IT" sz="2000" u="none" strike="noStrike" dirty="0">
+                          <a:effectLst/>
+                        </a:rPr>
+                        <a:t>12</a:t>
+                      </a:r>
+                      <a:endParaRPr lang="it-IT" sz="2000" b="0" i="0" u="none" strike="noStrike" dirty="0">
+                        <a:solidFill>
+                          <a:srgbClr val="000000"/>
+                        </a:solidFill>
+                        <a:effectLst/>
+                        <a:latin typeface="Calibri" panose="020F0502020204030204" pitchFamily="34" charset="0"/>
+                      </a:endParaRPr>
+                    </a:p>
+                  </a:txBody>
+                  <a:tcPr marL="9525" marR="9525" marT="9525" marB="0" anchor="ctr">
+                    <a:lnL w="12700" cap="flat" cmpd="sng" algn="ctr">
+                      <a:solidFill>
+                        <a:schemeClr val="tx1"/>
+                      </a:solidFill>
+                      <a:prstDash val="solid"/>
+                      <a:round/>
+                      <a:headEnd type="none" w="med" len="med"/>
+                      <a:tailEnd type="none" w="med" len="med"/>
+                    </a:lnL>
+                    <a:lnR w="12700" cap="flat" cmpd="sng" algn="ctr">
+                      <a:solidFill>
+                        <a:schemeClr val="tx1"/>
+                      </a:solidFill>
+                      <a:prstDash val="solid"/>
+                      <a:round/>
+                      <a:headEnd type="none" w="med" len="med"/>
+                      <a:tailEnd type="none" w="med" len="med"/>
+                    </a:lnR>
+                    <a:lnT w="12700" cap="flat" cmpd="sng" algn="ctr">
+                      <a:solidFill>
+                        <a:schemeClr val="tx1"/>
+                      </a:solidFill>
+                      <a:prstDash val="solid"/>
+                      <a:round/>
+                      <a:headEnd type="none" w="med" len="med"/>
+                      <a:tailEnd type="none" w="med" len="med"/>
+                    </a:lnT>
+                    <a:lnB w="12700" cap="flat" cmpd="sng" algn="ctr">
+                      <a:solidFill>
+                        <a:schemeClr val="tx1"/>
+                      </a:solidFill>
+                      <a:prstDash val="solid"/>
+                      <a:round/>
+                      <a:headEnd type="none" w="med" len="med"/>
+                      <a:tailEnd type="none" w="med" len="med"/>
+                    </a:lnB>
+                    <a:solidFill>
+                      <a:srgbClr val="FFFAEF"/>
+                    </a:solidFill>
+                  </a:tcPr>
+                </a:tc>
+                <a:tc>
+                  <a:txBody>
+                    <a:bodyPr/>
+                    <a:lstStyle/>
+                    <a:p>
+                      <a:pPr algn="ctr" fontAlgn="b">
+                        <a:buNone/>
+                      </a:pPr>
+                      <a:r>
+                        <a:rPr lang="it-IT" sz="2000" b="0" i="0" u="none" strike="noStrike">
+                          <a:solidFill>
+                            <a:srgbClr val="000000"/>
+                          </a:solidFill>
+                          <a:effectLst/>
+                          <a:latin typeface="Calibri" panose="020F0502020204030204" pitchFamily="34" charset="0"/>
+                        </a:rPr>
+                        <a:t>22</a:t>
+                      </a:r>
+                      <a:endParaRPr lang="it-IT" sz="2000" b="0" i="0" u="none" strike="noStrike" dirty="0">
+                        <a:solidFill>
+                          <a:srgbClr val="000000"/>
+                        </a:solidFill>
+                        <a:effectLst/>
+                        <a:latin typeface="Calibri" panose="020F0502020204030204" pitchFamily="34" charset="0"/>
+                      </a:endParaRPr>
+                    </a:p>
+                  </a:txBody>
+                  <a:tcPr marL="9525" marR="9525" marT="9525" marB="0" anchor="ctr">
+                    <a:lnL w="12700" cap="flat" cmpd="sng" algn="ctr">
+                      <a:solidFill>
+                        <a:schemeClr val="tx1"/>
+                      </a:solidFill>
+                      <a:prstDash val="solid"/>
+                      <a:round/>
+                      <a:headEnd type="none" w="med" len="med"/>
+                      <a:tailEnd type="none" w="med" len="med"/>
+                    </a:lnL>
+                    <a:lnR w="12700" cap="flat" cmpd="sng" algn="ctr">
+                      <a:solidFill>
+                        <a:schemeClr val="tx1"/>
+                      </a:solidFill>
+                      <a:prstDash val="solid"/>
+                      <a:round/>
+                      <a:headEnd type="none" w="med" len="med"/>
+                      <a:tailEnd type="none" w="med" len="med"/>
+                    </a:lnR>
+                    <a:lnT w="12700" cap="flat" cmpd="sng" algn="ctr">
+                      <a:solidFill>
+                        <a:schemeClr val="tx1"/>
+                      </a:solidFill>
+                      <a:prstDash val="solid"/>
+                      <a:round/>
+                      <a:headEnd type="none" w="med" len="med"/>
+                      <a:tailEnd type="none" w="med" len="med"/>
+                    </a:lnT>
+                    <a:lnB w="12700" cap="flat" cmpd="sng" algn="ctr">
+                      <a:solidFill>
+                        <a:schemeClr val="tx1"/>
+                      </a:solidFill>
+                      <a:prstDash val="solid"/>
+                      <a:round/>
+                      <a:headEnd type="none" w="med" len="med"/>
+                      <a:tailEnd type="none" w="med" len="med"/>
+                    </a:lnB>
+                    <a:solidFill>
+                      <a:srgbClr val="FFFAEF"/>
+                    </a:solidFill>
+                  </a:tcPr>
+                </a:tc>
+                <a:extLst>
+                  <a:ext uri="{0D108BD9-81ED-4DB2-BD59-A6C34878D82A}">
+                    <a16:rowId xmlns:a16="http://schemas.microsoft.com/office/drawing/2014/main" val="1831914584"/>
+                  </a:ext>
+                </a:extLst>
+              </a:tr>
+              <a:tr h="654346">
+                <a:tc>
+                  <a:txBody>
+                    <a:bodyPr/>
+                    <a:lstStyle/>
+                    <a:p>
+                      <a:pPr algn="ctr" fontAlgn="b">
+                        <a:buNone/>
+                      </a:pPr>
+                      <a:r>
+                        <a:rPr lang="it-IT" sz="2000" b="1" u="none" strike="noStrike" dirty="0">
+                          <a:effectLst/>
+                        </a:rPr>
+                        <a:t>TOTALE COMPLESSIVO</a:t>
+                      </a:r>
+                      <a:endParaRPr lang="it-IT" sz="2000" b="1" i="0" u="none" strike="noStrike" dirty="0">
+                        <a:solidFill>
+                          <a:srgbClr val="000000"/>
+                        </a:solidFill>
+                        <a:effectLst/>
+                        <a:latin typeface="Calibri" panose="020F0502020204030204" pitchFamily="34" charset="0"/>
+                      </a:endParaRPr>
+                    </a:p>
+                  </a:txBody>
+                  <a:tcPr marL="9525" marR="9525" marT="9525" marB="0" anchor="ctr">
+                    <a:lnL w="12700" cap="flat" cmpd="sng" algn="ctr">
+                      <a:solidFill>
+                        <a:schemeClr val="tx1"/>
+                      </a:solidFill>
+                      <a:prstDash val="solid"/>
+                      <a:round/>
+                      <a:headEnd type="none" w="med" len="med"/>
+                      <a:tailEnd type="none" w="med" len="med"/>
+                    </a:lnL>
+                    <a:lnR w="12700" cap="flat" cmpd="sng" algn="ctr">
+                      <a:solidFill>
+                        <a:schemeClr val="tx1"/>
+                      </a:solidFill>
+                      <a:prstDash val="solid"/>
+                      <a:round/>
+                      <a:headEnd type="none" w="med" len="med"/>
+                      <a:tailEnd type="none" w="med" len="med"/>
+                    </a:lnR>
+                    <a:lnT w="12700" cap="flat" cmpd="sng" algn="ctr">
+                      <a:solidFill>
+                        <a:schemeClr val="tx1"/>
+                      </a:solidFill>
+                      <a:prstDash val="solid"/>
+                      <a:round/>
+                      <a:headEnd type="none" w="med" len="med"/>
+                      <a:tailEnd type="none" w="med" len="med"/>
+                    </a:lnT>
+                    <a:lnB w="12700" cap="flat" cmpd="sng" algn="ctr">
+                      <a:solidFill>
+                        <a:schemeClr val="tx1"/>
+                      </a:solidFill>
+                      <a:prstDash val="solid"/>
+                      <a:round/>
+                      <a:headEnd type="none" w="med" len="med"/>
+                      <a:tailEnd type="none" w="med" len="med"/>
+                    </a:lnB>
+                    <a:solidFill>
+                      <a:srgbClr val="FFFAEF"/>
+                    </a:solidFill>
+                  </a:tcPr>
+                </a:tc>
+                <a:tc>
+                  <a:txBody>
+                    <a:bodyPr/>
+                    <a:lstStyle/>
+                    <a:p>
+                      <a:pPr algn="ctr" fontAlgn="b">
+                        <a:buNone/>
+                      </a:pPr>
+                      <a:r>
+                        <a:rPr lang="it-IT" sz="2000" b="0" i="0" u="none" strike="noStrike" dirty="0">
+                          <a:solidFill>
+                            <a:srgbClr val="000000"/>
+                          </a:solidFill>
+                          <a:effectLst/>
+                          <a:latin typeface="Calibri" panose="020F0502020204030204" pitchFamily="34" charset="0"/>
+                        </a:rPr>
+                        <a:t>18</a:t>
+                      </a:r>
+                    </a:p>
+                  </a:txBody>
+                  <a:tcPr marL="9525" marR="9525" marT="9525" marB="0" anchor="ctr">
+                    <a:lnL w="12700" cap="flat" cmpd="sng" algn="ctr">
+                      <a:solidFill>
+                        <a:schemeClr val="tx1"/>
+                      </a:solidFill>
+                      <a:prstDash val="solid"/>
+                      <a:round/>
+                      <a:headEnd type="none" w="med" len="med"/>
+                      <a:tailEnd type="none" w="med" len="med"/>
+                    </a:lnL>
+                    <a:lnR w="12700" cap="flat" cmpd="sng" algn="ctr">
+                      <a:solidFill>
+                        <a:schemeClr val="tx1"/>
+                      </a:solidFill>
+                      <a:prstDash val="solid"/>
+                      <a:round/>
+                      <a:headEnd type="none" w="med" len="med"/>
+                      <a:tailEnd type="none" w="med" len="med"/>
+                    </a:lnR>
+                    <a:lnT w="12700" cap="flat" cmpd="sng" algn="ctr">
+                      <a:solidFill>
+                        <a:schemeClr val="tx1"/>
+                      </a:solidFill>
+                      <a:prstDash val="solid"/>
+                      <a:round/>
+                      <a:headEnd type="none" w="med" len="med"/>
+                      <a:tailEnd type="none" w="med" len="med"/>
+                    </a:lnT>
+                    <a:lnB w="12700" cap="flat" cmpd="sng" algn="ctr">
+                      <a:solidFill>
+                        <a:schemeClr val="tx1"/>
+                      </a:solidFill>
+                      <a:prstDash val="solid"/>
+                      <a:round/>
+                      <a:headEnd type="none" w="med" len="med"/>
+                      <a:tailEnd type="none" w="med" len="med"/>
+                    </a:lnB>
+                    <a:solidFill>
+                      <a:srgbClr val="FFFAEF"/>
+                    </a:solidFill>
+                  </a:tcPr>
+                </a:tc>
+                <a:tc>
+                  <a:txBody>
+                    <a:bodyPr/>
+                    <a:lstStyle/>
+                    <a:p>
+                      <a:pPr algn="ctr" fontAlgn="b">
+                        <a:buNone/>
+                      </a:pPr>
+                      <a:r>
+                        <a:rPr lang="it-IT" sz="2000" b="0" i="0" u="none" strike="noStrike" dirty="0">
+                          <a:solidFill>
+                            <a:srgbClr val="000000"/>
+                          </a:solidFill>
+                          <a:effectLst/>
+                          <a:latin typeface="Calibri" panose="020F0502020204030204" pitchFamily="34" charset="0"/>
+                        </a:rPr>
+                        <a:t>17</a:t>
+                      </a:r>
+                    </a:p>
+                  </a:txBody>
+                  <a:tcPr marL="9525" marR="9525" marT="9525" marB="0" anchor="ctr">
+                    <a:lnL w="12700" cap="flat" cmpd="sng" algn="ctr">
+                      <a:solidFill>
+                        <a:schemeClr val="tx1"/>
+                      </a:solidFill>
+                      <a:prstDash val="solid"/>
+                      <a:round/>
+                      <a:headEnd type="none" w="med" len="med"/>
+                      <a:tailEnd type="none" w="med" len="med"/>
+                    </a:lnL>
+                    <a:lnR w="12700" cap="flat" cmpd="sng" algn="ctr">
+                      <a:solidFill>
+                        <a:schemeClr val="tx1"/>
+                      </a:solidFill>
+                      <a:prstDash val="solid"/>
+                      <a:round/>
+                      <a:headEnd type="none" w="med" len="med"/>
+                      <a:tailEnd type="none" w="med" len="med"/>
+                    </a:lnR>
+                    <a:lnT w="12700" cap="flat" cmpd="sng" algn="ctr">
+                      <a:solidFill>
+                        <a:schemeClr val="tx1"/>
+                      </a:solidFill>
+                      <a:prstDash val="solid"/>
+                      <a:round/>
+                      <a:headEnd type="none" w="med" len="med"/>
+                      <a:tailEnd type="none" w="med" len="med"/>
+                    </a:lnT>
+                    <a:lnB w="12700" cap="flat" cmpd="sng" algn="ctr">
+                      <a:solidFill>
+                        <a:schemeClr val="tx1"/>
+                      </a:solidFill>
+                      <a:prstDash val="solid"/>
+                      <a:round/>
+                      <a:headEnd type="none" w="med" len="med"/>
+                      <a:tailEnd type="none" w="med" len="med"/>
+                    </a:lnB>
+                    <a:solidFill>
+                      <a:srgbClr val="FFFAEF"/>
+                    </a:solidFill>
+                  </a:tcPr>
+                </a:tc>
+                <a:tc>
+                  <a:txBody>
+                    <a:bodyPr/>
+                    <a:lstStyle/>
+                    <a:p>
+                      <a:pPr algn="ctr" fontAlgn="b">
+                        <a:buNone/>
+                      </a:pPr>
+                      <a:r>
+                        <a:rPr lang="it-IT" sz="2000" b="0" i="0" u="none" strike="noStrike" dirty="0">
+                          <a:solidFill>
+                            <a:srgbClr val="000000"/>
+                          </a:solidFill>
+                          <a:effectLst/>
+                          <a:latin typeface="Calibri" panose="020F0502020204030204" pitchFamily="34" charset="0"/>
+                        </a:rPr>
+                        <a:t>39</a:t>
+                      </a:r>
+                    </a:p>
+                  </a:txBody>
+                  <a:tcPr marL="9525" marR="9525" marT="9525" marB="0" anchor="ctr">
+                    <a:lnL w="12700" cap="flat" cmpd="sng" algn="ctr">
+                      <a:solidFill>
+                        <a:schemeClr val="tx1"/>
+                      </a:solidFill>
+                      <a:prstDash val="solid"/>
+                      <a:round/>
+                      <a:headEnd type="none" w="med" len="med"/>
+                      <a:tailEnd type="none" w="med" len="med"/>
+                    </a:lnL>
+                    <a:lnR w="12700" cap="flat" cmpd="sng" algn="ctr">
+                      <a:solidFill>
+                        <a:schemeClr val="tx1"/>
+                      </a:solidFill>
+                      <a:prstDash val="solid"/>
+                      <a:round/>
+                      <a:headEnd type="none" w="med" len="med"/>
+                      <a:tailEnd type="none" w="med" len="med"/>
+                    </a:lnR>
+                    <a:lnT w="12700" cap="flat" cmpd="sng" algn="ctr">
+                      <a:solidFill>
+                        <a:schemeClr val="tx1"/>
+                      </a:solidFill>
+                      <a:prstDash val="solid"/>
+                      <a:round/>
+                      <a:headEnd type="none" w="med" len="med"/>
+                      <a:tailEnd type="none" w="med" len="med"/>
+                    </a:lnT>
+                    <a:lnB w="12700" cap="flat" cmpd="sng" algn="ctr">
+                      <a:solidFill>
+                        <a:schemeClr val="tx1"/>
+                      </a:solidFill>
+                      <a:prstDash val="solid"/>
+                      <a:round/>
+                      <a:headEnd type="none" w="med" len="med"/>
+                      <a:tailEnd type="none" w="med" len="med"/>
+                    </a:lnB>
+                    <a:solidFill>
+                      <a:srgbClr val="FFFAEF"/>
+                    </a:solidFill>
+                  </a:tcPr>
+                </a:tc>
+                <a:tc>
+                  <a:txBody>
+                    <a:bodyPr/>
+                    <a:lstStyle/>
+                    <a:p>
+                      <a:pPr algn="ctr" fontAlgn="b">
+                        <a:buNone/>
+                      </a:pPr>
+                      <a:r>
+                        <a:rPr lang="it-IT" sz="2000" b="0" i="0" u="none" strike="noStrike" dirty="0">
+                          <a:solidFill>
+                            <a:srgbClr val="000000"/>
+                          </a:solidFill>
+                          <a:effectLst/>
+                          <a:latin typeface="Calibri" panose="020F0502020204030204" pitchFamily="34" charset="0"/>
+                        </a:rPr>
+                        <a:t>51</a:t>
+                      </a:r>
+                    </a:p>
+                  </a:txBody>
+                  <a:tcPr marL="9525" marR="9525" marT="9525" marB="0" anchor="ctr">
+                    <a:lnL w="12700" cap="flat" cmpd="sng" algn="ctr">
+                      <a:solidFill>
+                        <a:schemeClr val="tx1"/>
+                      </a:solidFill>
+                      <a:prstDash val="solid"/>
+                      <a:round/>
+                      <a:headEnd type="none" w="med" len="med"/>
+                      <a:tailEnd type="none" w="med" len="med"/>
+                    </a:lnL>
+                    <a:lnR w="12700" cap="flat" cmpd="sng" algn="ctr">
+                      <a:solidFill>
+                        <a:schemeClr val="tx1"/>
+                      </a:solidFill>
+                      <a:prstDash val="solid"/>
+                      <a:round/>
+                      <a:headEnd type="none" w="med" len="med"/>
+                      <a:tailEnd type="none" w="med" len="med"/>
+                    </a:lnR>
+                    <a:lnT w="12700" cap="flat" cmpd="sng" algn="ctr">
+                      <a:solidFill>
+                        <a:schemeClr val="tx1"/>
+                      </a:solidFill>
+                      <a:prstDash val="solid"/>
+                      <a:round/>
+                      <a:headEnd type="none" w="med" len="med"/>
+                      <a:tailEnd type="none" w="med" len="med"/>
+                    </a:lnT>
+                    <a:lnB w="12700" cap="flat" cmpd="sng" algn="ctr">
+                      <a:solidFill>
+                        <a:schemeClr val="tx1"/>
+                      </a:solidFill>
+                      <a:prstDash val="solid"/>
+                      <a:round/>
+                      <a:headEnd type="none" w="med" len="med"/>
+                      <a:tailEnd type="none" w="med" len="med"/>
+                    </a:lnB>
+                    <a:solidFill>
+                      <a:srgbClr val="FFFAEF"/>
+                    </a:solidFill>
+                  </a:tcPr>
+                </a:tc>
+                <a:tc>
+                  <a:txBody>
+                    <a:bodyPr/>
+                    <a:lstStyle/>
+                    <a:p>
+                      <a:pPr algn="ctr" fontAlgn="b">
+                        <a:buNone/>
+                      </a:pPr>
+                      <a:endParaRPr lang="it-IT" sz="2000" b="0" i="0" u="none" strike="noStrike" dirty="0">
+                        <a:solidFill>
+                          <a:srgbClr val="000000"/>
+                        </a:solidFill>
+                        <a:effectLst/>
+                        <a:latin typeface="Calibri" panose="020F0502020204030204" pitchFamily="34" charset="0"/>
+                      </a:endParaRPr>
+                    </a:p>
+                  </a:txBody>
+                  <a:tcPr marL="9525" marR="9525" marT="9525" marB="0" anchor="ctr">
+                    <a:lnL w="12700" cap="flat" cmpd="sng" algn="ctr">
+                      <a:solidFill>
+                        <a:schemeClr val="tx1"/>
+                      </a:solidFill>
+                      <a:prstDash val="solid"/>
+                      <a:round/>
+                      <a:headEnd type="none" w="med" len="med"/>
+                      <a:tailEnd type="none" w="med" len="med"/>
+                    </a:lnL>
+                    <a:lnR w="12700" cap="flat" cmpd="sng" algn="ctr">
+                      <a:solidFill>
+                        <a:schemeClr val="tx1"/>
+                      </a:solidFill>
+                      <a:prstDash val="solid"/>
+                      <a:round/>
+                      <a:headEnd type="none" w="med" len="med"/>
+                      <a:tailEnd type="none" w="med" len="med"/>
+                    </a:lnR>
+                    <a:lnT w="12700" cap="flat" cmpd="sng" algn="ctr">
+                      <a:solidFill>
+                        <a:schemeClr val="tx1"/>
+                      </a:solidFill>
+                      <a:prstDash val="solid"/>
+                      <a:round/>
+                      <a:headEnd type="none" w="med" len="med"/>
+                      <a:tailEnd type="none" w="med" len="med"/>
+                    </a:lnT>
+                    <a:lnB w="12700" cap="flat" cmpd="sng" algn="ctr">
+                      <a:solidFill>
+                        <a:schemeClr val="tx1"/>
+                      </a:solidFill>
+                      <a:prstDash val="solid"/>
+                      <a:round/>
+                      <a:headEnd type="none" w="med" len="med"/>
+                      <a:tailEnd type="none" w="med" len="med"/>
+                    </a:lnB>
+                    <a:solidFill>
+                      <a:srgbClr val="FFFAEF"/>
+                    </a:solidFill>
+                  </a:tcPr>
+                </a:tc>
+                <a:tc>
+                  <a:txBody>
+                    <a:bodyPr/>
+                    <a:lstStyle/>
+                    <a:p>
+                      <a:pPr algn="ctr" fontAlgn="b">
+                        <a:buNone/>
+                      </a:pPr>
+                      <a:r>
+                        <a:rPr lang="it-IT" sz="2000" b="0" i="0" u="none" strike="noStrike" dirty="0">
+                          <a:solidFill>
+                            <a:srgbClr val="000000"/>
+                          </a:solidFill>
+                          <a:effectLst/>
+                          <a:latin typeface="Calibri" panose="020F0502020204030204" pitchFamily="34" charset="0"/>
+                        </a:rPr>
+                        <a:t>30</a:t>
+                      </a:r>
+                    </a:p>
+                  </a:txBody>
+                  <a:tcPr marL="9525" marR="9525" marT="9525" marB="0" anchor="ctr">
+                    <a:lnL w="12700" cap="flat" cmpd="sng" algn="ctr">
+                      <a:solidFill>
+                        <a:schemeClr val="tx1"/>
+                      </a:solidFill>
+                      <a:prstDash val="solid"/>
+                      <a:round/>
+                      <a:headEnd type="none" w="med" len="med"/>
+                      <a:tailEnd type="none" w="med" len="med"/>
+                    </a:lnL>
+                    <a:lnR w="12700" cap="flat" cmpd="sng" algn="ctr">
+                      <a:solidFill>
+                        <a:schemeClr val="tx1"/>
+                      </a:solidFill>
+                      <a:prstDash val="solid"/>
+                      <a:round/>
+                      <a:headEnd type="none" w="med" len="med"/>
+                      <a:tailEnd type="none" w="med" len="med"/>
+                    </a:lnR>
+                    <a:lnT w="12700" cap="flat" cmpd="sng" algn="ctr">
+                      <a:solidFill>
+                        <a:schemeClr val="tx1"/>
+                      </a:solidFill>
+                      <a:prstDash val="solid"/>
+                      <a:round/>
+                      <a:headEnd type="none" w="med" len="med"/>
+                      <a:tailEnd type="none" w="med" len="med"/>
+                    </a:lnT>
+                    <a:lnB w="12700" cap="flat" cmpd="sng" algn="ctr">
+                      <a:solidFill>
+                        <a:schemeClr val="tx1"/>
+                      </a:solidFill>
+                      <a:prstDash val="solid"/>
+                      <a:round/>
+                      <a:headEnd type="none" w="med" len="med"/>
+                      <a:tailEnd type="none" w="med" len="med"/>
+                    </a:lnB>
+                    <a:solidFill>
+                      <a:srgbClr val="FFFAEF"/>
+                    </a:solidFill>
+                  </a:tcPr>
+                </a:tc>
+                <a:tc>
+                  <a:txBody>
+                    <a:bodyPr/>
+                    <a:lstStyle/>
+                    <a:p>
+                      <a:pPr algn="ctr" fontAlgn="b">
+                        <a:buNone/>
+                      </a:pPr>
+                      <a:endParaRPr lang="it-IT" sz="2000" b="0" i="0" u="none" strike="noStrike" dirty="0">
+                        <a:solidFill>
+                          <a:srgbClr val="000000"/>
+                        </a:solidFill>
+                        <a:effectLst/>
+                        <a:latin typeface="Calibri" panose="020F0502020204030204" pitchFamily="34" charset="0"/>
+                      </a:endParaRPr>
+                    </a:p>
+                  </a:txBody>
+                  <a:tcPr marL="9525" marR="9525" marT="9525" marB="0" anchor="ctr">
+                    <a:lnL w="12700" cap="flat" cmpd="sng" algn="ctr">
+                      <a:solidFill>
+                        <a:schemeClr val="tx1"/>
+                      </a:solidFill>
+                      <a:prstDash val="solid"/>
+                      <a:round/>
+                      <a:headEnd type="none" w="med" len="med"/>
+                      <a:tailEnd type="none" w="med" len="med"/>
+                    </a:lnL>
+                    <a:lnR w="12700" cap="flat" cmpd="sng" algn="ctr">
+                      <a:solidFill>
+                        <a:schemeClr val="tx1"/>
+                      </a:solidFill>
+                      <a:prstDash val="solid"/>
+                      <a:round/>
+                      <a:headEnd type="none" w="med" len="med"/>
+                      <a:tailEnd type="none" w="med" len="med"/>
+                    </a:lnR>
+                    <a:lnT w="12700" cap="flat" cmpd="sng" algn="ctr">
+                      <a:solidFill>
+                        <a:schemeClr val="tx1"/>
+                      </a:solidFill>
+                      <a:prstDash val="solid"/>
+                      <a:round/>
+                      <a:headEnd type="none" w="med" len="med"/>
+                      <a:tailEnd type="none" w="med" len="med"/>
+                    </a:lnT>
+                    <a:lnB w="12700" cap="flat" cmpd="sng" algn="ctr">
+                      <a:solidFill>
+                        <a:schemeClr val="tx1"/>
+                      </a:solidFill>
+                      <a:prstDash val="solid"/>
+                      <a:round/>
+                      <a:headEnd type="none" w="med" len="med"/>
+                      <a:tailEnd type="none" w="med" len="med"/>
+                    </a:lnB>
+                    <a:solidFill>
+                      <a:srgbClr val="FFFAEF"/>
+                    </a:solidFill>
+                  </a:tcPr>
+                </a:tc>
+                <a:extLst>
+                  <a:ext uri="{0D108BD9-81ED-4DB2-BD59-A6C34878D82A}">
+                    <a16:rowId xmlns:a16="http://schemas.microsoft.com/office/drawing/2014/main" val="270329455"/>
+                  </a:ext>
+                </a:extLst>
+              </a:tr>
+            </a:tbl>
+          </a:graphicData>
+        </a:graphic>
+      </p:graphicFrame>
+    </p:spTree>
+    <p:extLst>
+      <p:ext uri="{BB962C8B-B14F-4D97-AF65-F5344CB8AC3E}">
+        <p14:creationId xmlns:p14="http://schemas.microsoft.com/office/powerpoint/2010/main" val="306867253"/>
+      </p:ext>
+    </p:extLst>
+  </p:cSld>
+  <p:clrMapOvr>
+    <a:masterClrMapping/>
+  </p:clrMapOvr>
+</p:sld>
+</file>
+
 <file path=ppt/slides/slide2.xml><?xml version="1.0" encoding="utf-8"?>
 <p:sld xmlns:a="http://schemas.openxmlformats.org/drawingml/2006/main" xmlns:r="http://schemas.openxmlformats.org/officeDocument/2006/relationships" xmlns:p="http://schemas.openxmlformats.org/presentationml/2006/main">
   <p:cSld>
@@ -8280,6 +13425,14 @@
 <file path=ppt/slides/slide9.xml><?xml version="1.0" encoding="utf-8"?>
 <p:sld xmlns:a="http://schemas.openxmlformats.org/drawingml/2006/main" xmlns:r="http://schemas.openxmlformats.org/officeDocument/2006/relationships" xmlns:p="http://schemas.openxmlformats.org/presentationml/2006/main">
   <p:cSld>
+    <p:bg>
+      <p:bgPr>
+        <a:solidFill>
+          <a:srgbClr val="FFFAEF"/>
+        </a:solidFill>
+        <a:effectLst/>
+      </p:bgPr>
+    </p:bg>
     <p:spTree>
       <p:nvGrpSpPr>
         <p:cNvPr id="1" name="">
@@ -8735,7 +13888,7 @@
           <p:nvPr>
             <p:extLst>
               <p:ext uri="{D42A27DB-BD31-4B8C-83A1-F6EECF244321}">
-                <p14:modId xmlns:p14="http://schemas.microsoft.com/office/powerpoint/2010/main" val="2189375927"/>
+                <p14:modId xmlns:p14="http://schemas.microsoft.com/office/powerpoint/2010/main" val="2273746364"/>
               </p:ext>
             </p:extLst>
           </p:nvPr>
@@ -8797,7 +13950,47 @@
                       </a:endParaRPr>
                     </a:p>
                   </a:txBody>
-                  <a:tcPr marL="9525" marR="9525" marT="9525" marB="0" anchor="b"/>
+                  <a:tcPr marL="9525" marR="9525" marT="9525" marB="0" anchor="b">
+                    <a:lnL w="12700" cap="flat" cmpd="sng" algn="ctr">
+                      <a:solidFill>
+                        <a:schemeClr val="tx1"/>
+                      </a:solidFill>
+                      <a:prstDash val="solid"/>
+                      <a:round/>
+                      <a:headEnd type="none" w="med" len="med"/>
+                      <a:tailEnd type="none" w="med" len="med"/>
+                    </a:lnL>
+                    <a:lnR w="12700" cap="flat" cmpd="sng" algn="ctr">
+                      <a:solidFill>
+                        <a:schemeClr val="tx1"/>
+                      </a:solidFill>
+                      <a:prstDash val="solid"/>
+                      <a:round/>
+                      <a:headEnd type="none" w="med" len="med"/>
+                      <a:tailEnd type="none" w="med" len="med"/>
+                    </a:lnR>
+                    <a:lnT w="12700" cap="flat" cmpd="sng" algn="ctr">
+                      <a:solidFill>
+                        <a:schemeClr val="tx1"/>
+                      </a:solidFill>
+                      <a:prstDash val="solid"/>
+                      <a:round/>
+                      <a:headEnd type="none" w="med" len="med"/>
+                      <a:tailEnd type="none" w="med" len="med"/>
+                    </a:lnT>
+                    <a:lnB w="12700" cap="flat" cmpd="sng" algn="ctr">
+                      <a:solidFill>
+                        <a:schemeClr val="tx1"/>
+                      </a:solidFill>
+                      <a:prstDash val="solid"/>
+                      <a:round/>
+                      <a:headEnd type="none" w="med" len="med"/>
+                      <a:tailEnd type="none" w="med" len="med"/>
+                    </a:lnB>
+                    <a:solidFill>
+                      <a:srgbClr val="FFFAEF"/>
+                    </a:solidFill>
+                  </a:tcPr>
                 </a:tc>
                 <a:tc>
                   <a:txBody>
@@ -8822,7 +14015,47 @@
                       </a:endParaRPr>
                     </a:p>
                   </a:txBody>
-                  <a:tcPr marL="9525" marR="9525" marT="9525" marB="0" anchor="b"/>
+                  <a:tcPr marL="9525" marR="9525" marT="9525" marB="0" anchor="b">
+                    <a:lnL w="12700" cap="flat" cmpd="sng" algn="ctr">
+                      <a:solidFill>
+                        <a:schemeClr val="tx1"/>
+                      </a:solidFill>
+                      <a:prstDash val="solid"/>
+                      <a:round/>
+                      <a:headEnd type="none" w="med" len="med"/>
+                      <a:tailEnd type="none" w="med" len="med"/>
+                    </a:lnL>
+                    <a:lnR w="12700" cap="flat" cmpd="sng" algn="ctr">
+                      <a:solidFill>
+                        <a:schemeClr val="tx1"/>
+                      </a:solidFill>
+                      <a:prstDash val="solid"/>
+                      <a:round/>
+                      <a:headEnd type="none" w="med" len="med"/>
+                      <a:tailEnd type="none" w="med" len="med"/>
+                    </a:lnR>
+                    <a:lnT w="12700" cap="flat" cmpd="sng" algn="ctr">
+                      <a:solidFill>
+                        <a:schemeClr val="tx1"/>
+                      </a:solidFill>
+                      <a:prstDash val="solid"/>
+                      <a:round/>
+                      <a:headEnd type="none" w="med" len="med"/>
+                      <a:tailEnd type="none" w="med" len="med"/>
+                    </a:lnT>
+                    <a:lnB w="12700" cap="flat" cmpd="sng" algn="ctr">
+                      <a:solidFill>
+                        <a:schemeClr val="tx1"/>
+                      </a:solidFill>
+                      <a:prstDash val="solid"/>
+                      <a:round/>
+                      <a:headEnd type="none" w="med" len="med"/>
+                      <a:tailEnd type="none" w="med" len="med"/>
+                    </a:lnB>
+                    <a:solidFill>
+                      <a:srgbClr val="FFFAEF"/>
+                    </a:solidFill>
+                  </a:tcPr>
                 </a:tc>
                 <a:tc>
                   <a:txBody>
@@ -8847,7 +14080,47 @@
                       </a:endParaRPr>
                     </a:p>
                   </a:txBody>
-                  <a:tcPr marL="9525" marR="9525" marT="9525" marB="0" anchor="b"/>
+                  <a:tcPr marL="9525" marR="9525" marT="9525" marB="0" anchor="b">
+                    <a:lnL w="12700" cap="flat" cmpd="sng" algn="ctr">
+                      <a:solidFill>
+                        <a:schemeClr val="tx1"/>
+                      </a:solidFill>
+                      <a:prstDash val="solid"/>
+                      <a:round/>
+                      <a:headEnd type="none" w="med" len="med"/>
+                      <a:tailEnd type="none" w="med" len="med"/>
+                    </a:lnL>
+                    <a:lnR w="12700" cap="flat" cmpd="sng" algn="ctr">
+                      <a:solidFill>
+                        <a:schemeClr val="tx1"/>
+                      </a:solidFill>
+                      <a:prstDash val="solid"/>
+                      <a:round/>
+                      <a:headEnd type="none" w="med" len="med"/>
+                      <a:tailEnd type="none" w="med" len="med"/>
+                    </a:lnR>
+                    <a:lnT w="12700" cap="flat" cmpd="sng" algn="ctr">
+                      <a:solidFill>
+                        <a:schemeClr val="tx1"/>
+                      </a:solidFill>
+                      <a:prstDash val="solid"/>
+                      <a:round/>
+                      <a:headEnd type="none" w="med" len="med"/>
+                      <a:tailEnd type="none" w="med" len="med"/>
+                    </a:lnT>
+                    <a:lnB w="12700" cap="flat" cmpd="sng" algn="ctr">
+                      <a:solidFill>
+                        <a:schemeClr val="tx1"/>
+                      </a:solidFill>
+                      <a:prstDash val="solid"/>
+                      <a:round/>
+                      <a:headEnd type="none" w="med" len="med"/>
+                      <a:tailEnd type="none" w="med" len="med"/>
+                    </a:lnB>
+                    <a:solidFill>
+                      <a:srgbClr val="FFFAEF"/>
+                    </a:solidFill>
+                  </a:tcPr>
                 </a:tc>
                 <a:extLst>
                   <a:ext uri="{0D108BD9-81ED-4DB2-BD59-A6C34878D82A}">
@@ -8879,7 +14152,47 @@
                       </a:endParaRPr>
                     </a:p>
                   </a:txBody>
-                  <a:tcPr marL="9525" marR="9525" marT="9525" marB="0" anchor="b"/>
+                  <a:tcPr marL="9525" marR="9525" marT="9525" marB="0" anchor="b">
+                    <a:lnL w="12700" cap="flat" cmpd="sng" algn="ctr">
+                      <a:solidFill>
+                        <a:schemeClr val="tx1"/>
+                      </a:solidFill>
+                      <a:prstDash val="solid"/>
+                      <a:round/>
+                      <a:headEnd type="none" w="med" len="med"/>
+                      <a:tailEnd type="none" w="med" len="med"/>
+                    </a:lnL>
+                    <a:lnR w="12700" cap="flat" cmpd="sng" algn="ctr">
+                      <a:solidFill>
+                        <a:schemeClr val="tx1"/>
+                      </a:solidFill>
+                      <a:prstDash val="solid"/>
+                      <a:round/>
+                      <a:headEnd type="none" w="med" len="med"/>
+                      <a:tailEnd type="none" w="med" len="med"/>
+                    </a:lnR>
+                    <a:lnT w="12700" cap="flat" cmpd="sng" algn="ctr">
+                      <a:solidFill>
+                        <a:schemeClr val="tx1"/>
+                      </a:solidFill>
+                      <a:prstDash val="solid"/>
+                      <a:round/>
+                      <a:headEnd type="none" w="med" len="med"/>
+                      <a:tailEnd type="none" w="med" len="med"/>
+                    </a:lnT>
+                    <a:lnB w="12700" cap="flat" cmpd="sng" algn="ctr">
+                      <a:solidFill>
+                        <a:schemeClr val="tx1"/>
+                      </a:solidFill>
+                      <a:prstDash val="solid"/>
+                      <a:round/>
+                      <a:headEnd type="none" w="med" len="med"/>
+                      <a:tailEnd type="none" w="med" len="med"/>
+                    </a:lnB>
+                    <a:solidFill>
+                      <a:srgbClr val="FFFAEF"/>
+                    </a:solidFill>
+                  </a:tcPr>
                 </a:tc>
                 <a:tc>
                   <a:txBody>
@@ -8904,7 +14217,47 @@
                       </a:endParaRPr>
                     </a:p>
                   </a:txBody>
-                  <a:tcPr marL="9525" marR="9525" marT="9525" marB="0" anchor="b"/>
+                  <a:tcPr marL="9525" marR="9525" marT="9525" marB="0" anchor="b">
+                    <a:lnL w="12700" cap="flat" cmpd="sng" algn="ctr">
+                      <a:solidFill>
+                        <a:schemeClr val="tx1"/>
+                      </a:solidFill>
+                      <a:prstDash val="solid"/>
+                      <a:round/>
+                      <a:headEnd type="none" w="med" len="med"/>
+                      <a:tailEnd type="none" w="med" len="med"/>
+                    </a:lnL>
+                    <a:lnR w="12700" cap="flat" cmpd="sng" algn="ctr">
+                      <a:solidFill>
+                        <a:schemeClr val="tx1"/>
+                      </a:solidFill>
+                      <a:prstDash val="solid"/>
+                      <a:round/>
+                      <a:headEnd type="none" w="med" len="med"/>
+                      <a:tailEnd type="none" w="med" len="med"/>
+                    </a:lnR>
+                    <a:lnT w="12700" cap="flat" cmpd="sng" algn="ctr">
+                      <a:solidFill>
+                        <a:schemeClr val="tx1"/>
+                      </a:solidFill>
+                      <a:prstDash val="solid"/>
+                      <a:round/>
+                      <a:headEnd type="none" w="med" len="med"/>
+                      <a:tailEnd type="none" w="med" len="med"/>
+                    </a:lnT>
+                    <a:lnB w="12700" cap="flat" cmpd="sng" algn="ctr">
+                      <a:solidFill>
+                        <a:schemeClr val="tx1"/>
+                      </a:solidFill>
+                      <a:prstDash val="solid"/>
+                      <a:round/>
+                      <a:headEnd type="none" w="med" len="med"/>
+                      <a:tailEnd type="none" w="med" len="med"/>
+                    </a:lnB>
+                    <a:solidFill>
+                      <a:srgbClr val="FFFAEF"/>
+                    </a:solidFill>
+                  </a:tcPr>
                 </a:tc>
                 <a:tc>
                   <a:txBody>
@@ -8929,7 +14282,47 @@
                       </a:endParaRPr>
                     </a:p>
                   </a:txBody>
-                  <a:tcPr marL="9525" marR="9525" marT="9525" marB="0" anchor="b"/>
+                  <a:tcPr marL="9525" marR="9525" marT="9525" marB="0" anchor="b">
+                    <a:lnL w="12700" cap="flat" cmpd="sng" algn="ctr">
+                      <a:solidFill>
+                        <a:schemeClr val="tx1"/>
+                      </a:solidFill>
+                      <a:prstDash val="solid"/>
+                      <a:round/>
+                      <a:headEnd type="none" w="med" len="med"/>
+                      <a:tailEnd type="none" w="med" len="med"/>
+                    </a:lnL>
+                    <a:lnR w="12700" cap="flat" cmpd="sng" algn="ctr">
+                      <a:solidFill>
+                        <a:schemeClr val="tx1"/>
+                      </a:solidFill>
+                      <a:prstDash val="solid"/>
+                      <a:round/>
+                      <a:headEnd type="none" w="med" len="med"/>
+                      <a:tailEnd type="none" w="med" len="med"/>
+                    </a:lnR>
+                    <a:lnT w="12700" cap="flat" cmpd="sng" algn="ctr">
+                      <a:solidFill>
+                        <a:schemeClr val="tx1"/>
+                      </a:solidFill>
+                      <a:prstDash val="solid"/>
+                      <a:round/>
+                      <a:headEnd type="none" w="med" len="med"/>
+                      <a:tailEnd type="none" w="med" len="med"/>
+                    </a:lnT>
+                    <a:lnB w="12700" cap="flat" cmpd="sng" algn="ctr">
+                      <a:solidFill>
+                        <a:schemeClr val="tx1"/>
+                      </a:solidFill>
+                      <a:prstDash val="solid"/>
+                      <a:round/>
+                      <a:headEnd type="none" w="med" len="med"/>
+                      <a:tailEnd type="none" w="med" len="med"/>
+                    </a:lnB>
+                    <a:solidFill>
+                      <a:srgbClr val="FFFAEF"/>
+                    </a:solidFill>
+                  </a:tcPr>
                 </a:tc>
                 <a:extLst>
                   <a:ext uri="{0D108BD9-81ED-4DB2-BD59-A6C34878D82A}">
@@ -8961,7 +14354,47 @@
                       </a:endParaRPr>
                     </a:p>
                   </a:txBody>
-                  <a:tcPr marL="9525" marR="9525" marT="9525" marB="0" anchor="b"/>
+                  <a:tcPr marL="9525" marR="9525" marT="9525" marB="0" anchor="b">
+                    <a:lnL w="12700" cap="flat" cmpd="sng" algn="ctr">
+                      <a:solidFill>
+                        <a:schemeClr val="tx1"/>
+                      </a:solidFill>
+                      <a:prstDash val="solid"/>
+                      <a:round/>
+                      <a:headEnd type="none" w="med" len="med"/>
+                      <a:tailEnd type="none" w="med" len="med"/>
+                    </a:lnL>
+                    <a:lnR w="12700" cap="flat" cmpd="sng" algn="ctr">
+                      <a:solidFill>
+                        <a:schemeClr val="tx1"/>
+                      </a:solidFill>
+                      <a:prstDash val="solid"/>
+                      <a:round/>
+                      <a:headEnd type="none" w="med" len="med"/>
+                      <a:tailEnd type="none" w="med" len="med"/>
+                    </a:lnR>
+                    <a:lnT w="12700" cap="flat" cmpd="sng" algn="ctr">
+                      <a:solidFill>
+                        <a:schemeClr val="tx1"/>
+                      </a:solidFill>
+                      <a:prstDash val="solid"/>
+                      <a:round/>
+                      <a:headEnd type="none" w="med" len="med"/>
+                      <a:tailEnd type="none" w="med" len="med"/>
+                    </a:lnT>
+                    <a:lnB w="12700" cap="flat" cmpd="sng" algn="ctr">
+                      <a:solidFill>
+                        <a:schemeClr val="tx1"/>
+                      </a:solidFill>
+                      <a:prstDash val="solid"/>
+                      <a:round/>
+                      <a:headEnd type="none" w="med" len="med"/>
+                      <a:tailEnd type="none" w="med" len="med"/>
+                    </a:lnB>
+                    <a:solidFill>
+                      <a:srgbClr val="FFFAEF"/>
+                    </a:solidFill>
+                  </a:tcPr>
                 </a:tc>
                 <a:tc>
                   <a:txBody>
@@ -8986,7 +14419,47 @@
                       </a:endParaRPr>
                     </a:p>
                   </a:txBody>
-                  <a:tcPr marL="9525" marR="9525" marT="9525" marB="0" anchor="b"/>
+                  <a:tcPr marL="9525" marR="9525" marT="9525" marB="0" anchor="b">
+                    <a:lnL w="12700" cap="flat" cmpd="sng" algn="ctr">
+                      <a:solidFill>
+                        <a:schemeClr val="tx1"/>
+                      </a:solidFill>
+                      <a:prstDash val="solid"/>
+                      <a:round/>
+                      <a:headEnd type="none" w="med" len="med"/>
+                      <a:tailEnd type="none" w="med" len="med"/>
+                    </a:lnL>
+                    <a:lnR w="12700" cap="flat" cmpd="sng" algn="ctr">
+                      <a:solidFill>
+                        <a:schemeClr val="tx1"/>
+                      </a:solidFill>
+                      <a:prstDash val="solid"/>
+                      <a:round/>
+                      <a:headEnd type="none" w="med" len="med"/>
+                      <a:tailEnd type="none" w="med" len="med"/>
+                    </a:lnR>
+                    <a:lnT w="12700" cap="flat" cmpd="sng" algn="ctr">
+                      <a:solidFill>
+                        <a:schemeClr val="tx1"/>
+                      </a:solidFill>
+                      <a:prstDash val="solid"/>
+                      <a:round/>
+                      <a:headEnd type="none" w="med" len="med"/>
+                      <a:tailEnd type="none" w="med" len="med"/>
+                    </a:lnT>
+                    <a:lnB w="12700" cap="flat" cmpd="sng" algn="ctr">
+                      <a:solidFill>
+                        <a:schemeClr val="tx1"/>
+                      </a:solidFill>
+                      <a:prstDash val="solid"/>
+                      <a:round/>
+                      <a:headEnd type="none" w="med" len="med"/>
+                      <a:tailEnd type="none" w="med" len="med"/>
+                    </a:lnB>
+                    <a:solidFill>
+                      <a:srgbClr val="FFFAEF"/>
+                    </a:solidFill>
+                  </a:tcPr>
                 </a:tc>
                 <a:tc>
                   <a:txBody>
@@ -9011,7 +14484,47 @@
                       </a:endParaRPr>
                     </a:p>
                   </a:txBody>
-                  <a:tcPr marL="9525" marR="9525" marT="9525" marB="0" anchor="b"/>
+                  <a:tcPr marL="9525" marR="9525" marT="9525" marB="0" anchor="b">
+                    <a:lnL w="12700" cap="flat" cmpd="sng" algn="ctr">
+                      <a:solidFill>
+                        <a:schemeClr val="tx1"/>
+                      </a:solidFill>
+                      <a:prstDash val="solid"/>
+                      <a:round/>
+                      <a:headEnd type="none" w="med" len="med"/>
+                      <a:tailEnd type="none" w="med" len="med"/>
+                    </a:lnL>
+                    <a:lnR w="12700" cap="flat" cmpd="sng" algn="ctr">
+                      <a:solidFill>
+                        <a:schemeClr val="tx1"/>
+                      </a:solidFill>
+                      <a:prstDash val="solid"/>
+                      <a:round/>
+                      <a:headEnd type="none" w="med" len="med"/>
+                      <a:tailEnd type="none" w="med" len="med"/>
+                    </a:lnR>
+                    <a:lnT w="12700" cap="flat" cmpd="sng" algn="ctr">
+                      <a:solidFill>
+                        <a:schemeClr val="tx1"/>
+                      </a:solidFill>
+                      <a:prstDash val="solid"/>
+                      <a:round/>
+                      <a:headEnd type="none" w="med" len="med"/>
+                      <a:tailEnd type="none" w="med" len="med"/>
+                    </a:lnT>
+                    <a:lnB w="12700" cap="flat" cmpd="sng" algn="ctr">
+                      <a:solidFill>
+                        <a:schemeClr val="tx1"/>
+                      </a:solidFill>
+                      <a:prstDash val="solid"/>
+                      <a:round/>
+                      <a:headEnd type="none" w="med" len="med"/>
+                      <a:tailEnd type="none" w="med" len="med"/>
+                    </a:lnB>
+                    <a:solidFill>
+                      <a:srgbClr val="FFFAEF"/>
+                    </a:solidFill>
+                  </a:tcPr>
                 </a:tc>
                 <a:extLst>
                   <a:ext uri="{0D108BD9-81ED-4DB2-BD59-A6C34878D82A}">
@@ -9043,7 +14556,47 @@
                       </a:endParaRPr>
                     </a:p>
                   </a:txBody>
-                  <a:tcPr marL="9525" marR="9525" marT="9525" marB="0" anchor="b"/>
+                  <a:tcPr marL="9525" marR="9525" marT="9525" marB="0" anchor="b">
+                    <a:lnL w="12700" cap="flat" cmpd="sng" algn="ctr">
+                      <a:solidFill>
+                        <a:schemeClr val="tx1"/>
+                      </a:solidFill>
+                      <a:prstDash val="solid"/>
+                      <a:round/>
+                      <a:headEnd type="none" w="med" len="med"/>
+                      <a:tailEnd type="none" w="med" len="med"/>
+                    </a:lnL>
+                    <a:lnR w="12700" cap="flat" cmpd="sng" algn="ctr">
+                      <a:solidFill>
+                        <a:schemeClr val="tx1"/>
+                      </a:solidFill>
+                      <a:prstDash val="solid"/>
+                      <a:round/>
+                      <a:headEnd type="none" w="med" len="med"/>
+                      <a:tailEnd type="none" w="med" len="med"/>
+                    </a:lnR>
+                    <a:lnT w="12700" cap="flat" cmpd="sng" algn="ctr">
+                      <a:solidFill>
+                        <a:schemeClr val="tx1"/>
+                      </a:solidFill>
+                      <a:prstDash val="solid"/>
+                      <a:round/>
+                      <a:headEnd type="none" w="med" len="med"/>
+                      <a:tailEnd type="none" w="med" len="med"/>
+                    </a:lnT>
+                    <a:lnB w="12700" cap="flat" cmpd="sng" algn="ctr">
+                      <a:solidFill>
+                        <a:schemeClr val="tx1"/>
+                      </a:solidFill>
+                      <a:prstDash val="solid"/>
+                      <a:round/>
+                      <a:headEnd type="none" w="med" len="med"/>
+                      <a:tailEnd type="none" w="med" len="med"/>
+                    </a:lnB>
+                    <a:solidFill>
+                      <a:srgbClr val="FFFAEF"/>
+                    </a:solidFill>
+                  </a:tcPr>
                 </a:tc>
                 <a:tc>
                   <a:txBody>
@@ -9068,7 +14621,47 @@
                       </a:endParaRPr>
                     </a:p>
                   </a:txBody>
-                  <a:tcPr marL="9525" marR="9525" marT="9525" marB="0" anchor="b"/>
+                  <a:tcPr marL="9525" marR="9525" marT="9525" marB="0" anchor="b">
+                    <a:lnL w="12700" cap="flat" cmpd="sng" algn="ctr">
+                      <a:solidFill>
+                        <a:schemeClr val="tx1"/>
+                      </a:solidFill>
+                      <a:prstDash val="solid"/>
+                      <a:round/>
+                      <a:headEnd type="none" w="med" len="med"/>
+                      <a:tailEnd type="none" w="med" len="med"/>
+                    </a:lnL>
+                    <a:lnR w="12700" cap="flat" cmpd="sng" algn="ctr">
+                      <a:solidFill>
+                        <a:schemeClr val="tx1"/>
+                      </a:solidFill>
+                      <a:prstDash val="solid"/>
+                      <a:round/>
+                      <a:headEnd type="none" w="med" len="med"/>
+                      <a:tailEnd type="none" w="med" len="med"/>
+                    </a:lnR>
+                    <a:lnT w="12700" cap="flat" cmpd="sng" algn="ctr">
+                      <a:solidFill>
+                        <a:schemeClr val="tx1"/>
+                      </a:solidFill>
+                      <a:prstDash val="solid"/>
+                      <a:round/>
+                      <a:headEnd type="none" w="med" len="med"/>
+                      <a:tailEnd type="none" w="med" len="med"/>
+                    </a:lnT>
+                    <a:lnB w="12700" cap="flat" cmpd="sng" algn="ctr">
+                      <a:solidFill>
+                        <a:schemeClr val="tx1"/>
+                      </a:solidFill>
+                      <a:prstDash val="solid"/>
+                      <a:round/>
+                      <a:headEnd type="none" w="med" len="med"/>
+                      <a:tailEnd type="none" w="med" len="med"/>
+                    </a:lnB>
+                    <a:solidFill>
+                      <a:srgbClr val="FFFAEF"/>
+                    </a:solidFill>
+                  </a:tcPr>
                 </a:tc>
                 <a:tc>
                   <a:txBody>
@@ -9093,7 +14686,47 @@
                       </a:endParaRPr>
                     </a:p>
                   </a:txBody>
-                  <a:tcPr marL="9525" marR="9525" marT="9525" marB="0" anchor="b"/>
+                  <a:tcPr marL="9525" marR="9525" marT="9525" marB="0" anchor="b">
+                    <a:lnL w="12700" cap="flat" cmpd="sng" algn="ctr">
+                      <a:solidFill>
+                        <a:schemeClr val="tx1"/>
+                      </a:solidFill>
+                      <a:prstDash val="solid"/>
+                      <a:round/>
+                      <a:headEnd type="none" w="med" len="med"/>
+                      <a:tailEnd type="none" w="med" len="med"/>
+                    </a:lnL>
+                    <a:lnR w="12700" cap="flat" cmpd="sng" algn="ctr">
+                      <a:solidFill>
+                        <a:schemeClr val="tx1"/>
+                      </a:solidFill>
+                      <a:prstDash val="solid"/>
+                      <a:round/>
+                      <a:headEnd type="none" w="med" len="med"/>
+                      <a:tailEnd type="none" w="med" len="med"/>
+                    </a:lnR>
+                    <a:lnT w="12700" cap="flat" cmpd="sng" algn="ctr">
+                      <a:solidFill>
+                        <a:schemeClr val="tx1"/>
+                      </a:solidFill>
+                      <a:prstDash val="solid"/>
+                      <a:round/>
+                      <a:headEnd type="none" w="med" len="med"/>
+                      <a:tailEnd type="none" w="med" len="med"/>
+                    </a:lnT>
+                    <a:lnB w="12700" cap="flat" cmpd="sng" algn="ctr">
+                      <a:solidFill>
+                        <a:schemeClr val="tx1"/>
+                      </a:solidFill>
+                      <a:prstDash val="solid"/>
+                      <a:round/>
+                      <a:headEnd type="none" w="med" len="med"/>
+                      <a:tailEnd type="none" w="med" len="med"/>
+                    </a:lnB>
+                    <a:solidFill>
+                      <a:srgbClr val="FFFAEF"/>
+                    </a:solidFill>
+                  </a:tcPr>
                 </a:tc>
                 <a:extLst>
                   <a:ext uri="{0D108BD9-81ED-4DB2-BD59-A6C34878D82A}">
@@ -9125,7 +14758,47 @@
                       </a:endParaRPr>
                     </a:p>
                   </a:txBody>
-                  <a:tcPr marL="9525" marR="9525" marT="9525" marB="0" anchor="b"/>
+                  <a:tcPr marL="9525" marR="9525" marT="9525" marB="0" anchor="b">
+                    <a:lnL w="12700" cap="flat" cmpd="sng" algn="ctr">
+                      <a:solidFill>
+                        <a:schemeClr val="tx1"/>
+                      </a:solidFill>
+                      <a:prstDash val="solid"/>
+                      <a:round/>
+                      <a:headEnd type="none" w="med" len="med"/>
+                      <a:tailEnd type="none" w="med" len="med"/>
+                    </a:lnL>
+                    <a:lnR w="12700" cap="flat" cmpd="sng" algn="ctr">
+                      <a:solidFill>
+                        <a:schemeClr val="tx1"/>
+                      </a:solidFill>
+                      <a:prstDash val="solid"/>
+                      <a:round/>
+                      <a:headEnd type="none" w="med" len="med"/>
+                      <a:tailEnd type="none" w="med" len="med"/>
+                    </a:lnR>
+                    <a:lnT w="12700" cap="flat" cmpd="sng" algn="ctr">
+                      <a:solidFill>
+                        <a:schemeClr val="tx1"/>
+                      </a:solidFill>
+                      <a:prstDash val="solid"/>
+                      <a:round/>
+                      <a:headEnd type="none" w="med" len="med"/>
+                      <a:tailEnd type="none" w="med" len="med"/>
+                    </a:lnT>
+                    <a:lnB w="12700" cap="flat" cmpd="sng" algn="ctr">
+                      <a:solidFill>
+                        <a:schemeClr val="tx1"/>
+                      </a:solidFill>
+                      <a:prstDash val="solid"/>
+                      <a:round/>
+                      <a:headEnd type="none" w="med" len="med"/>
+                      <a:tailEnd type="none" w="med" len="med"/>
+                    </a:lnB>
+                    <a:solidFill>
+                      <a:srgbClr val="FFFAEF"/>
+                    </a:solidFill>
+                  </a:tcPr>
                 </a:tc>
                 <a:tc>
                   <a:txBody>
@@ -9150,7 +14823,47 @@
                       </a:endParaRPr>
                     </a:p>
                   </a:txBody>
-                  <a:tcPr marL="9525" marR="9525" marT="9525" marB="0" anchor="b"/>
+                  <a:tcPr marL="9525" marR="9525" marT="9525" marB="0" anchor="b">
+                    <a:lnL w="12700" cap="flat" cmpd="sng" algn="ctr">
+                      <a:solidFill>
+                        <a:schemeClr val="tx1"/>
+                      </a:solidFill>
+                      <a:prstDash val="solid"/>
+                      <a:round/>
+                      <a:headEnd type="none" w="med" len="med"/>
+                      <a:tailEnd type="none" w="med" len="med"/>
+                    </a:lnL>
+                    <a:lnR w="12700" cap="flat" cmpd="sng" algn="ctr">
+                      <a:solidFill>
+                        <a:schemeClr val="tx1"/>
+                      </a:solidFill>
+                      <a:prstDash val="solid"/>
+                      <a:round/>
+                      <a:headEnd type="none" w="med" len="med"/>
+                      <a:tailEnd type="none" w="med" len="med"/>
+                    </a:lnR>
+                    <a:lnT w="12700" cap="flat" cmpd="sng" algn="ctr">
+                      <a:solidFill>
+                        <a:schemeClr val="tx1"/>
+                      </a:solidFill>
+                      <a:prstDash val="solid"/>
+                      <a:round/>
+                      <a:headEnd type="none" w="med" len="med"/>
+                      <a:tailEnd type="none" w="med" len="med"/>
+                    </a:lnT>
+                    <a:lnB w="12700" cap="flat" cmpd="sng" algn="ctr">
+                      <a:solidFill>
+                        <a:schemeClr val="tx1"/>
+                      </a:solidFill>
+                      <a:prstDash val="solid"/>
+                      <a:round/>
+                      <a:headEnd type="none" w="med" len="med"/>
+                      <a:tailEnd type="none" w="med" len="med"/>
+                    </a:lnB>
+                    <a:solidFill>
+                      <a:srgbClr val="FFFAEF"/>
+                    </a:solidFill>
+                  </a:tcPr>
                 </a:tc>
                 <a:tc>
                   <a:txBody>
@@ -9175,7 +14888,47 @@
                       </a:endParaRPr>
                     </a:p>
                   </a:txBody>
-                  <a:tcPr marL="9525" marR="9525" marT="9525" marB="0" anchor="b"/>
+                  <a:tcPr marL="9525" marR="9525" marT="9525" marB="0" anchor="b">
+                    <a:lnL w="12700" cap="flat" cmpd="sng" algn="ctr">
+                      <a:solidFill>
+                        <a:schemeClr val="tx1"/>
+                      </a:solidFill>
+                      <a:prstDash val="solid"/>
+                      <a:round/>
+                      <a:headEnd type="none" w="med" len="med"/>
+                      <a:tailEnd type="none" w="med" len="med"/>
+                    </a:lnL>
+                    <a:lnR w="12700" cap="flat" cmpd="sng" algn="ctr">
+                      <a:solidFill>
+                        <a:schemeClr val="tx1"/>
+                      </a:solidFill>
+                      <a:prstDash val="solid"/>
+                      <a:round/>
+                      <a:headEnd type="none" w="med" len="med"/>
+                      <a:tailEnd type="none" w="med" len="med"/>
+                    </a:lnR>
+                    <a:lnT w="12700" cap="flat" cmpd="sng" algn="ctr">
+                      <a:solidFill>
+                        <a:schemeClr val="tx1"/>
+                      </a:solidFill>
+                      <a:prstDash val="solid"/>
+                      <a:round/>
+                      <a:headEnd type="none" w="med" len="med"/>
+                      <a:tailEnd type="none" w="med" len="med"/>
+                    </a:lnT>
+                    <a:lnB w="12700" cap="flat" cmpd="sng" algn="ctr">
+                      <a:solidFill>
+                        <a:schemeClr val="tx1"/>
+                      </a:solidFill>
+                      <a:prstDash val="solid"/>
+                      <a:round/>
+                      <a:headEnd type="none" w="med" len="med"/>
+                      <a:tailEnd type="none" w="med" len="med"/>
+                    </a:lnB>
+                    <a:solidFill>
+                      <a:srgbClr val="FFFAEF"/>
+                    </a:solidFill>
+                  </a:tcPr>
                 </a:tc>
                 <a:extLst>
                   <a:ext uri="{0D108BD9-81ED-4DB2-BD59-A6C34878D82A}">
@@ -9207,7 +14960,47 @@
                       </a:endParaRPr>
                     </a:p>
                   </a:txBody>
-                  <a:tcPr marL="9525" marR="9525" marT="9525" marB="0" anchor="b"/>
+                  <a:tcPr marL="9525" marR="9525" marT="9525" marB="0" anchor="b">
+                    <a:lnL w="12700" cap="flat" cmpd="sng" algn="ctr">
+                      <a:solidFill>
+                        <a:schemeClr val="tx1"/>
+                      </a:solidFill>
+                      <a:prstDash val="solid"/>
+                      <a:round/>
+                      <a:headEnd type="none" w="med" len="med"/>
+                      <a:tailEnd type="none" w="med" len="med"/>
+                    </a:lnL>
+                    <a:lnR w="12700" cap="flat" cmpd="sng" algn="ctr">
+                      <a:solidFill>
+                        <a:schemeClr val="tx1"/>
+                      </a:solidFill>
+                      <a:prstDash val="solid"/>
+                      <a:round/>
+                      <a:headEnd type="none" w="med" len="med"/>
+                      <a:tailEnd type="none" w="med" len="med"/>
+                    </a:lnR>
+                    <a:lnT w="12700" cap="flat" cmpd="sng" algn="ctr">
+                      <a:solidFill>
+                        <a:schemeClr val="tx1"/>
+                      </a:solidFill>
+                      <a:prstDash val="solid"/>
+                      <a:round/>
+                      <a:headEnd type="none" w="med" len="med"/>
+                      <a:tailEnd type="none" w="med" len="med"/>
+                    </a:lnT>
+                    <a:lnB w="12700" cap="flat" cmpd="sng" algn="ctr">
+                      <a:solidFill>
+                        <a:schemeClr val="tx1"/>
+                      </a:solidFill>
+                      <a:prstDash val="solid"/>
+                      <a:round/>
+                      <a:headEnd type="none" w="med" len="med"/>
+                      <a:tailEnd type="none" w="med" len="med"/>
+                    </a:lnB>
+                    <a:solidFill>
+                      <a:srgbClr val="FFFAEF"/>
+                    </a:solidFill>
+                  </a:tcPr>
                 </a:tc>
                 <a:tc>
                   <a:txBody>
@@ -9232,7 +15025,47 @@
                       </a:endParaRPr>
                     </a:p>
                   </a:txBody>
-                  <a:tcPr marL="9525" marR="9525" marT="9525" marB="0" anchor="b"/>
+                  <a:tcPr marL="9525" marR="9525" marT="9525" marB="0" anchor="b">
+                    <a:lnL w="12700" cap="flat" cmpd="sng" algn="ctr">
+                      <a:solidFill>
+                        <a:schemeClr val="tx1"/>
+                      </a:solidFill>
+                      <a:prstDash val="solid"/>
+                      <a:round/>
+                      <a:headEnd type="none" w="med" len="med"/>
+                      <a:tailEnd type="none" w="med" len="med"/>
+                    </a:lnL>
+                    <a:lnR w="12700" cap="flat" cmpd="sng" algn="ctr">
+                      <a:solidFill>
+                        <a:schemeClr val="tx1"/>
+                      </a:solidFill>
+                      <a:prstDash val="solid"/>
+                      <a:round/>
+                      <a:headEnd type="none" w="med" len="med"/>
+                      <a:tailEnd type="none" w="med" len="med"/>
+                    </a:lnR>
+                    <a:lnT w="12700" cap="flat" cmpd="sng" algn="ctr">
+                      <a:solidFill>
+                        <a:schemeClr val="tx1"/>
+                      </a:solidFill>
+                      <a:prstDash val="solid"/>
+                      <a:round/>
+                      <a:headEnd type="none" w="med" len="med"/>
+                      <a:tailEnd type="none" w="med" len="med"/>
+                    </a:lnT>
+                    <a:lnB w="12700" cap="flat" cmpd="sng" algn="ctr">
+                      <a:solidFill>
+                        <a:schemeClr val="tx1"/>
+                      </a:solidFill>
+                      <a:prstDash val="solid"/>
+                      <a:round/>
+                      <a:headEnd type="none" w="med" len="med"/>
+                      <a:tailEnd type="none" w="med" len="med"/>
+                    </a:lnB>
+                    <a:solidFill>
+                      <a:srgbClr val="FFFAEF"/>
+                    </a:solidFill>
+                  </a:tcPr>
                 </a:tc>
                 <a:tc>
                   <a:txBody>
@@ -9257,7 +15090,47 @@
                       </a:endParaRPr>
                     </a:p>
                   </a:txBody>
-                  <a:tcPr marL="9525" marR="9525" marT="9525" marB="0" anchor="b"/>
+                  <a:tcPr marL="9525" marR="9525" marT="9525" marB="0" anchor="b">
+                    <a:lnL w="12700" cap="flat" cmpd="sng" algn="ctr">
+                      <a:solidFill>
+                        <a:schemeClr val="tx1"/>
+                      </a:solidFill>
+                      <a:prstDash val="solid"/>
+                      <a:round/>
+                      <a:headEnd type="none" w="med" len="med"/>
+                      <a:tailEnd type="none" w="med" len="med"/>
+                    </a:lnL>
+                    <a:lnR w="12700" cap="flat" cmpd="sng" algn="ctr">
+                      <a:solidFill>
+                        <a:schemeClr val="tx1"/>
+                      </a:solidFill>
+                      <a:prstDash val="solid"/>
+                      <a:round/>
+                      <a:headEnd type="none" w="med" len="med"/>
+                      <a:tailEnd type="none" w="med" len="med"/>
+                    </a:lnR>
+                    <a:lnT w="12700" cap="flat" cmpd="sng" algn="ctr">
+                      <a:solidFill>
+                        <a:schemeClr val="tx1"/>
+                      </a:solidFill>
+                      <a:prstDash val="solid"/>
+                      <a:round/>
+                      <a:headEnd type="none" w="med" len="med"/>
+                      <a:tailEnd type="none" w="med" len="med"/>
+                    </a:lnT>
+                    <a:lnB w="12700" cap="flat" cmpd="sng" algn="ctr">
+                      <a:solidFill>
+                        <a:schemeClr val="tx1"/>
+                      </a:solidFill>
+                      <a:prstDash val="solid"/>
+                      <a:round/>
+                      <a:headEnd type="none" w="med" len="med"/>
+                      <a:tailEnd type="none" w="med" len="med"/>
+                    </a:lnB>
+                    <a:solidFill>
+                      <a:srgbClr val="FFFAEF"/>
+                    </a:solidFill>
+                  </a:tcPr>
                 </a:tc>
                 <a:extLst>
                   <a:ext uri="{0D108BD9-81ED-4DB2-BD59-A6C34878D82A}">
@@ -9284,7 +15157,7 @@
           <p:nvPr>
             <p:extLst>
               <p:ext uri="{D42A27DB-BD31-4B8C-83A1-F6EECF244321}">
-                <p14:modId xmlns:p14="http://schemas.microsoft.com/office/powerpoint/2010/main" val="2234663484"/>
+                <p14:modId xmlns:p14="http://schemas.microsoft.com/office/powerpoint/2010/main" val="2295079585"/>
               </p:ext>
             </p:extLst>
           </p:nvPr>
@@ -9346,7 +15219,47 @@
                       </a:endParaRPr>
                     </a:p>
                   </a:txBody>
-                  <a:tcPr marL="9525" marR="9525" marT="9525" marB="0" anchor="b"/>
+                  <a:tcPr marL="9525" marR="9525" marT="9525" marB="0" anchor="b">
+                    <a:lnL w="12700" cap="flat" cmpd="sng" algn="ctr">
+                      <a:solidFill>
+                        <a:schemeClr val="tx1"/>
+                      </a:solidFill>
+                      <a:prstDash val="solid"/>
+                      <a:round/>
+                      <a:headEnd type="none" w="med" len="med"/>
+                      <a:tailEnd type="none" w="med" len="med"/>
+                    </a:lnL>
+                    <a:lnR w="12700" cap="flat" cmpd="sng" algn="ctr">
+                      <a:solidFill>
+                        <a:schemeClr val="tx1"/>
+                      </a:solidFill>
+                      <a:prstDash val="solid"/>
+                      <a:round/>
+                      <a:headEnd type="none" w="med" len="med"/>
+                      <a:tailEnd type="none" w="med" len="med"/>
+                    </a:lnR>
+                    <a:lnT w="12700" cap="flat" cmpd="sng" algn="ctr">
+                      <a:solidFill>
+                        <a:schemeClr val="tx1"/>
+                      </a:solidFill>
+                      <a:prstDash val="solid"/>
+                      <a:round/>
+                      <a:headEnd type="none" w="med" len="med"/>
+                      <a:tailEnd type="none" w="med" len="med"/>
+                    </a:lnT>
+                    <a:lnB w="12700" cap="flat" cmpd="sng" algn="ctr">
+                      <a:solidFill>
+                        <a:schemeClr val="tx1"/>
+                      </a:solidFill>
+                      <a:prstDash val="solid"/>
+                      <a:round/>
+                      <a:headEnd type="none" w="med" len="med"/>
+                      <a:tailEnd type="none" w="med" len="med"/>
+                    </a:lnB>
+                    <a:solidFill>
+                      <a:srgbClr val="FFFAEF"/>
+                    </a:solidFill>
+                  </a:tcPr>
                 </a:tc>
                 <a:tc>
                   <a:txBody>
@@ -9371,7 +15284,47 @@
                       </a:endParaRPr>
                     </a:p>
                   </a:txBody>
-                  <a:tcPr marL="9525" marR="9525" marT="9525" marB="0" anchor="b"/>
+                  <a:tcPr marL="9525" marR="9525" marT="9525" marB="0" anchor="b">
+                    <a:lnL w="12700" cap="flat" cmpd="sng" algn="ctr">
+                      <a:solidFill>
+                        <a:schemeClr val="tx1"/>
+                      </a:solidFill>
+                      <a:prstDash val="solid"/>
+                      <a:round/>
+                      <a:headEnd type="none" w="med" len="med"/>
+                      <a:tailEnd type="none" w="med" len="med"/>
+                    </a:lnL>
+                    <a:lnR w="12700" cap="flat" cmpd="sng" algn="ctr">
+                      <a:solidFill>
+                        <a:schemeClr val="tx1"/>
+                      </a:solidFill>
+                      <a:prstDash val="solid"/>
+                      <a:round/>
+                      <a:headEnd type="none" w="med" len="med"/>
+                      <a:tailEnd type="none" w="med" len="med"/>
+                    </a:lnR>
+                    <a:lnT w="12700" cap="flat" cmpd="sng" algn="ctr">
+                      <a:solidFill>
+                        <a:schemeClr val="tx1"/>
+                      </a:solidFill>
+                      <a:prstDash val="solid"/>
+                      <a:round/>
+                      <a:headEnd type="none" w="med" len="med"/>
+                      <a:tailEnd type="none" w="med" len="med"/>
+                    </a:lnT>
+                    <a:lnB w="12700" cap="flat" cmpd="sng" algn="ctr">
+                      <a:solidFill>
+                        <a:schemeClr val="tx1"/>
+                      </a:solidFill>
+                      <a:prstDash val="solid"/>
+                      <a:round/>
+                      <a:headEnd type="none" w="med" len="med"/>
+                      <a:tailEnd type="none" w="med" len="med"/>
+                    </a:lnB>
+                    <a:solidFill>
+                      <a:srgbClr val="FFFAEF"/>
+                    </a:solidFill>
+                  </a:tcPr>
                 </a:tc>
                 <a:tc>
                   <a:txBody>
@@ -9396,7 +15349,47 @@
                       </a:endParaRPr>
                     </a:p>
                   </a:txBody>
-                  <a:tcPr marL="9525" marR="9525" marT="9525" marB="0" anchor="b"/>
+                  <a:tcPr marL="9525" marR="9525" marT="9525" marB="0" anchor="b">
+                    <a:lnL w="12700" cap="flat" cmpd="sng" algn="ctr">
+                      <a:solidFill>
+                        <a:schemeClr val="tx1"/>
+                      </a:solidFill>
+                      <a:prstDash val="solid"/>
+                      <a:round/>
+                      <a:headEnd type="none" w="med" len="med"/>
+                      <a:tailEnd type="none" w="med" len="med"/>
+                    </a:lnL>
+                    <a:lnR w="12700" cap="flat" cmpd="sng" algn="ctr">
+                      <a:solidFill>
+                        <a:schemeClr val="tx1"/>
+                      </a:solidFill>
+                      <a:prstDash val="solid"/>
+                      <a:round/>
+                      <a:headEnd type="none" w="med" len="med"/>
+                      <a:tailEnd type="none" w="med" len="med"/>
+                    </a:lnR>
+                    <a:lnT w="12700" cap="flat" cmpd="sng" algn="ctr">
+                      <a:solidFill>
+                        <a:schemeClr val="tx1"/>
+                      </a:solidFill>
+                      <a:prstDash val="solid"/>
+                      <a:round/>
+                      <a:headEnd type="none" w="med" len="med"/>
+                      <a:tailEnd type="none" w="med" len="med"/>
+                    </a:lnT>
+                    <a:lnB w="12700" cap="flat" cmpd="sng" algn="ctr">
+                      <a:solidFill>
+                        <a:schemeClr val="tx1"/>
+                      </a:solidFill>
+                      <a:prstDash val="solid"/>
+                      <a:round/>
+                      <a:headEnd type="none" w="med" len="med"/>
+                      <a:tailEnd type="none" w="med" len="med"/>
+                    </a:lnB>
+                    <a:solidFill>
+                      <a:srgbClr val="FFFAEF"/>
+                    </a:solidFill>
+                  </a:tcPr>
                 </a:tc>
                 <a:extLst>
                   <a:ext uri="{0D108BD9-81ED-4DB2-BD59-A6C34878D82A}">
@@ -9428,7 +15421,47 @@
                       </a:endParaRPr>
                     </a:p>
                   </a:txBody>
-                  <a:tcPr marL="9525" marR="9525" marT="9525" marB="0" anchor="b"/>
+                  <a:tcPr marL="9525" marR="9525" marT="9525" marB="0" anchor="b">
+                    <a:lnL w="12700" cap="flat" cmpd="sng" algn="ctr">
+                      <a:solidFill>
+                        <a:schemeClr val="tx1"/>
+                      </a:solidFill>
+                      <a:prstDash val="solid"/>
+                      <a:round/>
+                      <a:headEnd type="none" w="med" len="med"/>
+                      <a:tailEnd type="none" w="med" len="med"/>
+                    </a:lnL>
+                    <a:lnR w="12700" cap="flat" cmpd="sng" algn="ctr">
+                      <a:solidFill>
+                        <a:schemeClr val="tx1"/>
+                      </a:solidFill>
+                      <a:prstDash val="solid"/>
+                      <a:round/>
+                      <a:headEnd type="none" w="med" len="med"/>
+                      <a:tailEnd type="none" w="med" len="med"/>
+                    </a:lnR>
+                    <a:lnT w="12700" cap="flat" cmpd="sng" algn="ctr">
+                      <a:solidFill>
+                        <a:schemeClr val="tx1"/>
+                      </a:solidFill>
+                      <a:prstDash val="solid"/>
+                      <a:round/>
+                      <a:headEnd type="none" w="med" len="med"/>
+                      <a:tailEnd type="none" w="med" len="med"/>
+                    </a:lnT>
+                    <a:lnB w="12700" cap="flat" cmpd="sng" algn="ctr">
+                      <a:solidFill>
+                        <a:schemeClr val="tx1"/>
+                      </a:solidFill>
+                      <a:prstDash val="solid"/>
+                      <a:round/>
+                      <a:headEnd type="none" w="med" len="med"/>
+                      <a:tailEnd type="none" w="med" len="med"/>
+                    </a:lnB>
+                    <a:solidFill>
+                      <a:srgbClr val="FFFAEF"/>
+                    </a:solidFill>
+                  </a:tcPr>
                 </a:tc>
                 <a:tc>
                   <a:txBody>
@@ -9453,7 +15486,47 @@
                       </a:endParaRPr>
                     </a:p>
                   </a:txBody>
-                  <a:tcPr marL="9525" marR="9525" marT="9525" marB="0" anchor="b"/>
+                  <a:tcPr marL="9525" marR="9525" marT="9525" marB="0" anchor="b">
+                    <a:lnL w="12700" cap="flat" cmpd="sng" algn="ctr">
+                      <a:solidFill>
+                        <a:schemeClr val="tx1"/>
+                      </a:solidFill>
+                      <a:prstDash val="solid"/>
+                      <a:round/>
+                      <a:headEnd type="none" w="med" len="med"/>
+                      <a:tailEnd type="none" w="med" len="med"/>
+                    </a:lnL>
+                    <a:lnR w="12700" cap="flat" cmpd="sng" algn="ctr">
+                      <a:solidFill>
+                        <a:schemeClr val="tx1"/>
+                      </a:solidFill>
+                      <a:prstDash val="solid"/>
+                      <a:round/>
+                      <a:headEnd type="none" w="med" len="med"/>
+                      <a:tailEnd type="none" w="med" len="med"/>
+                    </a:lnR>
+                    <a:lnT w="12700" cap="flat" cmpd="sng" algn="ctr">
+                      <a:solidFill>
+                        <a:schemeClr val="tx1"/>
+                      </a:solidFill>
+                      <a:prstDash val="solid"/>
+                      <a:round/>
+                      <a:headEnd type="none" w="med" len="med"/>
+                      <a:tailEnd type="none" w="med" len="med"/>
+                    </a:lnT>
+                    <a:lnB w="12700" cap="flat" cmpd="sng" algn="ctr">
+                      <a:solidFill>
+                        <a:schemeClr val="tx1"/>
+                      </a:solidFill>
+                      <a:prstDash val="solid"/>
+                      <a:round/>
+                      <a:headEnd type="none" w="med" len="med"/>
+                      <a:tailEnd type="none" w="med" len="med"/>
+                    </a:lnB>
+                    <a:solidFill>
+                      <a:srgbClr val="FFFAEF"/>
+                    </a:solidFill>
+                  </a:tcPr>
                 </a:tc>
                 <a:tc>
                   <a:txBody>
@@ -9478,7 +15551,47 @@
                       </a:endParaRPr>
                     </a:p>
                   </a:txBody>
-                  <a:tcPr marL="9525" marR="9525" marT="9525" marB="0" anchor="b"/>
+                  <a:tcPr marL="9525" marR="9525" marT="9525" marB="0" anchor="b">
+                    <a:lnL w="12700" cap="flat" cmpd="sng" algn="ctr">
+                      <a:solidFill>
+                        <a:schemeClr val="tx1"/>
+                      </a:solidFill>
+                      <a:prstDash val="solid"/>
+                      <a:round/>
+                      <a:headEnd type="none" w="med" len="med"/>
+                      <a:tailEnd type="none" w="med" len="med"/>
+                    </a:lnL>
+                    <a:lnR w="12700" cap="flat" cmpd="sng" algn="ctr">
+                      <a:solidFill>
+                        <a:schemeClr val="tx1"/>
+                      </a:solidFill>
+                      <a:prstDash val="solid"/>
+                      <a:round/>
+                      <a:headEnd type="none" w="med" len="med"/>
+                      <a:tailEnd type="none" w="med" len="med"/>
+                    </a:lnR>
+                    <a:lnT w="12700" cap="flat" cmpd="sng" algn="ctr">
+                      <a:solidFill>
+                        <a:schemeClr val="tx1"/>
+                      </a:solidFill>
+                      <a:prstDash val="solid"/>
+                      <a:round/>
+                      <a:headEnd type="none" w="med" len="med"/>
+                      <a:tailEnd type="none" w="med" len="med"/>
+                    </a:lnT>
+                    <a:lnB w="12700" cap="flat" cmpd="sng" algn="ctr">
+                      <a:solidFill>
+                        <a:schemeClr val="tx1"/>
+                      </a:solidFill>
+                      <a:prstDash val="solid"/>
+                      <a:round/>
+                      <a:headEnd type="none" w="med" len="med"/>
+                      <a:tailEnd type="none" w="med" len="med"/>
+                    </a:lnB>
+                    <a:solidFill>
+                      <a:srgbClr val="FFFAEF"/>
+                    </a:solidFill>
+                  </a:tcPr>
                 </a:tc>
                 <a:extLst>
                   <a:ext uri="{0D108BD9-81ED-4DB2-BD59-A6C34878D82A}">
@@ -9510,7 +15623,47 @@
                       </a:endParaRPr>
                     </a:p>
                   </a:txBody>
-                  <a:tcPr marL="9525" marR="9525" marT="9525" marB="0" anchor="b"/>
+                  <a:tcPr marL="9525" marR="9525" marT="9525" marB="0" anchor="b">
+                    <a:lnL w="12700" cap="flat" cmpd="sng" algn="ctr">
+                      <a:solidFill>
+                        <a:schemeClr val="tx1"/>
+                      </a:solidFill>
+                      <a:prstDash val="solid"/>
+                      <a:round/>
+                      <a:headEnd type="none" w="med" len="med"/>
+                      <a:tailEnd type="none" w="med" len="med"/>
+                    </a:lnL>
+                    <a:lnR w="12700" cap="flat" cmpd="sng" algn="ctr">
+                      <a:solidFill>
+                        <a:schemeClr val="tx1"/>
+                      </a:solidFill>
+                      <a:prstDash val="solid"/>
+                      <a:round/>
+                      <a:headEnd type="none" w="med" len="med"/>
+                      <a:tailEnd type="none" w="med" len="med"/>
+                    </a:lnR>
+                    <a:lnT w="12700" cap="flat" cmpd="sng" algn="ctr">
+                      <a:solidFill>
+                        <a:schemeClr val="tx1"/>
+                      </a:solidFill>
+                      <a:prstDash val="solid"/>
+                      <a:round/>
+                      <a:headEnd type="none" w="med" len="med"/>
+                      <a:tailEnd type="none" w="med" len="med"/>
+                    </a:lnT>
+                    <a:lnB w="12700" cap="flat" cmpd="sng" algn="ctr">
+                      <a:solidFill>
+                        <a:schemeClr val="tx1"/>
+                      </a:solidFill>
+                      <a:prstDash val="solid"/>
+                      <a:round/>
+                      <a:headEnd type="none" w="med" len="med"/>
+                      <a:tailEnd type="none" w="med" len="med"/>
+                    </a:lnB>
+                    <a:solidFill>
+                      <a:srgbClr val="FFFAEF"/>
+                    </a:solidFill>
+                  </a:tcPr>
                 </a:tc>
                 <a:tc>
                   <a:txBody>
@@ -9535,7 +15688,47 @@
                       </a:endParaRPr>
                     </a:p>
                   </a:txBody>
-                  <a:tcPr marL="9525" marR="9525" marT="9525" marB="0" anchor="b"/>
+                  <a:tcPr marL="9525" marR="9525" marT="9525" marB="0" anchor="b">
+                    <a:lnL w="12700" cap="flat" cmpd="sng" algn="ctr">
+                      <a:solidFill>
+                        <a:schemeClr val="tx1"/>
+                      </a:solidFill>
+                      <a:prstDash val="solid"/>
+                      <a:round/>
+                      <a:headEnd type="none" w="med" len="med"/>
+                      <a:tailEnd type="none" w="med" len="med"/>
+                    </a:lnL>
+                    <a:lnR w="12700" cap="flat" cmpd="sng" algn="ctr">
+                      <a:solidFill>
+                        <a:schemeClr val="tx1"/>
+                      </a:solidFill>
+                      <a:prstDash val="solid"/>
+                      <a:round/>
+                      <a:headEnd type="none" w="med" len="med"/>
+                      <a:tailEnd type="none" w="med" len="med"/>
+                    </a:lnR>
+                    <a:lnT w="12700" cap="flat" cmpd="sng" algn="ctr">
+                      <a:solidFill>
+                        <a:schemeClr val="tx1"/>
+                      </a:solidFill>
+                      <a:prstDash val="solid"/>
+                      <a:round/>
+                      <a:headEnd type="none" w="med" len="med"/>
+                      <a:tailEnd type="none" w="med" len="med"/>
+                    </a:lnT>
+                    <a:lnB w="12700" cap="flat" cmpd="sng" algn="ctr">
+                      <a:solidFill>
+                        <a:schemeClr val="tx1"/>
+                      </a:solidFill>
+                      <a:prstDash val="solid"/>
+                      <a:round/>
+                      <a:headEnd type="none" w="med" len="med"/>
+                      <a:tailEnd type="none" w="med" len="med"/>
+                    </a:lnB>
+                    <a:solidFill>
+                      <a:srgbClr val="FFFAEF"/>
+                    </a:solidFill>
+                  </a:tcPr>
                 </a:tc>
                 <a:tc>
                   <a:txBody>
@@ -9560,7 +15753,47 @@
                       </a:endParaRPr>
                     </a:p>
                   </a:txBody>
-                  <a:tcPr marL="9525" marR="9525" marT="9525" marB="0" anchor="b"/>
+                  <a:tcPr marL="9525" marR="9525" marT="9525" marB="0" anchor="b">
+                    <a:lnL w="12700" cap="flat" cmpd="sng" algn="ctr">
+                      <a:solidFill>
+                        <a:schemeClr val="tx1"/>
+                      </a:solidFill>
+                      <a:prstDash val="solid"/>
+                      <a:round/>
+                      <a:headEnd type="none" w="med" len="med"/>
+                      <a:tailEnd type="none" w="med" len="med"/>
+                    </a:lnL>
+                    <a:lnR w="12700" cap="flat" cmpd="sng" algn="ctr">
+                      <a:solidFill>
+                        <a:schemeClr val="tx1"/>
+                      </a:solidFill>
+                      <a:prstDash val="solid"/>
+                      <a:round/>
+                      <a:headEnd type="none" w="med" len="med"/>
+                      <a:tailEnd type="none" w="med" len="med"/>
+                    </a:lnR>
+                    <a:lnT w="12700" cap="flat" cmpd="sng" algn="ctr">
+                      <a:solidFill>
+                        <a:schemeClr val="tx1"/>
+                      </a:solidFill>
+                      <a:prstDash val="solid"/>
+                      <a:round/>
+                      <a:headEnd type="none" w="med" len="med"/>
+                      <a:tailEnd type="none" w="med" len="med"/>
+                    </a:lnT>
+                    <a:lnB w="12700" cap="flat" cmpd="sng" algn="ctr">
+                      <a:solidFill>
+                        <a:schemeClr val="tx1"/>
+                      </a:solidFill>
+                      <a:prstDash val="solid"/>
+                      <a:round/>
+                      <a:headEnd type="none" w="med" len="med"/>
+                      <a:tailEnd type="none" w="med" len="med"/>
+                    </a:lnB>
+                    <a:solidFill>
+                      <a:srgbClr val="FFFAEF"/>
+                    </a:solidFill>
+                  </a:tcPr>
                 </a:tc>
                 <a:extLst>
                   <a:ext uri="{0D108BD9-81ED-4DB2-BD59-A6C34878D82A}">
@@ -9592,7 +15825,47 @@
                       </a:endParaRPr>
                     </a:p>
                   </a:txBody>
-                  <a:tcPr marL="9525" marR="9525" marT="9525" marB="0" anchor="b"/>
+                  <a:tcPr marL="9525" marR="9525" marT="9525" marB="0" anchor="b">
+                    <a:lnL w="12700" cap="flat" cmpd="sng" algn="ctr">
+                      <a:solidFill>
+                        <a:schemeClr val="tx1"/>
+                      </a:solidFill>
+                      <a:prstDash val="solid"/>
+                      <a:round/>
+                      <a:headEnd type="none" w="med" len="med"/>
+                      <a:tailEnd type="none" w="med" len="med"/>
+                    </a:lnL>
+                    <a:lnR w="12700" cap="flat" cmpd="sng" algn="ctr">
+                      <a:solidFill>
+                        <a:schemeClr val="tx1"/>
+                      </a:solidFill>
+                      <a:prstDash val="solid"/>
+                      <a:round/>
+                      <a:headEnd type="none" w="med" len="med"/>
+                      <a:tailEnd type="none" w="med" len="med"/>
+                    </a:lnR>
+                    <a:lnT w="12700" cap="flat" cmpd="sng" algn="ctr">
+                      <a:solidFill>
+                        <a:schemeClr val="tx1"/>
+                      </a:solidFill>
+                      <a:prstDash val="solid"/>
+                      <a:round/>
+                      <a:headEnd type="none" w="med" len="med"/>
+                      <a:tailEnd type="none" w="med" len="med"/>
+                    </a:lnT>
+                    <a:lnB w="12700" cap="flat" cmpd="sng" algn="ctr">
+                      <a:solidFill>
+                        <a:schemeClr val="tx1"/>
+                      </a:solidFill>
+                      <a:prstDash val="solid"/>
+                      <a:round/>
+                      <a:headEnd type="none" w="med" len="med"/>
+                      <a:tailEnd type="none" w="med" len="med"/>
+                    </a:lnB>
+                    <a:solidFill>
+                      <a:srgbClr val="FFFAEF"/>
+                    </a:solidFill>
+                  </a:tcPr>
                 </a:tc>
                 <a:tc>
                   <a:txBody>
@@ -9617,7 +15890,47 @@
                       </a:endParaRPr>
                     </a:p>
                   </a:txBody>
-                  <a:tcPr marL="9525" marR="9525" marT="9525" marB="0" anchor="b"/>
+                  <a:tcPr marL="9525" marR="9525" marT="9525" marB="0" anchor="b">
+                    <a:lnL w="12700" cap="flat" cmpd="sng" algn="ctr">
+                      <a:solidFill>
+                        <a:schemeClr val="tx1"/>
+                      </a:solidFill>
+                      <a:prstDash val="solid"/>
+                      <a:round/>
+                      <a:headEnd type="none" w="med" len="med"/>
+                      <a:tailEnd type="none" w="med" len="med"/>
+                    </a:lnL>
+                    <a:lnR w="12700" cap="flat" cmpd="sng" algn="ctr">
+                      <a:solidFill>
+                        <a:schemeClr val="tx1"/>
+                      </a:solidFill>
+                      <a:prstDash val="solid"/>
+                      <a:round/>
+                      <a:headEnd type="none" w="med" len="med"/>
+                      <a:tailEnd type="none" w="med" len="med"/>
+                    </a:lnR>
+                    <a:lnT w="12700" cap="flat" cmpd="sng" algn="ctr">
+                      <a:solidFill>
+                        <a:schemeClr val="tx1"/>
+                      </a:solidFill>
+                      <a:prstDash val="solid"/>
+                      <a:round/>
+                      <a:headEnd type="none" w="med" len="med"/>
+                      <a:tailEnd type="none" w="med" len="med"/>
+                    </a:lnT>
+                    <a:lnB w="12700" cap="flat" cmpd="sng" algn="ctr">
+                      <a:solidFill>
+                        <a:schemeClr val="tx1"/>
+                      </a:solidFill>
+                      <a:prstDash val="solid"/>
+                      <a:round/>
+                      <a:headEnd type="none" w="med" len="med"/>
+                      <a:tailEnd type="none" w="med" len="med"/>
+                    </a:lnB>
+                    <a:solidFill>
+                      <a:srgbClr val="FFFAEF"/>
+                    </a:solidFill>
+                  </a:tcPr>
                 </a:tc>
                 <a:tc>
                   <a:txBody>
@@ -9642,7 +15955,47 @@
                       </a:endParaRPr>
                     </a:p>
                   </a:txBody>
-                  <a:tcPr marL="9525" marR="9525" marT="9525" marB="0" anchor="b"/>
+                  <a:tcPr marL="9525" marR="9525" marT="9525" marB="0" anchor="b">
+                    <a:lnL w="12700" cap="flat" cmpd="sng" algn="ctr">
+                      <a:solidFill>
+                        <a:schemeClr val="tx1"/>
+                      </a:solidFill>
+                      <a:prstDash val="solid"/>
+                      <a:round/>
+                      <a:headEnd type="none" w="med" len="med"/>
+                      <a:tailEnd type="none" w="med" len="med"/>
+                    </a:lnL>
+                    <a:lnR w="12700" cap="flat" cmpd="sng" algn="ctr">
+                      <a:solidFill>
+                        <a:schemeClr val="tx1"/>
+                      </a:solidFill>
+                      <a:prstDash val="solid"/>
+                      <a:round/>
+                      <a:headEnd type="none" w="med" len="med"/>
+                      <a:tailEnd type="none" w="med" len="med"/>
+                    </a:lnR>
+                    <a:lnT w="12700" cap="flat" cmpd="sng" algn="ctr">
+                      <a:solidFill>
+                        <a:schemeClr val="tx1"/>
+                      </a:solidFill>
+                      <a:prstDash val="solid"/>
+                      <a:round/>
+                      <a:headEnd type="none" w="med" len="med"/>
+                      <a:tailEnd type="none" w="med" len="med"/>
+                    </a:lnT>
+                    <a:lnB w="12700" cap="flat" cmpd="sng" algn="ctr">
+                      <a:solidFill>
+                        <a:schemeClr val="tx1"/>
+                      </a:solidFill>
+                      <a:prstDash val="solid"/>
+                      <a:round/>
+                      <a:headEnd type="none" w="med" len="med"/>
+                      <a:tailEnd type="none" w="med" len="med"/>
+                    </a:lnB>
+                    <a:solidFill>
+                      <a:srgbClr val="FFFAEF"/>
+                    </a:solidFill>
+                  </a:tcPr>
                 </a:tc>
                 <a:extLst>
                   <a:ext uri="{0D108BD9-81ED-4DB2-BD59-A6C34878D82A}">
@@ -9674,7 +16027,47 @@
                       </a:endParaRPr>
                     </a:p>
                   </a:txBody>
-                  <a:tcPr marL="9525" marR="9525" marT="9525" marB="0" anchor="b"/>
+                  <a:tcPr marL="9525" marR="9525" marT="9525" marB="0" anchor="b">
+                    <a:lnL w="12700" cap="flat" cmpd="sng" algn="ctr">
+                      <a:solidFill>
+                        <a:schemeClr val="tx1"/>
+                      </a:solidFill>
+                      <a:prstDash val="solid"/>
+                      <a:round/>
+                      <a:headEnd type="none" w="med" len="med"/>
+                      <a:tailEnd type="none" w="med" len="med"/>
+                    </a:lnL>
+                    <a:lnR w="12700" cap="flat" cmpd="sng" algn="ctr">
+                      <a:solidFill>
+                        <a:schemeClr val="tx1"/>
+                      </a:solidFill>
+                      <a:prstDash val="solid"/>
+                      <a:round/>
+                      <a:headEnd type="none" w="med" len="med"/>
+                      <a:tailEnd type="none" w="med" len="med"/>
+                    </a:lnR>
+                    <a:lnT w="12700" cap="flat" cmpd="sng" algn="ctr">
+                      <a:solidFill>
+                        <a:schemeClr val="tx1"/>
+                      </a:solidFill>
+                      <a:prstDash val="solid"/>
+                      <a:round/>
+                      <a:headEnd type="none" w="med" len="med"/>
+                      <a:tailEnd type="none" w="med" len="med"/>
+                    </a:lnT>
+                    <a:lnB w="12700" cap="flat" cmpd="sng" algn="ctr">
+                      <a:solidFill>
+                        <a:schemeClr val="tx1"/>
+                      </a:solidFill>
+                      <a:prstDash val="solid"/>
+                      <a:round/>
+                      <a:headEnd type="none" w="med" len="med"/>
+                      <a:tailEnd type="none" w="med" len="med"/>
+                    </a:lnB>
+                    <a:solidFill>
+                      <a:srgbClr val="FFFAEF"/>
+                    </a:solidFill>
+                  </a:tcPr>
                 </a:tc>
                 <a:tc>
                   <a:txBody>
@@ -9699,7 +16092,47 @@
                       </a:endParaRPr>
                     </a:p>
                   </a:txBody>
-                  <a:tcPr marL="9525" marR="9525" marT="9525" marB="0" anchor="b"/>
+                  <a:tcPr marL="9525" marR="9525" marT="9525" marB="0" anchor="b">
+                    <a:lnL w="12700" cap="flat" cmpd="sng" algn="ctr">
+                      <a:solidFill>
+                        <a:schemeClr val="tx1"/>
+                      </a:solidFill>
+                      <a:prstDash val="solid"/>
+                      <a:round/>
+                      <a:headEnd type="none" w="med" len="med"/>
+                      <a:tailEnd type="none" w="med" len="med"/>
+                    </a:lnL>
+                    <a:lnR w="12700" cap="flat" cmpd="sng" algn="ctr">
+                      <a:solidFill>
+                        <a:schemeClr val="tx1"/>
+                      </a:solidFill>
+                      <a:prstDash val="solid"/>
+                      <a:round/>
+                      <a:headEnd type="none" w="med" len="med"/>
+                      <a:tailEnd type="none" w="med" len="med"/>
+                    </a:lnR>
+                    <a:lnT w="12700" cap="flat" cmpd="sng" algn="ctr">
+                      <a:solidFill>
+                        <a:schemeClr val="tx1"/>
+                      </a:solidFill>
+                      <a:prstDash val="solid"/>
+                      <a:round/>
+                      <a:headEnd type="none" w="med" len="med"/>
+                      <a:tailEnd type="none" w="med" len="med"/>
+                    </a:lnT>
+                    <a:lnB w="12700" cap="flat" cmpd="sng" algn="ctr">
+                      <a:solidFill>
+                        <a:schemeClr val="tx1"/>
+                      </a:solidFill>
+                      <a:prstDash val="solid"/>
+                      <a:round/>
+                      <a:headEnd type="none" w="med" len="med"/>
+                      <a:tailEnd type="none" w="med" len="med"/>
+                    </a:lnB>
+                    <a:solidFill>
+                      <a:srgbClr val="FFFAEF"/>
+                    </a:solidFill>
+                  </a:tcPr>
                 </a:tc>
                 <a:tc>
                   <a:txBody>
@@ -9724,7 +16157,47 @@
                       </a:endParaRPr>
                     </a:p>
                   </a:txBody>
-                  <a:tcPr marL="9525" marR="9525" marT="9525" marB="0" anchor="b"/>
+                  <a:tcPr marL="9525" marR="9525" marT="9525" marB="0" anchor="b">
+                    <a:lnL w="12700" cap="flat" cmpd="sng" algn="ctr">
+                      <a:solidFill>
+                        <a:schemeClr val="tx1"/>
+                      </a:solidFill>
+                      <a:prstDash val="solid"/>
+                      <a:round/>
+                      <a:headEnd type="none" w="med" len="med"/>
+                      <a:tailEnd type="none" w="med" len="med"/>
+                    </a:lnL>
+                    <a:lnR w="12700" cap="flat" cmpd="sng" algn="ctr">
+                      <a:solidFill>
+                        <a:schemeClr val="tx1"/>
+                      </a:solidFill>
+                      <a:prstDash val="solid"/>
+                      <a:round/>
+                      <a:headEnd type="none" w="med" len="med"/>
+                      <a:tailEnd type="none" w="med" len="med"/>
+                    </a:lnR>
+                    <a:lnT w="12700" cap="flat" cmpd="sng" algn="ctr">
+                      <a:solidFill>
+                        <a:schemeClr val="tx1"/>
+                      </a:solidFill>
+                      <a:prstDash val="solid"/>
+                      <a:round/>
+                      <a:headEnd type="none" w="med" len="med"/>
+                      <a:tailEnd type="none" w="med" len="med"/>
+                    </a:lnT>
+                    <a:lnB w="12700" cap="flat" cmpd="sng" algn="ctr">
+                      <a:solidFill>
+                        <a:schemeClr val="tx1"/>
+                      </a:solidFill>
+                      <a:prstDash val="solid"/>
+                      <a:round/>
+                      <a:headEnd type="none" w="med" len="med"/>
+                      <a:tailEnd type="none" w="med" len="med"/>
+                    </a:lnB>
+                    <a:solidFill>
+                      <a:srgbClr val="FFFAEF"/>
+                    </a:solidFill>
+                  </a:tcPr>
                 </a:tc>
                 <a:extLst>
                   <a:ext uri="{0D108BD9-81ED-4DB2-BD59-A6C34878D82A}">
@@ -9756,7 +16229,47 @@
                       </a:endParaRPr>
                     </a:p>
                   </a:txBody>
-                  <a:tcPr marL="9525" marR="9525" marT="9525" marB="0" anchor="b"/>
+                  <a:tcPr marL="9525" marR="9525" marT="9525" marB="0" anchor="b">
+                    <a:lnL w="12700" cap="flat" cmpd="sng" algn="ctr">
+                      <a:solidFill>
+                        <a:schemeClr val="tx1"/>
+                      </a:solidFill>
+                      <a:prstDash val="solid"/>
+                      <a:round/>
+                      <a:headEnd type="none" w="med" len="med"/>
+                      <a:tailEnd type="none" w="med" len="med"/>
+                    </a:lnL>
+                    <a:lnR w="12700" cap="flat" cmpd="sng" algn="ctr">
+                      <a:solidFill>
+                        <a:schemeClr val="tx1"/>
+                      </a:solidFill>
+                      <a:prstDash val="solid"/>
+                      <a:round/>
+                      <a:headEnd type="none" w="med" len="med"/>
+                      <a:tailEnd type="none" w="med" len="med"/>
+                    </a:lnR>
+                    <a:lnT w="12700" cap="flat" cmpd="sng" algn="ctr">
+                      <a:solidFill>
+                        <a:schemeClr val="tx1"/>
+                      </a:solidFill>
+                      <a:prstDash val="solid"/>
+                      <a:round/>
+                      <a:headEnd type="none" w="med" len="med"/>
+                      <a:tailEnd type="none" w="med" len="med"/>
+                    </a:lnT>
+                    <a:lnB w="12700" cap="flat" cmpd="sng" algn="ctr">
+                      <a:solidFill>
+                        <a:schemeClr val="tx1"/>
+                      </a:solidFill>
+                      <a:prstDash val="solid"/>
+                      <a:round/>
+                      <a:headEnd type="none" w="med" len="med"/>
+                      <a:tailEnd type="none" w="med" len="med"/>
+                    </a:lnB>
+                    <a:solidFill>
+                      <a:srgbClr val="FFFAEF"/>
+                    </a:solidFill>
+                  </a:tcPr>
                 </a:tc>
                 <a:tc>
                   <a:txBody>
@@ -9781,7 +16294,47 @@
                       </a:endParaRPr>
                     </a:p>
                   </a:txBody>
-                  <a:tcPr marL="9525" marR="9525" marT="9525" marB="0" anchor="b"/>
+                  <a:tcPr marL="9525" marR="9525" marT="9525" marB="0" anchor="b">
+                    <a:lnL w="12700" cap="flat" cmpd="sng" algn="ctr">
+                      <a:solidFill>
+                        <a:schemeClr val="tx1"/>
+                      </a:solidFill>
+                      <a:prstDash val="solid"/>
+                      <a:round/>
+                      <a:headEnd type="none" w="med" len="med"/>
+                      <a:tailEnd type="none" w="med" len="med"/>
+                    </a:lnL>
+                    <a:lnR w="12700" cap="flat" cmpd="sng" algn="ctr">
+                      <a:solidFill>
+                        <a:schemeClr val="tx1"/>
+                      </a:solidFill>
+                      <a:prstDash val="solid"/>
+                      <a:round/>
+                      <a:headEnd type="none" w="med" len="med"/>
+                      <a:tailEnd type="none" w="med" len="med"/>
+                    </a:lnR>
+                    <a:lnT w="12700" cap="flat" cmpd="sng" algn="ctr">
+                      <a:solidFill>
+                        <a:schemeClr val="tx1"/>
+                      </a:solidFill>
+                      <a:prstDash val="solid"/>
+                      <a:round/>
+                      <a:headEnd type="none" w="med" len="med"/>
+                      <a:tailEnd type="none" w="med" len="med"/>
+                    </a:lnT>
+                    <a:lnB w="12700" cap="flat" cmpd="sng" algn="ctr">
+                      <a:solidFill>
+                        <a:schemeClr val="tx1"/>
+                      </a:solidFill>
+                      <a:prstDash val="solid"/>
+                      <a:round/>
+                      <a:headEnd type="none" w="med" len="med"/>
+                      <a:tailEnd type="none" w="med" len="med"/>
+                    </a:lnB>
+                    <a:solidFill>
+                      <a:srgbClr val="FFFAEF"/>
+                    </a:solidFill>
+                  </a:tcPr>
                 </a:tc>
                 <a:tc>
                   <a:txBody>
@@ -9806,7 +16359,47 @@
                       </a:endParaRPr>
                     </a:p>
                   </a:txBody>
-                  <a:tcPr marL="9525" marR="9525" marT="9525" marB="0" anchor="b"/>
+                  <a:tcPr marL="9525" marR="9525" marT="9525" marB="0" anchor="b">
+                    <a:lnL w="12700" cap="flat" cmpd="sng" algn="ctr">
+                      <a:solidFill>
+                        <a:schemeClr val="tx1"/>
+                      </a:solidFill>
+                      <a:prstDash val="solid"/>
+                      <a:round/>
+                      <a:headEnd type="none" w="med" len="med"/>
+                      <a:tailEnd type="none" w="med" len="med"/>
+                    </a:lnL>
+                    <a:lnR w="12700" cap="flat" cmpd="sng" algn="ctr">
+                      <a:solidFill>
+                        <a:schemeClr val="tx1"/>
+                      </a:solidFill>
+                      <a:prstDash val="solid"/>
+                      <a:round/>
+                      <a:headEnd type="none" w="med" len="med"/>
+                      <a:tailEnd type="none" w="med" len="med"/>
+                    </a:lnR>
+                    <a:lnT w="12700" cap="flat" cmpd="sng" algn="ctr">
+                      <a:solidFill>
+                        <a:schemeClr val="tx1"/>
+                      </a:solidFill>
+                      <a:prstDash val="solid"/>
+                      <a:round/>
+                      <a:headEnd type="none" w="med" len="med"/>
+                      <a:tailEnd type="none" w="med" len="med"/>
+                    </a:lnT>
+                    <a:lnB w="12700" cap="flat" cmpd="sng" algn="ctr">
+                      <a:solidFill>
+                        <a:schemeClr val="tx1"/>
+                      </a:solidFill>
+                      <a:prstDash val="solid"/>
+                      <a:round/>
+                      <a:headEnd type="none" w="med" len="med"/>
+                      <a:tailEnd type="none" w="med" len="med"/>
+                    </a:lnB>
+                    <a:solidFill>
+                      <a:srgbClr val="FFFAEF"/>
+                    </a:solidFill>
+                  </a:tcPr>
                 </a:tc>
                 <a:extLst>
                   <a:ext uri="{0D108BD9-81ED-4DB2-BD59-A6C34878D82A}">
@@ -9838,7 +16431,47 @@
                       </a:endParaRPr>
                     </a:p>
                   </a:txBody>
-                  <a:tcPr marL="9525" marR="9525" marT="9525" marB="0" anchor="b"/>
+                  <a:tcPr marL="9525" marR="9525" marT="9525" marB="0" anchor="b">
+                    <a:lnL w="12700" cap="flat" cmpd="sng" algn="ctr">
+                      <a:solidFill>
+                        <a:schemeClr val="tx1"/>
+                      </a:solidFill>
+                      <a:prstDash val="solid"/>
+                      <a:round/>
+                      <a:headEnd type="none" w="med" len="med"/>
+                      <a:tailEnd type="none" w="med" len="med"/>
+                    </a:lnL>
+                    <a:lnR w="12700" cap="flat" cmpd="sng" algn="ctr">
+                      <a:solidFill>
+                        <a:schemeClr val="tx1"/>
+                      </a:solidFill>
+                      <a:prstDash val="solid"/>
+                      <a:round/>
+                      <a:headEnd type="none" w="med" len="med"/>
+                      <a:tailEnd type="none" w="med" len="med"/>
+                    </a:lnR>
+                    <a:lnT w="12700" cap="flat" cmpd="sng" algn="ctr">
+                      <a:solidFill>
+                        <a:schemeClr val="tx1"/>
+                      </a:solidFill>
+                      <a:prstDash val="solid"/>
+                      <a:round/>
+                      <a:headEnd type="none" w="med" len="med"/>
+                      <a:tailEnd type="none" w="med" len="med"/>
+                    </a:lnT>
+                    <a:lnB w="12700" cap="flat" cmpd="sng" algn="ctr">
+                      <a:solidFill>
+                        <a:schemeClr val="tx1"/>
+                      </a:solidFill>
+                      <a:prstDash val="solid"/>
+                      <a:round/>
+                      <a:headEnd type="none" w="med" len="med"/>
+                      <a:tailEnd type="none" w="med" len="med"/>
+                    </a:lnB>
+                    <a:solidFill>
+                      <a:srgbClr val="FFFAEF"/>
+                    </a:solidFill>
+                  </a:tcPr>
                 </a:tc>
                 <a:tc>
                   <a:txBody>
@@ -9863,7 +16496,47 @@
                       </a:endParaRPr>
                     </a:p>
                   </a:txBody>
-                  <a:tcPr marL="9525" marR="9525" marT="9525" marB="0" anchor="b"/>
+                  <a:tcPr marL="9525" marR="9525" marT="9525" marB="0" anchor="b">
+                    <a:lnL w="12700" cap="flat" cmpd="sng" algn="ctr">
+                      <a:solidFill>
+                        <a:schemeClr val="tx1"/>
+                      </a:solidFill>
+                      <a:prstDash val="solid"/>
+                      <a:round/>
+                      <a:headEnd type="none" w="med" len="med"/>
+                      <a:tailEnd type="none" w="med" len="med"/>
+                    </a:lnL>
+                    <a:lnR w="12700" cap="flat" cmpd="sng" algn="ctr">
+                      <a:solidFill>
+                        <a:schemeClr val="tx1"/>
+                      </a:solidFill>
+                      <a:prstDash val="solid"/>
+                      <a:round/>
+                      <a:headEnd type="none" w="med" len="med"/>
+                      <a:tailEnd type="none" w="med" len="med"/>
+                    </a:lnR>
+                    <a:lnT w="12700" cap="flat" cmpd="sng" algn="ctr">
+                      <a:solidFill>
+                        <a:schemeClr val="tx1"/>
+                      </a:solidFill>
+                      <a:prstDash val="solid"/>
+                      <a:round/>
+                      <a:headEnd type="none" w="med" len="med"/>
+                      <a:tailEnd type="none" w="med" len="med"/>
+                    </a:lnT>
+                    <a:lnB w="12700" cap="flat" cmpd="sng" algn="ctr">
+                      <a:solidFill>
+                        <a:schemeClr val="tx1"/>
+                      </a:solidFill>
+                      <a:prstDash val="solid"/>
+                      <a:round/>
+                      <a:headEnd type="none" w="med" len="med"/>
+                      <a:tailEnd type="none" w="med" len="med"/>
+                    </a:lnB>
+                    <a:solidFill>
+                      <a:srgbClr val="FFFAEF"/>
+                    </a:solidFill>
+                  </a:tcPr>
                 </a:tc>
                 <a:tc>
                   <a:txBody>
@@ -9888,7 +16561,47 @@
                       </a:endParaRPr>
                     </a:p>
                   </a:txBody>
-                  <a:tcPr marL="9525" marR="9525" marT="9525" marB="0" anchor="b"/>
+                  <a:tcPr marL="9525" marR="9525" marT="9525" marB="0" anchor="b">
+                    <a:lnL w="12700" cap="flat" cmpd="sng" algn="ctr">
+                      <a:solidFill>
+                        <a:schemeClr val="tx1"/>
+                      </a:solidFill>
+                      <a:prstDash val="solid"/>
+                      <a:round/>
+                      <a:headEnd type="none" w="med" len="med"/>
+                      <a:tailEnd type="none" w="med" len="med"/>
+                    </a:lnL>
+                    <a:lnR w="12700" cap="flat" cmpd="sng" algn="ctr">
+                      <a:solidFill>
+                        <a:schemeClr val="tx1"/>
+                      </a:solidFill>
+                      <a:prstDash val="solid"/>
+                      <a:round/>
+                      <a:headEnd type="none" w="med" len="med"/>
+                      <a:tailEnd type="none" w="med" len="med"/>
+                    </a:lnR>
+                    <a:lnT w="12700" cap="flat" cmpd="sng" algn="ctr">
+                      <a:solidFill>
+                        <a:schemeClr val="tx1"/>
+                      </a:solidFill>
+                      <a:prstDash val="solid"/>
+                      <a:round/>
+                      <a:headEnd type="none" w="med" len="med"/>
+                      <a:tailEnd type="none" w="med" len="med"/>
+                    </a:lnT>
+                    <a:lnB w="12700" cap="flat" cmpd="sng" algn="ctr">
+                      <a:solidFill>
+                        <a:schemeClr val="tx1"/>
+                      </a:solidFill>
+                      <a:prstDash val="solid"/>
+                      <a:round/>
+                      <a:headEnd type="none" w="med" len="med"/>
+                      <a:tailEnd type="none" w="med" len="med"/>
+                    </a:lnB>
+                    <a:solidFill>
+                      <a:srgbClr val="FFFAEF"/>
+                    </a:solidFill>
+                  </a:tcPr>
                 </a:tc>
                 <a:extLst>
                   <a:ext uri="{0D108BD9-81ED-4DB2-BD59-A6C34878D82A}">
@@ -9920,7 +16633,47 @@
                       </a:endParaRPr>
                     </a:p>
                   </a:txBody>
-                  <a:tcPr marL="9525" marR="9525" marT="9525" marB="0" anchor="b"/>
+                  <a:tcPr marL="9525" marR="9525" marT="9525" marB="0" anchor="b">
+                    <a:lnL w="12700" cap="flat" cmpd="sng" algn="ctr">
+                      <a:solidFill>
+                        <a:schemeClr val="tx1"/>
+                      </a:solidFill>
+                      <a:prstDash val="solid"/>
+                      <a:round/>
+                      <a:headEnd type="none" w="med" len="med"/>
+                      <a:tailEnd type="none" w="med" len="med"/>
+                    </a:lnL>
+                    <a:lnR w="12700" cap="flat" cmpd="sng" algn="ctr">
+                      <a:solidFill>
+                        <a:schemeClr val="tx1"/>
+                      </a:solidFill>
+                      <a:prstDash val="solid"/>
+                      <a:round/>
+                      <a:headEnd type="none" w="med" len="med"/>
+                      <a:tailEnd type="none" w="med" len="med"/>
+                    </a:lnR>
+                    <a:lnT w="12700" cap="flat" cmpd="sng" algn="ctr">
+                      <a:solidFill>
+                        <a:schemeClr val="tx1"/>
+                      </a:solidFill>
+                      <a:prstDash val="solid"/>
+                      <a:round/>
+                      <a:headEnd type="none" w="med" len="med"/>
+                      <a:tailEnd type="none" w="med" len="med"/>
+                    </a:lnT>
+                    <a:lnB w="12700" cap="flat" cmpd="sng" algn="ctr">
+                      <a:solidFill>
+                        <a:schemeClr val="tx1"/>
+                      </a:solidFill>
+                      <a:prstDash val="solid"/>
+                      <a:round/>
+                      <a:headEnd type="none" w="med" len="med"/>
+                      <a:tailEnd type="none" w="med" len="med"/>
+                    </a:lnB>
+                    <a:solidFill>
+                      <a:srgbClr val="FFFAEF"/>
+                    </a:solidFill>
+                  </a:tcPr>
                 </a:tc>
                 <a:tc>
                   <a:txBody>
@@ -9945,7 +16698,47 @@
                       </a:endParaRPr>
                     </a:p>
                   </a:txBody>
-                  <a:tcPr marL="9525" marR="9525" marT="9525" marB="0" anchor="b"/>
+                  <a:tcPr marL="9525" marR="9525" marT="9525" marB="0" anchor="b">
+                    <a:lnL w="12700" cap="flat" cmpd="sng" algn="ctr">
+                      <a:solidFill>
+                        <a:schemeClr val="tx1"/>
+                      </a:solidFill>
+                      <a:prstDash val="solid"/>
+                      <a:round/>
+                      <a:headEnd type="none" w="med" len="med"/>
+                      <a:tailEnd type="none" w="med" len="med"/>
+                    </a:lnL>
+                    <a:lnR w="12700" cap="flat" cmpd="sng" algn="ctr">
+                      <a:solidFill>
+                        <a:schemeClr val="tx1"/>
+                      </a:solidFill>
+                      <a:prstDash val="solid"/>
+                      <a:round/>
+                      <a:headEnd type="none" w="med" len="med"/>
+                      <a:tailEnd type="none" w="med" len="med"/>
+                    </a:lnR>
+                    <a:lnT w="12700" cap="flat" cmpd="sng" algn="ctr">
+                      <a:solidFill>
+                        <a:schemeClr val="tx1"/>
+                      </a:solidFill>
+                      <a:prstDash val="solid"/>
+                      <a:round/>
+                      <a:headEnd type="none" w="med" len="med"/>
+                      <a:tailEnd type="none" w="med" len="med"/>
+                    </a:lnT>
+                    <a:lnB w="12700" cap="flat" cmpd="sng" algn="ctr">
+                      <a:solidFill>
+                        <a:schemeClr val="tx1"/>
+                      </a:solidFill>
+                      <a:prstDash val="solid"/>
+                      <a:round/>
+                      <a:headEnd type="none" w="med" len="med"/>
+                      <a:tailEnd type="none" w="med" len="med"/>
+                    </a:lnB>
+                    <a:solidFill>
+                      <a:srgbClr val="FFFAEF"/>
+                    </a:solidFill>
+                  </a:tcPr>
                 </a:tc>
                 <a:tc>
                   <a:txBody>
@@ -9970,7 +16763,47 @@
                       </a:endParaRPr>
                     </a:p>
                   </a:txBody>
-                  <a:tcPr marL="9525" marR="9525" marT="9525" marB="0" anchor="b"/>
+                  <a:tcPr marL="9525" marR="9525" marT="9525" marB="0" anchor="b">
+                    <a:lnL w="12700" cap="flat" cmpd="sng" algn="ctr">
+                      <a:solidFill>
+                        <a:schemeClr val="tx1"/>
+                      </a:solidFill>
+                      <a:prstDash val="solid"/>
+                      <a:round/>
+                      <a:headEnd type="none" w="med" len="med"/>
+                      <a:tailEnd type="none" w="med" len="med"/>
+                    </a:lnL>
+                    <a:lnR w="12700" cap="flat" cmpd="sng" algn="ctr">
+                      <a:solidFill>
+                        <a:schemeClr val="tx1"/>
+                      </a:solidFill>
+                      <a:prstDash val="solid"/>
+                      <a:round/>
+                      <a:headEnd type="none" w="med" len="med"/>
+                      <a:tailEnd type="none" w="med" len="med"/>
+                    </a:lnR>
+                    <a:lnT w="12700" cap="flat" cmpd="sng" algn="ctr">
+                      <a:solidFill>
+                        <a:schemeClr val="tx1"/>
+                      </a:solidFill>
+                      <a:prstDash val="solid"/>
+                      <a:round/>
+                      <a:headEnd type="none" w="med" len="med"/>
+                      <a:tailEnd type="none" w="med" len="med"/>
+                    </a:lnT>
+                    <a:lnB w="12700" cap="flat" cmpd="sng" algn="ctr">
+                      <a:solidFill>
+                        <a:schemeClr val="tx1"/>
+                      </a:solidFill>
+                      <a:prstDash val="solid"/>
+                      <a:round/>
+                      <a:headEnd type="none" w="med" len="med"/>
+                      <a:tailEnd type="none" w="med" len="med"/>
+                    </a:lnB>
+                    <a:solidFill>
+                      <a:srgbClr val="FFFAEF"/>
+                    </a:solidFill>
+                  </a:tcPr>
                 </a:tc>
                 <a:extLst>
                   <a:ext uri="{0D108BD9-81ED-4DB2-BD59-A6C34878D82A}">

--- a/RTB/PRESENTAZIONE RTB/Presentazione RTB.pptx
+++ b/RTB/PRESENTAZIONE RTB/Presentazione RTB.pptx
@@ -5198,7 +5198,7 @@
           <p:nvPr>
             <p:extLst>
               <p:ext uri="{D42A27DB-BD31-4B8C-83A1-F6EECF244321}">
-                <p14:modId xmlns:p14="http://schemas.microsoft.com/office/powerpoint/2010/main" val="433448604"/>
+                <p14:modId xmlns:p14="http://schemas.microsoft.com/office/powerpoint/2010/main" val="2085440515"/>
               </p:ext>
             </p:extLst>
           </p:nvPr>
@@ -7767,18 +7767,15 @@
                         <a:buNone/>
                       </a:pPr>
                       <a:r>
-                        <a:rPr lang="it-IT" sz="2000" u="none" strike="noStrike" dirty="0">
+                        <a:rPr lang="it-IT" sz="2000" b="0" i="0" u="none" strike="noStrike" dirty="0">
+                          <a:solidFill>
+                            <a:srgbClr val="000000"/>
+                          </a:solidFill>
                           <a:effectLst/>
+                          <a:latin typeface="Calibri" panose="020F0502020204030204" pitchFamily="34" charset="0"/>
                         </a:rPr>
-                        <a:t>5</a:t>
+                        <a:t>6</a:t>
                       </a:r>
-                      <a:endParaRPr lang="it-IT" sz="2000" b="0" i="0" u="none" strike="noStrike" dirty="0">
-                        <a:solidFill>
-                          <a:srgbClr val="000000"/>
-                        </a:solidFill>
-                        <a:effectLst/>
-                        <a:latin typeface="Calibri" panose="020F0502020204030204" pitchFamily="34" charset="0"/>
-                      </a:endParaRPr>
                     </a:p>
                   </a:txBody>
                   <a:tcPr marL="9525" marR="9525" marT="9525" marB="0" anchor="ctr">
@@ -7839,7 +7836,7 @@
                           <a:effectLst/>
                           <a:latin typeface="Calibri" panose="020F0502020204030204" pitchFamily="34" charset="0"/>
                         </a:rPr>
-                        <a:t>17</a:t>
+                        <a:t>18</a:t>
                       </a:r>
                     </a:p>
                   </a:txBody>
@@ -8697,7 +8694,7 @@
                         <a:rPr lang="it-IT" sz="2000" u="none" strike="noStrike" dirty="0">
                           <a:effectLst/>
                         </a:rPr>
-                        <a:t>13</a:t>
+                        <a:t>14</a:t>
                       </a:r>
                       <a:endParaRPr lang="it-IT" sz="2000" b="0" i="0" u="none" strike="noStrike" dirty="0">
                         <a:solidFill>
@@ -8889,15 +8886,22 @@
                         <a:buNone/>
                       </a:pPr>
                       <a:r>
-                        <a:rPr lang="it-IT" sz="2000" b="0" i="0" u="none" strike="noStrike" dirty="0">
+                        <a:rPr lang="it-IT" sz="2000" b="0" i="0" u="none" strike="noStrike">
                           <a:solidFill>
                             <a:srgbClr val="000000"/>
                           </a:solidFill>
                           <a:effectLst/>
                           <a:latin typeface="Calibri" panose="020F0502020204030204" pitchFamily="34" charset="0"/>
                         </a:rPr>
-                        <a:t>28</a:t>
+                        <a:t>29</a:t>
                       </a:r>
+                      <a:endParaRPr lang="it-IT" sz="2000" b="0" i="0" u="none" strike="noStrike" dirty="0">
+                        <a:solidFill>
+                          <a:srgbClr val="000000"/>
+                        </a:solidFill>
+                        <a:effectLst/>
+                        <a:latin typeface="Calibri" panose="020F0502020204030204" pitchFamily="34" charset="0"/>
+                      </a:endParaRPr>
                     </a:p>
                   </a:txBody>
                   <a:tcPr marL="9525" marR="9525" marT="9525" marB="0" anchor="ctr">
@@ -9747,7 +9751,7 @@
                           <a:effectLst/>
                           <a:latin typeface="Calibri" panose="020F0502020204030204" pitchFamily="34" charset="0"/>
                         </a:rPr>
-                        <a:t>51</a:t>
+                        <a:t>52</a:t>
                       </a:r>
                     </a:p>
                   </a:txBody>
@@ -9868,7 +9872,7 @@
                           <a:effectLst/>
                           <a:latin typeface="Calibri" panose="020F0502020204030204" pitchFamily="34" charset="0"/>
                         </a:rPr>
-                        <a:t>30</a:t>
+                        <a:t>31</a:t>
                       </a:r>
                     </a:p>
                   </a:txBody>
@@ -9922,13 +9926,16 @@
                       <a:pPr algn="ctr" fontAlgn="b">
                         <a:buNone/>
                       </a:pPr>
-                      <a:endParaRPr lang="it-IT" sz="2000" b="0" i="0" u="none" strike="noStrike" dirty="0">
-                        <a:solidFill>
-                          <a:srgbClr val="000000"/>
-                        </a:solidFill>
-                        <a:effectLst/>
-                        <a:latin typeface="Calibri" panose="020F0502020204030204" pitchFamily="34" charset="0"/>
-                      </a:endParaRPr>
+                      <a:r>
+                        <a:rPr lang="it-IT" sz="2000" b="0" i="0" u="none" strike="noStrike" dirty="0">
+                          <a:solidFill>
+                            <a:srgbClr val="000000"/>
+                          </a:solidFill>
+                          <a:effectLst/>
+                          <a:latin typeface="Calibri" panose="020F0502020204030204" pitchFamily="34" charset="0"/>
+                        </a:rPr>
+                        <a:t>157</a:t>
+                      </a:r>
                     </a:p>
                   </a:txBody>
                   <a:tcPr marL="9525" marR="9525" marT="9525" marB="0" anchor="ctr">
@@ -13888,7 +13895,7 @@
           <p:nvPr>
             <p:extLst>
               <p:ext uri="{D42A27DB-BD31-4B8C-83A1-F6EECF244321}">
-                <p14:modId xmlns:p14="http://schemas.microsoft.com/office/powerpoint/2010/main" val="2273746364"/>
+                <p14:modId xmlns:p14="http://schemas.microsoft.com/office/powerpoint/2010/main" val="254038366"/>
               </p:ext>
             </p:extLst>
           </p:nvPr>
@@ -14206,7 +14213,7 @@
                         <a:rPr lang="it-IT" sz="2800" u="none" strike="noStrike" dirty="0">
                           <a:effectLst/>
                         </a:rPr>
-                        <a:t>52h</a:t>
+                        <a:t>43h</a:t>
                       </a:r>
                       <a:endParaRPr lang="it-IT" sz="2800" b="0" i="0" u="none" strike="noStrike" dirty="0">
                         <a:solidFill>
@@ -14271,7 +14278,7 @@
                         <a:rPr lang="it-IT" sz="2800" u="none" strike="noStrike" dirty="0">
                           <a:effectLst/>
                         </a:rPr>
-                        <a:t>1.240€</a:t>
+                        <a:t>1020€</a:t>
                       </a:r>
                       <a:endParaRPr lang="it-IT" sz="2800" b="0" i="0" u="none" strike="noStrike" dirty="0">
                         <a:solidFill>
@@ -14408,7 +14415,7 @@
                         <a:rPr lang="it-IT" sz="2800" u="none" strike="noStrike" dirty="0">
                           <a:effectLst/>
                         </a:rPr>
-                        <a:t>42h</a:t>
+                        <a:t>37h</a:t>
                       </a:r>
                       <a:endParaRPr lang="it-IT" sz="2800" b="0" i="0" u="none" strike="noStrike" dirty="0">
                         <a:solidFill>
@@ -14470,12 +14477,12 @@
                         <a:buNone/>
                       </a:pPr>
                       <a:r>
-                        <a:rPr lang="it-IT" sz="2800" u="none" strike="noStrike">
+                        <a:rPr lang="it-IT" sz="2800" u="none" strike="noStrike" dirty="0">
                           <a:effectLst/>
                         </a:rPr>
-                        <a:t>945€</a:t>
+                        <a:t>845€</a:t>
                       </a:r>
-                      <a:endParaRPr lang="it-IT" sz="2800" b="0" i="0" u="none" strike="noStrike">
+                      <a:endParaRPr lang="it-IT" sz="2800" b="0" i="0" u="none" strike="noStrike" dirty="0">
                         <a:solidFill>
                           <a:srgbClr val="000000"/>
                         </a:solidFill>
@@ -14607,12 +14614,12 @@
                         <a:buNone/>
                       </a:pPr>
                       <a:r>
-                        <a:rPr lang="it-IT" sz="2800" u="none" strike="noStrike">
+                        <a:rPr lang="it-IT" sz="2800" u="none" strike="noStrike" dirty="0">
                           <a:effectLst/>
                         </a:rPr>
-                        <a:t>48h</a:t>
+                        <a:t>41h</a:t>
                       </a:r>
-                      <a:endParaRPr lang="it-IT" sz="2800" b="0" i="0" u="none" strike="noStrike">
+                      <a:endParaRPr lang="it-IT" sz="2800" b="0" i="0" u="none" strike="noStrike" dirty="0">
                         <a:solidFill>
                           <a:srgbClr val="000000"/>
                         </a:solidFill>
@@ -14675,7 +14682,7 @@
                         <a:rPr lang="it-IT" sz="2800" u="none" strike="noStrike" dirty="0">
                           <a:effectLst/>
                         </a:rPr>
-                        <a:t>1.060€</a:t>
+                        <a:t>910€</a:t>
                       </a:r>
                       <a:endParaRPr lang="it-IT" sz="2800" b="0" i="0" u="none" strike="noStrike" dirty="0">
                         <a:solidFill>
@@ -14809,12 +14816,12 @@
                         <a:buNone/>
                       </a:pPr>
                       <a:r>
-                        <a:rPr lang="it-IT" sz="2800" u="none" strike="noStrike">
+                        <a:rPr lang="it-IT" sz="2800" u="none" strike="noStrike" dirty="0">
                           <a:effectLst/>
                         </a:rPr>
-                        <a:t>43h</a:t>
+                        <a:t>36h</a:t>
                       </a:r>
-                      <a:endParaRPr lang="it-IT" sz="2800" b="0" i="0" u="none" strike="noStrike">
+                      <a:endParaRPr lang="it-IT" sz="2800" b="0" i="0" u="none" strike="noStrike" dirty="0">
                         <a:solidFill>
                           <a:srgbClr val="000000"/>
                         </a:solidFill>
@@ -14877,7 +14884,7 @@
                         <a:rPr lang="it-IT" sz="2800" u="none" strike="noStrike" dirty="0">
                           <a:effectLst/>
                         </a:rPr>
-                        <a:t>1.000€</a:t>
+                        <a:t>845€</a:t>
                       </a:r>
                       <a:endParaRPr lang="it-IT" sz="2800" b="0" i="0" u="none" strike="noStrike" dirty="0">
                         <a:solidFill>
@@ -15014,7 +15021,7 @@
                         <a:rPr lang="it-IT" sz="2800" u="none" strike="noStrike" dirty="0">
                           <a:effectLst/>
                         </a:rPr>
-                        <a:t>185h</a:t>
+                        <a:t>157h</a:t>
                       </a:r>
                       <a:endParaRPr lang="it-IT" sz="2800" b="0" i="0" u="none" strike="noStrike" dirty="0">
                         <a:solidFill>
@@ -15079,7 +15086,7 @@
                         <a:rPr lang="it-IT" sz="2800" u="none" strike="noStrike" dirty="0">
                           <a:effectLst/>
                         </a:rPr>
-                        <a:t>4.245€</a:t>
+                        <a:t>3620€</a:t>
                       </a:r>
                       <a:endParaRPr lang="it-IT" sz="2800" b="0" i="0" u="none" strike="noStrike" dirty="0">
                         <a:solidFill>
@@ -15157,7 +15164,7 @@
           <p:nvPr>
             <p:extLst>
               <p:ext uri="{D42A27DB-BD31-4B8C-83A1-F6EECF244321}">
-                <p14:modId xmlns:p14="http://schemas.microsoft.com/office/powerpoint/2010/main" val="2295079585"/>
+                <p14:modId xmlns:p14="http://schemas.microsoft.com/office/powerpoint/2010/main" val="345996814"/>
               </p:ext>
             </p:extLst>
           </p:nvPr>
@@ -15475,7 +15482,7 @@
                         <a:rPr lang="it-IT" sz="2000" u="none" strike="noStrike" dirty="0">
                           <a:effectLst/>
                         </a:rPr>
-                        <a:t>36h</a:t>
+                        <a:t>38h</a:t>
                       </a:r>
                       <a:endParaRPr lang="it-IT" sz="2000" b="0" i="0" u="none" strike="noStrike" dirty="0">
                         <a:solidFill>
@@ -15540,7 +15547,7 @@
                         <a:rPr lang="it-IT" sz="2000" u="none" strike="noStrike" dirty="0">
                           <a:effectLst/>
                         </a:rPr>
-                        <a:t>1080€</a:t>
+                        <a:t>1140€</a:t>
                       </a:r>
                       <a:endParaRPr lang="it-IT" sz="2000" b="0" i="0" u="none" strike="noStrike" dirty="0">
                         <a:solidFill>
@@ -15677,7 +15684,7 @@
                         <a:rPr lang="it-IT" sz="2000" u="none" strike="noStrike" dirty="0">
                           <a:effectLst/>
                         </a:rPr>
-                        <a:t>30h</a:t>
+                        <a:t>35h</a:t>
                       </a:r>
                       <a:endParaRPr lang="it-IT" sz="2000" b="0" i="0" u="none" strike="noStrike" dirty="0">
                         <a:solidFill>
@@ -15742,7 +15749,7 @@
                         <a:rPr lang="it-IT" sz="2000" u="none" strike="noStrike" dirty="0">
                           <a:effectLst/>
                         </a:rPr>
-                        <a:t>600€</a:t>
+                        <a:t>700€</a:t>
                       </a:r>
                       <a:endParaRPr lang="it-IT" sz="2000" b="0" i="0" u="none" strike="noStrike" dirty="0">
                         <a:solidFill>
@@ -15879,7 +15886,7 @@
                         <a:rPr lang="it-IT" sz="2000" u="none" strike="noStrike" dirty="0">
                           <a:effectLst/>
                         </a:rPr>
-                        <a:t>9h</a:t>
+                        <a:t>17h</a:t>
                       </a:r>
                       <a:endParaRPr lang="it-IT" sz="2000" b="0" i="0" u="none" strike="noStrike" dirty="0">
                         <a:solidFill>
@@ -15944,7 +15951,7 @@
                         <a:rPr lang="it-IT" sz="2000" u="none" strike="noStrike" dirty="0">
                           <a:effectLst/>
                         </a:rPr>
-                        <a:t>225€</a:t>
+                        <a:t>425€</a:t>
                       </a:r>
                       <a:endParaRPr lang="it-IT" sz="2000" b="0" i="0" u="none" strike="noStrike" dirty="0">
                         <a:solidFill>
@@ -16081,7 +16088,7 @@
                         <a:rPr lang="it-IT" sz="2000" u="none" strike="noStrike" dirty="0">
                           <a:effectLst/>
                         </a:rPr>
-                        <a:t>88h</a:t>
+                        <a:t>95h</a:t>
                       </a:r>
                       <a:endParaRPr lang="it-IT" sz="2000" b="0" i="0" u="none" strike="noStrike" dirty="0">
                         <a:solidFill>
@@ -16146,7 +16153,7 @@
                         <a:rPr lang="it-IT" sz="2000" u="none" strike="noStrike" dirty="0">
                           <a:effectLst/>
                         </a:rPr>
-                        <a:t>2200€</a:t>
+                        <a:t>2375€</a:t>
                       </a:r>
                       <a:endParaRPr lang="it-IT" sz="2000" b="0" i="0" u="none" strike="noStrike" dirty="0">
                         <a:solidFill>
@@ -16485,7 +16492,7 @@
                         <a:rPr lang="it-IT" sz="2000" u="none" strike="noStrike" dirty="0">
                           <a:effectLst/>
                         </a:rPr>
-                        <a:t>129h</a:t>
+                        <a:t>135h</a:t>
                       </a:r>
                       <a:endParaRPr lang="it-IT" sz="2000" b="0" i="0" u="none" strike="noStrike" dirty="0">
                         <a:solidFill>
@@ -16550,7 +16557,7 @@
                         <a:rPr lang="it-IT" sz="2000" u="none" strike="noStrike" dirty="0">
                           <a:effectLst/>
                         </a:rPr>
-                        <a:t>1935€</a:t>
+                        <a:t>2025€</a:t>
                       </a:r>
                       <a:endParaRPr lang="it-IT" sz="2000" b="0" i="0" u="none" strike="noStrike" dirty="0">
                         <a:solidFill>
@@ -16687,7 +16694,7 @@
                         <a:rPr lang="it-IT" sz="2000" u="none" strike="noStrike" dirty="0">
                           <a:effectLst/>
                         </a:rPr>
-                        <a:t>459h</a:t>
+                        <a:t>487h</a:t>
                       </a:r>
                       <a:endParaRPr lang="it-IT" sz="2000" b="0" i="0" u="none" strike="noStrike" dirty="0">
                         <a:solidFill>
@@ -16752,7 +16759,7 @@
                         <a:rPr lang="it-IT" sz="2000" u="none" strike="noStrike" dirty="0">
                           <a:effectLst/>
                         </a:rPr>
-                        <a:t>8545€</a:t>
+                        <a:t>9170€</a:t>
                       </a:r>
                       <a:endParaRPr lang="it-IT" sz="2000" b="0" i="0" u="none" strike="noStrike" dirty="0">
                         <a:solidFill>

--- a/RTB/PRESENTAZIONE RTB/Presentazione RTB.pptx
+++ b/RTB/PRESENTAZIONE RTB/Presentazione RTB.pptx
@@ -239,7 +239,7 @@
           <a:p>
             <a:fld id="{DC233B30-4F8C-4A4C-AB5E-3B02323E36F5}" type="datetimeFigureOut">
               <a:rPr lang="it-IT" smtClean="0"/>
-              <a:t>12/01/2026</a:t>
+              <a:t>14/01/2026</a:t>
             </a:fld>
             <a:endParaRPr lang="it-IT"/>
           </a:p>
@@ -1697,7 +1697,7 @@
             <a:fld id="{1D8BD707-D9CF-40AE-B4C6-C98DA3205C09}" type="datetimeFigureOut">
               <a:rPr lang="en-US" smtClean="0"/>
               <a:pPr/>
-              <a:t>1/12/2026</a:t>
+              <a:t>1/14/2026</a:t>
             </a:fld>
             <a:endParaRPr lang="en-US"/>
           </a:p>
@@ -1862,7 +1862,7 @@
             <a:fld id="{1D8BD707-D9CF-40AE-B4C6-C98DA3205C09}" type="datetimeFigureOut">
               <a:rPr lang="en-US" smtClean="0"/>
               <a:pPr/>
-              <a:t>1/12/2026</a:t>
+              <a:t>1/14/2026</a:t>
             </a:fld>
             <a:endParaRPr lang="en-US"/>
           </a:p>
@@ -2037,7 +2037,7 @@
             <a:fld id="{1D8BD707-D9CF-40AE-B4C6-C98DA3205C09}" type="datetimeFigureOut">
               <a:rPr lang="en-US" smtClean="0"/>
               <a:pPr/>
-              <a:t>1/12/2026</a:t>
+              <a:t>1/14/2026</a:t>
             </a:fld>
             <a:endParaRPr lang="en-US"/>
           </a:p>
@@ -2202,7 +2202,7 @@
             <a:fld id="{1D8BD707-D9CF-40AE-B4C6-C98DA3205C09}" type="datetimeFigureOut">
               <a:rPr lang="en-US" smtClean="0"/>
               <a:pPr/>
-              <a:t>1/12/2026</a:t>
+              <a:t>1/14/2026</a:t>
             </a:fld>
             <a:endParaRPr lang="en-US"/>
           </a:p>
@@ -2444,7 +2444,7 @@
             <a:fld id="{1D8BD707-D9CF-40AE-B4C6-C98DA3205C09}" type="datetimeFigureOut">
               <a:rPr lang="en-US" smtClean="0"/>
               <a:pPr/>
-              <a:t>1/12/2026</a:t>
+              <a:t>1/14/2026</a:t>
             </a:fld>
             <a:endParaRPr lang="en-US"/>
           </a:p>
@@ -2726,7 +2726,7 @@
             <a:fld id="{1D8BD707-D9CF-40AE-B4C6-C98DA3205C09}" type="datetimeFigureOut">
               <a:rPr lang="en-US" smtClean="0"/>
               <a:pPr/>
-              <a:t>1/12/2026</a:t>
+              <a:t>1/14/2026</a:t>
             </a:fld>
             <a:endParaRPr lang="en-US"/>
           </a:p>
@@ -3142,7 +3142,7 @@
             <a:fld id="{1D8BD707-D9CF-40AE-B4C6-C98DA3205C09}" type="datetimeFigureOut">
               <a:rPr lang="en-US" smtClean="0"/>
               <a:pPr/>
-              <a:t>1/12/2026</a:t>
+              <a:t>1/14/2026</a:t>
             </a:fld>
             <a:endParaRPr lang="en-US"/>
           </a:p>
@@ -3256,7 +3256,7 @@
             <a:fld id="{1D8BD707-D9CF-40AE-B4C6-C98DA3205C09}" type="datetimeFigureOut">
               <a:rPr lang="en-US" smtClean="0"/>
               <a:pPr/>
-              <a:t>1/12/2026</a:t>
+              <a:t>1/14/2026</a:t>
             </a:fld>
             <a:endParaRPr lang="en-US"/>
           </a:p>
@@ -3348,7 +3348,7 @@
             <a:fld id="{1D8BD707-D9CF-40AE-B4C6-C98DA3205C09}" type="datetimeFigureOut">
               <a:rPr lang="en-US" smtClean="0"/>
               <a:pPr/>
-              <a:t>1/12/2026</a:t>
+              <a:t>1/14/2026</a:t>
             </a:fld>
             <a:endParaRPr lang="en-US"/>
           </a:p>
@@ -3620,7 +3620,7 @@
             <a:fld id="{1D8BD707-D9CF-40AE-B4C6-C98DA3205C09}" type="datetimeFigureOut">
               <a:rPr lang="en-US" smtClean="0"/>
               <a:pPr/>
-              <a:t>1/12/2026</a:t>
+              <a:t>1/14/2026</a:t>
             </a:fld>
             <a:endParaRPr lang="en-US"/>
           </a:p>
@@ -3869,7 +3869,7 @@
             <a:fld id="{1D8BD707-D9CF-40AE-B4C6-C98DA3205C09}" type="datetimeFigureOut">
               <a:rPr lang="en-US" smtClean="0"/>
               <a:pPr/>
-              <a:t>1/12/2026</a:t>
+              <a:t>1/14/2026</a:t>
             </a:fld>
             <a:endParaRPr lang="en-US"/>
           </a:p>
@@ -4077,7 +4077,7 @@
             <a:fld id="{1D8BD707-D9CF-40AE-B4C6-C98DA3205C09}" type="datetimeFigureOut">
               <a:rPr lang="en-US" smtClean="0"/>
               <a:pPr/>
-              <a:t>1/12/2026</a:t>
+              <a:t>1/14/2026</a:t>
             </a:fld>
             <a:endParaRPr lang="en-US"/>
           </a:p>
@@ -5198,7 +5198,7 @@
           <p:nvPr>
             <p:extLst>
               <p:ext uri="{D42A27DB-BD31-4B8C-83A1-F6EECF244321}">
-                <p14:modId xmlns:p14="http://schemas.microsoft.com/office/powerpoint/2010/main" val="2085440515"/>
+                <p14:modId xmlns:p14="http://schemas.microsoft.com/office/powerpoint/2010/main" val="879151252"/>
               </p:ext>
             </p:extLst>
           </p:nvPr>
@@ -6006,7 +6006,7 @@
                         <a:rPr lang="it-IT" sz="2000" u="none" strike="noStrike" dirty="0">
                           <a:effectLst/>
                         </a:rPr>
-                        <a:t>6</a:t>
+                        <a:t>8</a:t>
                       </a:r>
                       <a:endParaRPr lang="it-IT" sz="2000" b="0" i="0" u="none" strike="noStrike" dirty="0">
                         <a:solidFill>
@@ -6068,12 +6068,12 @@
                         <a:buNone/>
                       </a:pPr>
                       <a:r>
-                        <a:rPr lang="it-IT" sz="2000" u="none" strike="noStrike">
+                        <a:rPr lang="it-IT" sz="2000" u="none" strike="noStrike" dirty="0">
                           <a:effectLst/>
                         </a:rPr>
-                        <a:t>9</a:t>
+                        <a:t>19</a:t>
                       </a:r>
-                      <a:endParaRPr lang="it-IT" sz="2000" b="0" i="0" u="none" strike="noStrike">
+                      <a:endParaRPr lang="it-IT" sz="2000" b="0" i="0" u="none" strike="noStrike" dirty="0">
                         <a:solidFill>
                           <a:srgbClr val="000000"/>
                         </a:solidFill>
@@ -6133,12 +6133,12 @@
                         <a:buNone/>
                       </a:pPr>
                       <a:r>
-                        <a:rPr lang="it-IT" sz="2000" u="none" strike="noStrike">
+                        <a:rPr lang="it-IT" sz="2000" u="none" strike="noStrike" dirty="0">
                           <a:effectLst/>
                         </a:rPr>
                         <a:t>0</a:t>
                       </a:r>
-                      <a:endParaRPr lang="it-IT" sz="2000" b="0" i="0" u="none" strike="noStrike">
+                      <a:endParaRPr lang="it-IT" sz="2000" b="0" i="0" u="none" strike="noStrike" dirty="0">
                         <a:solidFill>
                           <a:srgbClr val="000000"/>
                         </a:solidFill>
@@ -6198,12 +6198,12 @@
                         <a:buNone/>
                       </a:pPr>
                       <a:r>
-                        <a:rPr lang="it-IT" sz="2000" u="none" strike="noStrike">
+                        <a:rPr lang="it-IT" sz="2000" u="none" strike="noStrike" dirty="0">
                           <a:effectLst/>
                         </a:rPr>
                         <a:t>0</a:t>
                       </a:r>
-                      <a:endParaRPr lang="it-IT" sz="2000" b="0" i="0" u="none" strike="noStrike">
+                      <a:endParaRPr lang="it-IT" sz="2000" b="0" i="0" u="none" strike="noStrike" dirty="0">
                         <a:solidFill>
                           <a:srgbClr val="000000"/>
                         </a:solidFill>
@@ -6270,7 +6270,7 @@
                           <a:effectLst/>
                           <a:latin typeface="Calibri" panose="020F0502020204030204" pitchFamily="34" charset="0"/>
                         </a:rPr>
-                        <a:t>22</a:t>
+                        <a:t>34</a:t>
                       </a:r>
                     </a:p>
                   </a:txBody>
@@ -6595,7 +6595,7 @@
                         <a:rPr lang="it-IT" sz="2000" u="none" strike="noStrike" dirty="0">
                           <a:effectLst/>
                         </a:rPr>
-                        <a:t>8</a:t>
+                        <a:t>9</a:t>
                       </a:r>
                       <a:endParaRPr lang="it-IT" sz="2000" b="0" i="0" u="none" strike="noStrike" dirty="0">
                         <a:solidFill>
@@ -6722,12 +6722,12 @@
                         <a:buNone/>
                       </a:pPr>
                       <a:r>
-                        <a:rPr lang="it-IT" sz="2000" u="none" strike="noStrike">
+                        <a:rPr lang="it-IT" sz="2000" u="none" strike="noStrike" dirty="0">
                           <a:effectLst/>
                         </a:rPr>
-                        <a:t>0</a:t>
+                        <a:t>12</a:t>
                       </a:r>
-                      <a:endParaRPr lang="it-IT" sz="2000" b="0" i="0" u="none" strike="noStrike">
+                      <a:endParaRPr lang="it-IT" sz="2000" b="0" i="0" u="none" strike="noStrike" dirty="0">
                         <a:solidFill>
                           <a:srgbClr val="000000"/>
                         </a:solidFill>
@@ -6794,7 +6794,7 @@
                           <a:effectLst/>
                           <a:latin typeface="Calibri" panose="020F0502020204030204" pitchFamily="34" charset="0"/>
                         </a:rPr>
-                        <a:t>21</a:t>
+                        <a:t>34</a:t>
                       </a:r>
                     </a:p>
                   </a:txBody>
@@ -7113,18 +7113,15 @@
                         <a:buNone/>
                       </a:pPr>
                       <a:r>
-                        <a:rPr lang="it-IT" sz="2000" u="none" strike="noStrike" dirty="0">
+                        <a:rPr lang="it-IT" sz="2000" b="0" i="0" u="none" strike="noStrike" dirty="0">
+                          <a:solidFill>
+                            <a:srgbClr val="000000"/>
+                          </a:solidFill>
                           <a:effectLst/>
+                          <a:latin typeface="Calibri" panose="020F0502020204030204" pitchFamily="34" charset="0"/>
                         </a:rPr>
-                        <a:t>8</a:t>
+                        <a:t>17</a:t>
                       </a:r>
-                      <a:endParaRPr lang="it-IT" sz="2000" b="0" i="0" u="none" strike="noStrike" dirty="0">
-                        <a:solidFill>
-                          <a:srgbClr val="000000"/>
-                        </a:solidFill>
-                        <a:effectLst/>
-                        <a:latin typeface="Calibri" panose="020F0502020204030204" pitchFamily="34" charset="0"/>
-                      </a:endParaRPr>
                     </a:p>
                   </a:txBody>
                   <a:tcPr marL="9525" marR="9525" marT="9525" marB="0" anchor="ctr">
@@ -7178,12 +7175,12 @@
                         <a:buNone/>
                       </a:pPr>
                       <a:r>
-                        <a:rPr lang="it-IT" sz="2000" u="none" strike="noStrike">
+                        <a:rPr lang="it-IT" sz="2000" u="none" strike="noStrike" dirty="0">
                           <a:effectLst/>
                         </a:rPr>
                         <a:t>0</a:t>
                       </a:r>
-                      <a:endParaRPr lang="it-IT" sz="2000" b="0" i="0" u="none" strike="noStrike">
+                      <a:endParaRPr lang="it-IT" sz="2000" b="0" i="0" u="none" strike="noStrike" dirty="0">
                         <a:solidFill>
                           <a:srgbClr val="000000"/>
                         </a:solidFill>
@@ -7243,12 +7240,12 @@
                         <a:buNone/>
                       </a:pPr>
                       <a:r>
-                        <a:rPr lang="it-IT" sz="2000" u="none" strike="noStrike">
+                        <a:rPr lang="it-IT" sz="2000" u="none" strike="noStrike" dirty="0">
                           <a:effectLst/>
                         </a:rPr>
                         <a:t>0</a:t>
                       </a:r>
-                      <a:endParaRPr lang="it-IT" sz="2000" b="0" i="0" u="none" strike="noStrike">
+                      <a:endParaRPr lang="it-IT" sz="2000" b="0" i="0" u="none" strike="noStrike" dirty="0">
                         <a:solidFill>
                           <a:srgbClr val="000000"/>
                         </a:solidFill>
@@ -7315,7 +7312,7 @@
                           <a:effectLst/>
                           <a:latin typeface="Calibri" panose="020F0502020204030204" pitchFamily="34" charset="0"/>
                         </a:rPr>
-                        <a:t>22</a:t>
+                        <a:t>31</a:t>
                       </a:r>
                     </a:p>
                   </a:txBody>
@@ -7445,72 +7442,7 @@
                         <a:rPr lang="it-IT" sz="2000" u="none" strike="noStrike" dirty="0">
                           <a:effectLst/>
                         </a:rPr>
-                        <a:t>5</a:t>
-                      </a:r>
-                      <a:endParaRPr lang="it-IT" sz="2000" b="0" i="0" u="none" strike="noStrike" dirty="0">
-                        <a:solidFill>
-                          <a:srgbClr val="000000"/>
-                        </a:solidFill>
-                        <a:effectLst/>
-                        <a:latin typeface="Calibri" panose="020F0502020204030204" pitchFamily="34" charset="0"/>
-                      </a:endParaRPr>
-                    </a:p>
-                  </a:txBody>
-                  <a:tcPr marL="9525" marR="9525" marT="9525" marB="0" anchor="ctr">
-                    <a:lnL w="12700" cap="flat" cmpd="sng" algn="ctr">
-                      <a:solidFill>
-                        <a:schemeClr val="tx1"/>
-                      </a:solidFill>
-                      <a:prstDash val="solid"/>
-                      <a:round/>
-                      <a:headEnd type="none" w="med" len="med"/>
-                      <a:tailEnd type="none" w="med" len="med"/>
-                    </a:lnL>
-                    <a:lnR w="12700" cap="flat" cmpd="sng" algn="ctr">
-                      <a:solidFill>
-                        <a:schemeClr val="tx1"/>
-                      </a:solidFill>
-                      <a:prstDash val="solid"/>
-                      <a:round/>
-                      <a:headEnd type="none" w="med" len="med"/>
-                      <a:tailEnd type="none" w="med" len="med"/>
-                    </a:lnR>
-                    <a:lnT w="12700" cap="flat" cmpd="sng" algn="ctr">
-                      <a:solidFill>
-                        <a:schemeClr val="tx1"/>
-                      </a:solidFill>
-                      <a:prstDash val="solid"/>
-                      <a:round/>
-                      <a:headEnd type="none" w="med" len="med"/>
-                      <a:tailEnd type="none" w="med" len="med"/>
-                    </a:lnT>
-                    <a:lnB w="12700" cap="flat" cmpd="sng" algn="ctr">
-                      <a:solidFill>
-                        <a:schemeClr val="tx1"/>
-                      </a:solidFill>
-                      <a:prstDash val="solid"/>
-                      <a:round/>
-                      <a:headEnd type="none" w="med" len="med"/>
-                      <a:tailEnd type="none" w="med" len="med"/>
-                    </a:lnB>
-                    <a:solidFill>
-                      <a:srgbClr val="FFFAEF"/>
-                    </a:solidFill>
-                  </a:tcPr>
-                </a:tc>
-                <a:tc>
-                  <a:txBody>
-                    <a:bodyPr/>
-                    <a:lstStyle/>
-                    <a:p>
-                      <a:pPr algn="ctr" fontAlgn="b">
-                        <a:buNone/>
-                      </a:pPr>
-                      <a:r>
-                        <a:rPr lang="it-IT" sz="2000" u="none" strike="noStrike" dirty="0">
-                          <a:effectLst/>
-                        </a:rPr>
-                        <a:t>2</a:t>
+                        <a:t>6</a:t>
                       </a:r>
                       <a:endParaRPr lang="it-IT" sz="2000" b="0" i="0" u="none" strike="noStrike" dirty="0">
                         <a:solidFill>
@@ -7640,7 +7572,72 @@
                         <a:rPr lang="it-IT" sz="2000" u="none" strike="noStrike" dirty="0">
                           <a:effectLst/>
                         </a:rPr>
-                        <a:t>0</a:t>
+                        <a:t>6</a:t>
+                      </a:r>
+                      <a:endParaRPr lang="it-IT" sz="2000" b="0" i="0" u="none" strike="noStrike" dirty="0">
+                        <a:solidFill>
+                          <a:srgbClr val="000000"/>
+                        </a:solidFill>
+                        <a:effectLst/>
+                        <a:latin typeface="Calibri" panose="020F0502020204030204" pitchFamily="34" charset="0"/>
+                      </a:endParaRPr>
+                    </a:p>
+                  </a:txBody>
+                  <a:tcPr marL="9525" marR="9525" marT="9525" marB="0" anchor="ctr">
+                    <a:lnL w="12700" cap="flat" cmpd="sng" algn="ctr">
+                      <a:solidFill>
+                        <a:schemeClr val="tx1"/>
+                      </a:solidFill>
+                      <a:prstDash val="solid"/>
+                      <a:round/>
+                      <a:headEnd type="none" w="med" len="med"/>
+                      <a:tailEnd type="none" w="med" len="med"/>
+                    </a:lnL>
+                    <a:lnR w="12700" cap="flat" cmpd="sng" algn="ctr">
+                      <a:solidFill>
+                        <a:schemeClr val="tx1"/>
+                      </a:solidFill>
+                      <a:prstDash val="solid"/>
+                      <a:round/>
+                      <a:headEnd type="none" w="med" len="med"/>
+                      <a:tailEnd type="none" w="med" len="med"/>
+                    </a:lnR>
+                    <a:lnT w="12700" cap="flat" cmpd="sng" algn="ctr">
+                      <a:solidFill>
+                        <a:schemeClr val="tx1"/>
+                      </a:solidFill>
+                      <a:prstDash val="solid"/>
+                      <a:round/>
+                      <a:headEnd type="none" w="med" len="med"/>
+                      <a:tailEnd type="none" w="med" len="med"/>
+                    </a:lnT>
+                    <a:lnB w="12700" cap="flat" cmpd="sng" algn="ctr">
+                      <a:solidFill>
+                        <a:schemeClr val="tx1"/>
+                      </a:solidFill>
+                      <a:prstDash val="solid"/>
+                      <a:round/>
+                      <a:headEnd type="none" w="med" len="med"/>
+                      <a:tailEnd type="none" w="med" len="med"/>
+                    </a:lnB>
+                    <a:solidFill>
+                      <a:srgbClr val="FFFAEF"/>
+                    </a:solidFill>
+                  </a:tcPr>
+                </a:tc>
+                <a:tc>
+                  <a:txBody>
+                    <a:bodyPr/>
+                    <a:lstStyle/>
+                    <a:p>
+                      <a:pPr algn="ctr" fontAlgn="b">
+                        <a:buNone/>
+                      </a:pPr>
+                      <a:r>
+                        <a:rPr lang="it-IT" sz="2000" u="none" strike="noStrike" dirty="0">
+                          <a:effectLst/>
+                        </a:rPr>
+                        <a:t>8</a:t>
                       </a:r>
                       <a:endParaRPr lang="it-IT" sz="2000" b="0" i="0" u="none" strike="noStrike" dirty="0">
                         <a:solidFill>
@@ -7836,7 +7833,7 @@
                           <a:effectLst/>
                           <a:latin typeface="Calibri" panose="020F0502020204030204" pitchFamily="34" charset="0"/>
                         </a:rPr>
-                        <a:t>18</a:t>
+                        <a:t>31</a:t>
                       </a:r>
                     </a:p>
                   </a:txBody>
@@ -7975,18 +7972,15 @@
                         <a:buNone/>
                       </a:pPr>
                       <a:r>
-                        <a:rPr lang="it-IT" sz="2000" u="none" strike="noStrike">
+                        <a:rPr lang="it-IT" sz="2000" b="0" i="0" u="none" strike="noStrike" dirty="0">
+                          <a:solidFill>
+                            <a:srgbClr val="000000"/>
+                          </a:solidFill>
                           <a:effectLst/>
+                          <a:latin typeface="Calibri" panose="020F0502020204030204" pitchFamily="34" charset="0"/>
                         </a:rPr>
-                        <a:t>0</a:t>
+                        <a:t>2</a:t>
                       </a:r>
-                      <a:endParaRPr lang="it-IT" sz="2000" b="0" i="0" u="none" strike="noStrike">
-                        <a:solidFill>
-                          <a:srgbClr val="000000"/>
-                        </a:solidFill>
-                        <a:effectLst/>
-                        <a:latin typeface="Calibri" panose="020F0502020204030204" pitchFamily="34" charset="0"/>
-                      </a:endParaRPr>
                     </a:p>
                   </a:txBody>
                   <a:tcPr marL="9525" marR="9525" marT="9525" marB="0" anchor="ctr">
@@ -8047,268 +8041,8 @@
                           <a:effectLst/>
                           <a:latin typeface="Calibri" panose="020F0502020204030204" pitchFamily="34" charset="0"/>
                         </a:rPr>
-                        <a:t>4</a:t>
+                        <a:t>8</a:t>
                       </a:r>
-                    </a:p>
-                  </a:txBody>
-                  <a:tcPr marL="9525" marR="9525" marT="9525" marB="0" anchor="ctr">
-                    <a:lnL w="12700" cap="flat" cmpd="sng" algn="ctr">
-                      <a:solidFill>
-                        <a:schemeClr val="tx1"/>
-                      </a:solidFill>
-                      <a:prstDash val="solid"/>
-                      <a:round/>
-                      <a:headEnd type="none" w="med" len="med"/>
-                      <a:tailEnd type="none" w="med" len="med"/>
-                    </a:lnL>
-                    <a:lnR w="12700" cap="flat" cmpd="sng" algn="ctr">
-                      <a:solidFill>
-                        <a:schemeClr val="tx1"/>
-                      </a:solidFill>
-                      <a:prstDash val="solid"/>
-                      <a:round/>
-                      <a:headEnd type="none" w="med" len="med"/>
-                      <a:tailEnd type="none" w="med" len="med"/>
-                    </a:lnR>
-                    <a:lnT w="12700" cap="flat" cmpd="sng" algn="ctr">
-                      <a:solidFill>
-                        <a:schemeClr val="tx1"/>
-                      </a:solidFill>
-                      <a:prstDash val="solid"/>
-                      <a:round/>
-                      <a:headEnd type="none" w="med" len="med"/>
-                      <a:tailEnd type="none" w="med" len="med"/>
-                    </a:lnT>
-                    <a:lnB w="12700" cap="flat" cmpd="sng" algn="ctr">
-                      <a:solidFill>
-                        <a:schemeClr val="tx1"/>
-                      </a:solidFill>
-                      <a:prstDash val="solid"/>
-                      <a:round/>
-                      <a:headEnd type="none" w="med" len="med"/>
-                      <a:tailEnd type="none" w="med" len="med"/>
-                    </a:lnB>
-                    <a:solidFill>
-                      <a:srgbClr val="FFFAEF"/>
-                    </a:solidFill>
-                  </a:tcPr>
-                </a:tc>
-                <a:tc>
-                  <a:txBody>
-                    <a:bodyPr/>
-                    <a:lstStyle/>
-                    <a:p>
-                      <a:pPr algn="ctr" fontAlgn="b">
-                        <a:buNone/>
-                      </a:pPr>
-                      <a:r>
-                        <a:rPr lang="it-IT" sz="2000" u="none" strike="noStrike" dirty="0">
-                          <a:effectLst/>
-                        </a:rPr>
-                        <a:t>5</a:t>
-                      </a:r>
-                      <a:endParaRPr lang="it-IT" sz="2000" b="0" i="0" u="none" strike="noStrike" dirty="0">
-                        <a:solidFill>
-                          <a:srgbClr val="000000"/>
-                        </a:solidFill>
-                        <a:effectLst/>
-                        <a:latin typeface="Calibri" panose="020F0502020204030204" pitchFamily="34" charset="0"/>
-                      </a:endParaRPr>
-                    </a:p>
-                  </a:txBody>
-                  <a:tcPr marL="9525" marR="9525" marT="9525" marB="0" anchor="ctr">
-                    <a:lnL w="12700" cap="flat" cmpd="sng" algn="ctr">
-                      <a:solidFill>
-                        <a:schemeClr val="tx1"/>
-                      </a:solidFill>
-                      <a:prstDash val="solid"/>
-                      <a:round/>
-                      <a:headEnd type="none" w="med" len="med"/>
-                      <a:tailEnd type="none" w="med" len="med"/>
-                    </a:lnL>
-                    <a:lnR w="12700" cap="flat" cmpd="sng" algn="ctr">
-                      <a:solidFill>
-                        <a:schemeClr val="tx1"/>
-                      </a:solidFill>
-                      <a:prstDash val="solid"/>
-                      <a:round/>
-                      <a:headEnd type="none" w="med" len="med"/>
-                      <a:tailEnd type="none" w="med" len="med"/>
-                    </a:lnR>
-                    <a:lnT w="12700" cap="flat" cmpd="sng" algn="ctr">
-                      <a:solidFill>
-                        <a:schemeClr val="tx1"/>
-                      </a:solidFill>
-                      <a:prstDash val="solid"/>
-                      <a:round/>
-                      <a:headEnd type="none" w="med" len="med"/>
-                      <a:tailEnd type="none" w="med" len="med"/>
-                    </a:lnT>
-                    <a:lnB w="12700" cap="flat" cmpd="sng" algn="ctr">
-                      <a:solidFill>
-                        <a:schemeClr val="tx1"/>
-                      </a:solidFill>
-                      <a:prstDash val="solid"/>
-                      <a:round/>
-                      <a:headEnd type="none" w="med" len="med"/>
-                      <a:tailEnd type="none" w="med" len="med"/>
-                    </a:lnB>
-                    <a:solidFill>
-                      <a:srgbClr val="FFFAEF"/>
-                    </a:solidFill>
-                  </a:tcPr>
-                </a:tc>
-                <a:tc>
-                  <a:txBody>
-                    <a:bodyPr/>
-                    <a:lstStyle/>
-                    <a:p>
-                      <a:pPr algn="ctr" fontAlgn="b">
-                        <a:buNone/>
-                      </a:pPr>
-                      <a:r>
-                        <a:rPr lang="it-IT" sz="2000" u="none" strike="noStrike" dirty="0">
-                          <a:effectLst/>
-                        </a:rPr>
-                        <a:t>7</a:t>
-                      </a:r>
-                      <a:endParaRPr lang="it-IT" sz="2000" b="0" i="0" u="none" strike="noStrike" dirty="0">
-                        <a:solidFill>
-                          <a:srgbClr val="000000"/>
-                        </a:solidFill>
-                        <a:effectLst/>
-                        <a:latin typeface="Calibri" panose="020F0502020204030204" pitchFamily="34" charset="0"/>
-                      </a:endParaRPr>
-                    </a:p>
-                  </a:txBody>
-                  <a:tcPr marL="9525" marR="9525" marT="9525" marB="0" anchor="ctr">
-                    <a:lnL w="12700" cap="flat" cmpd="sng" algn="ctr">
-                      <a:solidFill>
-                        <a:schemeClr val="tx1"/>
-                      </a:solidFill>
-                      <a:prstDash val="solid"/>
-                      <a:round/>
-                      <a:headEnd type="none" w="med" len="med"/>
-                      <a:tailEnd type="none" w="med" len="med"/>
-                    </a:lnL>
-                    <a:lnR w="12700" cap="flat" cmpd="sng" algn="ctr">
-                      <a:solidFill>
-                        <a:schemeClr val="tx1"/>
-                      </a:solidFill>
-                      <a:prstDash val="solid"/>
-                      <a:round/>
-                      <a:headEnd type="none" w="med" len="med"/>
-                      <a:tailEnd type="none" w="med" len="med"/>
-                    </a:lnR>
-                    <a:lnT w="12700" cap="flat" cmpd="sng" algn="ctr">
-                      <a:solidFill>
-                        <a:schemeClr val="tx1"/>
-                      </a:solidFill>
-                      <a:prstDash val="solid"/>
-                      <a:round/>
-                      <a:headEnd type="none" w="med" len="med"/>
-                      <a:tailEnd type="none" w="med" len="med"/>
-                    </a:lnT>
-                    <a:lnB w="12700" cap="flat" cmpd="sng" algn="ctr">
-                      <a:solidFill>
-                        <a:schemeClr val="tx1"/>
-                      </a:solidFill>
-                      <a:prstDash val="solid"/>
-                      <a:round/>
-                      <a:headEnd type="none" w="med" len="med"/>
-                      <a:tailEnd type="none" w="med" len="med"/>
-                    </a:lnB>
-                    <a:solidFill>
-                      <a:srgbClr val="FFFAEF"/>
-                    </a:solidFill>
-                  </a:tcPr>
-                </a:tc>
-                <a:tc>
-                  <a:txBody>
-                    <a:bodyPr/>
-                    <a:lstStyle/>
-                    <a:p>
-                      <a:pPr algn="ctr" fontAlgn="b">
-                        <a:buNone/>
-                      </a:pPr>
-                      <a:r>
-                        <a:rPr lang="it-IT" sz="2000" u="none" strike="noStrike">
-                          <a:effectLst/>
-                        </a:rPr>
-                        <a:t>0</a:t>
-                      </a:r>
-                      <a:endParaRPr lang="it-IT" sz="2000" b="0" i="0" u="none" strike="noStrike">
-                        <a:solidFill>
-                          <a:srgbClr val="000000"/>
-                        </a:solidFill>
-                        <a:effectLst/>
-                        <a:latin typeface="Calibri" panose="020F0502020204030204" pitchFamily="34" charset="0"/>
-                      </a:endParaRPr>
-                    </a:p>
-                  </a:txBody>
-                  <a:tcPr marL="9525" marR="9525" marT="9525" marB="0" anchor="ctr">
-                    <a:lnL w="12700" cap="flat" cmpd="sng" algn="ctr">
-                      <a:solidFill>
-                        <a:schemeClr val="tx1"/>
-                      </a:solidFill>
-                      <a:prstDash val="solid"/>
-                      <a:round/>
-                      <a:headEnd type="none" w="med" len="med"/>
-                      <a:tailEnd type="none" w="med" len="med"/>
-                    </a:lnL>
-                    <a:lnR w="12700" cap="flat" cmpd="sng" algn="ctr">
-                      <a:solidFill>
-                        <a:schemeClr val="tx1"/>
-                      </a:solidFill>
-                      <a:prstDash val="solid"/>
-                      <a:round/>
-                      <a:headEnd type="none" w="med" len="med"/>
-                      <a:tailEnd type="none" w="med" len="med"/>
-                    </a:lnR>
-                    <a:lnT w="12700" cap="flat" cmpd="sng" algn="ctr">
-                      <a:solidFill>
-                        <a:schemeClr val="tx1"/>
-                      </a:solidFill>
-                      <a:prstDash val="solid"/>
-                      <a:round/>
-                      <a:headEnd type="none" w="med" len="med"/>
-                      <a:tailEnd type="none" w="med" len="med"/>
-                    </a:lnT>
-                    <a:lnB w="12700" cap="flat" cmpd="sng" algn="ctr">
-                      <a:solidFill>
-                        <a:schemeClr val="tx1"/>
-                      </a:solidFill>
-                      <a:prstDash val="solid"/>
-                      <a:round/>
-                      <a:headEnd type="none" w="med" len="med"/>
-                      <a:tailEnd type="none" w="med" len="med"/>
-                    </a:lnB>
-                    <a:solidFill>
-                      <a:srgbClr val="FFFAEF"/>
-                    </a:solidFill>
-                  </a:tcPr>
-                </a:tc>
-                <a:tc>
-                  <a:txBody>
-                    <a:bodyPr/>
-                    <a:lstStyle/>
-                    <a:p>
-                      <a:pPr algn="ctr" fontAlgn="b">
-                        <a:buNone/>
-                      </a:pPr>
-                      <a:r>
-                        <a:rPr lang="it-IT" sz="2000" u="none" strike="noStrike" dirty="0">
-                          <a:effectLst/>
-                        </a:rPr>
-                        <a:t>7</a:t>
-                      </a:r>
-                      <a:endParaRPr lang="it-IT" sz="2000" b="0" i="0" u="none" strike="noStrike" dirty="0">
-                        <a:solidFill>
-                          <a:srgbClr val="000000"/>
-                        </a:solidFill>
-                        <a:effectLst/>
-                        <a:latin typeface="Calibri" panose="020F0502020204030204" pitchFamily="34" charset="0"/>
-                      </a:endParaRPr>
                     </a:p>
                   </a:txBody>
                   <a:tcPr marL="9525" marR="9525" marT="9525" marB="0" anchor="ctr">
@@ -8369,7 +8103,258 @@
                           <a:effectLst/>
                           <a:latin typeface="Calibri" panose="020F0502020204030204" pitchFamily="34" charset="0"/>
                         </a:rPr>
-                        <a:t>23</a:t>
+                        <a:t>6</a:t>
+                      </a:r>
+                    </a:p>
+                  </a:txBody>
+                  <a:tcPr marL="9525" marR="9525" marT="9525" marB="0" anchor="ctr">
+                    <a:lnL w="12700" cap="flat" cmpd="sng" algn="ctr">
+                      <a:solidFill>
+                        <a:schemeClr val="tx1"/>
+                      </a:solidFill>
+                      <a:prstDash val="solid"/>
+                      <a:round/>
+                      <a:headEnd type="none" w="med" len="med"/>
+                      <a:tailEnd type="none" w="med" len="med"/>
+                    </a:lnL>
+                    <a:lnR w="12700" cap="flat" cmpd="sng" algn="ctr">
+                      <a:solidFill>
+                        <a:schemeClr val="tx1"/>
+                      </a:solidFill>
+                      <a:prstDash val="solid"/>
+                      <a:round/>
+                      <a:headEnd type="none" w="med" len="med"/>
+                      <a:tailEnd type="none" w="med" len="med"/>
+                    </a:lnR>
+                    <a:lnT w="12700" cap="flat" cmpd="sng" algn="ctr">
+                      <a:solidFill>
+                        <a:schemeClr val="tx1"/>
+                      </a:solidFill>
+                      <a:prstDash val="solid"/>
+                      <a:round/>
+                      <a:headEnd type="none" w="med" len="med"/>
+                      <a:tailEnd type="none" w="med" len="med"/>
+                    </a:lnT>
+                    <a:lnB w="12700" cap="flat" cmpd="sng" algn="ctr">
+                      <a:solidFill>
+                        <a:schemeClr val="tx1"/>
+                      </a:solidFill>
+                      <a:prstDash val="solid"/>
+                      <a:round/>
+                      <a:headEnd type="none" w="med" len="med"/>
+                      <a:tailEnd type="none" w="med" len="med"/>
+                    </a:lnB>
+                    <a:solidFill>
+                      <a:srgbClr val="FFFAEF"/>
+                    </a:solidFill>
+                  </a:tcPr>
+                </a:tc>
+                <a:tc>
+                  <a:txBody>
+                    <a:bodyPr/>
+                    <a:lstStyle/>
+                    <a:p>
+                      <a:pPr algn="ctr" fontAlgn="b">
+                        <a:buNone/>
+                      </a:pPr>
+                      <a:r>
+                        <a:rPr lang="it-IT" sz="2000" b="0" i="0" u="none" strike="noStrike" dirty="0">
+                          <a:solidFill>
+                            <a:srgbClr val="000000"/>
+                          </a:solidFill>
+                          <a:effectLst/>
+                          <a:latin typeface="Calibri" panose="020F0502020204030204" pitchFamily="34" charset="0"/>
+                        </a:rPr>
+                        <a:t>9</a:t>
+                      </a:r>
+                    </a:p>
+                  </a:txBody>
+                  <a:tcPr marL="9525" marR="9525" marT="9525" marB="0" anchor="ctr">
+                    <a:lnL w="12700" cap="flat" cmpd="sng" algn="ctr">
+                      <a:solidFill>
+                        <a:schemeClr val="tx1"/>
+                      </a:solidFill>
+                      <a:prstDash val="solid"/>
+                      <a:round/>
+                      <a:headEnd type="none" w="med" len="med"/>
+                      <a:tailEnd type="none" w="med" len="med"/>
+                    </a:lnL>
+                    <a:lnR w="12700" cap="flat" cmpd="sng" algn="ctr">
+                      <a:solidFill>
+                        <a:schemeClr val="tx1"/>
+                      </a:solidFill>
+                      <a:prstDash val="solid"/>
+                      <a:round/>
+                      <a:headEnd type="none" w="med" len="med"/>
+                      <a:tailEnd type="none" w="med" len="med"/>
+                    </a:lnR>
+                    <a:lnT w="12700" cap="flat" cmpd="sng" algn="ctr">
+                      <a:solidFill>
+                        <a:schemeClr val="tx1"/>
+                      </a:solidFill>
+                      <a:prstDash val="solid"/>
+                      <a:round/>
+                      <a:headEnd type="none" w="med" len="med"/>
+                      <a:tailEnd type="none" w="med" len="med"/>
+                    </a:lnT>
+                    <a:lnB w="12700" cap="flat" cmpd="sng" algn="ctr">
+                      <a:solidFill>
+                        <a:schemeClr val="tx1"/>
+                      </a:solidFill>
+                      <a:prstDash val="solid"/>
+                      <a:round/>
+                      <a:headEnd type="none" w="med" len="med"/>
+                      <a:tailEnd type="none" w="med" len="med"/>
+                    </a:lnB>
+                    <a:solidFill>
+                      <a:srgbClr val="FFFAEF"/>
+                    </a:solidFill>
+                  </a:tcPr>
+                </a:tc>
+                <a:tc>
+                  <a:txBody>
+                    <a:bodyPr/>
+                    <a:lstStyle/>
+                    <a:p>
+                      <a:pPr algn="ctr" fontAlgn="b">
+                        <a:buNone/>
+                      </a:pPr>
+                      <a:r>
+                        <a:rPr lang="it-IT" sz="2000" u="none" strike="noStrike" dirty="0">
+                          <a:effectLst/>
+                        </a:rPr>
+                        <a:t>0</a:t>
+                      </a:r>
+                      <a:endParaRPr lang="it-IT" sz="2000" b="0" i="0" u="none" strike="noStrike" dirty="0">
+                        <a:solidFill>
+                          <a:srgbClr val="000000"/>
+                        </a:solidFill>
+                        <a:effectLst/>
+                        <a:latin typeface="Calibri" panose="020F0502020204030204" pitchFamily="34" charset="0"/>
+                      </a:endParaRPr>
+                    </a:p>
+                  </a:txBody>
+                  <a:tcPr marL="9525" marR="9525" marT="9525" marB="0" anchor="ctr">
+                    <a:lnL w="12700" cap="flat" cmpd="sng" algn="ctr">
+                      <a:solidFill>
+                        <a:schemeClr val="tx1"/>
+                      </a:solidFill>
+                      <a:prstDash val="solid"/>
+                      <a:round/>
+                      <a:headEnd type="none" w="med" len="med"/>
+                      <a:tailEnd type="none" w="med" len="med"/>
+                    </a:lnL>
+                    <a:lnR w="12700" cap="flat" cmpd="sng" algn="ctr">
+                      <a:solidFill>
+                        <a:schemeClr val="tx1"/>
+                      </a:solidFill>
+                      <a:prstDash val="solid"/>
+                      <a:round/>
+                      <a:headEnd type="none" w="med" len="med"/>
+                      <a:tailEnd type="none" w="med" len="med"/>
+                    </a:lnR>
+                    <a:lnT w="12700" cap="flat" cmpd="sng" algn="ctr">
+                      <a:solidFill>
+                        <a:schemeClr val="tx1"/>
+                      </a:solidFill>
+                      <a:prstDash val="solid"/>
+                      <a:round/>
+                      <a:headEnd type="none" w="med" len="med"/>
+                      <a:tailEnd type="none" w="med" len="med"/>
+                    </a:lnT>
+                    <a:lnB w="12700" cap="flat" cmpd="sng" algn="ctr">
+                      <a:solidFill>
+                        <a:schemeClr val="tx1"/>
+                      </a:solidFill>
+                      <a:prstDash val="solid"/>
+                      <a:round/>
+                      <a:headEnd type="none" w="med" len="med"/>
+                      <a:tailEnd type="none" w="med" len="med"/>
+                    </a:lnB>
+                    <a:solidFill>
+                      <a:srgbClr val="FFFAEF"/>
+                    </a:solidFill>
+                  </a:tcPr>
+                </a:tc>
+                <a:tc>
+                  <a:txBody>
+                    <a:bodyPr/>
+                    <a:lstStyle/>
+                    <a:p>
+                      <a:pPr algn="ctr" fontAlgn="b">
+                        <a:buNone/>
+                      </a:pPr>
+                      <a:r>
+                        <a:rPr lang="it-IT" sz="2000" b="0" i="0" u="none" strike="noStrike" dirty="0">
+                          <a:solidFill>
+                            <a:srgbClr val="000000"/>
+                          </a:solidFill>
+                          <a:effectLst/>
+                          <a:latin typeface="Calibri" panose="020F0502020204030204" pitchFamily="34" charset="0"/>
+                        </a:rPr>
+                        <a:t>9</a:t>
+                      </a:r>
+                    </a:p>
+                  </a:txBody>
+                  <a:tcPr marL="9525" marR="9525" marT="9525" marB="0" anchor="ctr">
+                    <a:lnL w="12700" cap="flat" cmpd="sng" algn="ctr">
+                      <a:solidFill>
+                        <a:schemeClr val="tx1"/>
+                      </a:solidFill>
+                      <a:prstDash val="solid"/>
+                      <a:round/>
+                      <a:headEnd type="none" w="med" len="med"/>
+                      <a:tailEnd type="none" w="med" len="med"/>
+                    </a:lnL>
+                    <a:lnR w="12700" cap="flat" cmpd="sng" algn="ctr">
+                      <a:solidFill>
+                        <a:schemeClr val="tx1"/>
+                      </a:solidFill>
+                      <a:prstDash val="solid"/>
+                      <a:round/>
+                      <a:headEnd type="none" w="med" len="med"/>
+                      <a:tailEnd type="none" w="med" len="med"/>
+                    </a:lnR>
+                    <a:lnT w="12700" cap="flat" cmpd="sng" algn="ctr">
+                      <a:solidFill>
+                        <a:schemeClr val="tx1"/>
+                      </a:solidFill>
+                      <a:prstDash val="solid"/>
+                      <a:round/>
+                      <a:headEnd type="none" w="med" len="med"/>
+                      <a:tailEnd type="none" w="med" len="med"/>
+                    </a:lnT>
+                    <a:lnB w="12700" cap="flat" cmpd="sng" algn="ctr">
+                      <a:solidFill>
+                        <a:schemeClr val="tx1"/>
+                      </a:solidFill>
+                      <a:prstDash val="solid"/>
+                      <a:round/>
+                      <a:headEnd type="none" w="med" len="med"/>
+                      <a:tailEnd type="none" w="med" len="med"/>
+                    </a:lnB>
+                    <a:solidFill>
+                      <a:srgbClr val="FFFAEF"/>
+                    </a:solidFill>
+                  </a:tcPr>
+                </a:tc>
+                <a:tc>
+                  <a:txBody>
+                    <a:bodyPr/>
+                    <a:lstStyle/>
+                    <a:p>
+                      <a:pPr algn="ctr" fontAlgn="b">
+                        <a:buNone/>
+                      </a:pPr>
+                      <a:r>
+                        <a:rPr lang="it-IT" sz="2000" b="0" i="0" u="none" strike="noStrike" dirty="0">
+                          <a:solidFill>
+                            <a:srgbClr val="000000"/>
+                          </a:solidFill>
+                          <a:effectLst/>
+                          <a:latin typeface="Calibri" panose="020F0502020204030204" pitchFamily="34" charset="0"/>
+                        </a:rPr>
+                        <a:t>34</a:t>
                       </a:r>
                     </a:p>
                   </a:txBody>
@@ -8629,7 +8614,7 @@
                         <a:rPr lang="it-IT" sz="2000" u="none" strike="noStrike" dirty="0">
                           <a:effectLst/>
                         </a:rPr>
-                        <a:t>9</a:t>
+                        <a:t>12</a:t>
                       </a:r>
                       <a:endParaRPr lang="it-IT" sz="2000" b="0" i="0" u="none" strike="noStrike" dirty="0">
                         <a:solidFill>
@@ -8691,18 +8676,15 @@
                         <a:buNone/>
                       </a:pPr>
                       <a:r>
-                        <a:rPr lang="it-IT" sz="2000" u="none" strike="noStrike" dirty="0">
+                        <a:rPr lang="it-IT" sz="2000" b="0" i="0" u="none" strike="noStrike" dirty="0">
+                          <a:solidFill>
+                            <a:srgbClr val="000000"/>
+                          </a:solidFill>
                           <a:effectLst/>
+                          <a:latin typeface="Calibri" panose="020F0502020204030204" pitchFamily="34" charset="0"/>
                         </a:rPr>
-                        <a:t>14</a:t>
+                        <a:t>17</a:t>
                       </a:r>
-                      <a:endParaRPr lang="it-IT" sz="2000" b="0" i="0" u="none" strike="noStrike" dirty="0">
-                        <a:solidFill>
-                          <a:srgbClr val="000000"/>
-                        </a:solidFill>
-                        <a:effectLst/>
-                        <a:latin typeface="Calibri" panose="020F0502020204030204" pitchFamily="34" charset="0"/>
-                      </a:endParaRPr>
                     </a:p>
                   </a:txBody>
                   <a:tcPr marL="9525" marR="9525" marT="9525" marB="0" anchor="ctr">
@@ -8821,18 +8803,15 @@
                         <a:buNone/>
                       </a:pPr>
                       <a:r>
-                        <a:rPr lang="it-IT" sz="2000" u="none" strike="noStrike">
+                        <a:rPr lang="it-IT" sz="2000" b="0" i="0" u="none" strike="noStrike" dirty="0">
+                          <a:solidFill>
+                            <a:srgbClr val="000000"/>
+                          </a:solidFill>
                           <a:effectLst/>
+                          <a:latin typeface="Calibri" panose="020F0502020204030204" pitchFamily="34" charset="0"/>
                         </a:rPr>
-                        <a:t>6</a:t>
+                        <a:t>8</a:t>
                       </a:r>
-                      <a:endParaRPr lang="it-IT" sz="2000" b="0" i="0" u="none" strike="noStrike">
-                        <a:solidFill>
-                          <a:srgbClr val="000000"/>
-                        </a:solidFill>
-                        <a:effectLst/>
-                        <a:latin typeface="Calibri" panose="020F0502020204030204" pitchFamily="34" charset="0"/>
-                      </a:endParaRPr>
                     </a:p>
                   </a:txBody>
                   <a:tcPr marL="9525" marR="9525" marT="9525" marB="0" anchor="ctr">
@@ -8886,22 +8865,15 @@
                         <a:buNone/>
                       </a:pPr>
                       <a:r>
-                        <a:rPr lang="it-IT" sz="2000" b="0" i="0" u="none" strike="noStrike">
+                        <a:rPr lang="it-IT" sz="2000" b="0" i="0" u="none" strike="noStrike" dirty="0">
                           <a:solidFill>
                             <a:srgbClr val="000000"/>
                           </a:solidFill>
                           <a:effectLst/>
                           <a:latin typeface="Calibri" panose="020F0502020204030204" pitchFamily="34" charset="0"/>
                         </a:rPr>
-                        <a:t>29</a:t>
+                        <a:t>37</a:t>
                       </a:r>
-                      <a:endParaRPr lang="it-IT" sz="2000" b="0" i="0" u="none" strike="noStrike" dirty="0">
-                        <a:solidFill>
-                          <a:srgbClr val="000000"/>
-                        </a:solidFill>
-                        <a:effectLst/>
-                        <a:latin typeface="Calibri" panose="020F0502020204030204" pitchFamily="34" charset="0"/>
-                      </a:endParaRPr>
                     </a:p>
                   </a:txBody>
                   <a:tcPr marL="9525" marR="9525" marT="9525" marB="0" anchor="ctr">
@@ -9160,7 +9132,7 @@
                         <a:rPr lang="it-IT" sz="2000" u="none" strike="noStrike" dirty="0">
                           <a:effectLst/>
                         </a:rPr>
-                        <a:t>4</a:t>
+                        <a:t>6</a:t>
                       </a:r>
                       <a:endParaRPr lang="it-IT" sz="2000" b="0" i="0" u="none" strike="noStrike" dirty="0">
                         <a:solidFill>
@@ -9225,74 +9197,9 @@
                         <a:rPr lang="it-IT" sz="2000" u="none" strike="noStrike" dirty="0">
                           <a:effectLst/>
                         </a:rPr>
-                        <a:t>6</a:t>
+                        <a:t>16</a:t>
                       </a:r>
                       <a:endParaRPr lang="it-IT" sz="2000" b="0" i="0" u="none" strike="noStrike" dirty="0">
-                        <a:solidFill>
-                          <a:srgbClr val="000000"/>
-                        </a:solidFill>
-                        <a:effectLst/>
-                        <a:latin typeface="Calibri" panose="020F0502020204030204" pitchFamily="34" charset="0"/>
-                      </a:endParaRPr>
-                    </a:p>
-                  </a:txBody>
-                  <a:tcPr marL="9525" marR="9525" marT="9525" marB="0" anchor="ctr">
-                    <a:lnL w="12700" cap="flat" cmpd="sng" algn="ctr">
-                      <a:solidFill>
-                        <a:schemeClr val="tx1"/>
-                      </a:solidFill>
-                      <a:prstDash val="solid"/>
-                      <a:round/>
-                      <a:headEnd type="none" w="med" len="med"/>
-                      <a:tailEnd type="none" w="med" len="med"/>
-                    </a:lnL>
-                    <a:lnR w="12700" cap="flat" cmpd="sng" algn="ctr">
-                      <a:solidFill>
-                        <a:schemeClr val="tx1"/>
-                      </a:solidFill>
-                      <a:prstDash val="solid"/>
-                      <a:round/>
-                      <a:headEnd type="none" w="med" len="med"/>
-                      <a:tailEnd type="none" w="med" len="med"/>
-                    </a:lnR>
-                    <a:lnT w="12700" cap="flat" cmpd="sng" algn="ctr">
-                      <a:solidFill>
-                        <a:schemeClr val="tx1"/>
-                      </a:solidFill>
-                      <a:prstDash val="solid"/>
-                      <a:round/>
-                      <a:headEnd type="none" w="med" len="med"/>
-                      <a:tailEnd type="none" w="med" len="med"/>
-                    </a:lnT>
-                    <a:lnB w="12700" cap="flat" cmpd="sng" algn="ctr">
-                      <a:solidFill>
-                        <a:schemeClr val="tx1"/>
-                      </a:solidFill>
-                      <a:prstDash val="solid"/>
-                      <a:round/>
-                      <a:headEnd type="none" w="med" len="med"/>
-                      <a:tailEnd type="none" w="med" len="med"/>
-                    </a:lnB>
-                    <a:solidFill>
-                      <a:srgbClr val="FFFAEF"/>
-                    </a:solidFill>
-                  </a:tcPr>
-                </a:tc>
-                <a:tc>
-                  <a:txBody>
-                    <a:bodyPr/>
-                    <a:lstStyle/>
-                    <a:p>
-                      <a:pPr algn="ctr" fontAlgn="b">
-                        <a:buNone/>
-                      </a:pPr>
-                      <a:r>
-                        <a:rPr lang="it-IT" sz="2000" u="none" strike="noStrike">
-                          <a:effectLst/>
-                        </a:rPr>
-                        <a:t>0</a:t>
-                      </a:r>
-                      <a:endParaRPr lang="it-IT" sz="2000" b="0" i="0" u="none" strike="noStrike">
                         <a:solidFill>
                           <a:srgbClr val="000000"/>
                         </a:solidFill>
@@ -9355,7 +9262,7 @@
                         <a:rPr lang="it-IT" sz="2000" u="none" strike="noStrike" dirty="0">
                           <a:effectLst/>
                         </a:rPr>
-                        <a:t>12</a:t>
+                        <a:t>0</a:t>
                       </a:r>
                       <a:endParaRPr lang="it-IT" sz="2000" b="0" i="0" u="none" strike="noStrike" dirty="0">
                         <a:solidFill>
@@ -9417,14 +9324,10 @@
                         <a:buNone/>
                       </a:pPr>
                       <a:r>
-                        <a:rPr lang="it-IT" sz="2000" b="0" i="0" u="none" strike="noStrike">
-                          <a:solidFill>
-                            <a:srgbClr val="000000"/>
-                          </a:solidFill>
+                        <a:rPr lang="it-IT" sz="2000" u="none" strike="noStrike" dirty="0">
                           <a:effectLst/>
-                          <a:latin typeface="Calibri" panose="020F0502020204030204" pitchFamily="34" charset="0"/>
                         </a:rPr>
-                        <a:t>22</a:t>
+                        <a:t>16</a:t>
                       </a:r>
                       <a:endParaRPr lang="it-IT" sz="2000" b="0" i="0" u="none" strike="noStrike" dirty="0">
                         <a:solidFill>
@@ -9433,6 +9336,68 @@
                         <a:effectLst/>
                         <a:latin typeface="Calibri" panose="020F0502020204030204" pitchFamily="34" charset="0"/>
                       </a:endParaRPr>
+                    </a:p>
+                  </a:txBody>
+                  <a:tcPr marL="9525" marR="9525" marT="9525" marB="0" anchor="ctr">
+                    <a:lnL w="12700" cap="flat" cmpd="sng" algn="ctr">
+                      <a:solidFill>
+                        <a:schemeClr val="tx1"/>
+                      </a:solidFill>
+                      <a:prstDash val="solid"/>
+                      <a:round/>
+                      <a:headEnd type="none" w="med" len="med"/>
+                      <a:tailEnd type="none" w="med" len="med"/>
+                    </a:lnL>
+                    <a:lnR w="12700" cap="flat" cmpd="sng" algn="ctr">
+                      <a:solidFill>
+                        <a:schemeClr val="tx1"/>
+                      </a:solidFill>
+                      <a:prstDash val="solid"/>
+                      <a:round/>
+                      <a:headEnd type="none" w="med" len="med"/>
+                      <a:tailEnd type="none" w="med" len="med"/>
+                    </a:lnR>
+                    <a:lnT w="12700" cap="flat" cmpd="sng" algn="ctr">
+                      <a:solidFill>
+                        <a:schemeClr val="tx1"/>
+                      </a:solidFill>
+                      <a:prstDash val="solid"/>
+                      <a:round/>
+                      <a:headEnd type="none" w="med" len="med"/>
+                      <a:tailEnd type="none" w="med" len="med"/>
+                    </a:lnT>
+                    <a:lnB w="12700" cap="flat" cmpd="sng" algn="ctr">
+                      <a:solidFill>
+                        <a:schemeClr val="tx1"/>
+                      </a:solidFill>
+                      <a:prstDash val="solid"/>
+                      <a:round/>
+                      <a:headEnd type="none" w="med" len="med"/>
+                      <a:tailEnd type="none" w="med" len="med"/>
+                    </a:lnB>
+                    <a:solidFill>
+                      <a:srgbClr val="FFFAEF"/>
+                    </a:solidFill>
+                  </a:tcPr>
+                </a:tc>
+                <a:tc>
+                  <a:txBody>
+                    <a:bodyPr/>
+                    <a:lstStyle/>
+                    <a:p>
+                      <a:pPr algn="ctr" fontAlgn="b">
+                        <a:buNone/>
+                      </a:pPr>
+                      <a:r>
+                        <a:rPr lang="it-IT" sz="2000" b="0" i="0" u="none" strike="noStrike" dirty="0">
+                          <a:solidFill>
+                            <a:srgbClr val="000000"/>
+                          </a:solidFill>
+                          <a:effectLst/>
+                          <a:latin typeface="Calibri" panose="020F0502020204030204" pitchFamily="34" charset="0"/>
+                        </a:rPr>
+                        <a:t>38</a:t>
+                      </a:r>
                     </a:p>
                   </a:txBody>
                   <a:tcPr marL="9525" marR="9525" marT="9525" marB="0" anchor="ctr">
@@ -9565,7 +9530,7 @@
                           <a:effectLst/>
                           <a:latin typeface="Calibri" panose="020F0502020204030204" pitchFamily="34" charset="0"/>
                         </a:rPr>
-                        <a:t>18</a:t>
+                        <a:t>21</a:t>
                       </a:r>
                     </a:p>
                   </a:txBody>
@@ -9627,7 +9592,7 @@
                           <a:effectLst/>
                           <a:latin typeface="Calibri" panose="020F0502020204030204" pitchFamily="34" charset="0"/>
                         </a:rPr>
-                        <a:t>17</a:t>
+                        <a:t>24</a:t>
                       </a:r>
                     </a:p>
                   </a:txBody>
@@ -9689,7 +9654,7 @@
                           <a:effectLst/>
                           <a:latin typeface="Calibri" panose="020F0502020204030204" pitchFamily="34" charset="0"/>
                         </a:rPr>
-                        <a:t>39</a:t>
+                        <a:t>48</a:t>
                       </a:r>
                     </a:p>
                   </a:txBody>
@@ -9751,7 +9716,7 @@
                           <a:effectLst/>
                           <a:latin typeface="Calibri" panose="020F0502020204030204" pitchFamily="34" charset="0"/>
                         </a:rPr>
-                        <a:t>52</a:t>
+                        <a:t>95</a:t>
                       </a:r>
                     </a:p>
                   </a:txBody>
@@ -9872,7 +9837,7 @@
                           <a:effectLst/>
                           <a:latin typeface="Calibri" panose="020F0502020204030204" pitchFamily="34" charset="0"/>
                         </a:rPr>
-                        <a:t>31</a:t>
+                        <a:t>51</a:t>
                       </a:r>
                     </a:p>
                   </a:txBody>
@@ -9927,15 +9892,22 @@
                         <a:buNone/>
                       </a:pPr>
                       <a:r>
-                        <a:rPr lang="it-IT" sz="2000" b="0" i="0" u="none" strike="noStrike" dirty="0">
+                        <a:rPr lang="it-IT" sz="2000" b="0" i="0" u="none" strike="noStrike">
                           <a:solidFill>
                             <a:srgbClr val="000000"/>
                           </a:solidFill>
                           <a:effectLst/>
                           <a:latin typeface="Calibri" panose="020F0502020204030204" pitchFamily="34" charset="0"/>
                         </a:rPr>
-                        <a:t>157</a:t>
+                        <a:t>239</a:t>
                       </a:r>
+                      <a:endParaRPr lang="it-IT" sz="2000" b="0" i="0" u="none" strike="noStrike" dirty="0">
+                        <a:solidFill>
+                          <a:srgbClr val="000000"/>
+                        </a:solidFill>
+                        <a:effectLst/>
+                        <a:latin typeface="Calibri" panose="020F0502020204030204" pitchFamily="34" charset="0"/>
+                      </a:endParaRPr>
                     </a:p>
                   </a:txBody>
                   <a:tcPr marL="9525" marR="9525" marT="9525" marB="0" anchor="ctr">
@@ -13895,14 +13867,14 @@
           <p:nvPr>
             <p:extLst>
               <p:ext uri="{D42A27DB-BD31-4B8C-83A1-F6EECF244321}">
-                <p14:modId xmlns:p14="http://schemas.microsoft.com/office/powerpoint/2010/main" val="254038366"/>
+                <p14:modId xmlns:p14="http://schemas.microsoft.com/office/powerpoint/2010/main" val="1815606153"/>
               </p:ext>
             </p:extLst>
           </p:nvPr>
         </p:nvGraphicFramePr>
         <p:xfrm>
           <a:off x="4495800" y="2400300"/>
-          <a:ext cx="9525000" cy="2641524"/>
+          <a:ext cx="9525000" cy="3081778"/>
         </p:xfrm>
         <a:graphic>
           <a:graphicData uri="http://schemas.openxmlformats.org/drawingml/2006/table">
@@ -14213,7 +14185,7 @@
                         <a:rPr lang="it-IT" sz="2800" u="none" strike="noStrike" dirty="0">
                           <a:effectLst/>
                         </a:rPr>
-                        <a:t>43h</a:t>
+                        <a:t>46h</a:t>
                       </a:r>
                       <a:endParaRPr lang="it-IT" sz="2800" b="0" i="0" u="none" strike="noStrike" dirty="0">
                         <a:solidFill>
@@ -14278,7 +14250,7 @@
                         <a:rPr lang="it-IT" sz="2800" u="none" strike="noStrike" dirty="0">
                           <a:effectLst/>
                         </a:rPr>
-                        <a:t>1020€</a:t>
+                        <a:t>1095€</a:t>
                       </a:r>
                       <a:endParaRPr lang="it-IT" sz="2800" b="0" i="0" u="none" strike="noStrike" dirty="0">
                         <a:solidFill>
@@ -14415,7 +14387,7 @@
                         <a:rPr lang="it-IT" sz="2800" u="none" strike="noStrike" dirty="0">
                           <a:effectLst/>
                         </a:rPr>
-                        <a:t>37h</a:t>
+                        <a:t>44h</a:t>
                       </a:r>
                       <a:endParaRPr lang="it-IT" sz="2800" b="0" i="0" u="none" strike="noStrike" dirty="0">
                         <a:solidFill>
@@ -14480,7 +14452,7 @@
                         <a:rPr lang="it-IT" sz="2800" u="none" strike="noStrike" dirty="0">
                           <a:effectLst/>
                         </a:rPr>
-                        <a:t>845€</a:t>
+                        <a:t>1000€</a:t>
                       </a:r>
                       <a:endParaRPr lang="it-IT" sz="2800" b="0" i="0" u="none" strike="noStrike" dirty="0">
                         <a:solidFill>
@@ -14549,12 +14521,12 @@
                         <a:buNone/>
                       </a:pPr>
                       <a:r>
-                        <a:rPr lang="it-IT" sz="2800" b="1" u="none" strike="noStrike">
+                        <a:rPr lang="it-IT" sz="2800" b="1" u="none" strike="noStrike" dirty="0">
                           <a:effectLst/>
                         </a:rPr>
                         <a:t>Sprint 3</a:t>
                       </a:r>
-                      <a:endParaRPr lang="it-IT" sz="2800" b="1" i="0" u="none" strike="noStrike">
+                      <a:endParaRPr lang="it-IT" sz="2800" b="1" i="0" u="none" strike="noStrike" dirty="0">
                         <a:solidFill>
                           <a:srgbClr val="000000"/>
                         </a:solidFill>
@@ -14617,7 +14589,7 @@
                         <a:rPr lang="it-IT" sz="2800" u="none" strike="noStrike" dirty="0">
                           <a:effectLst/>
                         </a:rPr>
-                        <a:t>41h</a:t>
+                        <a:t>49h</a:t>
                       </a:r>
                       <a:endParaRPr lang="it-IT" sz="2800" b="0" i="0" u="none" strike="noStrike" dirty="0">
                         <a:solidFill>
@@ -14682,7 +14654,7 @@
                         <a:rPr lang="it-IT" sz="2800" u="none" strike="noStrike" dirty="0">
                           <a:effectLst/>
                         </a:rPr>
-                        <a:t>910€</a:t>
+                        <a:t>1065€</a:t>
                       </a:r>
                       <a:endParaRPr lang="it-IT" sz="2800" b="0" i="0" u="none" strike="noStrike" dirty="0">
                         <a:solidFill>
@@ -14751,12 +14723,12 @@
                         <a:buNone/>
                       </a:pPr>
                       <a:r>
-                        <a:rPr lang="it-IT" sz="2800" b="1" u="none" strike="noStrike">
+                        <a:rPr lang="it-IT" sz="2800" b="1" u="none" strike="noStrike" dirty="0">
                           <a:effectLst/>
                         </a:rPr>
                         <a:t>Sprint 4</a:t>
                       </a:r>
-                      <a:endParaRPr lang="it-IT" sz="2800" b="1" i="0" u="none" strike="noStrike">
+                      <a:endParaRPr lang="it-IT" sz="2800" b="1" i="0" u="none" strike="noStrike" dirty="0">
                         <a:solidFill>
                           <a:srgbClr val="000000"/>
                         </a:solidFill>
@@ -14819,7 +14791,7 @@
                         <a:rPr lang="it-IT" sz="2800" u="none" strike="noStrike" dirty="0">
                           <a:effectLst/>
                         </a:rPr>
-                        <a:t>36h</a:t>
+                        <a:t>45h</a:t>
                       </a:r>
                       <a:endParaRPr lang="it-IT" sz="2800" b="0" i="0" u="none" strike="noStrike" dirty="0">
                         <a:solidFill>
@@ -14884,7 +14856,7 @@
                         <a:rPr lang="it-IT" sz="2800" u="none" strike="noStrike" dirty="0">
                           <a:effectLst/>
                         </a:rPr>
-                        <a:t>845€</a:t>
+                        <a:t>1045€</a:t>
                       </a:r>
                       <a:endParaRPr lang="it-IT" sz="2800" b="0" i="0" u="none" strike="noStrike" dirty="0">
                         <a:solidFill>
@@ -14940,6 +14912,250 @@
                 <a:extLst>
                   <a:ext uri="{0D108BD9-81ED-4DB2-BD59-A6C34878D82A}">
                     <a16:rowId xmlns:a16="http://schemas.microsoft.com/office/drawing/2014/main" val="2183559990"/>
+                  </a:ext>
+                </a:extLst>
+              </a:tr>
+              <a:tr h="440254">
+                <a:tc>
+                  <a:txBody>
+                    <a:bodyPr/>
+                    <a:lstStyle/>
+                    <a:p>
+                      <a:pPr marL="0" marR="0" lvl="0" indent="0" algn="ctr" defTabSz="914400" rtl="0" eaLnBrk="1" fontAlgn="b" latinLnBrk="0" hangingPunct="1">
+                        <a:lnSpc>
+                          <a:spcPct val="100000"/>
+                        </a:lnSpc>
+                        <a:spcBef>
+                          <a:spcPts val="0"/>
+                        </a:spcBef>
+                        <a:spcAft>
+                          <a:spcPts val="0"/>
+                        </a:spcAft>
+                        <a:buClrTx/>
+                        <a:buSzTx/>
+                        <a:buFontTx/>
+                        <a:buNone/>
+                        <a:tabLst/>
+                        <a:defRPr/>
+                      </a:pPr>
+                      <a:r>
+                        <a:rPr lang="it-IT" sz="2800" b="1" u="none" strike="noStrike" dirty="0">
+                          <a:effectLst/>
+                        </a:rPr>
+                        <a:t>Sprint 5</a:t>
+                      </a:r>
+                      <a:endParaRPr lang="it-IT" sz="2800" b="1" i="0" u="none" strike="noStrike" dirty="0">
+                        <a:solidFill>
+                          <a:srgbClr val="000000"/>
+                        </a:solidFill>
+                        <a:effectLst/>
+                        <a:latin typeface="Arial" panose="020B0604020202020204" pitchFamily="34" charset="0"/>
+                      </a:endParaRPr>
+                    </a:p>
+                  </a:txBody>
+                  <a:tcPr marL="9525" marR="9525" marT="9525" marB="0" anchor="b">
+                    <a:lnL w="12700" cap="flat" cmpd="sng" algn="ctr">
+                      <a:solidFill>
+                        <a:schemeClr val="tx1"/>
+                      </a:solidFill>
+                      <a:prstDash val="solid"/>
+                      <a:round/>
+                      <a:headEnd type="none" w="med" len="med"/>
+                      <a:tailEnd type="none" w="med" len="med"/>
+                    </a:lnL>
+                    <a:lnR w="12700" cap="flat" cmpd="sng" algn="ctr">
+                      <a:solidFill>
+                        <a:schemeClr val="tx1"/>
+                      </a:solidFill>
+                      <a:prstDash val="solid"/>
+                      <a:round/>
+                      <a:headEnd type="none" w="med" len="med"/>
+                      <a:tailEnd type="none" w="med" len="med"/>
+                    </a:lnR>
+                    <a:lnT w="12700" cap="flat" cmpd="sng" algn="ctr">
+                      <a:solidFill>
+                        <a:schemeClr val="tx1"/>
+                      </a:solidFill>
+                      <a:prstDash val="solid"/>
+                      <a:round/>
+                      <a:headEnd type="none" w="med" len="med"/>
+                      <a:tailEnd type="none" w="med" len="med"/>
+                    </a:lnT>
+                    <a:lnB w="12700" cap="flat" cmpd="sng" algn="ctr">
+                      <a:solidFill>
+                        <a:schemeClr val="tx1"/>
+                      </a:solidFill>
+                      <a:prstDash val="solid"/>
+                      <a:round/>
+                      <a:headEnd type="none" w="med" len="med"/>
+                      <a:tailEnd type="none" w="med" len="med"/>
+                    </a:lnB>
+                    <a:solidFill>
+                      <a:srgbClr val="FFFAEF"/>
+                    </a:solidFill>
+                  </a:tcPr>
+                </a:tc>
+                <a:tc>
+                  <a:txBody>
+                    <a:bodyPr/>
+                    <a:lstStyle/>
+                    <a:p>
+                      <a:pPr marL="0" marR="0" lvl="0" indent="0" algn="ctr" defTabSz="914400" rtl="0" eaLnBrk="1" fontAlgn="b" latinLnBrk="0" hangingPunct="1">
+                        <a:lnSpc>
+                          <a:spcPct val="100000"/>
+                        </a:lnSpc>
+                        <a:spcBef>
+                          <a:spcPts val="0"/>
+                        </a:spcBef>
+                        <a:spcAft>
+                          <a:spcPts val="0"/>
+                        </a:spcAft>
+                        <a:buClrTx/>
+                        <a:buSzTx/>
+                        <a:buFontTx/>
+                        <a:buNone/>
+                        <a:tabLst/>
+                        <a:defRPr/>
+                      </a:pPr>
+                      <a:r>
+                        <a:rPr lang="it-IT" sz="2800" u="none" strike="noStrike" dirty="0">
+                          <a:effectLst/>
+                        </a:rPr>
+                        <a:t>55h</a:t>
+                      </a:r>
+                      <a:endParaRPr lang="it-IT" sz="2800" b="0" i="0" u="none" strike="noStrike" dirty="0">
+                        <a:solidFill>
+                          <a:srgbClr val="000000"/>
+                        </a:solidFill>
+                        <a:effectLst/>
+                        <a:latin typeface="Arial" panose="020B0604020202020204" pitchFamily="34" charset="0"/>
+                      </a:endParaRPr>
+                    </a:p>
+                  </a:txBody>
+                  <a:tcPr marL="9525" marR="9525" marT="9525" marB="0" anchor="b">
+                    <a:lnL w="12700" cap="flat" cmpd="sng" algn="ctr">
+                      <a:solidFill>
+                        <a:schemeClr val="tx1"/>
+                      </a:solidFill>
+                      <a:prstDash val="solid"/>
+                      <a:round/>
+                      <a:headEnd type="none" w="med" len="med"/>
+                      <a:tailEnd type="none" w="med" len="med"/>
+                    </a:lnL>
+                    <a:lnR w="12700" cap="flat" cmpd="sng" algn="ctr">
+                      <a:solidFill>
+                        <a:schemeClr val="tx1"/>
+                      </a:solidFill>
+                      <a:prstDash val="solid"/>
+                      <a:round/>
+                      <a:headEnd type="none" w="med" len="med"/>
+                      <a:tailEnd type="none" w="med" len="med"/>
+                    </a:lnR>
+                    <a:lnT w="12700" cap="flat" cmpd="sng" algn="ctr">
+                      <a:solidFill>
+                        <a:schemeClr val="tx1"/>
+                      </a:solidFill>
+                      <a:prstDash val="solid"/>
+                      <a:round/>
+                      <a:headEnd type="none" w="med" len="med"/>
+                      <a:tailEnd type="none" w="med" len="med"/>
+                    </a:lnT>
+                    <a:lnB w="12700" cap="flat" cmpd="sng" algn="ctr">
+                      <a:solidFill>
+                        <a:schemeClr val="tx1"/>
+                      </a:solidFill>
+                      <a:prstDash val="solid"/>
+                      <a:round/>
+                      <a:headEnd type="none" w="med" len="med"/>
+                      <a:tailEnd type="none" w="med" len="med"/>
+                    </a:lnB>
+                    <a:solidFill>
+                      <a:srgbClr val="FFFAEF"/>
+                    </a:solidFill>
+                  </a:tcPr>
+                </a:tc>
+                <a:tc>
+                  <a:txBody>
+                    <a:bodyPr/>
+                    <a:lstStyle/>
+                    <a:p>
+                      <a:pPr marL="0" marR="0" lvl="0" indent="0" algn="ctr" defTabSz="914400" rtl="0" eaLnBrk="1" fontAlgn="b" latinLnBrk="0" hangingPunct="1">
+                        <a:lnSpc>
+                          <a:spcPct val="100000"/>
+                        </a:lnSpc>
+                        <a:spcBef>
+                          <a:spcPts val="0"/>
+                        </a:spcBef>
+                        <a:spcAft>
+                          <a:spcPts val="0"/>
+                        </a:spcAft>
+                        <a:buClrTx/>
+                        <a:buSzTx/>
+                        <a:buFontTx/>
+                        <a:buNone/>
+                        <a:tabLst/>
+                        <a:defRPr/>
+                      </a:pPr>
+                      <a:r>
+                        <a:rPr lang="it-IT" sz="2800" u="none" strike="noStrike" dirty="0">
+                          <a:effectLst/>
+                        </a:rPr>
+                        <a:t>1245€</a:t>
+                      </a:r>
+                      <a:endParaRPr lang="it-IT" sz="2800" b="0" i="0" u="none" strike="noStrike" dirty="0">
+                        <a:solidFill>
+                          <a:srgbClr val="000000"/>
+                        </a:solidFill>
+                        <a:effectLst/>
+                        <a:latin typeface="Arial" panose="020B0604020202020204" pitchFamily="34" charset="0"/>
+                      </a:endParaRPr>
+                    </a:p>
+                  </a:txBody>
+                  <a:tcPr marL="9525" marR="9525" marT="9525" marB="0" anchor="b">
+                    <a:lnL w="12700" cap="flat" cmpd="sng" algn="ctr">
+                      <a:solidFill>
+                        <a:schemeClr val="tx1"/>
+                      </a:solidFill>
+                      <a:prstDash val="solid"/>
+                      <a:round/>
+                      <a:headEnd type="none" w="med" len="med"/>
+                      <a:tailEnd type="none" w="med" len="med"/>
+                    </a:lnL>
+                    <a:lnR w="12700" cap="flat" cmpd="sng" algn="ctr">
+                      <a:solidFill>
+                        <a:schemeClr val="tx1"/>
+                      </a:solidFill>
+                      <a:prstDash val="solid"/>
+                      <a:round/>
+                      <a:headEnd type="none" w="med" len="med"/>
+                      <a:tailEnd type="none" w="med" len="med"/>
+                    </a:lnR>
+                    <a:lnT w="12700" cap="flat" cmpd="sng" algn="ctr">
+                      <a:solidFill>
+                        <a:schemeClr val="tx1"/>
+                      </a:solidFill>
+                      <a:prstDash val="solid"/>
+                      <a:round/>
+                      <a:headEnd type="none" w="med" len="med"/>
+                      <a:tailEnd type="none" w="med" len="med"/>
+                    </a:lnT>
+                    <a:lnB w="12700" cap="flat" cmpd="sng" algn="ctr">
+                      <a:solidFill>
+                        <a:schemeClr val="tx1"/>
+                      </a:solidFill>
+                      <a:prstDash val="solid"/>
+                      <a:round/>
+                      <a:headEnd type="none" w="med" len="med"/>
+                      <a:tailEnd type="none" w="med" len="med"/>
+                    </a:lnB>
+                    <a:solidFill>
+                      <a:srgbClr val="FFFAEF"/>
+                    </a:solidFill>
+                  </a:tcPr>
+                </a:tc>
+                <a:extLst>
+                  <a:ext uri="{0D108BD9-81ED-4DB2-BD59-A6C34878D82A}">
+                    <a16:rowId xmlns:a16="http://schemas.microsoft.com/office/drawing/2014/main" val="555408780"/>
                   </a:ext>
                 </a:extLst>
               </a:tr>
@@ -15086,7 +15302,7 @@
                         <a:rPr lang="it-IT" sz="2800" u="none" strike="noStrike" dirty="0">
                           <a:effectLst/>
                         </a:rPr>
-                        <a:t>3620€</a:t>
+                        <a:t>5450€</a:t>
                       </a:r>
                       <a:endParaRPr lang="it-IT" sz="2800" b="0" i="0" u="none" strike="noStrike" dirty="0">
                         <a:solidFill>
@@ -15164,7 +15380,7 @@
           <p:nvPr>
             <p:extLst>
               <p:ext uri="{D42A27DB-BD31-4B8C-83A1-F6EECF244321}">
-                <p14:modId xmlns:p14="http://schemas.microsoft.com/office/powerpoint/2010/main" val="345996814"/>
+                <p14:modId xmlns:p14="http://schemas.microsoft.com/office/powerpoint/2010/main" val="2939041760"/>
               </p:ext>
             </p:extLst>
           </p:nvPr>
@@ -15482,7 +15698,7 @@
                         <a:rPr lang="it-IT" sz="2000" u="none" strike="noStrike" dirty="0">
                           <a:effectLst/>
                         </a:rPr>
-                        <a:t>38h</a:t>
+                        <a:t>35h</a:t>
                       </a:r>
                       <a:endParaRPr lang="it-IT" sz="2000" b="0" i="0" u="none" strike="noStrike" dirty="0">
                         <a:solidFill>
@@ -15547,7 +15763,7 @@
                         <a:rPr lang="it-IT" sz="2000" u="none" strike="noStrike" dirty="0">
                           <a:effectLst/>
                         </a:rPr>
-                        <a:t>1140€</a:t>
+                        <a:t>1050€</a:t>
                       </a:r>
                       <a:endParaRPr lang="it-IT" sz="2000" b="0" i="0" u="none" strike="noStrike" dirty="0">
                         <a:solidFill>
@@ -15684,7 +15900,7 @@
                         <a:rPr lang="it-IT" sz="2000" u="none" strike="noStrike" dirty="0">
                           <a:effectLst/>
                         </a:rPr>
-                        <a:t>35h</a:t>
+                        <a:t>28h</a:t>
                       </a:r>
                       <a:endParaRPr lang="it-IT" sz="2000" b="0" i="0" u="none" strike="noStrike" dirty="0">
                         <a:solidFill>
@@ -15749,7 +15965,7 @@
                         <a:rPr lang="it-IT" sz="2000" u="none" strike="noStrike" dirty="0">
                           <a:effectLst/>
                         </a:rPr>
-                        <a:t>700€</a:t>
+                        <a:t>560€</a:t>
                       </a:r>
                       <a:endParaRPr lang="it-IT" sz="2000" b="0" i="0" u="none" strike="noStrike" dirty="0">
                         <a:solidFill>
@@ -15886,7 +16102,7 @@
                         <a:rPr lang="it-IT" sz="2000" u="none" strike="noStrike" dirty="0">
                           <a:effectLst/>
                         </a:rPr>
-                        <a:t>17h</a:t>
+                        <a:t>8h</a:t>
                       </a:r>
                       <a:endParaRPr lang="it-IT" sz="2000" b="0" i="0" u="none" strike="noStrike" dirty="0">
                         <a:solidFill>
@@ -15951,7 +16167,7 @@
                         <a:rPr lang="it-IT" sz="2000" u="none" strike="noStrike" dirty="0">
                           <a:effectLst/>
                         </a:rPr>
-                        <a:t>425€</a:t>
+                        <a:t>200€</a:t>
                       </a:r>
                       <a:endParaRPr lang="it-IT" sz="2000" b="0" i="0" u="none" strike="noStrike" dirty="0">
                         <a:solidFill>
@@ -16088,7 +16304,7 @@
                         <a:rPr lang="it-IT" sz="2000" u="none" strike="noStrike" dirty="0">
                           <a:effectLst/>
                         </a:rPr>
-                        <a:t>95h</a:t>
+                        <a:t>52h</a:t>
                       </a:r>
                       <a:endParaRPr lang="it-IT" sz="2000" b="0" i="0" u="none" strike="noStrike" dirty="0">
                         <a:solidFill>
@@ -16153,7 +16369,7 @@
                         <a:rPr lang="it-IT" sz="2000" u="none" strike="noStrike" dirty="0">
                           <a:effectLst/>
                         </a:rPr>
-                        <a:t>2375€</a:t>
+                        <a:t>1300€</a:t>
                       </a:r>
                       <a:endParaRPr lang="it-IT" sz="2000" b="0" i="0" u="none" strike="noStrike" dirty="0">
                         <a:solidFill>
@@ -16492,7 +16708,7 @@
                         <a:rPr lang="it-IT" sz="2000" u="none" strike="noStrike" dirty="0">
                           <a:effectLst/>
                         </a:rPr>
-                        <a:t>135h</a:t>
+                        <a:t>115h</a:t>
                       </a:r>
                       <a:endParaRPr lang="it-IT" sz="2000" b="0" i="0" u="none" strike="noStrike" dirty="0">
                         <a:solidFill>
@@ -16557,7 +16773,7 @@
                         <a:rPr lang="it-IT" sz="2000" u="none" strike="noStrike" dirty="0">
                           <a:effectLst/>
                         </a:rPr>
-                        <a:t>2025€</a:t>
+                        <a:t>1725€</a:t>
                       </a:r>
                       <a:endParaRPr lang="it-IT" sz="2000" b="0" i="0" u="none" strike="noStrike" dirty="0">
                         <a:solidFill>
@@ -16694,7 +16910,7 @@
                         <a:rPr lang="it-IT" sz="2000" u="none" strike="noStrike" dirty="0">
                           <a:effectLst/>
                         </a:rPr>
-                        <a:t>487h</a:t>
+                        <a:t>405h</a:t>
                       </a:r>
                       <a:endParaRPr lang="it-IT" sz="2000" b="0" i="0" u="none" strike="noStrike" dirty="0">
                         <a:solidFill>
@@ -16759,7 +16975,7 @@
                         <a:rPr lang="it-IT" sz="2000" u="none" strike="noStrike" dirty="0">
                           <a:effectLst/>
                         </a:rPr>
-                        <a:t>9170€</a:t>
+                        <a:t>7340€</a:t>
                       </a:r>
                       <a:endParaRPr lang="it-IT" sz="2000" b="0" i="0" u="none" strike="noStrike" dirty="0">
                         <a:solidFill>

--- a/RTB/PRESENTAZIONE RTB/Presentazione RTB.pptx
+++ b/RTB/PRESENTAZIONE RTB/Presentazione RTB.pptx
@@ -239,7 +239,7 @@
           <a:p>
             <a:fld id="{DC233B30-4F8C-4A4C-AB5E-3B02323E36F5}" type="datetimeFigureOut">
               <a:rPr lang="it-IT" smtClean="0"/>
-              <a:t>14/01/2026</a:t>
+              <a:t>26/01/2026</a:t>
             </a:fld>
             <a:endParaRPr lang="it-IT"/>
           </a:p>
@@ -1697,7 +1697,7 @@
             <a:fld id="{1D8BD707-D9CF-40AE-B4C6-C98DA3205C09}" type="datetimeFigureOut">
               <a:rPr lang="en-US" smtClean="0"/>
               <a:pPr/>
-              <a:t>1/14/2026</a:t>
+              <a:t>1/26/2026</a:t>
             </a:fld>
             <a:endParaRPr lang="en-US"/>
           </a:p>
@@ -1862,7 +1862,7 @@
             <a:fld id="{1D8BD707-D9CF-40AE-B4C6-C98DA3205C09}" type="datetimeFigureOut">
               <a:rPr lang="en-US" smtClean="0"/>
               <a:pPr/>
-              <a:t>1/14/2026</a:t>
+              <a:t>1/26/2026</a:t>
             </a:fld>
             <a:endParaRPr lang="en-US"/>
           </a:p>
@@ -2037,7 +2037,7 @@
             <a:fld id="{1D8BD707-D9CF-40AE-B4C6-C98DA3205C09}" type="datetimeFigureOut">
               <a:rPr lang="en-US" smtClean="0"/>
               <a:pPr/>
-              <a:t>1/14/2026</a:t>
+              <a:t>1/26/2026</a:t>
             </a:fld>
             <a:endParaRPr lang="en-US"/>
           </a:p>
@@ -2202,7 +2202,7 @@
             <a:fld id="{1D8BD707-D9CF-40AE-B4C6-C98DA3205C09}" type="datetimeFigureOut">
               <a:rPr lang="en-US" smtClean="0"/>
               <a:pPr/>
-              <a:t>1/14/2026</a:t>
+              <a:t>1/26/2026</a:t>
             </a:fld>
             <a:endParaRPr lang="en-US"/>
           </a:p>
@@ -2444,7 +2444,7 @@
             <a:fld id="{1D8BD707-D9CF-40AE-B4C6-C98DA3205C09}" type="datetimeFigureOut">
               <a:rPr lang="en-US" smtClean="0"/>
               <a:pPr/>
-              <a:t>1/14/2026</a:t>
+              <a:t>1/26/2026</a:t>
             </a:fld>
             <a:endParaRPr lang="en-US"/>
           </a:p>
@@ -2726,7 +2726,7 @@
             <a:fld id="{1D8BD707-D9CF-40AE-B4C6-C98DA3205C09}" type="datetimeFigureOut">
               <a:rPr lang="en-US" smtClean="0"/>
               <a:pPr/>
-              <a:t>1/14/2026</a:t>
+              <a:t>1/26/2026</a:t>
             </a:fld>
             <a:endParaRPr lang="en-US"/>
           </a:p>
@@ -3142,7 +3142,7 @@
             <a:fld id="{1D8BD707-D9CF-40AE-B4C6-C98DA3205C09}" type="datetimeFigureOut">
               <a:rPr lang="en-US" smtClean="0"/>
               <a:pPr/>
-              <a:t>1/14/2026</a:t>
+              <a:t>1/26/2026</a:t>
             </a:fld>
             <a:endParaRPr lang="en-US"/>
           </a:p>
@@ -3256,7 +3256,7 @@
             <a:fld id="{1D8BD707-D9CF-40AE-B4C6-C98DA3205C09}" type="datetimeFigureOut">
               <a:rPr lang="en-US" smtClean="0"/>
               <a:pPr/>
-              <a:t>1/14/2026</a:t>
+              <a:t>1/26/2026</a:t>
             </a:fld>
             <a:endParaRPr lang="en-US"/>
           </a:p>
@@ -3348,7 +3348,7 @@
             <a:fld id="{1D8BD707-D9CF-40AE-B4C6-C98DA3205C09}" type="datetimeFigureOut">
               <a:rPr lang="en-US" smtClean="0"/>
               <a:pPr/>
-              <a:t>1/14/2026</a:t>
+              <a:t>1/26/2026</a:t>
             </a:fld>
             <a:endParaRPr lang="en-US"/>
           </a:p>
@@ -3620,7 +3620,7 @@
             <a:fld id="{1D8BD707-D9CF-40AE-B4C6-C98DA3205C09}" type="datetimeFigureOut">
               <a:rPr lang="en-US" smtClean="0"/>
               <a:pPr/>
-              <a:t>1/14/2026</a:t>
+              <a:t>1/26/2026</a:t>
             </a:fld>
             <a:endParaRPr lang="en-US"/>
           </a:p>
@@ -3869,7 +3869,7 @@
             <a:fld id="{1D8BD707-D9CF-40AE-B4C6-C98DA3205C09}" type="datetimeFigureOut">
               <a:rPr lang="en-US" smtClean="0"/>
               <a:pPr/>
-              <a:t>1/14/2026</a:t>
+              <a:t>1/26/2026</a:t>
             </a:fld>
             <a:endParaRPr lang="en-US"/>
           </a:p>
@@ -4077,7 +4077,7 @@
             <a:fld id="{1D8BD707-D9CF-40AE-B4C6-C98DA3205C09}" type="datetimeFigureOut">
               <a:rPr lang="en-US" smtClean="0"/>
               <a:pPr/>
-              <a:t>1/14/2026</a:t>
+              <a:t>1/26/2026</a:t>
             </a:fld>
             <a:endParaRPr lang="en-US"/>
           </a:p>
@@ -5198,7 +5198,7 @@
           <p:nvPr>
             <p:extLst>
               <p:ext uri="{D42A27DB-BD31-4B8C-83A1-F6EECF244321}">
-                <p14:modId xmlns:p14="http://schemas.microsoft.com/office/powerpoint/2010/main" val="879151252"/>
+                <p14:modId xmlns:p14="http://schemas.microsoft.com/office/powerpoint/2010/main" val="712013286"/>
               </p:ext>
             </p:extLst>
           </p:nvPr>
@@ -5873,12 +5873,12 @@
                         <a:buNone/>
                       </a:pPr>
                       <a:r>
-                        <a:rPr lang="it-IT" sz="2000" u="none" strike="noStrike">
+                        <a:rPr lang="it-IT" sz="2000" u="none" strike="noStrike" dirty="0">
                           <a:effectLst/>
                         </a:rPr>
-                        <a:t>7</a:t>
+                        <a:t>8</a:t>
                       </a:r>
-                      <a:endParaRPr lang="it-IT" sz="2000" b="0" i="0" u="none" strike="noStrike">
+                      <a:endParaRPr lang="it-IT" sz="2000" b="0" i="0" u="none" strike="noStrike" dirty="0">
                         <a:solidFill>
                           <a:srgbClr val="000000"/>
                         </a:solidFill>
@@ -6071,136 +6071,6 @@
                         <a:rPr lang="it-IT" sz="2000" u="none" strike="noStrike" dirty="0">
                           <a:effectLst/>
                         </a:rPr>
-                        <a:t>19</a:t>
-                      </a:r>
-                      <a:endParaRPr lang="it-IT" sz="2000" b="0" i="0" u="none" strike="noStrike" dirty="0">
-                        <a:solidFill>
-                          <a:srgbClr val="000000"/>
-                        </a:solidFill>
-                        <a:effectLst/>
-                        <a:latin typeface="Calibri" panose="020F0502020204030204" pitchFamily="34" charset="0"/>
-                      </a:endParaRPr>
-                    </a:p>
-                  </a:txBody>
-                  <a:tcPr marL="9525" marR="9525" marT="9525" marB="0" anchor="ctr">
-                    <a:lnL w="12700" cap="flat" cmpd="sng" algn="ctr">
-                      <a:solidFill>
-                        <a:schemeClr val="tx1"/>
-                      </a:solidFill>
-                      <a:prstDash val="solid"/>
-                      <a:round/>
-                      <a:headEnd type="none" w="med" len="med"/>
-                      <a:tailEnd type="none" w="med" len="med"/>
-                    </a:lnL>
-                    <a:lnR w="12700" cap="flat" cmpd="sng" algn="ctr">
-                      <a:solidFill>
-                        <a:schemeClr val="tx1"/>
-                      </a:solidFill>
-                      <a:prstDash val="solid"/>
-                      <a:round/>
-                      <a:headEnd type="none" w="med" len="med"/>
-                      <a:tailEnd type="none" w="med" len="med"/>
-                    </a:lnR>
-                    <a:lnT w="12700" cap="flat" cmpd="sng" algn="ctr">
-                      <a:solidFill>
-                        <a:schemeClr val="tx1"/>
-                      </a:solidFill>
-                      <a:prstDash val="solid"/>
-                      <a:round/>
-                      <a:headEnd type="none" w="med" len="med"/>
-                      <a:tailEnd type="none" w="med" len="med"/>
-                    </a:lnT>
-                    <a:lnB w="12700" cap="flat" cmpd="sng" algn="ctr">
-                      <a:solidFill>
-                        <a:schemeClr val="tx1"/>
-                      </a:solidFill>
-                      <a:prstDash val="solid"/>
-                      <a:round/>
-                      <a:headEnd type="none" w="med" len="med"/>
-                      <a:tailEnd type="none" w="med" len="med"/>
-                    </a:lnB>
-                    <a:solidFill>
-                      <a:srgbClr val="FFFAEF"/>
-                    </a:solidFill>
-                  </a:tcPr>
-                </a:tc>
-                <a:tc>
-                  <a:txBody>
-                    <a:bodyPr/>
-                    <a:lstStyle/>
-                    <a:p>
-                      <a:pPr algn="ctr" fontAlgn="b">
-                        <a:buNone/>
-                      </a:pPr>
-                      <a:r>
-                        <a:rPr lang="it-IT" sz="2000" u="none" strike="noStrike" dirty="0">
-                          <a:effectLst/>
-                        </a:rPr>
-                        <a:t>0</a:t>
-                      </a:r>
-                      <a:endParaRPr lang="it-IT" sz="2000" b="0" i="0" u="none" strike="noStrike" dirty="0">
-                        <a:solidFill>
-                          <a:srgbClr val="000000"/>
-                        </a:solidFill>
-                        <a:effectLst/>
-                        <a:latin typeface="Calibri" panose="020F0502020204030204" pitchFamily="34" charset="0"/>
-                      </a:endParaRPr>
-                    </a:p>
-                  </a:txBody>
-                  <a:tcPr marL="9525" marR="9525" marT="9525" marB="0" anchor="ctr">
-                    <a:lnL w="12700" cap="flat" cmpd="sng" algn="ctr">
-                      <a:solidFill>
-                        <a:schemeClr val="tx1"/>
-                      </a:solidFill>
-                      <a:prstDash val="solid"/>
-                      <a:round/>
-                      <a:headEnd type="none" w="med" len="med"/>
-                      <a:tailEnd type="none" w="med" len="med"/>
-                    </a:lnL>
-                    <a:lnR w="12700" cap="flat" cmpd="sng" algn="ctr">
-                      <a:solidFill>
-                        <a:schemeClr val="tx1"/>
-                      </a:solidFill>
-                      <a:prstDash val="solid"/>
-                      <a:round/>
-                      <a:headEnd type="none" w="med" len="med"/>
-                      <a:tailEnd type="none" w="med" len="med"/>
-                    </a:lnR>
-                    <a:lnT w="12700" cap="flat" cmpd="sng" algn="ctr">
-                      <a:solidFill>
-                        <a:schemeClr val="tx1"/>
-                      </a:solidFill>
-                      <a:prstDash val="solid"/>
-                      <a:round/>
-                      <a:headEnd type="none" w="med" len="med"/>
-                      <a:tailEnd type="none" w="med" len="med"/>
-                    </a:lnT>
-                    <a:lnB w="12700" cap="flat" cmpd="sng" algn="ctr">
-                      <a:solidFill>
-                        <a:schemeClr val="tx1"/>
-                      </a:solidFill>
-                      <a:prstDash val="solid"/>
-                      <a:round/>
-                      <a:headEnd type="none" w="med" len="med"/>
-                      <a:tailEnd type="none" w="med" len="med"/>
-                    </a:lnB>
-                    <a:solidFill>
-                      <a:srgbClr val="FFFAEF"/>
-                    </a:solidFill>
-                  </a:tcPr>
-                </a:tc>
-                <a:tc>
-                  <a:txBody>
-                    <a:bodyPr/>
-                    <a:lstStyle/>
-                    <a:p>
-                      <a:pPr algn="ctr" fontAlgn="b">
-                        <a:buNone/>
-                      </a:pPr>
-                      <a:r>
-                        <a:rPr lang="it-IT" sz="2000" u="none" strike="noStrike" dirty="0">
-                          <a:effectLst/>
-                        </a:rPr>
                         <a:t>0</a:t>
                       </a:r>
                       <a:endParaRPr lang="it-IT" sz="2000" b="0" i="0" u="none" strike="noStrike" dirty="0">
@@ -6270,7 +6140,134 @@
                           <a:effectLst/>
                           <a:latin typeface="Calibri" panose="020F0502020204030204" pitchFamily="34" charset="0"/>
                         </a:rPr>
-                        <a:t>34</a:t>
+                        <a:t>11</a:t>
+                      </a:r>
+                    </a:p>
+                  </a:txBody>
+                  <a:tcPr marL="9525" marR="9525" marT="9525" marB="0" anchor="ctr">
+                    <a:lnL w="12700" cap="flat" cmpd="sng" algn="ctr">
+                      <a:solidFill>
+                        <a:schemeClr val="tx1"/>
+                      </a:solidFill>
+                      <a:prstDash val="solid"/>
+                      <a:round/>
+                      <a:headEnd type="none" w="med" len="med"/>
+                      <a:tailEnd type="none" w="med" len="med"/>
+                    </a:lnL>
+                    <a:lnR w="12700" cap="flat" cmpd="sng" algn="ctr">
+                      <a:solidFill>
+                        <a:schemeClr val="tx1"/>
+                      </a:solidFill>
+                      <a:prstDash val="solid"/>
+                      <a:round/>
+                      <a:headEnd type="none" w="med" len="med"/>
+                      <a:tailEnd type="none" w="med" len="med"/>
+                    </a:lnR>
+                    <a:lnT w="12700" cap="flat" cmpd="sng" algn="ctr">
+                      <a:solidFill>
+                        <a:schemeClr val="tx1"/>
+                      </a:solidFill>
+                      <a:prstDash val="solid"/>
+                      <a:round/>
+                      <a:headEnd type="none" w="med" len="med"/>
+                      <a:tailEnd type="none" w="med" len="med"/>
+                    </a:lnT>
+                    <a:lnB w="12700" cap="flat" cmpd="sng" algn="ctr">
+                      <a:solidFill>
+                        <a:schemeClr val="tx1"/>
+                      </a:solidFill>
+                      <a:prstDash val="solid"/>
+                      <a:round/>
+                      <a:headEnd type="none" w="med" len="med"/>
+                      <a:tailEnd type="none" w="med" len="med"/>
+                    </a:lnB>
+                    <a:solidFill>
+                      <a:srgbClr val="FFFAEF"/>
+                    </a:solidFill>
+                  </a:tcPr>
+                </a:tc>
+                <a:tc>
+                  <a:txBody>
+                    <a:bodyPr/>
+                    <a:lstStyle/>
+                    <a:p>
+                      <a:pPr algn="ctr" fontAlgn="b">
+                        <a:buNone/>
+                      </a:pPr>
+                      <a:r>
+                        <a:rPr lang="it-IT" sz="2000" u="none" strike="noStrike" dirty="0">
+                          <a:effectLst/>
+                        </a:rPr>
+                        <a:t>12</a:t>
+                      </a:r>
+                      <a:endParaRPr lang="it-IT" sz="2000" b="0" i="0" u="none" strike="noStrike" dirty="0">
+                        <a:solidFill>
+                          <a:srgbClr val="000000"/>
+                        </a:solidFill>
+                        <a:effectLst/>
+                        <a:latin typeface="Calibri" panose="020F0502020204030204" pitchFamily="34" charset="0"/>
+                      </a:endParaRPr>
+                    </a:p>
+                  </a:txBody>
+                  <a:tcPr marL="9525" marR="9525" marT="9525" marB="0" anchor="ctr">
+                    <a:lnL w="12700" cap="flat" cmpd="sng" algn="ctr">
+                      <a:solidFill>
+                        <a:schemeClr val="tx1"/>
+                      </a:solidFill>
+                      <a:prstDash val="solid"/>
+                      <a:round/>
+                      <a:headEnd type="none" w="med" len="med"/>
+                      <a:tailEnd type="none" w="med" len="med"/>
+                    </a:lnL>
+                    <a:lnR w="12700" cap="flat" cmpd="sng" algn="ctr">
+                      <a:solidFill>
+                        <a:schemeClr val="tx1"/>
+                      </a:solidFill>
+                      <a:prstDash val="solid"/>
+                      <a:round/>
+                      <a:headEnd type="none" w="med" len="med"/>
+                      <a:tailEnd type="none" w="med" len="med"/>
+                    </a:lnR>
+                    <a:lnT w="12700" cap="flat" cmpd="sng" algn="ctr">
+                      <a:solidFill>
+                        <a:schemeClr val="tx1"/>
+                      </a:solidFill>
+                      <a:prstDash val="solid"/>
+                      <a:round/>
+                      <a:headEnd type="none" w="med" len="med"/>
+                      <a:tailEnd type="none" w="med" len="med"/>
+                    </a:lnT>
+                    <a:lnB w="12700" cap="flat" cmpd="sng" algn="ctr">
+                      <a:solidFill>
+                        <a:schemeClr val="tx1"/>
+                      </a:solidFill>
+                      <a:prstDash val="solid"/>
+                      <a:round/>
+                      <a:headEnd type="none" w="med" len="med"/>
+                      <a:tailEnd type="none" w="med" len="med"/>
+                    </a:lnB>
+                    <a:solidFill>
+                      <a:srgbClr val="FFFAEF"/>
+                    </a:solidFill>
+                  </a:tcPr>
+                </a:tc>
+                <a:tc>
+                  <a:txBody>
+                    <a:bodyPr/>
+                    <a:lstStyle/>
+                    <a:p>
+                      <a:pPr algn="ctr" fontAlgn="b">
+                        <a:buNone/>
+                      </a:pPr>
+                      <a:r>
+                        <a:rPr lang="it-IT" sz="2000" b="0" i="0" u="none" strike="noStrike" dirty="0">
+                          <a:solidFill>
+                            <a:srgbClr val="000000"/>
+                          </a:solidFill>
+                          <a:effectLst/>
+                          <a:latin typeface="Calibri" panose="020F0502020204030204" pitchFamily="34" charset="0"/>
+                        </a:rPr>
+                        <a:t>39</a:t>
                       </a:r>
                     </a:p>
                   </a:txBody>
@@ -6397,335 +6394,10 @@
                         <a:buNone/>
                       </a:pPr>
                       <a:r>
-                        <a:rPr lang="it-IT" sz="2000" u="none" strike="noStrike">
-                          <a:effectLst/>
-                        </a:rPr>
-                        <a:t>3</a:t>
-                      </a:r>
-                      <a:endParaRPr lang="it-IT" sz="2000" b="0" i="0" u="none" strike="noStrike">
-                        <a:solidFill>
-                          <a:srgbClr val="000000"/>
-                        </a:solidFill>
-                        <a:effectLst/>
-                        <a:latin typeface="Calibri" panose="020F0502020204030204" pitchFamily="34" charset="0"/>
-                      </a:endParaRPr>
-                    </a:p>
-                  </a:txBody>
-                  <a:tcPr marL="9525" marR="9525" marT="9525" marB="0" anchor="ctr">
-                    <a:lnL w="12700" cap="flat" cmpd="sng" algn="ctr">
-                      <a:solidFill>
-                        <a:schemeClr val="tx1"/>
-                      </a:solidFill>
-                      <a:prstDash val="solid"/>
-                      <a:round/>
-                      <a:headEnd type="none" w="med" len="med"/>
-                      <a:tailEnd type="none" w="med" len="med"/>
-                    </a:lnL>
-                    <a:lnR w="12700" cap="flat" cmpd="sng" algn="ctr">
-                      <a:solidFill>
-                        <a:schemeClr val="tx1"/>
-                      </a:solidFill>
-                      <a:prstDash val="solid"/>
-                      <a:round/>
-                      <a:headEnd type="none" w="med" len="med"/>
-                      <a:tailEnd type="none" w="med" len="med"/>
-                    </a:lnR>
-                    <a:lnT w="12700" cap="flat" cmpd="sng" algn="ctr">
-                      <a:solidFill>
-                        <a:schemeClr val="tx1"/>
-                      </a:solidFill>
-                      <a:prstDash val="solid"/>
-                      <a:round/>
-                      <a:headEnd type="none" w="med" len="med"/>
-                      <a:tailEnd type="none" w="med" len="med"/>
-                    </a:lnT>
-                    <a:lnB w="12700" cap="flat" cmpd="sng" algn="ctr">
-                      <a:solidFill>
-                        <a:schemeClr val="tx1"/>
-                      </a:solidFill>
-                      <a:prstDash val="solid"/>
-                      <a:round/>
-                      <a:headEnd type="none" w="med" len="med"/>
-                      <a:tailEnd type="none" w="med" len="med"/>
-                    </a:lnB>
-                    <a:solidFill>
-                      <a:srgbClr val="FFFAEF"/>
-                    </a:solidFill>
-                  </a:tcPr>
-                </a:tc>
-                <a:tc>
-                  <a:txBody>
-                    <a:bodyPr/>
-                    <a:lstStyle/>
-                    <a:p>
-                      <a:pPr algn="ctr" fontAlgn="b">
-                        <a:buNone/>
-                      </a:pPr>
-                      <a:r>
                         <a:rPr lang="it-IT" sz="2000" u="none" strike="noStrike" dirty="0">
                           <a:effectLst/>
                         </a:rPr>
-                        <a:t>6</a:t>
-                      </a:r>
-                      <a:endParaRPr lang="it-IT" sz="2000" b="0" i="0" u="none" strike="noStrike" dirty="0">
-                        <a:solidFill>
-                          <a:srgbClr val="000000"/>
-                        </a:solidFill>
-                        <a:effectLst/>
-                        <a:latin typeface="Calibri" panose="020F0502020204030204" pitchFamily="34" charset="0"/>
-                      </a:endParaRPr>
-                    </a:p>
-                  </a:txBody>
-                  <a:tcPr marL="9525" marR="9525" marT="9525" marB="0" anchor="ctr">
-                    <a:lnL w="12700" cap="flat" cmpd="sng" algn="ctr">
-                      <a:solidFill>
-                        <a:schemeClr val="tx1"/>
-                      </a:solidFill>
-                      <a:prstDash val="solid"/>
-                      <a:round/>
-                      <a:headEnd type="none" w="med" len="med"/>
-                      <a:tailEnd type="none" w="med" len="med"/>
-                    </a:lnL>
-                    <a:lnR w="12700" cap="flat" cmpd="sng" algn="ctr">
-                      <a:solidFill>
-                        <a:schemeClr val="tx1"/>
-                      </a:solidFill>
-                      <a:prstDash val="solid"/>
-                      <a:round/>
-                      <a:headEnd type="none" w="med" len="med"/>
-                      <a:tailEnd type="none" w="med" len="med"/>
-                    </a:lnR>
-                    <a:lnT w="12700" cap="flat" cmpd="sng" algn="ctr">
-                      <a:solidFill>
-                        <a:schemeClr val="tx1"/>
-                      </a:solidFill>
-                      <a:prstDash val="solid"/>
-                      <a:round/>
-                      <a:headEnd type="none" w="med" len="med"/>
-                      <a:tailEnd type="none" w="med" len="med"/>
-                    </a:lnT>
-                    <a:lnB w="12700" cap="flat" cmpd="sng" algn="ctr">
-                      <a:solidFill>
-                        <a:schemeClr val="tx1"/>
-                      </a:solidFill>
-                      <a:prstDash val="solid"/>
-                      <a:round/>
-                      <a:headEnd type="none" w="med" len="med"/>
-                      <a:tailEnd type="none" w="med" len="med"/>
-                    </a:lnB>
-                    <a:solidFill>
-                      <a:srgbClr val="FFFAEF"/>
-                    </a:solidFill>
-                  </a:tcPr>
-                </a:tc>
-                <a:tc>
-                  <a:txBody>
-                    <a:bodyPr/>
-                    <a:lstStyle/>
-                    <a:p>
-                      <a:pPr algn="ctr" fontAlgn="b">
-                        <a:buNone/>
-                      </a:pPr>
-                      <a:r>
-                        <a:rPr lang="it-IT" sz="2000" u="none" strike="noStrike">
-                          <a:effectLst/>
-                        </a:rPr>
                         <a:t>4</a:t>
-                      </a:r>
-                      <a:endParaRPr lang="it-IT" sz="2000" b="0" i="0" u="none" strike="noStrike">
-                        <a:solidFill>
-                          <a:srgbClr val="000000"/>
-                        </a:solidFill>
-                        <a:effectLst/>
-                        <a:latin typeface="Calibri" panose="020F0502020204030204" pitchFamily="34" charset="0"/>
-                      </a:endParaRPr>
-                    </a:p>
-                  </a:txBody>
-                  <a:tcPr marL="9525" marR="9525" marT="9525" marB="0" anchor="ctr">
-                    <a:lnL w="12700" cap="flat" cmpd="sng" algn="ctr">
-                      <a:solidFill>
-                        <a:schemeClr val="tx1"/>
-                      </a:solidFill>
-                      <a:prstDash val="solid"/>
-                      <a:round/>
-                      <a:headEnd type="none" w="med" len="med"/>
-                      <a:tailEnd type="none" w="med" len="med"/>
-                    </a:lnL>
-                    <a:lnR w="12700" cap="flat" cmpd="sng" algn="ctr">
-                      <a:solidFill>
-                        <a:schemeClr val="tx1"/>
-                      </a:solidFill>
-                      <a:prstDash val="solid"/>
-                      <a:round/>
-                      <a:headEnd type="none" w="med" len="med"/>
-                      <a:tailEnd type="none" w="med" len="med"/>
-                    </a:lnR>
-                    <a:lnT w="12700" cap="flat" cmpd="sng" algn="ctr">
-                      <a:solidFill>
-                        <a:schemeClr val="tx1"/>
-                      </a:solidFill>
-                      <a:prstDash val="solid"/>
-                      <a:round/>
-                      <a:headEnd type="none" w="med" len="med"/>
-                      <a:tailEnd type="none" w="med" len="med"/>
-                    </a:lnT>
-                    <a:lnB w="12700" cap="flat" cmpd="sng" algn="ctr">
-                      <a:solidFill>
-                        <a:schemeClr val="tx1"/>
-                      </a:solidFill>
-                      <a:prstDash val="solid"/>
-                      <a:round/>
-                      <a:headEnd type="none" w="med" len="med"/>
-                      <a:tailEnd type="none" w="med" len="med"/>
-                    </a:lnB>
-                    <a:solidFill>
-                      <a:srgbClr val="FFFAEF"/>
-                    </a:solidFill>
-                  </a:tcPr>
-                </a:tc>
-                <a:tc>
-                  <a:txBody>
-                    <a:bodyPr/>
-                    <a:lstStyle/>
-                    <a:p>
-                      <a:pPr algn="ctr" fontAlgn="b">
-                        <a:buNone/>
-                      </a:pPr>
-                      <a:r>
-                        <a:rPr lang="it-IT" sz="2000" u="none" strike="noStrike" dirty="0">
-                          <a:effectLst/>
-                        </a:rPr>
-                        <a:t>9</a:t>
-                      </a:r>
-                      <a:endParaRPr lang="it-IT" sz="2000" b="0" i="0" u="none" strike="noStrike" dirty="0">
-                        <a:solidFill>
-                          <a:srgbClr val="000000"/>
-                        </a:solidFill>
-                        <a:effectLst/>
-                        <a:latin typeface="Calibri" panose="020F0502020204030204" pitchFamily="34" charset="0"/>
-                      </a:endParaRPr>
-                    </a:p>
-                  </a:txBody>
-                  <a:tcPr marL="9525" marR="9525" marT="9525" marB="0" anchor="ctr">
-                    <a:lnL w="12700" cap="flat" cmpd="sng" algn="ctr">
-                      <a:solidFill>
-                        <a:schemeClr val="tx1"/>
-                      </a:solidFill>
-                      <a:prstDash val="solid"/>
-                      <a:round/>
-                      <a:headEnd type="none" w="med" len="med"/>
-                      <a:tailEnd type="none" w="med" len="med"/>
-                    </a:lnL>
-                    <a:lnR w="12700" cap="flat" cmpd="sng" algn="ctr">
-                      <a:solidFill>
-                        <a:schemeClr val="tx1"/>
-                      </a:solidFill>
-                      <a:prstDash val="solid"/>
-                      <a:round/>
-                      <a:headEnd type="none" w="med" len="med"/>
-                      <a:tailEnd type="none" w="med" len="med"/>
-                    </a:lnR>
-                    <a:lnT w="12700" cap="flat" cmpd="sng" algn="ctr">
-                      <a:solidFill>
-                        <a:schemeClr val="tx1"/>
-                      </a:solidFill>
-                      <a:prstDash val="solid"/>
-                      <a:round/>
-                      <a:headEnd type="none" w="med" len="med"/>
-                      <a:tailEnd type="none" w="med" len="med"/>
-                    </a:lnT>
-                    <a:lnB w="12700" cap="flat" cmpd="sng" algn="ctr">
-                      <a:solidFill>
-                        <a:schemeClr val="tx1"/>
-                      </a:solidFill>
-                      <a:prstDash val="solid"/>
-                      <a:round/>
-                      <a:headEnd type="none" w="med" len="med"/>
-                      <a:tailEnd type="none" w="med" len="med"/>
-                    </a:lnB>
-                    <a:solidFill>
-                      <a:srgbClr val="FFFAEF"/>
-                    </a:solidFill>
-                  </a:tcPr>
-                </a:tc>
-                <a:tc>
-                  <a:txBody>
-                    <a:bodyPr/>
-                    <a:lstStyle/>
-                    <a:p>
-                      <a:pPr algn="ctr" fontAlgn="b">
-                        <a:buNone/>
-                      </a:pPr>
-                      <a:r>
-                        <a:rPr lang="it-IT" sz="2000" u="none" strike="noStrike">
-                          <a:effectLst/>
-                        </a:rPr>
-                        <a:t>0</a:t>
-                      </a:r>
-                      <a:endParaRPr lang="it-IT" sz="2000" b="0" i="0" u="none" strike="noStrike">
-                        <a:solidFill>
-                          <a:srgbClr val="000000"/>
-                        </a:solidFill>
-                        <a:effectLst/>
-                        <a:latin typeface="Calibri" panose="020F0502020204030204" pitchFamily="34" charset="0"/>
-                      </a:endParaRPr>
-                    </a:p>
-                  </a:txBody>
-                  <a:tcPr marL="9525" marR="9525" marT="9525" marB="0" anchor="ctr">
-                    <a:lnL w="12700" cap="flat" cmpd="sng" algn="ctr">
-                      <a:solidFill>
-                        <a:schemeClr val="tx1"/>
-                      </a:solidFill>
-                      <a:prstDash val="solid"/>
-                      <a:round/>
-                      <a:headEnd type="none" w="med" len="med"/>
-                      <a:tailEnd type="none" w="med" len="med"/>
-                    </a:lnL>
-                    <a:lnR w="12700" cap="flat" cmpd="sng" algn="ctr">
-                      <a:solidFill>
-                        <a:schemeClr val="tx1"/>
-                      </a:solidFill>
-                      <a:prstDash val="solid"/>
-                      <a:round/>
-                      <a:headEnd type="none" w="med" len="med"/>
-                      <a:tailEnd type="none" w="med" len="med"/>
-                    </a:lnR>
-                    <a:lnT w="12700" cap="flat" cmpd="sng" algn="ctr">
-                      <a:solidFill>
-                        <a:schemeClr val="tx1"/>
-                      </a:solidFill>
-                      <a:prstDash val="solid"/>
-                      <a:round/>
-                      <a:headEnd type="none" w="med" len="med"/>
-                      <a:tailEnd type="none" w="med" len="med"/>
-                    </a:lnT>
-                    <a:lnB w="12700" cap="flat" cmpd="sng" algn="ctr">
-                      <a:solidFill>
-                        <a:schemeClr val="tx1"/>
-                      </a:solidFill>
-                      <a:prstDash val="solid"/>
-                      <a:round/>
-                      <a:headEnd type="none" w="med" len="med"/>
-                      <a:tailEnd type="none" w="med" len="med"/>
-                    </a:lnB>
-                    <a:solidFill>
-                      <a:srgbClr val="FFFAEF"/>
-                    </a:solidFill>
-                  </a:tcPr>
-                </a:tc>
-                <a:tc>
-                  <a:txBody>
-                    <a:bodyPr/>
-                    <a:lstStyle/>
-                    <a:p>
-                      <a:pPr algn="ctr" fontAlgn="b">
-                        <a:buNone/>
-                      </a:pPr>
-                      <a:r>
-                        <a:rPr lang="it-IT" sz="2000" u="none" strike="noStrike" dirty="0">
-                          <a:effectLst/>
-                        </a:rPr>
-                        <a:t>12</a:t>
                       </a:r>
                       <a:endParaRPr lang="it-IT" sz="2000" b="0" i="0" u="none" strike="noStrike" dirty="0">
                         <a:solidFill>
@@ -6794,7 +6466,317 @@
                           <a:effectLst/>
                           <a:latin typeface="Calibri" panose="020F0502020204030204" pitchFamily="34" charset="0"/>
                         </a:rPr>
-                        <a:t>34</a:t>
+                        <a:t>8</a:t>
+                      </a:r>
+                    </a:p>
+                  </a:txBody>
+                  <a:tcPr marL="9525" marR="9525" marT="9525" marB="0" anchor="ctr">
+                    <a:lnL w="12700" cap="flat" cmpd="sng" algn="ctr">
+                      <a:solidFill>
+                        <a:schemeClr val="tx1"/>
+                      </a:solidFill>
+                      <a:prstDash val="solid"/>
+                      <a:round/>
+                      <a:headEnd type="none" w="med" len="med"/>
+                      <a:tailEnd type="none" w="med" len="med"/>
+                    </a:lnL>
+                    <a:lnR w="12700" cap="flat" cmpd="sng" algn="ctr">
+                      <a:solidFill>
+                        <a:schemeClr val="tx1"/>
+                      </a:solidFill>
+                      <a:prstDash val="solid"/>
+                      <a:round/>
+                      <a:headEnd type="none" w="med" len="med"/>
+                      <a:tailEnd type="none" w="med" len="med"/>
+                    </a:lnR>
+                    <a:lnT w="12700" cap="flat" cmpd="sng" algn="ctr">
+                      <a:solidFill>
+                        <a:schemeClr val="tx1"/>
+                      </a:solidFill>
+                      <a:prstDash val="solid"/>
+                      <a:round/>
+                      <a:headEnd type="none" w="med" len="med"/>
+                      <a:tailEnd type="none" w="med" len="med"/>
+                    </a:lnT>
+                    <a:lnB w="12700" cap="flat" cmpd="sng" algn="ctr">
+                      <a:solidFill>
+                        <a:schemeClr val="tx1"/>
+                      </a:solidFill>
+                      <a:prstDash val="solid"/>
+                      <a:round/>
+                      <a:headEnd type="none" w="med" len="med"/>
+                      <a:tailEnd type="none" w="med" len="med"/>
+                    </a:lnB>
+                    <a:solidFill>
+                      <a:srgbClr val="FFFAEF"/>
+                    </a:solidFill>
+                  </a:tcPr>
+                </a:tc>
+                <a:tc>
+                  <a:txBody>
+                    <a:bodyPr/>
+                    <a:lstStyle/>
+                    <a:p>
+                      <a:pPr algn="ctr" fontAlgn="b">
+                        <a:buNone/>
+                      </a:pPr>
+                      <a:r>
+                        <a:rPr lang="it-IT" sz="2000" b="0" i="0" u="none" strike="noStrike" dirty="0">
+                          <a:solidFill>
+                            <a:srgbClr val="000000"/>
+                          </a:solidFill>
+                          <a:effectLst/>
+                          <a:latin typeface="Calibri" panose="020F0502020204030204" pitchFamily="34" charset="0"/>
+                        </a:rPr>
+                        <a:t>8</a:t>
+                      </a:r>
+                    </a:p>
+                  </a:txBody>
+                  <a:tcPr marL="9525" marR="9525" marT="9525" marB="0" anchor="ctr">
+                    <a:lnL w="12700" cap="flat" cmpd="sng" algn="ctr">
+                      <a:solidFill>
+                        <a:schemeClr val="tx1"/>
+                      </a:solidFill>
+                      <a:prstDash val="solid"/>
+                      <a:round/>
+                      <a:headEnd type="none" w="med" len="med"/>
+                      <a:tailEnd type="none" w="med" len="med"/>
+                    </a:lnL>
+                    <a:lnR w="12700" cap="flat" cmpd="sng" algn="ctr">
+                      <a:solidFill>
+                        <a:schemeClr val="tx1"/>
+                      </a:solidFill>
+                      <a:prstDash val="solid"/>
+                      <a:round/>
+                      <a:headEnd type="none" w="med" len="med"/>
+                      <a:tailEnd type="none" w="med" len="med"/>
+                    </a:lnR>
+                    <a:lnT w="12700" cap="flat" cmpd="sng" algn="ctr">
+                      <a:solidFill>
+                        <a:schemeClr val="tx1"/>
+                      </a:solidFill>
+                      <a:prstDash val="solid"/>
+                      <a:round/>
+                      <a:headEnd type="none" w="med" len="med"/>
+                      <a:tailEnd type="none" w="med" len="med"/>
+                    </a:lnT>
+                    <a:lnB w="12700" cap="flat" cmpd="sng" algn="ctr">
+                      <a:solidFill>
+                        <a:schemeClr val="tx1"/>
+                      </a:solidFill>
+                      <a:prstDash val="solid"/>
+                      <a:round/>
+                      <a:headEnd type="none" w="med" len="med"/>
+                      <a:tailEnd type="none" w="med" len="med"/>
+                    </a:lnB>
+                    <a:solidFill>
+                      <a:srgbClr val="FFFAEF"/>
+                    </a:solidFill>
+                  </a:tcPr>
+                </a:tc>
+                <a:tc>
+                  <a:txBody>
+                    <a:bodyPr/>
+                    <a:lstStyle/>
+                    <a:p>
+                      <a:pPr algn="ctr" fontAlgn="b">
+                        <a:buNone/>
+                      </a:pPr>
+                      <a:r>
+                        <a:rPr lang="it-IT" sz="2000" b="0" i="0" u="none" strike="noStrike" dirty="0">
+                          <a:solidFill>
+                            <a:srgbClr val="000000"/>
+                          </a:solidFill>
+                          <a:effectLst/>
+                          <a:latin typeface="Calibri" panose="020F0502020204030204" pitchFamily="34" charset="0"/>
+                        </a:rPr>
+                        <a:t>0</a:t>
+                      </a:r>
+                    </a:p>
+                  </a:txBody>
+                  <a:tcPr marL="9525" marR="9525" marT="9525" marB="0" anchor="ctr">
+                    <a:lnL w="12700" cap="flat" cmpd="sng" algn="ctr">
+                      <a:solidFill>
+                        <a:schemeClr val="tx1"/>
+                      </a:solidFill>
+                      <a:prstDash val="solid"/>
+                      <a:round/>
+                      <a:headEnd type="none" w="med" len="med"/>
+                      <a:tailEnd type="none" w="med" len="med"/>
+                    </a:lnL>
+                    <a:lnR w="12700" cap="flat" cmpd="sng" algn="ctr">
+                      <a:solidFill>
+                        <a:schemeClr val="tx1"/>
+                      </a:solidFill>
+                      <a:prstDash val="solid"/>
+                      <a:round/>
+                      <a:headEnd type="none" w="med" len="med"/>
+                      <a:tailEnd type="none" w="med" len="med"/>
+                    </a:lnR>
+                    <a:lnT w="12700" cap="flat" cmpd="sng" algn="ctr">
+                      <a:solidFill>
+                        <a:schemeClr val="tx1"/>
+                      </a:solidFill>
+                      <a:prstDash val="solid"/>
+                      <a:round/>
+                      <a:headEnd type="none" w="med" len="med"/>
+                      <a:tailEnd type="none" w="med" len="med"/>
+                    </a:lnT>
+                    <a:lnB w="12700" cap="flat" cmpd="sng" algn="ctr">
+                      <a:solidFill>
+                        <a:schemeClr val="tx1"/>
+                      </a:solidFill>
+                      <a:prstDash val="solid"/>
+                      <a:round/>
+                      <a:headEnd type="none" w="med" len="med"/>
+                      <a:tailEnd type="none" w="med" len="med"/>
+                    </a:lnB>
+                    <a:solidFill>
+                      <a:srgbClr val="FFFAEF"/>
+                    </a:solidFill>
+                  </a:tcPr>
+                </a:tc>
+                <a:tc>
+                  <a:txBody>
+                    <a:bodyPr/>
+                    <a:lstStyle/>
+                    <a:p>
+                      <a:pPr algn="ctr" fontAlgn="b">
+                        <a:buNone/>
+                      </a:pPr>
+                      <a:r>
+                        <a:rPr lang="it-IT" sz="2000" b="0" i="0" u="none" strike="noStrike" dirty="0">
+                          <a:solidFill>
+                            <a:srgbClr val="000000"/>
+                          </a:solidFill>
+                          <a:effectLst/>
+                          <a:latin typeface="Calibri" panose="020F0502020204030204" pitchFamily="34" charset="0"/>
+                        </a:rPr>
+                        <a:t>8</a:t>
+                      </a:r>
+                    </a:p>
+                  </a:txBody>
+                  <a:tcPr marL="9525" marR="9525" marT="9525" marB="0" anchor="ctr">
+                    <a:lnL w="12700" cap="flat" cmpd="sng" algn="ctr">
+                      <a:solidFill>
+                        <a:schemeClr val="tx1"/>
+                      </a:solidFill>
+                      <a:prstDash val="solid"/>
+                      <a:round/>
+                      <a:headEnd type="none" w="med" len="med"/>
+                      <a:tailEnd type="none" w="med" len="med"/>
+                    </a:lnL>
+                    <a:lnR w="12700" cap="flat" cmpd="sng" algn="ctr">
+                      <a:solidFill>
+                        <a:schemeClr val="tx1"/>
+                      </a:solidFill>
+                      <a:prstDash val="solid"/>
+                      <a:round/>
+                      <a:headEnd type="none" w="med" len="med"/>
+                      <a:tailEnd type="none" w="med" len="med"/>
+                    </a:lnR>
+                    <a:lnT w="12700" cap="flat" cmpd="sng" algn="ctr">
+                      <a:solidFill>
+                        <a:schemeClr val="tx1"/>
+                      </a:solidFill>
+                      <a:prstDash val="solid"/>
+                      <a:round/>
+                      <a:headEnd type="none" w="med" len="med"/>
+                      <a:tailEnd type="none" w="med" len="med"/>
+                    </a:lnT>
+                    <a:lnB w="12700" cap="flat" cmpd="sng" algn="ctr">
+                      <a:solidFill>
+                        <a:schemeClr val="tx1"/>
+                      </a:solidFill>
+                      <a:prstDash val="solid"/>
+                      <a:round/>
+                      <a:headEnd type="none" w="med" len="med"/>
+                      <a:tailEnd type="none" w="med" len="med"/>
+                    </a:lnB>
+                    <a:solidFill>
+                      <a:srgbClr val="FFFAEF"/>
+                    </a:solidFill>
+                  </a:tcPr>
+                </a:tc>
+                <a:tc>
+                  <a:txBody>
+                    <a:bodyPr/>
+                    <a:lstStyle/>
+                    <a:p>
+                      <a:pPr algn="ctr" fontAlgn="b">
+                        <a:buNone/>
+                      </a:pPr>
+                      <a:r>
+                        <a:rPr lang="it-IT" sz="2000" b="0" i="0" u="none" strike="noStrike" dirty="0">
+                          <a:solidFill>
+                            <a:srgbClr val="000000"/>
+                          </a:solidFill>
+                          <a:effectLst/>
+                          <a:latin typeface="Calibri" panose="020F0502020204030204" pitchFamily="34" charset="0"/>
+                        </a:rPr>
+                        <a:t>11</a:t>
+                      </a:r>
+                    </a:p>
+                  </a:txBody>
+                  <a:tcPr marL="9525" marR="9525" marT="9525" marB="0" anchor="ctr">
+                    <a:lnL w="12700" cap="flat" cmpd="sng" algn="ctr">
+                      <a:solidFill>
+                        <a:schemeClr val="tx1"/>
+                      </a:solidFill>
+                      <a:prstDash val="solid"/>
+                      <a:round/>
+                      <a:headEnd type="none" w="med" len="med"/>
+                      <a:tailEnd type="none" w="med" len="med"/>
+                    </a:lnL>
+                    <a:lnR w="12700" cap="flat" cmpd="sng" algn="ctr">
+                      <a:solidFill>
+                        <a:schemeClr val="tx1"/>
+                      </a:solidFill>
+                      <a:prstDash val="solid"/>
+                      <a:round/>
+                      <a:headEnd type="none" w="med" len="med"/>
+                      <a:tailEnd type="none" w="med" len="med"/>
+                    </a:lnR>
+                    <a:lnT w="12700" cap="flat" cmpd="sng" algn="ctr">
+                      <a:solidFill>
+                        <a:schemeClr val="tx1"/>
+                      </a:solidFill>
+                      <a:prstDash val="solid"/>
+                      <a:round/>
+                      <a:headEnd type="none" w="med" len="med"/>
+                      <a:tailEnd type="none" w="med" len="med"/>
+                    </a:lnT>
+                    <a:lnB w="12700" cap="flat" cmpd="sng" algn="ctr">
+                      <a:solidFill>
+                        <a:schemeClr val="tx1"/>
+                      </a:solidFill>
+                      <a:prstDash val="solid"/>
+                      <a:round/>
+                      <a:headEnd type="none" w="med" len="med"/>
+                      <a:tailEnd type="none" w="med" len="med"/>
+                    </a:lnB>
+                    <a:solidFill>
+                      <a:srgbClr val="FFFAEF"/>
+                    </a:solidFill>
+                  </a:tcPr>
+                </a:tc>
+                <a:tc>
+                  <a:txBody>
+                    <a:bodyPr/>
+                    <a:lstStyle/>
+                    <a:p>
+                      <a:pPr algn="ctr" fontAlgn="b">
+                        <a:buNone/>
+                      </a:pPr>
+                      <a:r>
+                        <a:rPr lang="it-IT" sz="2000" b="0" i="0" u="none" strike="noStrike" dirty="0">
+                          <a:solidFill>
+                            <a:srgbClr val="000000"/>
+                          </a:solidFill>
+                          <a:effectLst/>
+                          <a:latin typeface="Calibri" panose="020F0502020204030204" pitchFamily="34" charset="0"/>
+                        </a:rPr>
+                        <a:t>39</a:t>
                       </a:r>
                     </a:p>
                   </a:txBody>
@@ -6928,138 +6910,8 @@
                           <a:effectLst/>
                           <a:latin typeface="Calibri" panose="020F0502020204030204" pitchFamily="34" charset="0"/>
                         </a:rPr>
-                        <a:t>3</a:t>
+                        <a:t>4</a:t>
                       </a:r>
-                    </a:p>
-                  </a:txBody>
-                  <a:tcPr marL="9525" marR="9525" marT="9525" marB="0" anchor="ctr">
-                    <a:lnL w="12700" cap="flat" cmpd="sng" algn="ctr">
-                      <a:solidFill>
-                        <a:schemeClr val="tx1"/>
-                      </a:solidFill>
-                      <a:prstDash val="solid"/>
-                      <a:round/>
-                      <a:headEnd type="none" w="med" len="med"/>
-                      <a:tailEnd type="none" w="med" len="med"/>
-                    </a:lnL>
-                    <a:lnR w="12700" cap="flat" cmpd="sng" algn="ctr">
-                      <a:solidFill>
-                        <a:schemeClr val="tx1"/>
-                      </a:solidFill>
-                      <a:prstDash val="solid"/>
-                      <a:round/>
-                      <a:headEnd type="none" w="med" len="med"/>
-                      <a:tailEnd type="none" w="med" len="med"/>
-                    </a:lnR>
-                    <a:lnT w="12700" cap="flat" cmpd="sng" algn="ctr">
-                      <a:solidFill>
-                        <a:schemeClr val="tx1"/>
-                      </a:solidFill>
-                      <a:prstDash val="solid"/>
-                      <a:round/>
-                      <a:headEnd type="none" w="med" len="med"/>
-                      <a:tailEnd type="none" w="med" len="med"/>
-                    </a:lnT>
-                    <a:lnB w="12700" cap="flat" cmpd="sng" algn="ctr">
-                      <a:solidFill>
-                        <a:schemeClr val="tx1"/>
-                      </a:solidFill>
-                      <a:prstDash val="solid"/>
-                      <a:round/>
-                      <a:headEnd type="none" w="med" len="med"/>
-                      <a:tailEnd type="none" w="med" len="med"/>
-                    </a:lnB>
-                    <a:solidFill>
-                      <a:srgbClr val="FFFAEF"/>
-                    </a:solidFill>
-                  </a:tcPr>
-                </a:tc>
-                <a:tc>
-                  <a:txBody>
-                    <a:bodyPr/>
-                    <a:lstStyle/>
-                    <a:p>
-                      <a:pPr algn="ctr" fontAlgn="b">
-                        <a:buNone/>
-                      </a:pPr>
-                      <a:r>
-                        <a:rPr lang="it-IT" sz="2000" u="none" strike="noStrike" dirty="0">
-                          <a:effectLst/>
-                        </a:rPr>
-                        <a:t>5</a:t>
-                      </a:r>
-                      <a:endParaRPr lang="it-IT" sz="2000" b="0" i="0" u="none" strike="noStrike" dirty="0">
-                        <a:solidFill>
-                          <a:srgbClr val="000000"/>
-                        </a:solidFill>
-                        <a:effectLst/>
-                        <a:latin typeface="Calibri" panose="020F0502020204030204" pitchFamily="34" charset="0"/>
-                      </a:endParaRPr>
-                    </a:p>
-                  </a:txBody>
-                  <a:tcPr marL="9525" marR="9525" marT="9525" marB="0" anchor="ctr">
-                    <a:lnL w="12700" cap="flat" cmpd="sng" algn="ctr">
-                      <a:solidFill>
-                        <a:schemeClr val="tx1"/>
-                      </a:solidFill>
-                      <a:prstDash val="solid"/>
-                      <a:round/>
-                      <a:headEnd type="none" w="med" len="med"/>
-                      <a:tailEnd type="none" w="med" len="med"/>
-                    </a:lnL>
-                    <a:lnR w="12700" cap="flat" cmpd="sng" algn="ctr">
-                      <a:solidFill>
-                        <a:schemeClr val="tx1"/>
-                      </a:solidFill>
-                      <a:prstDash val="solid"/>
-                      <a:round/>
-                      <a:headEnd type="none" w="med" len="med"/>
-                      <a:tailEnd type="none" w="med" len="med"/>
-                    </a:lnR>
-                    <a:lnT w="12700" cap="flat" cmpd="sng" algn="ctr">
-                      <a:solidFill>
-                        <a:schemeClr val="tx1"/>
-                      </a:solidFill>
-                      <a:prstDash val="solid"/>
-                      <a:round/>
-                      <a:headEnd type="none" w="med" len="med"/>
-                      <a:tailEnd type="none" w="med" len="med"/>
-                    </a:lnT>
-                    <a:lnB w="12700" cap="flat" cmpd="sng" algn="ctr">
-                      <a:solidFill>
-                        <a:schemeClr val="tx1"/>
-                      </a:solidFill>
-                      <a:prstDash val="solid"/>
-                      <a:round/>
-                      <a:headEnd type="none" w="med" len="med"/>
-                      <a:tailEnd type="none" w="med" len="med"/>
-                    </a:lnB>
-                    <a:solidFill>
-                      <a:srgbClr val="FFFAEF"/>
-                    </a:solidFill>
-                  </a:tcPr>
-                </a:tc>
-                <a:tc>
-                  <a:txBody>
-                    <a:bodyPr/>
-                    <a:lstStyle/>
-                    <a:p>
-                      <a:pPr algn="ctr" fontAlgn="b">
-                        <a:buNone/>
-                      </a:pPr>
-                      <a:r>
-                        <a:rPr lang="it-IT" sz="2000" u="none" strike="noStrike">
-                          <a:effectLst/>
-                        </a:rPr>
-                        <a:t>6</a:t>
-                      </a:r>
-                      <a:endParaRPr lang="it-IT" sz="2000" b="0" i="0" u="none" strike="noStrike">
-                        <a:solidFill>
-                          <a:srgbClr val="000000"/>
-                        </a:solidFill>
-                        <a:effectLst/>
-                        <a:latin typeface="Calibri" panose="020F0502020204030204" pitchFamily="34" charset="0"/>
-                      </a:endParaRPr>
                     </a:p>
                   </a:txBody>
                   <a:tcPr marL="9525" marR="9525" marT="9525" marB="0" anchor="ctr">
@@ -7120,138 +6972,8 @@
                           <a:effectLst/>
                           <a:latin typeface="Calibri" panose="020F0502020204030204" pitchFamily="34" charset="0"/>
                         </a:rPr>
-                        <a:t>17</a:t>
+                        <a:t>7</a:t>
                       </a:r>
-                    </a:p>
-                  </a:txBody>
-                  <a:tcPr marL="9525" marR="9525" marT="9525" marB="0" anchor="ctr">
-                    <a:lnL w="12700" cap="flat" cmpd="sng" algn="ctr">
-                      <a:solidFill>
-                        <a:schemeClr val="tx1"/>
-                      </a:solidFill>
-                      <a:prstDash val="solid"/>
-                      <a:round/>
-                      <a:headEnd type="none" w="med" len="med"/>
-                      <a:tailEnd type="none" w="med" len="med"/>
-                    </a:lnL>
-                    <a:lnR w="12700" cap="flat" cmpd="sng" algn="ctr">
-                      <a:solidFill>
-                        <a:schemeClr val="tx1"/>
-                      </a:solidFill>
-                      <a:prstDash val="solid"/>
-                      <a:round/>
-                      <a:headEnd type="none" w="med" len="med"/>
-                      <a:tailEnd type="none" w="med" len="med"/>
-                    </a:lnR>
-                    <a:lnT w="12700" cap="flat" cmpd="sng" algn="ctr">
-                      <a:solidFill>
-                        <a:schemeClr val="tx1"/>
-                      </a:solidFill>
-                      <a:prstDash val="solid"/>
-                      <a:round/>
-                      <a:headEnd type="none" w="med" len="med"/>
-                      <a:tailEnd type="none" w="med" len="med"/>
-                    </a:lnT>
-                    <a:lnB w="12700" cap="flat" cmpd="sng" algn="ctr">
-                      <a:solidFill>
-                        <a:schemeClr val="tx1"/>
-                      </a:solidFill>
-                      <a:prstDash val="solid"/>
-                      <a:round/>
-                      <a:headEnd type="none" w="med" len="med"/>
-                      <a:tailEnd type="none" w="med" len="med"/>
-                    </a:lnB>
-                    <a:solidFill>
-                      <a:srgbClr val="FFFAEF"/>
-                    </a:solidFill>
-                  </a:tcPr>
-                </a:tc>
-                <a:tc>
-                  <a:txBody>
-                    <a:bodyPr/>
-                    <a:lstStyle/>
-                    <a:p>
-                      <a:pPr algn="ctr" fontAlgn="b">
-                        <a:buNone/>
-                      </a:pPr>
-                      <a:r>
-                        <a:rPr lang="it-IT" sz="2000" u="none" strike="noStrike" dirty="0">
-                          <a:effectLst/>
-                        </a:rPr>
-                        <a:t>0</a:t>
-                      </a:r>
-                      <a:endParaRPr lang="it-IT" sz="2000" b="0" i="0" u="none" strike="noStrike" dirty="0">
-                        <a:solidFill>
-                          <a:srgbClr val="000000"/>
-                        </a:solidFill>
-                        <a:effectLst/>
-                        <a:latin typeface="Calibri" panose="020F0502020204030204" pitchFamily="34" charset="0"/>
-                      </a:endParaRPr>
-                    </a:p>
-                  </a:txBody>
-                  <a:tcPr marL="9525" marR="9525" marT="9525" marB="0" anchor="ctr">
-                    <a:lnL w="12700" cap="flat" cmpd="sng" algn="ctr">
-                      <a:solidFill>
-                        <a:schemeClr val="tx1"/>
-                      </a:solidFill>
-                      <a:prstDash val="solid"/>
-                      <a:round/>
-                      <a:headEnd type="none" w="med" len="med"/>
-                      <a:tailEnd type="none" w="med" len="med"/>
-                    </a:lnL>
-                    <a:lnR w="12700" cap="flat" cmpd="sng" algn="ctr">
-                      <a:solidFill>
-                        <a:schemeClr val="tx1"/>
-                      </a:solidFill>
-                      <a:prstDash val="solid"/>
-                      <a:round/>
-                      <a:headEnd type="none" w="med" len="med"/>
-                      <a:tailEnd type="none" w="med" len="med"/>
-                    </a:lnR>
-                    <a:lnT w="12700" cap="flat" cmpd="sng" algn="ctr">
-                      <a:solidFill>
-                        <a:schemeClr val="tx1"/>
-                      </a:solidFill>
-                      <a:prstDash val="solid"/>
-                      <a:round/>
-                      <a:headEnd type="none" w="med" len="med"/>
-                      <a:tailEnd type="none" w="med" len="med"/>
-                    </a:lnT>
-                    <a:lnB w="12700" cap="flat" cmpd="sng" algn="ctr">
-                      <a:solidFill>
-                        <a:schemeClr val="tx1"/>
-                      </a:solidFill>
-                      <a:prstDash val="solid"/>
-                      <a:round/>
-                      <a:headEnd type="none" w="med" len="med"/>
-                      <a:tailEnd type="none" w="med" len="med"/>
-                    </a:lnB>
-                    <a:solidFill>
-                      <a:srgbClr val="FFFAEF"/>
-                    </a:solidFill>
-                  </a:tcPr>
-                </a:tc>
-                <a:tc>
-                  <a:txBody>
-                    <a:bodyPr/>
-                    <a:lstStyle/>
-                    <a:p>
-                      <a:pPr algn="ctr" fontAlgn="b">
-                        <a:buNone/>
-                      </a:pPr>
-                      <a:r>
-                        <a:rPr lang="it-IT" sz="2000" u="none" strike="noStrike" dirty="0">
-                          <a:effectLst/>
-                        </a:rPr>
-                        <a:t>0</a:t>
-                      </a:r>
-                      <a:endParaRPr lang="it-IT" sz="2000" b="0" i="0" u="none" strike="noStrike" dirty="0">
-                        <a:solidFill>
-                          <a:srgbClr val="000000"/>
-                        </a:solidFill>
-                        <a:effectLst/>
-                        <a:latin typeface="Calibri" panose="020F0502020204030204" pitchFamily="34" charset="0"/>
-                      </a:endParaRPr>
                     </a:p>
                   </a:txBody>
                   <a:tcPr marL="9525" marR="9525" marT="9525" marB="0" anchor="ctr">
@@ -7312,7 +7034,255 @@
                           <a:effectLst/>
                           <a:latin typeface="Calibri" panose="020F0502020204030204" pitchFamily="34" charset="0"/>
                         </a:rPr>
-                        <a:t>31</a:t>
+                        <a:t>7</a:t>
+                      </a:r>
+                    </a:p>
+                  </a:txBody>
+                  <a:tcPr marL="9525" marR="9525" marT="9525" marB="0" anchor="ctr">
+                    <a:lnL w="12700" cap="flat" cmpd="sng" algn="ctr">
+                      <a:solidFill>
+                        <a:schemeClr val="tx1"/>
+                      </a:solidFill>
+                      <a:prstDash val="solid"/>
+                      <a:round/>
+                      <a:headEnd type="none" w="med" len="med"/>
+                      <a:tailEnd type="none" w="med" len="med"/>
+                    </a:lnL>
+                    <a:lnR w="12700" cap="flat" cmpd="sng" algn="ctr">
+                      <a:solidFill>
+                        <a:schemeClr val="tx1"/>
+                      </a:solidFill>
+                      <a:prstDash val="solid"/>
+                      <a:round/>
+                      <a:headEnd type="none" w="med" len="med"/>
+                      <a:tailEnd type="none" w="med" len="med"/>
+                    </a:lnR>
+                    <a:lnT w="12700" cap="flat" cmpd="sng" algn="ctr">
+                      <a:solidFill>
+                        <a:schemeClr val="tx1"/>
+                      </a:solidFill>
+                      <a:prstDash val="solid"/>
+                      <a:round/>
+                      <a:headEnd type="none" w="med" len="med"/>
+                      <a:tailEnd type="none" w="med" len="med"/>
+                    </a:lnT>
+                    <a:lnB w="12700" cap="flat" cmpd="sng" algn="ctr">
+                      <a:solidFill>
+                        <a:schemeClr val="tx1"/>
+                      </a:solidFill>
+                      <a:prstDash val="solid"/>
+                      <a:round/>
+                      <a:headEnd type="none" w="med" len="med"/>
+                      <a:tailEnd type="none" w="med" len="med"/>
+                    </a:lnB>
+                    <a:solidFill>
+                      <a:srgbClr val="FFFAEF"/>
+                    </a:solidFill>
+                  </a:tcPr>
+                </a:tc>
+                <a:tc>
+                  <a:txBody>
+                    <a:bodyPr/>
+                    <a:lstStyle/>
+                    <a:p>
+                      <a:pPr algn="ctr" fontAlgn="b">
+                        <a:buNone/>
+                      </a:pPr>
+                      <a:r>
+                        <a:rPr lang="it-IT" sz="2000" b="0" i="0" u="none" strike="noStrike" dirty="0">
+                          <a:solidFill>
+                            <a:srgbClr val="000000"/>
+                          </a:solidFill>
+                          <a:effectLst/>
+                          <a:latin typeface="Calibri" panose="020F0502020204030204" pitchFamily="34" charset="0"/>
+                        </a:rPr>
+                        <a:t>0</a:t>
+                      </a:r>
+                    </a:p>
+                  </a:txBody>
+                  <a:tcPr marL="9525" marR="9525" marT="9525" marB="0" anchor="ctr">
+                    <a:lnL w="12700" cap="flat" cmpd="sng" algn="ctr">
+                      <a:solidFill>
+                        <a:schemeClr val="tx1"/>
+                      </a:solidFill>
+                      <a:prstDash val="solid"/>
+                      <a:round/>
+                      <a:headEnd type="none" w="med" len="med"/>
+                      <a:tailEnd type="none" w="med" len="med"/>
+                    </a:lnL>
+                    <a:lnR w="12700" cap="flat" cmpd="sng" algn="ctr">
+                      <a:solidFill>
+                        <a:schemeClr val="tx1"/>
+                      </a:solidFill>
+                      <a:prstDash val="solid"/>
+                      <a:round/>
+                      <a:headEnd type="none" w="med" len="med"/>
+                      <a:tailEnd type="none" w="med" len="med"/>
+                    </a:lnR>
+                    <a:lnT w="12700" cap="flat" cmpd="sng" algn="ctr">
+                      <a:solidFill>
+                        <a:schemeClr val="tx1"/>
+                      </a:solidFill>
+                      <a:prstDash val="solid"/>
+                      <a:round/>
+                      <a:headEnd type="none" w="med" len="med"/>
+                      <a:tailEnd type="none" w="med" len="med"/>
+                    </a:lnT>
+                    <a:lnB w="12700" cap="flat" cmpd="sng" algn="ctr">
+                      <a:solidFill>
+                        <a:schemeClr val="tx1"/>
+                      </a:solidFill>
+                      <a:prstDash val="solid"/>
+                      <a:round/>
+                      <a:headEnd type="none" w="med" len="med"/>
+                      <a:tailEnd type="none" w="med" len="med"/>
+                    </a:lnB>
+                    <a:solidFill>
+                      <a:srgbClr val="FFFAEF"/>
+                    </a:solidFill>
+                  </a:tcPr>
+                </a:tc>
+                <a:tc>
+                  <a:txBody>
+                    <a:bodyPr/>
+                    <a:lstStyle/>
+                    <a:p>
+                      <a:pPr algn="ctr" fontAlgn="b">
+                        <a:buNone/>
+                      </a:pPr>
+                      <a:r>
+                        <a:rPr lang="it-IT" sz="2000" b="0" i="0" u="none" strike="noStrike" dirty="0">
+                          <a:solidFill>
+                            <a:srgbClr val="000000"/>
+                          </a:solidFill>
+                          <a:effectLst/>
+                          <a:latin typeface="Calibri" panose="020F0502020204030204" pitchFamily="34" charset="0"/>
+                        </a:rPr>
+                        <a:t>12</a:t>
+                      </a:r>
+                    </a:p>
+                  </a:txBody>
+                  <a:tcPr marL="9525" marR="9525" marT="9525" marB="0" anchor="ctr">
+                    <a:lnL w="12700" cap="flat" cmpd="sng" algn="ctr">
+                      <a:solidFill>
+                        <a:schemeClr val="tx1"/>
+                      </a:solidFill>
+                      <a:prstDash val="solid"/>
+                      <a:round/>
+                      <a:headEnd type="none" w="med" len="med"/>
+                      <a:tailEnd type="none" w="med" len="med"/>
+                    </a:lnL>
+                    <a:lnR w="12700" cap="flat" cmpd="sng" algn="ctr">
+                      <a:solidFill>
+                        <a:schemeClr val="tx1"/>
+                      </a:solidFill>
+                      <a:prstDash val="solid"/>
+                      <a:round/>
+                      <a:headEnd type="none" w="med" len="med"/>
+                      <a:tailEnd type="none" w="med" len="med"/>
+                    </a:lnR>
+                    <a:lnT w="12700" cap="flat" cmpd="sng" algn="ctr">
+                      <a:solidFill>
+                        <a:schemeClr val="tx1"/>
+                      </a:solidFill>
+                      <a:prstDash val="solid"/>
+                      <a:round/>
+                      <a:headEnd type="none" w="med" len="med"/>
+                      <a:tailEnd type="none" w="med" len="med"/>
+                    </a:lnT>
+                    <a:lnB w="12700" cap="flat" cmpd="sng" algn="ctr">
+                      <a:solidFill>
+                        <a:schemeClr val="tx1"/>
+                      </a:solidFill>
+                      <a:prstDash val="solid"/>
+                      <a:round/>
+                      <a:headEnd type="none" w="med" len="med"/>
+                      <a:tailEnd type="none" w="med" len="med"/>
+                    </a:lnB>
+                    <a:solidFill>
+                      <a:srgbClr val="FFFAEF"/>
+                    </a:solidFill>
+                  </a:tcPr>
+                </a:tc>
+                <a:tc>
+                  <a:txBody>
+                    <a:bodyPr/>
+                    <a:lstStyle/>
+                    <a:p>
+                      <a:pPr algn="ctr" fontAlgn="b">
+                        <a:buNone/>
+                      </a:pPr>
+                      <a:r>
+                        <a:rPr lang="it-IT" sz="2000" b="0" i="0" u="none" strike="noStrike" dirty="0">
+                          <a:solidFill>
+                            <a:srgbClr val="000000"/>
+                          </a:solidFill>
+                          <a:effectLst/>
+                          <a:latin typeface="Calibri" panose="020F0502020204030204" pitchFamily="34" charset="0"/>
+                        </a:rPr>
+                        <a:t>12</a:t>
+                      </a:r>
+                    </a:p>
+                  </a:txBody>
+                  <a:tcPr marL="9525" marR="9525" marT="9525" marB="0" anchor="ctr">
+                    <a:lnL w="12700" cap="flat" cmpd="sng" algn="ctr">
+                      <a:solidFill>
+                        <a:schemeClr val="tx1"/>
+                      </a:solidFill>
+                      <a:prstDash val="solid"/>
+                      <a:round/>
+                      <a:headEnd type="none" w="med" len="med"/>
+                      <a:tailEnd type="none" w="med" len="med"/>
+                    </a:lnL>
+                    <a:lnR w="12700" cap="flat" cmpd="sng" algn="ctr">
+                      <a:solidFill>
+                        <a:schemeClr val="tx1"/>
+                      </a:solidFill>
+                      <a:prstDash val="solid"/>
+                      <a:round/>
+                      <a:headEnd type="none" w="med" len="med"/>
+                      <a:tailEnd type="none" w="med" len="med"/>
+                    </a:lnR>
+                    <a:lnT w="12700" cap="flat" cmpd="sng" algn="ctr">
+                      <a:solidFill>
+                        <a:schemeClr val="tx1"/>
+                      </a:solidFill>
+                      <a:prstDash val="solid"/>
+                      <a:round/>
+                      <a:headEnd type="none" w="med" len="med"/>
+                      <a:tailEnd type="none" w="med" len="med"/>
+                    </a:lnT>
+                    <a:lnB w="12700" cap="flat" cmpd="sng" algn="ctr">
+                      <a:solidFill>
+                        <a:schemeClr val="tx1"/>
+                      </a:solidFill>
+                      <a:prstDash val="solid"/>
+                      <a:round/>
+                      <a:headEnd type="none" w="med" len="med"/>
+                      <a:tailEnd type="none" w="med" len="med"/>
+                    </a:lnB>
+                    <a:solidFill>
+                      <a:srgbClr val="FFFAEF"/>
+                    </a:solidFill>
+                  </a:tcPr>
+                </a:tc>
+                <a:tc>
+                  <a:txBody>
+                    <a:bodyPr/>
+                    <a:lstStyle/>
+                    <a:p>
+                      <a:pPr algn="ctr" fontAlgn="b">
+                        <a:buNone/>
+                      </a:pPr>
+                      <a:r>
+                        <a:rPr lang="it-IT" sz="2000" b="0" i="0" u="none" strike="noStrike" dirty="0">
+                          <a:solidFill>
+                            <a:srgbClr val="000000"/>
+                          </a:solidFill>
+                          <a:effectLst/>
+                          <a:latin typeface="Calibri" panose="020F0502020204030204" pitchFamily="34" charset="0"/>
+                        </a:rPr>
+                        <a:t>42</a:t>
                       </a:r>
                     </a:p>
                   </a:txBody>
@@ -7439,18 +7409,15 @@
                         <a:buNone/>
                       </a:pPr>
                       <a:r>
-                        <a:rPr lang="it-IT" sz="2000" u="none" strike="noStrike" dirty="0">
+                        <a:rPr lang="it-IT" sz="2000" b="0" i="0" u="none" strike="noStrike" dirty="0">
+                          <a:solidFill>
+                            <a:srgbClr val="000000"/>
+                          </a:solidFill>
                           <a:effectLst/>
+                          <a:latin typeface="Calibri" panose="020F0502020204030204" pitchFamily="34" charset="0"/>
                         </a:rPr>
-                        <a:t>6</a:t>
+                        <a:t>8</a:t>
                       </a:r>
-                      <a:endParaRPr lang="it-IT" sz="2000" b="0" i="0" u="none" strike="noStrike" dirty="0">
-                        <a:solidFill>
-                          <a:srgbClr val="000000"/>
-                        </a:solidFill>
-                        <a:effectLst/>
-                        <a:latin typeface="Calibri" panose="020F0502020204030204" pitchFamily="34" charset="0"/>
-                      </a:endParaRPr>
                     </a:p>
                   </a:txBody>
                   <a:tcPr marL="9525" marR="9525" marT="9525" marB="0" anchor="ctr">
@@ -7504,18 +7471,15 @@
                         <a:buNone/>
                       </a:pPr>
                       <a:r>
-                        <a:rPr lang="it-IT" sz="2000" u="none" strike="noStrike" dirty="0">
+                        <a:rPr lang="it-IT" sz="2000" b="0" i="0" u="none" strike="noStrike" dirty="0">
+                          <a:solidFill>
+                            <a:srgbClr val="000000"/>
+                          </a:solidFill>
                           <a:effectLst/>
+                          <a:latin typeface="Calibri" panose="020F0502020204030204" pitchFamily="34" charset="0"/>
                         </a:rPr>
-                        <a:t>5</a:t>
+                        <a:t>4</a:t>
                       </a:r>
-                      <a:endParaRPr lang="it-IT" sz="2000" b="0" i="0" u="none" strike="noStrike" dirty="0">
-                        <a:solidFill>
-                          <a:srgbClr val="000000"/>
-                        </a:solidFill>
-                        <a:effectLst/>
-                        <a:latin typeface="Calibri" panose="020F0502020204030204" pitchFamily="34" charset="0"/>
-                      </a:endParaRPr>
                     </a:p>
                   </a:txBody>
                   <a:tcPr marL="9525" marR="9525" marT="9525" marB="0" anchor="ctr">
@@ -7569,18 +7533,15 @@
                         <a:buNone/>
                       </a:pPr>
                       <a:r>
-                        <a:rPr lang="it-IT" sz="2000" u="none" strike="noStrike" dirty="0">
+                        <a:rPr lang="it-IT" sz="2000" b="0" i="0" u="none" strike="noStrike" dirty="0">
+                          <a:solidFill>
+                            <a:srgbClr val="000000"/>
+                          </a:solidFill>
                           <a:effectLst/>
+                          <a:latin typeface="Calibri" panose="020F0502020204030204" pitchFamily="34" charset="0"/>
                         </a:rPr>
-                        <a:t>6</a:t>
+                        <a:t>8</a:t>
                       </a:r>
-                      <a:endParaRPr lang="it-IT" sz="2000" b="0" i="0" u="none" strike="noStrike" dirty="0">
-                        <a:solidFill>
-                          <a:srgbClr val="000000"/>
-                        </a:solidFill>
-                        <a:effectLst/>
-                        <a:latin typeface="Calibri" panose="020F0502020204030204" pitchFamily="34" charset="0"/>
-                      </a:endParaRPr>
                     </a:p>
                   </a:txBody>
                   <a:tcPr marL="9525" marR="9525" marT="9525" marB="0" anchor="ctr">
@@ -7634,83 +7595,15 @@
                         <a:buNone/>
                       </a:pPr>
                       <a:r>
-                        <a:rPr lang="it-IT" sz="2000" u="none" strike="noStrike" dirty="0">
+                        <a:rPr lang="it-IT" sz="2000" b="0" i="0" u="none" strike="noStrike" dirty="0">
+                          <a:solidFill>
+                            <a:srgbClr val="000000"/>
+                          </a:solidFill>
                           <a:effectLst/>
-                        </a:rPr>
-                        <a:t>8</a:t>
-                      </a:r>
-                      <a:endParaRPr lang="it-IT" sz="2000" b="0" i="0" u="none" strike="noStrike" dirty="0">
-                        <a:solidFill>
-                          <a:srgbClr val="000000"/>
-                        </a:solidFill>
-                        <a:effectLst/>
-                        <a:latin typeface="Calibri" panose="020F0502020204030204" pitchFamily="34" charset="0"/>
-                      </a:endParaRPr>
-                    </a:p>
-                  </a:txBody>
-                  <a:tcPr marL="9525" marR="9525" marT="9525" marB="0" anchor="ctr">
-                    <a:lnL w="12700" cap="flat" cmpd="sng" algn="ctr">
-                      <a:solidFill>
-                        <a:schemeClr val="tx1"/>
-                      </a:solidFill>
-                      <a:prstDash val="solid"/>
-                      <a:round/>
-                      <a:headEnd type="none" w="med" len="med"/>
-                      <a:tailEnd type="none" w="med" len="med"/>
-                    </a:lnL>
-                    <a:lnR w="12700" cap="flat" cmpd="sng" algn="ctr">
-                      <a:solidFill>
-                        <a:schemeClr val="tx1"/>
-                      </a:solidFill>
-                      <a:prstDash val="solid"/>
-                      <a:round/>
-                      <a:headEnd type="none" w="med" len="med"/>
-                      <a:tailEnd type="none" w="med" len="med"/>
-                    </a:lnR>
-                    <a:lnT w="12700" cap="flat" cmpd="sng" algn="ctr">
-                      <a:solidFill>
-                        <a:schemeClr val="tx1"/>
-                      </a:solidFill>
-                      <a:prstDash val="solid"/>
-                      <a:round/>
-                      <a:headEnd type="none" w="med" len="med"/>
-                      <a:tailEnd type="none" w="med" len="med"/>
-                    </a:lnT>
-                    <a:lnB w="12700" cap="flat" cmpd="sng" algn="ctr">
-                      <a:solidFill>
-                        <a:schemeClr val="tx1"/>
-                      </a:solidFill>
-                      <a:prstDash val="solid"/>
-                      <a:round/>
-                      <a:headEnd type="none" w="med" len="med"/>
-                      <a:tailEnd type="none" w="med" len="med"/>
-                    </a:lnB>
-                    <a:solidFill>
-                      <a:srgbClr val="FFFAEF"/>
-                    </a:solidFill>
-                  </a:tcPr>
-                </a:tc>
-                <a:tc>
-                  <a:txBody>
-                    <a:bodyPr/>
-                    <a:lstStyle/>
-                    <a:p>
-                      <a:pPr algn="ctr" fontAlgn="b">
-                        <a:buNone/>
-                      </a:pPr>
-                      <a:r>
-                        <a:rPr lang="it-IT" sz="2000" u="none" strike="noStrike" dirty="0">
-                          <a:effectLst/>
+                          <a:latin typeface="Calibri" panose="020F0502020204030204" pitchFamily="34" charset="0"/>
                         </a:rPr>
                         <a:t>0</a:t>
                       </a:r>
-                      <a:endParaRPr lang="it-IT" sz="2000" b="0" i="0" u="none" strike="noStrike" dirty="0">
-                        <a:solidFill>
-                          <a:srgbClr val="000000"/>
-                        </a:solidFill>
-                        <a:effectLst/>
-                        <a:latin typeface="Calibri" panose="020F0502020204030204" pitchFamily="34" charset="0"/>
-                      </a:endParaRPr>
                     </a:p>
                   </a:txBody>
                   <a:tcPr marL="9525" marR="9525" marT="9525" marB="0" anchor="ctr">
@@ -7833,7 +7726,69 @@
                           <a:effectLst/>
                           <a:latin typeface="Calibri" panose="020F0502020204030204" pitchFamily="34" charset="0"/>
                         </a:rPr>
-                        <a:t>31</a:t>
+                        <a:t>23</a:t>
+                      </a:r>
+                    </a:p>
+                  </a:txBody>
+                  <a:tcPr marL="9525" marR="9525" marT="9525" marB="0" anchor="ctr">
+                    <a:lnL w="12700" cap="flat" cmpd="sng" algn="ctr">
+                      <a:solidFill>
+                        <a:schemeClr val="tx1"/>
+                      </a:solidFill>
+                      <a:prstDash val="solid"/>
+                      <a:round/>
+                      <a:headEnd type="none" w="med" len="med"/>
+                      <a:tailEnd type="none" w="med" len="med"/>
+                    </a:lnL>
+                    <a:lnR w="12700" cap="flat" cmpd="sng" algn="ctr">
+                      <a:solidFill>
+                        <a:schemeClr val="tx1"/>
+                      </a:solidFill>
+                      <a:prstDash val="solid"/>
+                      <a:round/>
+                      <a:headEnd type="none" w="med" len="med"/>
+                      <a:tailEnd type="none" w="med" len="med"/>
+                    </a:lnR>
+                    <a:lnT w="12700" cap="flat" cmpd="sng" algn="ctr">
+                      <a:solidFill>
+                        <a:schemeClr val="tx1"/>
+                      </a:solidFill>
+                      <a:prstDash val="solid"/>
+                      <a:round/>
+                      <a:headEnd type="none" w="med" len="med"/>
+                      <a:tailEnd type="none" w="med" len="med"/>
+                    </a:lnT>
+                    <a:lnB w="12700" cap="flat" cmpd="sng" algn="ctr">
+                      <a:solidFill>
+                        <a:schemeClr val="tx1"/>
+                      </a:solidFill>
+                      <a:prstDash val="solid"/>
+                      <a:round/>
+                      <a:headEnd type="none" w="med" len="med"/>
+                      <a:tailEnd type="none" w="med" len="med"/>
+                    </a:lnB>
+                    <a:solidFill>
+                      <a:srgbClr val="FFFAEF"/>
+                    </a:solidFill>
+                  </a:tcPr>
+                </a:tc>
+                <a:tc>
+                  <a:txBody>
+                    <a:bodyPr/>
+                    <a:lstStyle/>
+                    <a:p>
+                      <a:pPr algn="ctr" fontAlgn="b">
+                        <a:buNone/>
+                      </a:pPr>
+                      <a:r>
+                        <a:rPr lang="it-IT" sz="2000" b="0" i="0" u="none" strike="noStrike" dirty="0">
+                          <a:solidFill>
+                            <a:srgbClr val="000000"/>
+                          </a:solidFill>
+                          <a:effectLst/>
+                          <a:latin typeface="Calibri" panose="020F0502020204030204" pitchFamily="34" charset="0"/>
+                        </a:rPr>
+                        <a:t>49</a:t>
                       </a:r>
                     </a:p>
                   </a:txBody>
@@ -7979,7 +7934,7 @@
                           <a:effectLst/>
                           <a:latin typeface="Calibri" panose="020F0502020204030204" pitchFamily="34" charset="0"/>
                         </a:rPr>
-                        <a:t>2</a:t>
+                        <a:t>4</a:t>
                       </a:r>
                     </a:p>
                   </a:txBody>
@@ -8103,7 +8058,7 @@
                           <a:effectLst/>
                           <a:latin typeface="Calibri" panose="020F0502020204030204" pitchFamily="34" charset="0"/>
                         </a:rPr>
-                        <a:t>6</a:t>
+                        <a:t>8</a:t>
                       </a:r>
                     </a:p>
                   </a:txBody>
@@ -8165,73 +8120,8 @@
                           <a:effectLst/>
                           <a:latin typeface="Calibri" panose="020F0502020204030204" pitchFamily="34" charset="0"/>
                         </a:rPr>
-                        <a:t>9</a:t>
-                      </a:r>
-                    </a:p>
-                  </a:txBody>
-                  <a:tcPr marL="9525" marR="9525" marT="9525" marB="0" anchor="ctr">
-                    <a:lnL w="12700" cap="flat" cmpd="sng" algn="ctr">
-                      <a:solidFill>
-                        <a:schemeClr val="tx1"/>
-                      </a:solidFill>
-                      <a:prstDash val="solid"/>
-                      <a:round/>
-                      <a:headEnd type="none" w="med" len="med"/>
-                      <a:tailEnd type="none" w="med" len="med"/>
-                    </a:lnL>
-                    <a:lnR w="12700" cap="flat" cmpd="sng" algn="ctr">
-                      <a:solidFill>
-                        <a:schemeClr val="tx1"/>
-                      </a:solidFill>
-                      <a:prstDash val="solid"/>
-                      <a:round/>
-                      <a:headEnd type="none" w="med" len="med"/>
-                      <a:tailEnd type="none" w="med" len="med"/>
-                    </a:lnR>
-                    <a:lnT w="12700" cap="flat" cmpd="sng" algn="ctr">
-                      <a:solidFill>
-                        <a:schemeClr val="tx1"/>
-                      </a:solidFill>
-                      <a:prstDash val="solid"/>
-                      <a:round/>
-                      <a:headEnd type="none" w="med" len="med"/>
-                      <a:tailEnd type="none" w="med" len="med"/>
-                    </a:lnT>
-                    <a:lnB w="12700" cap="flat" cmpd="sng" algn="ctr">
-                      <a:solidFill>
-                        <a:schemeClr val="tx1"/>
-                      </a:solidFill>
-                      <a:prstDash val="solid"/>
-                      <a:round/>
-                      <a:headEnd type="none" w="med" len="med"/>
-                      <a:tailEnd type="none" w="med" len="med"/>
-                    </a:lnB>
-                    <a:solidFill>
-                      <a:srgbClr val="FFFAEF"/>
-                    </a:solidFill>
-                  </a:tcPr>
-                </a:tc>
-                <a:tc>
-                  <a:txBody>
-                    <a:bodyPr/>
-                    <a:lstStyle/>
-                    <a:p>
-                      <a:pPr algn="ctr" fontAlgn="b">
-                        <a:buNone/>
-                      </a:pPr>
-                      <a:r>
-                        <a:rPr lang="it-IT" sz="2000" u="none" strike="noStrike" dirty="0">
-                          <a:effectLst/>
-                        </a:rPr>
                         <a:t>0</a:t>
                       </a:r>
-                      <a:endParaRPr lang="it-IT" sz="2000" b="0" i="0" u="none" strike="noStrike" dirty="0">
-                        <a:solidFill>
-                          <a:srgbClr val="000000"/>
-                        </a:solidFill>
-                        <a:effectLst/>
-                        <a:latin typeface="Calibri" panose="020F0502020204030204" pitchFamily="34" charset="0"/>
-                      </a:endParaRPr>
                     </a:p>
                   </a:txBody>
                   <a:tcPr marL="9525" marR="9525" marT="9525" marB="0" anchor="ctr">
@@ -8292,7 +8182,7 @@
                           <a:effectLst/>
                           <a:latin typeface="Calibri" panose="020F0502020204030204" pitchFamily="34" charset="0"/>
                         </a:rPr>
-                        <a:t>9</a:t>
+                        <a:t>12</a:t>
                       </a:r>
                     </a:p>
                   </a:txBody>
@@ -8354,7 +8244,69 @@
                           <a:effectLst/>
                           <a:latin typeface="Calibri" panose="020F0502020204030204" pitchFamily="34" charset="0"/>
                         </a:rPr>
-                        <a:t>34</a:t>
+                        <a:t>12</a:t>
+                      </a:r>
+                    </a:p>
+                  </a:txBody>
+                  <a:tcPr marL="9525" marR="9525" marT="9525" marB="0" anchor="ctr">
+                    <a:lnL w="12700" cap="flat" cmpd="sng" algn="ctr">
+                      <a:solidFill>
+                        <a:schemeClr val="tx1"/>
+                      </a:solidFill>
+                      <a:prstDash val="solid"/>
+                      <a:round/>
+                      <a:headEnd type="none" w="med" len="med"/>
+                      <a:tailEnd type="none" w="med" len="med"/>
+                    </a:lnL>
+                    <a:lnR w="12700" cap="flat" cmpd="sng" algn="ctr">
+                      <a:solidFill>
+                        <a:schemeClr val="tx1"/>
+                      </a:solidFill>
+                      <a:prstDash val="solid"/>
+                      <a:round/>
+                      <a:headEnd type="none" w="med" len="med"/>
+                      <a:tailEnd type="none" w="med" len="med"/>
+                    </a:lnR>
+                    <a:lnT w="12700" cap="flat" cmpd="sng" algn="ctr">
+                      <a:solidFill>
+                        <a:schemeClr val="tx1"/>
+                      </a:solidFill>
+                      <a:prstDash val="solid"/>
+                      <a:round/>
+                      <a:headEnd type="none" w="med" len="med"/>
+                      <a:tailEnd type="none" w="med" len="med"/>
+                    </a:lnT>
+                    <a:lnB w="12700" cap="flat" cmpd="sng" algn="ctr">
+                      <a:solidFill>
+                        <a:schemeClr val="tx1"/>
+                      </a:solidFill>
+                      <a:prstDash val="solid"/>
+                      <a:round/>
+                      <a:headEnd type="none" w="med" len="med"/>
+                      <a:tailEnd type="none" w="med" len="med"/>
+                    </a:lnB>
+                    <a:solidFill>
+                      <a:srgbClr val="FFFAEF"/>
+                    </a:solidFill>
+                  </a:tcPr>
+                </a:tc>
+                <a:tc>
+                  <a:txBody>
+                    <a:bodyPr/>
+                    <a:lstStyle/>
+                    <a:p>
+                      <a:pPr algn="ctr" fontAlgn="b">
+                        <a:buNone/>
+                      </a:pPr>
+                      <a:r>
+                        <a:rPr lang="it-IT" sz="2000" b="0" i="0" u="none" strike="noStrike" dirty="0">
+                          <a:solidFill>
+                            <a:srgbClr val="000000"/>
+                          </a:solidFill>
+                          <a:effectLst/>
+                          <a:latin typeface="Calibri" panose="020F0502020204030204" pitchFamily="34" charset="0"/>
+                        </a:rPr>
+                        <a:t>44</a:t>
                       </a:r>
                     </a:p>
                   </a:txBody>
@@ -8481,148 +8433,15 @@
                         <a:buNone/>
                       </a:pPr>
                       <a:r>
-                        <a:rPr lang="it-IT" sz="2000" u="none" strike="noStrike">
+                        <a:rPr lang="it-IT" sz="2000" b="0" i="0" u="none" strike="noStrike" dirty="0">
+                          <a:solidFill>
+                            <a:srgbClr val="000000"/>
+                          </a:solidFill>
                           <a:effectLst/>
+                          <a:latin typeface="Calibri" panose="020F0502020204030204" pitchFamily="34" charset="0"/>
                         </a:rPr>
-                        <a:t>0</a:t>
+                        <a:t>8</a:t>
                       </a:r>
-                      <a:endParaRPr lang="it-IT" sz="2000" b="0" i="0" u="none" strike="noStrike">
-                        <a:solidFill>
-                          <a:srgbClr val="000000"/>
-                        </a:solidFill>
-                        <a:effectLst/>
-                        <a:latin typeface="Calibri" panose="020F0502020204030204" pitchFamily="34" charset="0"/>
-                      </a:endParaRPr>
-                    </a:p>
-                  </a:txBody>
-                  <a:tcPr marL="9525" marR="9525" marT="9525" marB="0" anchor="ctr">
-                    <a:lnL w="12700" cap="flat" cmpd="sng" algn="ctr">
-                      <a:solidFill>
-                        <a:schemeClr val="tx1"/>
-                      </a:solidFill>
-                      <a:prstDash val="solid"/>
-                      <a:round/>
-                      <a:headEnd type="none" w="med" len="med"/>
-                      <a:tailEnd type="none" w="med" len="med"/>
-                    </a:lnL>
-                    <a:lnR w="12700" cap="flat" cmpd="sng" algn="ctr">
-                      <a:solidFill>
-                        <a:schemeClr val="tx1"/>
-                      </a:solidFill>
-                      <a:prstDash val="solid"/>
-                      <a:round/>
-                      <a:headEnd type="none" w="med" len="med"/>
-                      <a:tailEnd type="none" w="med" len="med"/>
-                    </a:lnR>
-                    <a:lnT w="12700" cap="flat" cmpd="sng" algn="ctr">
-                      <a:solidFill>
-                        <a:schemeClr val="tx1"/>
-                      </a:solidFill>
-                      <a:prstDash val="solid"/>
-                      <a:round/>
-                      <a:headEnd type="none" w="med" len="med"/>
-                      <a:tailEnd type="none" w="med" len="med"/>
-                    </a:lnT>
-                    <a:lnB w="12700" cap="flat" cmpd="sng" algn="ctr">
-                      <a:solidFill>
-                        <a:schemeClr val="tx1"/>
-                      </a:solidFill>
-                      <a:prstDash val="solid"/>
-                      <a:round/>
-                      <a:headEnd type="none" w="med" len="med"/>
-                      <a:tailEnd type="none" w="med" len="med"/>
-                    </a:lnB>
-                    <a:solidFill>
-                      <a:srgbClr val="FFFAEF"/>
-                    </a:solidFill>
-                  </a:tcPr>
-                </a:tc>
-                <a:tc>
-                  <a:txBody>
-                    <a:bodyPr/>
-                    <a:lstStyle/>
-                    <a:p>
-                      <a:pPr algn="ctr" fontAlgn="b">
-                        <a:buNone/>
-                      </a:pPr>
-                      <a:r>
-                        <a:rPr lang="it-IT" sz="2000" u="none" strike="noStrike" dirty="0">
-                          <a:effectLst/>
-                        </a:rPr>
-                        <a:t>0</a:t>
-                      </a:r>
-                      <a:endParaRPr lang="it-IT" sz="2000" b="0" i="0" u="none" strike="noStrike" dirty="0">
-                        <a:solidFill>
-                          <a:srgbClr val="000000"/>
-                        </a:solidFill>
-                        <a:effectLst/>
-                        <a:latin typeface="Calibri" panose="020F0502020204030204" pitchFamily="34" charset="0"/>
-                      </a:endParaRPr>
-                    </a:p>
-                  </a:txBody>
-                  <a:tcPr marL="9525" marR="9525" marT="9525" marB="0" anchor="ctr">
-                    <a:lnL w="12700" cap="flat" cmpd="sng" algn="ctr">
-                      <a:solidFill>
-                        <a:schemeClr val="tx1"/>
-                      </a:solidFill>
-                      <a:prstDash val="solid"/>
-                      <a:round/>
-                      <a:headEnd type="none" w="med" len="med"/>
-                      <a:tailEnd type="none" w="med" len="med"/>
-                    </a:lnL>
-                    <a:lnR w="12700" cap="flat" cmpd="sng" algn="ctr">
-                      <a:solidFill>
-                        <a:schemeClr val="tx1"/>
-                      </a:solidFill>
-                      <a:prstDash val="solid"/>
-                      <a:round/>
-                      <a:headEnd type="none" w="med" len="med"/>
-                      <a:tailEnd type="none" w="med" len="med"/>
-                    </a:lnR>
-                    <a:lnT w="12700" cap="flat" cmpd="sng" algn="ctr">
-                      <a:solidFill>
-                        <a:schemeClr val="tx1"/>
-                      </a:solidFill>
-                      <a:prstDash val="solid"/>
-                      <a:round/>
-                      <a:headEnd type="none" w="med" len="med"/>
-                      <a:tailEnd type="none" w="med" len="med"/>
-                    </a:lnT>
-                    <a:lnB w="12700" cap="flat" cmpd="sng" algn="ctr">
-                      <a:solidFill>
-                        <a:schemeClr val="tx1"/>
-                      </a:solidFill>
-                      <a:prstDash val="solid"/>
-                      <a:round/>
-                      <a:headEnd type="none" w="med" len="med"/>
-                      <a:tailEnd type="none" w="med" len="med"/>
-                    </a:lnB>
-                    <a:solidFill>
-                      <a:srgbClr val="FFFAEF"/>
-                    </a:solidFill>
-                  </a:tcPr>
-                </a:tc>
-                <a:tc>
-                  <a:txBody>
-                    <a:bodyPr/>
-                    <a:lstStyle/>
-                    <a:p>
-                      <a:pPr algn="ctr" fontAlgn="b">
-                        <a:buNone/>
-                      </a:pPr>
-                      <a:r>
-                        <a:rPr lang="it-IT" sz="2000" u="none" strike="noStrike" dirty="0">
-                          <a:effectLst/>
-                        </a:rPr>
-                        <a:t>12</a:t>
-                      </a:r>
-                      <a:endParaRPr lang="it-IT" sz="2000" b="0" i="0" u="none" strike="noStrike" dirty="0">
-                        <a:solidFill>
-                          <a:srgbClr val="000000"/>
-                        </a:solidFill>
-                        <a:effectLst/>
-                        <a:latin typeface="Calibri" panose="020F0502020204030204" pitchFamily="34" charset="0"/>
-                      </a:endParaRPr>
                     </a:p>
                   </a:txBody>
                   <a:tcPr marL="9525" marR="9525" marT="9525" marB="0" anchor="ctr">
@@ -8683,7 +8502,7 @@
                           <a:effectLst/>
                           <a:latin typeface="Calibri" panose="020F0502020204030204" pitchFamily="34" charset="0"/>
                         </a:rPr>
-                        <a:t>17</a:t>
+                        <a:t>4</a:t>
                       </a:r>
                     </a:p>
                   </a:txBody>
@@ -8741,7 +8560,7 @@
                         <a:rPr lang="it-IT" sz="2000" u="none" strike="noStrike" dirty="0">
                           <a:effectLst/>
                         </a:rPr>
-                        <a:t>0</a:t>
+                        <a:t>9</a:t>
                       </a:r>
                       <a:endParaRPr lang="it-IT" sz="2000" b="0" i="0" u="none" strike="noStrike" dirty="0">
                         <a:solidFill>
@@ -8810,7 +8629,7 @@
                           <a:effectLst/>
                           <a:latin typeface="Calibri" panose="020F0502020204030204" pitchFamily="34" charset="0"/>
                         </a:rPr>
-                        <a:t>8</a:t>
+                        <a:t>0</a:t>
                       </a:r>
                     </a:p>
                   </a:txBody>
@@ -8872,7 +8691,131 @@
                           <a:effectLst/>
                           <a:latin typeface="Calibri" panose="020F0502020204030204" pitchFamily="34" charset="0"/>
                         </a:rPr>
-                        <a:t>37</a:t>
+                        <a:t>5</a:t>
+                      </a:r>
+                    </a:p>
+                  </a:txBody>
+                  <a:tcPr marL="9525" marR="9525" marT="9525" marB="0" anchor="ctr">
+                    <a:lnL w="12700" cap="flat" cmpd="sng" algn="ctr">
+                      <a:solidFill>
+                        <a:schemeClr val="tx1"/>
+                      </a:solidFill>
+                      <a:prstDash val="solid"/>
+                      <a:round/>
+                      <a:headEnd type="none" w="med" len="med"/>
+                      <a:tailEnd type="none" w="med" len="med"/>
+                    </a:lnL>
+                    <a:lnR w="12700" cap="flat" cmpd="sng" algn="ctr">
+                      <a:solidFill>
+                        <a:schemeClr val="tx1"/>
+                      </a:solidFill>
+                      <a:prstDash val="solid"/>
+                      <a:round/>
+                      <a:headEnd type="none" w="med" len="med"/>
+                      <a:tailEnd type="none" w="med" len="med"/>
+                    </a:lnR>
+                    <a:lnT w="12700" cap="flat" cmpd="sng" algn="ctr">
+                      <a:solidFill>
+                        <a:schemeClr val="tx1"/>
+                      </a:solidFill>
+                      <a:prstDash val="solid"/>
+                      <a:round/>
+                      <a:headEnd type="none" w="med" len="med"/>
+                      <a:tailEnd type="none" w="med" len="med"/>
+                    </a:lnT>
+                    <a:lnB w="12700" cap="flat" cmpd="sng" algn="ctr">
+                      <a:solidFill>
+                        <a:schemeClr val="tx1"/>
+                      </a:solidFill>
+                      <a:prstDash val="solid"/>
+                      <a:round/>
+                      <a:headEnd type="none" w="med" len="med"/>
+                      <a:tailEnd type="none" w="med" len="med"/>
+                    </a:lnB>
+                    <a:solidFill>
+                      <a:srgbClr val="FFFAEF"/>
+                    </a:solidFill>
+                  </a:tcPr>
+                </a:tc>
+                <a:tc>
+                  <a:txBody>
+                    <a:bodyPr/>
+                    <a:lstStyle/>
+                    <a:p>
+                      <a:pPr algn="ctr" fontAlgn="b">
+                        <a:buNone/>
+                      </a:pPr>
+                      <a:r>
+                        <a:rPr lang="it-IT" sz="2000" b="0" i="0" u="none" strike="noStrike" dirty="0">
+                          <a:solidFill>
+                            <a:srgbClr val="000000"/>
+                          </a:solidFill>
+                          <a:effectLst/>
+                          <a:latin typeface="Calibri" panose="020F0502020204030204" pitchFamily="34" charset="0"/>
+                        </a:rPr>
+                        <a:t>12</a:t>
+                      </a:r>
+                    </a:p>
+                  </a:txBody>
+                  <a:tcPr marL="9525" marR="9525" marT="9525" marB="0" anchor="ctr">
+                    <a:lnL w="12700" cap="flat" cmpd="sng" algn="ctr">
+                      <a:solidFill>
+                        <a:schemeClr val="tx1"/>
+                      </a:solidFill>
+                      <a:prstDash val="solid"/>
+                      <a:round/>
+                      <a:headEnd type="none" w="med" len="med"/>
+                      <a:tailEnd type="none" w="med" len="med"/>
+                    </a:lnL>
+                    <a:lnR w="12700" cap="flat" cmpd="sng" algn="ctr">
+                      <a:solidFill>
+                        <a:schemeClr val="tx1"/>
+                      </a:solidFill>
+                      <a:prstDash val="solid"/>
+                      <a:round/>
+                      <a:headEnd type="none" w="med" len="med"/>
+                      <a:tailEnd type="none" w="med" len="med"/>
+                    </a:lnR>
+                    <a:lnT w="12700" cap="flat" cmpd="sng" algn="ctr">
+                      <a:solidFill>
+                        <a:schemeClr val="tx1"/>
+                      </a:solidFill>
+                      <a:prstDash val="solid"/>
+                      <a:round/>
+                      <a:headEnd type="none" w="med" len="med"/>
+                      <a:tailEnd type="none" w="med" len="med"/>
+                    </a:lnT>
+                    <a:lnB w="12700" cap="flat" cmpd="sng" algn="ctr">
+                      <a:solidFill>
+                        <a:schemeClr val="tx1"/>
+                      </a:solidFill>
+                      <a:prstDash val="solid"/>
+                      <a:round/>
+                      <a:headEnd type="none" w="med" len="med"/>
+                      <a:tailEnd type="none" w="med" len="med"/>
+                    </a:lnB>
+                    <a:solidFill>
+                      <a:srgbClr val="FFFAEF"/>
+                    </a:solidFill>
+                  </a:tcPr>
+                </a:tc>
+                <a:tc>
+                  <a:txBody>
+                    <a:bodyPr/>
+                    <a:lstStyle/>
+                    <a:p>
+                      <a:pPr algn="ctr" fontAlgn="b">
+                        <a:buNone/>
+                      </a:pPr>
+                      <a:r>
+                        <a:rPr lang="it-IT" sz="2000" b="0" i="0" u="none" strike="noStrike" dirty="0">
+                          <a:solidFill>
+                            <a:srgbClr val="000000"/>
+                          </a:solidFill>
+                          <a:effectLst/>
+                          <a:latin typeface="Calibri" panose="020F0502020204030204" pitchFamily="34" charset="0"/>
+                        </a:rPr>
+                        <a:t>38</a:t>
                       </a:r>
                     </a:p>
                   </a:txBody>
@@ -8999,343 +8942,15 @@
                         <a:buNone/>
                       </a:pPr>
                       <a:r>
-                        <a:rPr lang="it-IT" sz="2000" u="none" strike="noStrike">
+                        <a:rPr lang="it-IT" sz="2000" b="0" i="0" u="none" strike="noStrike" dirty="0">
+                          <a:solidFill>
+                            <a:srgbClr val="000000"/>
+                          </a:solidFill>
                           <a:effectLst/>
+                          <a:latin typeface="Calibri" panose="020F0502020204030204" pitchFamily="34" charset="0"/>
                         </a:rPr>
                         <a:t>0</a:t>
                       </a:r>
-                      <a:endParaRPr lang="it-IT" sz="2000" b="0" i="0" u="none" strike="noStrike">
-                        <a:solidFill>
-                          <a:srgbClr val="000000"/>
-                        </a:solidFill>
-                        <a:effectLst/>
-                        <a:latin typeface="Calibri" panose="020F0502020204030204" pitchFamily="34" charset="0"/>
-                      </a:endParaRPr>
-                    </a:p>
-                  </a:txBody>
-                  <a:tcPr marL="9525" marR="9525" marT="9525" marB="0" anchor="ctr">
-                    <a:lnL w="12700" cap="flat" cmpd="sng" algn="ctr">
-                      <a:solidFill>
-                        <a:schemeClr val="tx1"/>
-                      </a:solidFill>
-                      <a:prstDash val="solid"/>
-                      <a:round/>
-                      <a:headEnd type="none" w="med" len="med"/>
-                      <a:tailEnd type="none" w="med" len="med"/>
-                    </a:lnL>
-                    <a:lnR w="12700" cap="flat" cmpd="sng" algn="ctr">
-                      <a:solidFill>
-                        <a:schemeClr val="tx1"/>
-                      </a:solidFill>
-                      <a:prstDash val="solid"/>
-                      <a:round/>
-                      <a:headEnd type="none" w="med" len="med"/>
-                      <a:tailEnd type="none" w="med" len="med"/>
-                    </a:lnR>
-                    <a:lnT w="12700" cap="flat" cmpd="sng" algn="ctr">
-                      <a:solidFill>
-                        <a:schemeClr val="tx1"/>
-                      </a:solidFill>
-                      <a:prstDash val="solid"/>
-                      <a:round/>
-                      <a:headEnd type="none" w="med" len="med"/>
-                      <a:tailEnd type="none" w="med" len="med"/>
-                    </a:lnT>
-                    <a:lnB w="12700" cap="flat" cmpd="sng" algn="ctr">
-                      <a:solidFill>
-                        <a:schemeClr val="tx1"/>
-                      </a:solidFill>
-                      <a:prstDash val="solid"/>
-                      <a:round/>
-                      <a:headEnd type="none" w="med" len="med"/>
-                      <a:tailEnd type="none" w="med" len="med"/>
-                    </a:lnB>
-                    <a:solidFill>
-                      <a:srgbClr val="FFFAEF"/>
-                    </a:solidFill>
-                  </a:tcPr>
-                </a:tc>
-                <a:tc>
-                  <a:txBody>
-                    <a:bodyPr/>
-                    <a:lstStyle/>
-                    <a:p>
-                      <a:pPr algn="ctr" fontAlgn="b">
-                        <a:buNone/>
-                      </a:pPr>
-                      <a:r>
-                        <a:rPr lang="it-IT" sz="2000" u="none" strike="noStrike">
-                          <a:effectLst/>
-                        </a:rPr>
-                        <a:t>0</a:t>
-                      </a:r>
-                      <a:endParaRPr lang="it-IT" sz="2000" b="0" i="0" u="none" strike="noStrike">
-                        <a:solidFill>
-                          <a:srgbClr val="000000"/>
-                        </a:solidFill>
-                        <a:effectLst/>
-                        <a:latin typeface="Calibri" panose="020F0502020204030204" pitchFamily="34" charset="0"/>
-                      </a:endParaRPr>
-                    </a:p>
-                  </a:txBody>
-                  <a:tcPr marL="9525" marR="9525" marT="9525" marB="0" anchor="ctr">
-                    <a:lnL w="12700" cap="flat" cmpd="sng" algn="ctr">
-                      <a:solidFill>
-                        <a:schemeClr val="tx1"/>
-                      </a:solidFill>
-                      <a:prstDash val="solid"/>
-                      <a:round/>
-                      <a:headEnd type="none" w="med" len="med"/>
-                      <a:tailEnd type="none" w="med" len="med"/>
-                    </a:lnL>
-                    <a:lnR w="12700" cap="flat" cmpd="sng" algn="ctr">
-                      <a:solidFill>
-                        <a:schemeClr val="tx1"/>
-                      </a:solidFill>
-                      <a:prstDash val="solid"/>
-                      <a:round/>
-                      <a:headEnd type="none" w="med" len="med"/>
-                      <a:tailEnd type="none" w="med" len="med"/>
-                    </a:lnR>
-                    <a:lnT w="12700" cap="flat" cmpd="sng" algn="ctr">
-                      <a:solidFill>
-                        <a:schemeClr val="tx1"/>
-                      </a:solidFill>
-                      <a:prstDash val="solid"/>
-                      <a:round/>
-                      <a:headEnd type="none" w="med" len="med"/>
-                      <a:tailEnd type="none" w="med" len="med"/>
-                    </a:lnT>
-                    <a:lnB w="12700" cap="flat" cmpd="sng" algn="ctr">
-                      <a:solidFill>
-                        <a:schemeClr val="tx1"/>
-                      </a:solidFill>
-                      <a:prstDash val="solid"/>
-                      <a:round/>
-                      <a:headEnd type="none" w="med" len="med"/>
-                      <a:tailEnd type="none" w="med" len="med"/>
-                    </a:lnB>
-                    <a:solidFill>
-                      <a:srgbClr val="FFFAEF"/>
-                    </a:solidFill>
-                  </a:tcPr>
-                </a:tc>
-                <a:tc>
-                  <a:txBody>
-                    <a:bodyPr/>
-                    <a:lstStyle/>
-                    <a:p>
-                      <a:pPr algn="ctr" fontAlgn="b">
-                        <a:buNone/>
-                      </a:pPr>
-                      <a:r>
-                        <a:rPr lang="it-IT" sz="2000" u="none" strike="noStrike" dirty="0">
-                          <a:effectLst/>
-                        </a:rPr>
-                        <a:t>6</a:t>
-                      </a:r>
-                      <a:endParaRPr lang="it-IT" sz="2000" b="0" i="0" u="none" strike="noStrike" dirty="0">
-                        <a:solidFill>
-                          <a:srgbClr val="000000"/>
-                        </a:solidFill>
-                        <a:effectLst/>
-                        <a:latin typeface="Calibri" panose="020F0502020204030204" pitchFamily="34" charset="0"/>
-                      </a:endParaRPr>
-                    </a:p>
-                  </a:txBody>
-                  <a:tcPr marL="9525" marR="9525" marT="9525" marB="0" anchor="ctr">
-                    <a:lnL w="12700" cap="flat" cmpd="sng" algn="ctr">
-                      <a:solidFill>
-                        <a:schemeClr val="tx1"/>
-                      </a:solidFill>
-                      <a:prstDash val="solid"/>
-                      <a:round/>
-                      <a:headEnd type="none" w="med" len="med"/>
-                      <a:tailEnd type="none" w="med" len="med"/>
-                    </a:lnL>
-                    <a:lnR w="12700" cap="flat" cmpd="sng" algn="ctr">
-                      <a:solidFill>
-                        <a:schemeClr val="tx1"/>
-                      </a:solidFill>
-                      <a:prstDash val="solid"/>
-                      <a:round/>
-                      <a:headEnd type="none" w="med" len="med"/>
-                      <a:tailEnd type="none" w="med" len="med"/>
-                    </a:lnR>
-                    <a:lnT w="12700" cap="flat" cmpd="sng" algn="ctr">
-                      <a:solidFill>
-                        <a:schemeClr val="tx1"/>
-                      </a:solidFill>
-                      <a:prstDash val="solid"/>
-                      <a:round/>
-                      <a:headEnd type="none" w="med" len="med"/>
-                      <a:tailEnd type="none" w="med" len="med"/>
-                    </a:lnT>
-                    <a:lnB w="12700" cap="flat" cmpd="sng" algn="ctr">
-                      <a:solidFill>
-                        <a:schemeClr val="tx1"/>
-                      </a:solidFill>
-                      <a:prstDash val="solid"/>
-                      <a:round/>
-                      <a:headEnd type="none" w="med" len="med"/>
-                      <a:tailEnd type="none" w="med" len="med"/>
-                    </a:lnB>
-                    <a:solidFill>
-                      <a:srgbClr val="FFFAEF"/>
-                    </a:solidFill>
-                  </a:tcPr>
-                </a:tc>
-                <a:tc>
-                  <a:txBody>
-                    <a:bodyPr/>
-                    <a:lstStyle/>
-                    <a:p>
-                      <a:pPr algn="ctr" fontAlgn="b">
-                        <a:buNone/>
-                      </a:pPr>
-                      <a:r>
-                        <a:rPr lang="it-IT" sz="2000" u="none" strike="noStrike" dirty="0">
-                          <a:effectLst/>
-                        </a:rPr>
-                        <a:t>16</a:t>
-                      </a:r>
-                      <a:endParaRPr lang="it-IT" sz="2000" b="0" i="0" u="none" strike="noStrike" dirty="0">
-                        <a:solidFill>
-                          <a:srgbClr val="000000"/>
-                        </a:solidFill>
-                        <a:effectLst/>
-                        <a:latin typeface="Calibri" panose="020F0502020204030204" pitchFamily="34" charset="0"/>
-                      </a:endParaRPr>
-                    </a:p>
-                  </a:txBody>
-                  <a:tcPr marL="9525" marR="9525" marT="9525" marB="0" anchor="ctr">
-                    <a:lnL w="12700" cap="flat" cmpd="sng" algn="ctr">
-                      <a:solidFill>
-                        <a:schemeClr val="tx1"/>
-                      </a:solidFill>
-                      <a:prstDash val="solid"/>
-                      <a:round/>
-                      <a:headEnd type="none" w="med" len="med"/>
-                      <a:tailEnd type="none" w="med" len="med"/>
-                    </a:lnL>
-                    <a:lnR w="12700" cap="flat" cmpd="sng" algn="ctr">
-                      <a:solidFill>
-                        <a:schemeClr val="tx1"/>
-                      </a:solidFill>
-                      <a:prstDash val="solid"/>
-                      <a:round/>
-                      <a:headEnd type="none" w="med" len="med"/>
-                      <a:tailEnd type="none" w="med" len="med"/>
-                    </a:lnR>
-                    <a:lnT w="12700" cap="flat" cmpd="sng" algn="ctr">
-                      <a:solidFill>
-                        <a:schemeClr val="tx1"/>
-                      </a:solidFill>
-                      <a:prstDash val="solid"/>
-                      <a:round/>
-                      <a:headEnd type="none" w="med" len="med"/>
-                      <a:tailEnd type="none" w="med" len="med"/>
-                    </a:lnT>
-                    <a:lnB w="12700" cap="flat" cmpd="sng" algn="ctr">
-                      <a:solidFill>
-                        <a:schemeClr val="tx1"/>
-                      </a:solidFill>
-                      <a:prstDash val="solid"/>
-                      <a:round/>
-                      <a:headEnd type="none" w="med" len="med"/>
-                      <a:tailEnd type="none" w="med" len="med"/>
-                    </a:lnB>
-                    <a:solidFill>
-                      <a:srgbClr val="FFFAEF"/>
-                    </a:solidFill>
-                  </a:tcPr>
-                </a:tc>
-                <a:tc>
-                  <a:txBody>
-                    <a:bodyPr/>
-                    <a:lstStyle/>
-                    <a:p>
-                      <a:pPr algn="ctr" fontAlgn="b">
-                        <a:buNone/>
-                      </a:pPr>
-                      <a:r>
-                        <a:rPr lang="it-IT" sz="2000" u="none" strike="noStrike" dirty="0">
-                          <a:effectLst/>
-                        </a:rPr>
-                        <a:t>0</a:t>
-                      </a:r>
-                      <a:endParaRPr lang="it-IT" sz="2000" b="0" i="0" u="none" strike="noStrike" dirty="0">
-                        <a:solidFill>
-                          <a:srgbClr val="000000"/>
-                        </a:solidFill>
-                        <a:effectLst/>
-                        <a:latin typeface="Calibri" panose="020F0502020204030204" pitchFamily="34" charset="0"/>
-                      </a:endParaRPr>
-                    </a:p>
-                  </a:txBody>
-                  <a:tcPr marL="9525" marR="9525" marT="9525" marB="0" anchor="ctr">
-                    <a:lnL w="12700" cap="flat" cmpd="sng" algn="ctr">
-                      <a:solidFill>
-                        <a:schemeClr val="tx1"/>
-                      </a:solidFill>
-                      <a:prstDash val="solid"/>
-                      <a:round/>
-                      <a:headEnd type="none" w="med" len="med"/>
-                      <a:tailEnd type="none" w="med" len="med"/>
-                    </a:lnL>
-                    <a:lnR w="12700" cap="flat" cmpd="sng" algn="ctr">
-                      <a:solidFill>
-                        <a:schemeClr val="tx1"/>
-                      </a:solidFill>
-                      <a:prstDash val="solid"/>
-                      <a:round/>
-                      <a:headEnd type="none" w="med" len="med"/>
-                      <a:tailEnd type="none" w="med" len="med"/>
-                    </a:lnR>
-                    <a:lnT w="12700" cap="flat" cmpd="sng" algn="ctr">
-                      <a:solidFill>
-                        <a:schemeClr val="tx1"/>
-                      </a:solidFill>
-                      <a:prstDash val="solid"/>
-                      <a:round/>
-                      <a:headEnd type="none" w="med" len="med"/>
-                      <a:tailEnd type="none" w="med" len="med"/>
-                    </a:lnT>
-                    <a:lnB w="12700" cap="flat" cmpd="sng" algn="ctr">
-                      <a:solidFill>
-                        <a:schemeClr val="tx1"/>
-                      </a:solidFill>
-                      <a:prstDash val="solid"/>
-                      <a:round/>
-                      <a:headEnd type="none" w="med" len="med"/>
-                      <a:tailEnd type="none" w="med" len="med"/>
-                    </a:lnB>
-                    <a:solidFill>
-                      <a:srgbClr val="FFFAEF"/>
-                    </a:solidFill>
-                  </a:tcPr>
-                </a:tc>
-                <a:tc>
-                  <a:txBody>
-                    <a:bodyPr/>
-                    <a:lstStyle/>
-                    <a:p>
-                      <a:pPr algn="ctr" fontAlgn="b">
-                        <a:buNone/>
-                      </a:pPr>
-                      <a:r>
-                        <a:rPr lang="it-IT" sz="2000" u="none" strike="noStrike" dirty="0">
-                          <a:effectLst/>
-                        </a:rPr>
-                        <a:t>16</a:t>
-                      </a:r>
-                      <a:endParaRPr lang="it-IT" sz="2000" b="0" i="0" u="none" strike="noStrike" dirty="0">
-                        <a:solidFill>
-                          <a:srgbClr val="000000"/>
-                        </a:solidFill>
-                        <a:effectLst/>
-                        <a:latin typeface="Calibri" panose="020F0502020204030204" pitchFamily="34" charset="0"/>
-                      </a:endParaRPr>
                     </a:p>
                   </a:txBody>
                   <a:tcPr marL="9525" marR="9525" marT="9525" marB="0" anchor="ctr">
@@ -9396,7 +9011,317 @@
                           <a:effectLst/>
                           <a:latin typeface="Calibri" panose="020F0502020204030204" pitchFamily="34" charset="0"/>
                         </a:rPr>
-                        <a:t>38</a:t>
+                        <a:t>4</a:t>
+                      </a:r>
+                    </a:p>
+                  </a:txBody>
+                  <a:tcPr marL="9525" marR="9525" marT="9525" marB="0" anchor="ctr">
+                    <a:lnL w="12700" cap="flat" cmpd="sng" algn="ctr">
+                      <a:solidFill>
+                        <a:schemeClr val="tx1"/>
+                      </a:solidFill>
+                      <a:prstDash val="solid"/>
+                      <a:round/>
+                      <a:headEnd type="none" w="med" len="med"/>
+                      <a:tailEnd type="none" w="med" len="med"/>
+                    </a:lnL>
+                    <a:lnR w="12700" cap="flat" cmpd="sng" algn="ctr">
+                      <a:solidFill>
+                        <a:schemeClr val="tx1"/>
+                      </a:solidFill>
+                      <a:prstDash val="solid"/>
+                      <a:round/>
+                      <a:headEnd type="none" w="med" len="med"/>
+                      <a:tailEnd type="none" w="med" len="med"/>
+                    </a:lnR>
+                    <a:lnT w="12700" cap="flat" cmpd="sng" algn="ctr">
+                      <a:solidFill>
+                        <a:schemeClr val="tx1"/>
+                      </a:solidFill>
+                      <a:prstDash val="solid"/>
+                      <a:round/>
+                      <a:headEnd type="none" w="med" len="med"/>
+                      <a:tailEnd type="none" w="med" len="med"/>
+                    </a:lnT>
+                    <a:lnB w="12700" cap="flat" cmpd="sng" algn="ctr">
+                      <a:solidFill>
+                        <a:schemeClr val="tx1"/>
+                      </a:solidFill>
+                      <a:prstDash val="solid"/>
+                      <a:round/>
+                      <a:headEnd type="none" w="med" len="med"/>
+                      <a:tailEnd type="none" w="med" len="med"/>
+                    </a:lnB>
+                    <a:solidFill>
+                      <a:srgbClr val="FFFAEF"/>
+                    </a:solidFill>
+                  </a:tcPr>
+                </a:tc>
+                <a:tc>
+                  <a:txBody>
+                    <a:bodyPr/>
+                    <a:lstStyle/>
+                    <a:p>
+                      <a:pPr algn="ctr" fontAlgn="b">
+                        <a:buNone/>
+                      </a:pPr>
+                      <a:r>
+                        <a:rPr lang="it-IT" sz="2000" b="0" i="0" u="none" strike="noStrike" dirty="0">
+                          <a:solidFill>
+                            <a:srgbClr val="000000"/>
+                          </a:solidFill>
+                          <a:effectLst/>
+                          <a:latin typeface="Calibri" panose="020F0502020204030204" pitchFamily="34" charset="0"/>
+                        </a:rPr>
+                        <a:t>8</a:t>
+                      </a:r>
+                    </a:p>
+                  </a:txBody>
+                  <a:tcPr marL="9525" marR="9525" marT="9525" marB="0" anchor="ctr">
+                    <a:lnL w="12700" cap="flat" cmpd="sng" algn="ctr">
+                      <a:solidFill>
+                        <a:schemeClr val="tx1"/>
+                      </a:solidFill>
+                      <a:prstDash val="solid"/>
+                      <a:round/>
+                      <a:headEnd type="none" w="med" len="med"/>
+                      <a:tailEnd type="none" w="med" len="med"/>
+                    </a:lnL>
+                    <a:lnR w="12700" cap="flat" cmpd="sng" algn="ctr">
+                      <a:solidFill>
+                        <a:schemeClr val="tx1"/>
+                      </a:solidFill>
+                      <a:prstDash val="solid"/>
+                      <a:round/>
+                      <a:headEnd type="none" w="med" len="med"/>
+                      <a:tailEnd type="none" w="med" len="med"/>
+                    </a:lnR>
+                    <a:lnT w="12700" cap="flat" cmpd="sng" algn="ctr">
+                      <a:solidFill>
+                        <a:schemeClr val="tx1"/>
+                      </a:solidFill>
+                      <a:prstDash val="solid"/>
+                      <a:round/>
+                      <a:headEnd type="none" w="med" len="med"/>
+                      <a:tailEnd type="none" w="med" len="med"/>
+                    </a:lnT>
+                    <a:lnB w="12700" cap="flat" cmpd="sng" algn="ctr">
+                      <a:solidFill>
+                        <a:schemeClr val="tx1"/>
+                      </a:solidFill>
+                      <a:prstDash val="solid"/>
+                      <a:round/>
+                      <a:headEnd type="none" w="med" len="med"/>
+                      <a:tailEnd type="none" w="med" len="med"/>
+                    </a:lnB>
+                    <a:solidFill>
+                      <a:srgbClr val="FFFAEF"/>
+                    </a:solidFill>
+                  </a:tcPr>
+                </a:tc>
+                <a:tc>
+                  <a:txBody>
+                    <a:bodyPr/>
+                    <a:lstStyle/>
+                    <a:p>
+                      <a:pPr algn="ctr" fontAlgn="b">
+                        <a:buNone/>
+                      </a:pPr>
+                      <a:r>
+                        <a:rPr lang="it-IT" sz="2000" b="0" i="0" u="none" strike="noStrike" dirty="0">
+                          <a:solidFill>
+                            <a:srgbClr val="000000"/>
+                          </a:solidFill>
+                          <a:effectLst/>
+                          <a:latin typeface="Calibri" panose="020F0502020204030204" pitchFamily="34" charset="0"/>
+                        </a:rPr>
+                        <a:t>0</a:t>
+                      </a:r>
+                    </a:p>
+                  </a:txBody>
+                  <a:tcPr marL="9525" marR="9525" marT="9525" marB="0" anchor="ctr">
+                    <a:lnL w="12700" cap="flat" cmpd="sng" algn="ctr">
+                      <a:solidFill>
+                        <a:schemeClr val="tx1"/>
+                      </a:solidFill>
+                      <a:prstDash val="solid"/>
+                      <a:round/>
+                      <a:headEnd type="none" w="med" len="med"/>
+                      <a:tailEnd type="none" w="med" len="med"/>
+                    </a:lnL>
+                    <a:lnR w="12700" cap="flat" cmpd="sng" algn="ctr">
+                      <a:solidFill>
+                        <a:schemeClr val="tx1"/>
+                      </a:solidFill>
+                      <a:prstDash val="solid"/>
+                      <a:round/>
+                      <a:headEnd type="none" w="med" len="med"/>
+                      <a:tailEnd type="none" w="med" len="med"/>
+                    </a:lnR>
+                    <a:lnT w="12700" cap="flat" cmpd="sng" algn="ctr">
+                      <a:solidFill>
+                        <a:schemeClr val="tx1"/>
+                      </a:solidFill>
+                      <a:prstDash val="solid"/>
+                      <a:round/>
+                      <a:headEnd type="none" w="med" len="med"/>
+                      <a:tailEnd type="none" w="med" len="med"/>
+                    </a:lnT>
+                    <a:lnB w="12700" cap="flat" cmpd="sng" algn="ctr">
+                      <a:solidFill>
+                        <a:schemeClr val="tx1"/>
+                      </a:solidFill>
+                      <a:prstDash val="solid"/>
+                      <a:round/>
+                      <a:headEnd type="none" w="med" len="med"/>
+                      <a:tailEnd type="none" w="med" len="med"/>
+                    </a:lnB>
+                    <a:solidFill>
+                      <a:srgbClr val="FFFAEF"/>
+                    </a:solidFill>
+                  </a:tcPr>
+                </a:tc>
+                <a:tc>
+                  <a:txBody>
+                    <a:bodyPr/>
+                    <a:lstStyle/>
+                    <a:p>
+                      <a:pPr algn="ctr" fontAlgn="b">
+                        <a:buNone/>
+                      </a:pPr>
+                      <a:r>
+                        <a:rPr lang="it-IT" sz="2000" b="0" i="0" u="none" strike="noStrike" dirty="0">
+                          <a:solidFill>
+                            <a:srgbClr val="000000"/>
+                          </a:solidFill>
+                          <a:effectLst/>
+                          <a:latin typeface="Calibri" panose="020F0502020204030204" pitchFamily="34" charset="0"/>
+                        </a:rPr>
+                        <a:t>6</a:t>
+                      </a:r>
+                    </a:p>
+                  </a:txBody>
+                  <a:tcPr marL="9525" marR="9525" marT="9525" marB="0" anchor="ctr">
+                    <a:lnL w="12700" cap="flat" cmpd="sng" algn="ctr">
+                      <a:solidFill>
+                        <a:schemeClr val="tx1"/>
+                      </a:solidFill>
+                      <a:prstDash val="solid"/>
+                      <a:round/>
+                      <a:headEnd type="none" w="med" len="med"/>
+                      <a:tailEnd type="none" w="med" len="med"/>
+                    </a:lnL>
+                    <a:lnR w="12700" cap="flat" cmpd="sng" algn="ctr">
+                      <a:solidFill>
+                        <a:schemeClr val="tx1"/>
+                      </a:solidFill>
+                      <a:prstDash val="solid"/>
+                      <a:round/>
+                      <a:headEnd type="none" w="med" len="med"/>
+                      <a:tailEnd type="none" w="med" len="med"/>
+                    </a:lnR>
+                    <a:lnT w="12700" cap="flat" cmpd="sng" algn="ctr">
+                      <a:solidFill>
+                        <a:schemeClr val="tx1"/>
+                      </a:solidFill>
+                      <a:prstDash val="solid"/>
+                      <a:round/>
+                      <a:headEnd type="none" w="med" len="med"/>
+                      <a:tailEnd type="none" w="med" len="med"/>
+                    </a:lnT>
+                    <a:lnB w="12700" cap="flat" cmpd="sng" algn="ctr">
+                      <a:solidFill>
+                        <a:schemeClr val="tx1"/>
+                      </a:solidFill>
+                      <a:prstDash val="solid"/>
+                      <a:round/>
+                      <a:headEnd type="none" w="med" len="med"/>
+                      <a:tailEnd type="none" w="med" len="med"/>
+                    </a:lnB>
+                    <a:solidFill>
+                      <a:srgbClr val="FFFAEF"/>
+                    </a:solidFill>
+                  </a:tcPr>
+                </a:tc>
+                <a:tc>
+                  <a:txBody>
+                    <a:bodyPr/>
+                    <a:lstStyle/>
+                    <a:p>
+                      <a:pPr algn="ctr" fontAlgn="b">
+                        <a:buNone/>
+                      </a:pPr>
+                      <a:r>
+                        <a:rPr lang="it-IT" sz="2000" b="0" i="0" u="none" strike="noStrike" dirty="0">
+                          <a:solidFill>
+                            <a:srgbClr val="000000"/>
+                          </a:solidFill>
+                          <a:effectLst/>
+                          <a:latin typeface="Calibri" panose="020F0502020204030204" pitchFamily="34" charset="0"/>
+                        </a:rPr>
+                        <a:t>23</a:t>
+                      </a:r>
+                    </a:p>
+                  </a:txBody>
+                  <a:tcPr marL="9525" marR="9525" marT="9525" marB="0" anchor="ctr">
+                    <a:lnL w="12700" cap="flat" cmpd="sng" algn="ctr">
+                      <a:solidFill>
+                        <a:schemeClr val="tx1"/>
+                      </a:solidFill>
+                      <a:prstDash val="solid"/>
+                      <a:round/>
+                      <a:headEnd type="none" w="med" len="med"/>
+                      <a:tailEnd type="none" w="med" len="med"/>
+                    </a:lnL>
+                    <a:lnR w="12700" cap="flat" cmpd="sng" algn="ctr">
+                      <a:solidFill>
+                        <a:schemeClr val="tx1"/>
+                      </a:solidFill>
+                      <a:prstDash val="solid"/>
+                      <a:round/>
+                      <a:headEnd type="none" w="med" len="med"/>
+                      <a:tailEnd type="none" w="med" len="med"/>
+                    </a:lnR>
+                    <a:lnT w="12700" cap="flat" cmpd="sng" algn="ctr">
+                      <a:solidFill>
+                        <a:schemeClr val="tx1"/>
+                      </a:solidFill>
+                      <a:prstDash val="solid"/>
+                      <a:round/>
+                      <a:headEnd type="none" w="med" len="med"/>
+                      <a:tailEnd type="none" w="med" len="med"/>
+                    </a:lnT>
+                    <a:lnB w="12700" cap="flat" cmpd="sng" algn="ctr">
+                      <a:solidFill>
+                        <a:schemeClr val="tx1"/>
+                      </a:solidFill>
+                      <a:prstDash val="solid"/>
+                      <a:round/>
+                      <a:headEnd type="none" w="med" len="med"/>
+                      <a:tailEnd type="none" w="med" len="med"/>
+                    </a:lnB>
+                    <a:solidFill>
+                      <a:srgbClr val="FFFAEF"/>
+                    </a:solidFill>
+                  </a:tcPr>
+                </a:tc>
+                <a:tc>
+                  <a:txBody>
+                    <a:bodyPr/>
+                    <a:lstStyle/>
+                    <a:p>
+                      <a:pPr algn="ctr" fontAlgn="b">
+                        <a:buNone/>
+                      </a:pPr>
+                      <a:r>
+                        <a:rPr lang="it-IT" sz="2000" b="0" i="0" u="none" strike="noStrike" dirty="0">
+                          <a:solidFill>
+                            <a:srgbClr val="000000"/>
+                          </a:solidFill>
+                          <a:effectLst/>
+                          <a:latin typeface="Calibri" panose="020F0502020204030204" pitchFamily="34" charset="0"/>
+                        </a:rPr>
+                        <a:t>41</a:t>
                       </a:r>
                     </a:p>
                   </a:txBody>
@@ -9530,7 +9455,7 @@
                           <a:effectLst/>
                           <a:latin typeface="Calibri" panose="020F0502020204030204" pitchFamily="34" charset="0"/>
                         </a:rPr>
-                        <a:t>21</a:t>
+                        <a:t>36</a:t>
                       </a:r>
                     </a:p>
                   </a:txBody>
@@ -9592,7 +9517,7 @@
                           <a:effectLst/>
                           <a:latin typeface="Calibri" panose="020F0502020204030204" pitchFamily="34" charset="0"/>
                         </a:rPr>
-                        <a:t>24</a:t>
+                        <a:t>35</a:t>
                       </a:r>
                     </a:p>
                   </a:txBody>
@@ -9654,7 +9579,7 @@
                           <a:effectLst/>
                           <a:latin typeface="Calibri" panose="020F0502020204030204" pitchFamily="34" charset="0"/>
                         </a:rPr>
-                        <a:t>48</a:t>
+                        <a:t>56</a:t>
                       </a:r>
                     </a:p>
                   </a:txBody>
@@ -9716,67 +9641,8 @@
                           <a:effectLst/>
                           <a:latin typeface="Calibri" panose="020F0502020204030204" pitchFamily="34" charset="0"/>
                         </a:rPr>
-                        <a:t>95</a:t>
+                        <a:t>0</a:t>
                       </a:r>
-                    </a:p>
-                  </a:txBody>
-                  <a:tcPr marL="9525" marR="9525" marT="9525" marB="0" anchor="ctr">
-                    <a:lnL w="12700" cap="flat" cmpd="sng" algn="ctr">
-                      <a:solidFill>
-                        <a:schemeClr val="tx1"/>
-                      </a:solidFill>
-                      <a:prstDash val="solid"/>
-                      <a:round/>
-                      <a:headEnd type="none" w="med" len="med"/>
-                      <a:tailEnd type="none" w="med" len="med"/>
-                    </a:lnL>
-                    <a:lnR w="12700" cap="flat" cmpd="sng" algn="ctr">
-                      <a:solidFill>
-                        <a:schemeClr val="tx1"/>
-                      </a:solidFill>
-                      <a:prstDash val="solid"/>
-                      <a:round/>
-                      <a:headEnd type="none" w="med" len="med"/>
-                      <a:tailEnd type="none" w="med" len="med"/>
-                    </a:lnR>
-                    <a:lnT w="12700" cap="flat" cmpd="sng" algn="ctr">
-                      <a:solidFill>
-                        <a:schemeClr val="tx1"/>
-                      </a:solidFill>
-                      <a:prstDash val="solid"/>
-                      <a:round/>
-                      <a:headEnd type="none" w="med" len="med"/>
-                      <a:tailEnd type="none" w="med" len="med"/>
-                    </a:lnT>
-                    <a:lnB w="12700" cap="flat" cmpd="sng" algn="ctr">
-                      <a:solidFill>
-                        <a:schemeClr val="tx1"/>
-                      </a:solidFill>
-                      <a:prstDash val="solid"/>
-                      <a:round/>
-                      <a:headEnd type="none" w="med" len="med"/>
-                      <a:tailEnd type="none" w="med" len="med"/>
-                    </a:lnB>
-                    <a:solidFill>
-                      <a:srgbClr val="FFFAEF"/>
-                    </a:solidFill>
-                  </a:tcPr>
-                </a:tc>
-                <a:tc>
-                  <a:txBody>
-                    <a:bodyPr/>
-                    <a:lstStyle/>
-                    <a:p>
-                      <a:pPr algn="ctr" fontAlgn="b">
-                        <a:buNone/>
-                      </a:pPr>
-                      <a:endParaRPr lang="it-IT" sz="2000" b="0" i="0" u="none" strike="noStrike" dirty="0">
-                        <a:solidFill>
-                          <a:srgbClr val="000000"/>
-                        </a:solidFill>
-                        <a:effectLst/>
-                        <a:latin typeface="Calibri" panose="020F0502020204030204" pitchFamily="34" charset="0"/>
-                      </a:endParaRPr>
                     </a:p>
                   </a:txBody>
                   <a:tcPr marL="9525" marR="9525" marT="9525" marB="0" anchor="ctr">
@@ -9837,7 +9703,69 @@
                           <a:effectLst/>
                           <a:latin typeface="Calibri" panose="020F0502020204030204" pitchFamily="34" charset="0"/>
                         </a:rPr>
-                        <a:t>51</a:t>
+                        <a:t>60</a:t>
+                      </a:r>
+                    </a:p>
+                  </a:txBody>
+                  <a:tcPr marL="9525" marR="9525" marT="9525" marB="0" anchor="ctr">
+                    <a:lnL w="12700" cap="flat" cmpd="sng" algn="ctr">
+                      <a:solidFill>
+                        <a:schemeClr val="tx1"/>
+                      </a:solidFill>
+                      <a:prstDash val="solid"/>
+                      <a:round/>
+                      <a:headEnd type="none" w="med" len="med"/>
+                      <a:tailEnd type="none" w="med" len="med"/>
+                    </a:lnL>
+                    <a:lnR w="12700" cap="flat" cmpd="sng" algn="ctr">
+                      <a:solidFill>
+                        <a:schemeClr val="tx1"/>
+                      </a:solidFill>
+                      <a:prstDash val="solid"/>
+                      <a:round/>
+                      <a:headEnd type="none" w="med" len="med"/>
+                      <a:tailEnd type="none" w="med" len="med"/>
+                    </a:lnR>
+                    <a:lnT w="12700" cap="flat" cmpd="sng" algn="ctr">
+                      <a:solidFill>
+                        <a:schemeClr val="tx1"/>
+                      </a:solidFill>
+                      <a:prstDash val="solid"/>
+                      <a:round/>
+                      <a:headEnd type="none" w="med" len="med"/>
+                      <a:tailEnd type="none" w="med" len="med"/>
+                    </a:lnT>
+                    <a:lnB w="12700" cap="flat" cmpd="sng" algn="ctr">
+                      <a:solidFill>
+                        <a:schemeClr val="tx1"/>
+                      </a:solidFill>
+                      <a:prstDash val="solid"/>
+                      <a:round/>
+                      <a:headEnd type="none" w="med" len="med"/>
+                      <a:tailEnd type="none" w="med" len="med"/>
+                    </a:lnB>
+                    <a:solidFill>
+                      <a:srgbClr val="FFFAEF"/>
+                    </a:solidFill>
+                  </a:tcPr>
+                </a:tc>
+                <a:tc>
+                  <a:txBody>
+                    <a:bodyPr/>
+                    <a:lstStyle/>
+                    <a:p>
+                      <a:pPr algn="ctr" fontAlgn="b">
+                        <a:buNone/>
+                      </a:pPr>
+                      <a:r>
+                        <a:rPr lang="it-IT" sz="2000" b="0" i="0" u="none" strike="noStrike" dirty="0">
+                          <a:solidFill>
+                            <a:srgbClr val="000000"/>
+                          </a:solidFill>
+                          <a:effectLst/>
+                          <a:latin typeface="Calibri" panose="020F0502020204030204" pitchFamily="34" charset="0"/>
+                        </a:rPr>
+                        <a:t>105</a:t>
                       </a:r>
                     </a:p>
                   </a:txBody>
@@ -9899,7 +9827,7 @@
                           <a:effectLst/>
                           <a:latin typeface="Calibri" panose="020F0502020204030204" pitchFamily="34" charset="0"/>
                         </a:rPr>
-                        <a:t>239</a:t>
+                        <a:t>292</a:t>
                       </a:r>
                       <a:endParaRPr lang="it-IT" sz="2000" b="0" i="0" u="none" strike="noStrike" dirty="0">
                         <a:solidFill>
@@ -13867,14 +13795,14 @@
           <p:nvPr>
             <p:extLst>
               <p:ext uri="{D42A27DB-BD31-4B8C-83A1-F6EECF244321}">
-                <p14:modId xmlns:p14="http://schemas.microsoft.com/office/powerpoint/2010/main" val="1815606153"/>
+                <p14:modId xmlns:p14="http://schemas.microsoft.com/office/powerpoint/2010/main" val="3401584854"/>
               </p:ext>
             </p:extLst>
           </p:nvPr>
         </p:nvGraphicFramePr>
         <p:xfrm>
-          <a:off x="4495800" y="2400300"/>
-          <a:ext cx="9525000" cy="3081778"/>
+          <a:off x="4491110" y="2277584"/>
+          <a:ext cx="9525000" cy="3522032"/>
         </p:xfrm>
         <a:graphic>
           <a:graphicData uri="http://schemas.openxmlformats.org/drawingml/2006/table">
@@ -14250,7 +14178,7 @@
                         <a:rPr lang="it-IT" sz="2800" u="none" strike="noStrike" dirty="0">
                           <a:effectLst/>
                         </a:rPr>
-                        <a:t>1095€</a:t>
+                        <a:t>1125€</a:t>
                       </a:r>
                       <a:endParaRPr lang="it-IT" sz="2800" b="0" i="0" u="none" strike="noStrike" dirty="0">
                         <a:solidFill>
@@ -14452,7 +14380,7 @@
                         <a:rPr lang="it-IT" sz="2800" u="none" strike="noStrike" dirty="0">
                           <a:effectLst/>
                         </a:rPr>
-                        <a:t>1000€</a:t>
+                        <a:t>990€</a:t>
                       </a:r>
                       <a:endParaRPr lang="it-IT" sz="2800" b="0" i="0" u="none" strike="noStrike" dirty="0">
                         <a:solidFill>
@@ -14654,7 +14582,7 @@
                         <a:rPr lang="it-IT" sz="2800" u="none" strike="noStrike" dirty="0">
                           <a:effectLst/>
                         </a:rPr>
-                        <a:t>1065€</a:t>
+                        <a:t>910€</a:t>
                       </a:r>
                       <a:endParaRPr lang="it-IT" sz="2800" b="0" i="0" u="none" strike="noStrike" dirty="0">
                         <a:solidFill>
@@ -14856,7 +14784,7 @@
                         <a:rPr lang="it-IT" sz="2800" u="none" strike="noStrike" dirty="0">
                           <a:effectLst/>
                         </a:rPr>
-                        <a:t>1045€</a:t>
+                        <a:t>905€</a:t>
                       </a:r>
                       <a:endParaRPr lang="it-IT" sz="2800" b="0" i="0" u="none" strike="noStrike" dirty="0">
                         <a:solidFill>
@@ -15100,7 +15028,7 @@
                         <a:rPr lang="it-IT" sz="2800" u="none" strike="noStrike" dirty="0">
                           <a:effectLst/>
                         </a:rPr>
-                        <a:t>1245€</a:t>
+                        <a:t>790€</a:t>
                       </a:r>
                       <a:endParaRPr lang="it-IT" sz="2800" b="0" i="0" u="none" strike="noStrike" dirty="0">
                         <a:solidFill>
@@ -15165,16 +15093,260 @@
                     <a:bodyPr/>
                     <a:lstStyle/>
                     <a:p>
+                      <a:pPr marL="0" marR="0" lvl="0" indent="0" algn="ctr" defTabSz="914400" rtl="0" eaLnBrk="1" fontAlgn="b" latinLnBrk="0" hangingPunct="1">
+                        <a:lnSpc>
+                          <a:spcPct val="100000"/>
+                        </a:lnSpc>
+                        <a:spcBef>
+                          <a:spcPts val="0"/>
+                        </a:spcBef>
+                        <a:spcAft>
+                          <a:spcPts val="0"/>
+                        </a:spcAft>
+                        <a:buClrTx/>
+                        <a:buSzTx/>
+                        <a:buFontTx/>
+                        <a:buNone/>
+                        <a:tabLst/>
+                        <a:defRPr/>
+                      </a:pPr>
+                      <a:r>
+                        <a:rPr lang="it-IT" sz="2800" b="1" u="none" strike="noStrike" dirty="0">
+                          <a:effectLst/>
+                        </a:rPr>
+                        <a:t>Sprint 6</a:t>
+                      </a:r>
+                      <a:endParaRPr lang="it-IT" sz="2800" b="1" i="0" u="none" strike="noStrike" dirty="0">
+                        <a:solidFill>
+                          <a:srgbClr val="000000"/>
+                        </a:solidFill>
+                        <a:effectLst/>
+                        <a:latin typeface="Arial" panose="020B0604020202020204" pitchFamily="34" charset="0"/>
+                      </a:endParaRPr>
+                    </a:p>
+                  </a:txBody>
+                  <a:tcPr marL="9525" marR="9525" marT="9525" marB="0" anchor="b">
+                    <a:lnL w="12700" cap="flat" cmpd="sng" algn="ctr">
+                      <a:solidFill>
+                        <a:schemeClr val="tx1"/>
+                      </a:solidFill>
+                      <a:prstDash val="solid"/>
+                      <a:round/>
+                      <a:headEnd type="none" w="med" len="med"/>
+                      <a:tailEnd type="none" w="med" len="med"/>
+                    </a:lnL>
+                    <a:lnR w="12700" cap="flat" cmpd="sng" algn="ctr">
+                      <a:solidFill>
+                        <a:schemeClr val="tx1"/>
+                      </a:solidFill>
+                      <a:prstDash val="solid"/>
+                      <a:round/>
+                      <a:headEnd type="none" w="med" len="med"/>
+                      <a:tailEnd type="none" w="med" len="med"/>
+                    </a:lnR>
+                    <a:lnT w="12700" cap="flat" cmpd="sng" algn="ctr">
+                      <a:solidFill>
+                        <a:schemeClr val="tx1"/>
+                      </a:solidFill>
+                      <a:prstDash val="solid"/>
+                      <a:round/>
+                      <a:headEnd type="none" w="med" len="med"/>
+                      <a:tailEnd type="none" w="med" len="med"/>
+                    </a:lnT>
+                    <a:lnB w="12700" cap="flat" cmpd="sng" algn="ctr">
+                      <a:solidFill>
+                        <a:schemeClr val="tx1"/>
+                      </a:solidFill>
+                      <a:prstDash val="solid"/>
+                      <a:round/>
+                      <a:headEnd type="none" w="med" len="med"/>
+                      <a:tailEnd type="none" w="med" len="med"/>
+                    </a:lnB>
+                    <a:solidFill>
+                      <a:srgbClr val="FFFAEF"/>
+                    </a:solidFill>
+                  </a:tcPr>
+                </a:tc>
+                <a:tc>
+                  <a:txBody>
+                    <a:bodyPr/>
+                    <a:lstStyle/>
+                    <a:p>
+                      <a:pPr marL="0" marR="0" lvl="0" indent="0" algn="ctr" defTabSz="914400" rtl="0" eaLnBrk="1" fontAlgn="b" latinLnBrk="0" hangingPunct="1">
+                        <a:lnSpc>
+                          <a:spcPct val="100000"/>
+                        </a:lnSpc>
+                        <a:spcBef>
+                          <a:spcPts val="0"/>
+                        </a:spcBef>
+                        <a:spcAft>
+                          <a:spcPts val="0"/>
+                        </a:spcAft>
+                        <a:buClrTx/>
+                        <a:buSzTx/>
+                        <a:buFontTx/>
+                        <a:buNone/>
+                        <a:tabLst/>
+                        <a:defRPr/>
+                      </a:pPr>
+                      <a:r>
+                        <a:rPr lang="it-IT" sz="2800" u="none" strike="noStrike" dirty="0">
+                          <a:effectLst/>
+                        </a:rPr>
+                        <a:t>53h</a:t>
+                      </a:r>
+                      <a:endParaRPr lang="it-IT" sz="2800" b="0" i="0" u="none" strike="noStrike" dirty="0">
+                        <a:solidFill>
+                          <a:srgbClr val="000000"/>
+                        </a:solidFill>
+                        <a:effectLst/>
+                        <a:latin typeface="Arial" panose="020B0604020202020204" pitchFamily="34" charset="0"/>
+                      </a:endParaRPr>
+                    </a:p>
+                  </a:txBody>
+                  <a:tcPr marL="9525" marR="9525" marT="9525" marB="0" anchor="b">
+                    <a:lnL w="12700" cap="flat" cmpd="sng" algn="ctr">
+                      <a:solidFill>
+                        <a:schemeClr val="tx1"/>
+                      </a:solidFill>
+                      <a:prstDash val="solid"/>
+                      <a:round/>
+                      <a:headEnd type="none" w="med" len="med"/>
+                      <a:tailEnd type="none" w="med" len="med"/>
+                    </a:lnL>
+                    <a:lnR w="12700" cap="flat" cmpd="sng" algn="ctr">
+                      <a:solidFill>
+                        <a:schemeClr val="tx1"/>
+                      </a:solidFill>
+                      <a:prstDash val="solid"/>
+                      <a:round/>
+                      <a:headEnd type="none" w="med" len="med"/>
+                      <a:tailEnd type="none" w="med" len="med"/>
+                    </a:lnR>
+                    <a:lnT w="12700" cap="flat" cmpd="sng" algn="ctr">
+                      <a:solidFill>
+                        <a:schemeClr val="tx1"/>
+                      </a:solidFill>
+                      <a:prstDash val="solid"/>
+                      <a:round/>
+                      <a:headEnd type="none" w="med" len="med"/>
+                      <a:tailEnd type="none" w="med" len="med"/>
+                    </a:lnT>
+                    <a:lnB w="12700" cap="flat" cmpd="sng" algn="ctr">
+                      <a:solidFill>
+                        <a:schemeClr val="tx1"/>
+                      </a:solidFill>
+                      <a:prstDash val="solid"/>
+                      <a:round/>
+                      <a:headEnd type="none" w="med" len="med"/>
+                      <a:tailEnd type="none" w="med" len="med"/>
+                    </a:lnB>
+                    <a:solidFill>
+                      <a:srgbClr val="FFFAEF"/>
+                    </a:solidFill>
+                  </a:tcPr>
+                </a:tc>
+                <a:tc>
+                  <a:txBody>
+                    <a:bodyPr/>
+                    <a:lstStyle/>
+                    <a:p>
+                      <a:pPr marL="0" marR="0" lvl="0" indent="0" algn="ctr" defTabSz="914400" rtl="0" eaLnBrk="1" fontAlgn="b" latinLnBrk="0" hangingPunct="1">
+                        <a:lnSpc>
+                          <a:spcPct val="100000"/>
+                        </a:lnSpc>
+                        <a:spcBef>
+                          <a:spcPts val="0"/>
+                        </a:spcBef>
+                        <a:spcAft>
+                          <a:spcPts val="0"/>
+                        </a:spcAft>
+                        <a:buClrTx/>
+                        <a:buSzTx/>
+                        <a:buFontTx/>
+                        <a:buNone/>
+                        <a:tabLst/>
+                        <a:defRPr/>
+                      </a:pPr>
+                      <a:r>
+                        <a:rPr lang="it-IT" sz="2800" u="none" strike="noStrike" dirty="0">
+                          <a:effectLst/>
+                        </a:rPr>
+                        <a:t>935€</a:t>
+                      </a:r>
+                      <a:endParaRPr lang="it-IT" sz="2800" b="0" i="0" u="none" strike="noStrike" dirty="0">
+                        <a:solidFill>
+                          <a:srgbClr val="000000"/>
+                        </a:solidFill>
+                        <a:effectLst/>
+                        <a:latin typeface="Arial" panose="020B0604020202020204" pitchFamily="34" charset="0"/>
+                      </a:endParaRPr>
+                    </a:p>
+                  </a:txBody>
+                  <a:tcPr marL="9525" marR="9525" marT="9525" marB="0" anchor="b">
+                    <a:lnL w="12700" cap="flat" cmpd="sng" algn="ctr">
+                      <a:solidFill>
+                        <a:schemeClr val="tx1"/>
+                      </a:solidFill>
+                      <a:prstDash val="solid"/>
+                      <a:round/>
+                      <a:headEnd type="none" w="med" len="med"/>
+                      <a:tailEnd type="none" w="med" len="med"/>
+                    </a:lnL>
+                    <a:lnR w="12700" cap="flat" cmpd="sng" algn="ctr">
+                      <a:solidFill>
+                        <a:schemeClr val="tx1"/>
+                      </a:solidFill>
+                      <a:prstDash val="solid"/>
+                      <a:round/>
+                      <a:headEnd type="none" w="med" len="med"/>
+                      <a:tailEnd type="none" w="med" len="med"/>
+                    </a:lnR>
+                    <a:lnT w="12700" cap="flat" cmpd="sng" algn="ctr">
+                      <a:solidFill>
+                        <a:schemeClr val="tx1"/>
+                      </a:solidFill>
+                      <a:prstDash val="solid"/>
+                      <a:round/>
+                      <a:headEnd type="none" w="med" len="med"/>
+                      <a:tailEnd type="none" w="med" len="med"/>
+                    </a:lnT>
+                    <a:lnB w="12700" cap="flat" cmpd="sng" algn="ctr">
+                      <a:solidFill>
+                        <a:schemeClr val="tx1"/>
+                      </a:solidFill>
+                      <a:prstDash val="solid"/>
+                      <a:round/>
+                      <a:headEnd type="none" w="med" len="med"/>
+                      <a:tailEnd type="none" w="med" len="med"/>
+                    </a:lnB>
+                    <a:solidFill>
+                      <a:srgbClr val="FFFAEF"/>
+                    </a:solidFill>
+                  </a:tcPr>
+                </a:tc>
+                <a:extLst>
+                  <a:ext uri="{0D108BD9-81ED-4DB2-BD59-A6C34878D82A}">
+                    <a16:rowId xmlns:a16="http://schemas.microsoft.com/office/drawing/2014/main" val="3141241163"/>
+                  </a:ext>
+                </a:extLst>
+              </a:tr>
+              <a:tr h="440254">
+                <a:tc>
+                  <a:txBody>
+                    <a:bodyPr/>
+                    <a:lstStyle/>
+                    <a:p>
                       <a:pPr algn="ctr" fontAlgn="b">
                         <a:buNone/>
                       </a:pPr>
                       <a:r>
-                        <a:rPr lang="it-IT" sz="2800" b="1" u="none" strike="noStrike">
+                        <a:rPr lang="it-IT" sz="2800" b="1" u="none" strike="noStrike" dirty="0">
                           <a:effectLst/>
                         </a:rPr>
                         <a:t>Totale utilizzato</a:t>
                       </a:r>
-                      <a:endParaRPr lang="it-IT" sz="2800" b="1" i="0" u="none" strike="noStrike">
+                      <a:endParaRPr lang="it-IT" sz="2800" b="1" i="0" u="none" strike="noStrike" dirty="0">
                         <a:solidFill>
                           <a:srgbClr val="000000"/>
                         </a:solidFill>
@@ -15302,7 +15474,7 @@
                         <a:rPr lang="it-IT" sz="2800" u="none" strike="noStrike" dirty="0">
                           <a:effectLst/>
                         </a:rPr>
-                        <a:t>5450€</a:t>
+                        <a:t>5655€</a:t>
                       </a:r>
                       <a:endParaRPr lang="it-IT" sz="2800" b="0" i="0" u="none" strike="noStrike" dirty="0">
                         <a:solidFill>
@@ -15380,7 +15552,7 @@
           <p:nvPr>
             <p:extLst>
               <p:ext uri="{D42A27DB-BD31-4B8C-83A1-F6EECF244321}">
-                <p14:modId xmlns:p14="http://schemas.microsoft.com/office/powerpoint/2010/main" val="2939041760"/>
+                <p14:modId xmlns:p14="http://schemas.microsoft.com/office/powerpoint/2010/main" val="2989446055"/>
               </p:ext>
             </p:extLst>
           </p:nvPr>
@@ -15698,7 +15870,7 @@
                         <a:rPr lang="it-IT" sz="2000" u="none" strike="noStrike" dirty="0">
                           <a:effectLst/>
                         </a:rPr>
-                        <a:t>35h</a:t>
+                        <a:t>20h</a:t>
                       </a:r>
                       <a:endParaRPr lang="it-IT" sz="2000" b="0" i="0" u="none" strike="noStrike" dirty="0">
                         <a:solidFill>
@@ -15763,7 +15935,7 @@
                         <a:rPr lang="it-IT" sz="2000" u="none" strike="noStrike" dirty="0">
                           <a:effectLst/>
                         </a:rPr>
-                        <a:t>1050€</a:t>
+                        <a:t>600€</a:t>
                       </a:r>
                       <a:endParaRPr lang="it-IT" sz="2000" b="0" i="0" u="none" strike="noStrike" dirty="0">
                         <a:solidFill>
@@ -15900,7 +16072,7 @@
                         <a:rPr lang="it-IT" sz="2000" u="none" strike="noStrike" dirty="0">
                           <a:effectLst/>
                         </a:rPr>
-                        <a:t>28h</a:t>
+                        <a:t>17h</a:t>
                       </a:r>
                       <a:endParaRPr lang="it-IT" sz="2000" b="0" i="0" u="none" strike="noStrike" dirty="0">
                         <a:solidFill>
@@ -15965,7 +16137,7 @@
                         <a:rPr lang="it-IT" sz="2000" u="none" strike="noStrike" dirty="0">
                           <a:effectLst/>
                         </a:rPr>
-                        <a:t>560€</a:t>
+                        <a:t>340€</a:t>
                       </a:r>
                       <a:endParaRPr lang="it-IT" sz="2000" b="0" i="0" u="none" strike="noStrike" dirty="0">
                         <a:solidFill>
@@ -16102,7 +16274,7 @@
                         <a:rPr lang="it-IT" sz="2000" u="none" strike="noStrike" dirty="0">
                           <a:effectLst/>
                         </a:rPr>
-                        <a:t>8h</a:t>
+                        <a:t>0h</a:t>
                       </a:r>
                       <a:endParaRPr lang="it-IT" sz="2000" b="0" i="0" u="none" strike="noStrike" dirty="0">
                         <a:solidFill>
@@ -16167,7 +16339,7 @@
                         <a:rPr lang="it-IT" sz="2000" u="none" strike="noStrike" dirty="0">
                           <a:effectLst/>
                         </a:rPr>
-                        <a:t>200€</a:t>
+                        <a:t>0€</a:t>
                       </a:r>
                       <a:endParaRPr lang="it-IT" sz="2000" b="0" i="0" u="none" strike="noStrike" dirty="0">
                         <a:solidFill>
@@ -16304,7 +16476,7 @@
                         <a:rPr lang="it-IT" sz="2000" u="none" strike="noStrike" dirty="0">
                           <a:effectLst/>
                         </a:rPr>
-                        <a:t>52h</a:t>
+                        <a:t>147h</a:t>
                       </a:r>
                       <a:endParaRPr lang="it-IT" sz="2000" b="0" i="0" u="none" strike="noStrike" dirty="0">
                         <a:solidFill>
@@ -16369,7 +16541,7 @@
                         <a:rPr lang="it-IT" sz="2000" u="none" strike="noStrike" dirty="0">
                           <a:effectLst/>
                         </a:rPr>
-                        <a:t>1300€</a:t>
+                        <a:t>3675€</a:t>
                       </a:r>
                       <a:endParaRPr lang="it-IT" sz="2000" b="0" i="0" u="none" strike="noStrike" dirty="0">
                         <a:solidFill>
@@ -16506,7 +16678,7 @@
                         <a:rPr lang="it-IT" sz="2000" u="none" strike="noStrike" dirty="0">
                           <a:effectLst/>
                         </a:rPr>
-                        <a:t>167h</a:t>
+                        <a:t>107h</a:t>
                       </a:r>
                       <a:endParaRPr lang="it-IT" sz="2000" b="0" i="0" u="none" strike="noStrike" dirty="0">
                         <a:solidFill>
@@ -16571,7 +16743,7 @@
                         <a:rPr lang="it-IT" sz="2000" u="none" strike="noStrike" dirty="0">
                           <a:effectLst/>
                         </a:rPr>
-                        <a:t>2505€</a:t>
+                        <a:t>1605€</a:t>
                       </a:r>
                       <a:endParaRPr lang="it-IT" sz="2000" b="0" i="0" u="none" strike="noStrike" dirty="0">
                         <a:solidFill>
@@ -16708,7 +16880,7 @@
                         <a:rPr lang="it-IT" sz="2000" u="none" strike="noStrike" dirty="0">
                           <a:effectLst/>
                         </a:rPr>
-                        <a:t>115h</a:t>
+                        <a:t>61h</a:t>
                       </a:r>
                       <a:endParaRPr lang="it-IT" sz="2000" b="0" i="0" u="none" strike="noStrike" dirty="0">
                         <a:solidFill>
@@ -16773,7 +16945,7 @@
                         <a:rPr lang="it-IT" sz="2000" u="none" strike="noStrike" dirty="0">
                           <a:effectLst/>
                         </a:rPr>
-                        <a:t>1725€</a:t>
+                        <a:t>915€</a:t>
                       </a:r>
                       <a:endParaRPr lang="it-IT" sz="2000" b="0" i="0" u="none" strike="noStrike" dirty="0">
                         <a:solidFill>
@@ -16910,7 +17082,7 @@
                         <a:rPr lang="it-IT" sz="2000" u="none" strike="noStrike" dirty="0">
                           <a:effectLst/>
                         </a:rPr>
-                        <a:t>405h</a:t>
+                        <a:t>352h</a:t>
                       </a:r>
                       <a:endParaRPr lang="it-IT" sz="2000" b="0" i="0" u="none" strike="noStrike" dirty="0">
                         <a:solidFill>
@@ -16975,7 +17147,7 @@
                         <a:rPr lang="it-IT" sz="2000" u="none" strike="noStrike" dirty="0">
                           <a:effectLst/>
                         </a:rPr>
-                        <a:t>7340€</a:t>
+                        <a:t>7135€</a:t>
                       </a:r>
                       <a:endParaRPr lang="it-IT" sz="2000" b="0" i="0" u="none" strike="noStrike" dirty="0">
                         <a:solidFill>
@@ -17052,7 +17224,7 @@
         </p:nvSpPr>
         <p:spPr>
           <a:xfrm>
-            <a:off x="4650582" y="5579358"/>
+            <a:off x="4541597" y="5998045"/>
             <a:ext cx="9215436" cy="630942"/>
           </a:xfrm>
           <a:prstGeom prst="rect">

--- a/RTB/PRESENTAZIONE RTB/Presentazione RTB.pptx
+++ b/RTB/PRESENTAZIONE RTB/Presentazione RTB.pptx
@@ -239,7 +239,7 @@
           <a:p>
             <a:fld id="{DC233B30-4F8C-4A4C-AB5E-3B02323E36F5}" type="datetimeFigureOut">
               <a:rPr lang="it-IT" smtClean="0"/>
-              <a:t>26/01/2026</a:t>
+              <a:t>28/01/2026</a:t>
             </a:fld>
             <a:endParaRPr lang="it-IT"/>
           </a:p>
@@ -1697,7 +1697,7 @@
             <a:fld id="{1D8BD707-D9CF-40AE-B4C6-C98DA3205C09}" type="datetimeFigureOut">
               <a:rPr lang="en-US" smtClean="0"/>
               <a:pPr/>
-              <a:t>1/26/2026</a:t>
+              <a:t>1/28/2026</a:t>
             </a:fld>
             <a:endParaRPr lang="en-US"/>
           </a:p>
@@ -1862,7 +1862,7 @@
             <a:fld id="{1D8BD707-D9CF-40AE-B4C6-C98DA3205C09}" type="datetimeFigureOut">
               <a:rPr lang="en-US" smtClean="0"/>
               <a:pPr/>
-              <a:t>1/26/2026</a:t>
+              <a:t>1/28/2026</a:t>
             </a:fld>
             <a:endParaRPr lang="en-US"/>
           </a:p>
@@ -2037,7 +2037,7 @@
             <a:fld id="{1D8BD707-D9CF-40AE-B4C6-C98DA3205C09}" type="datetimeFigureOut">
               <a:rPr lang="en-US" smtClean="0"/>
               <a:pPr/>
-              <a:t>1/26/2026</a:t>
+              <a:t>1/28/2026</a:t>
             </a:fld>
             <a:endParaRPr lang="en-US"/>
           </a:p>
@@ -2202,7 +2202,7 @@
             <a:fld id="{1D8BD707-D9CF-40AE-B4C6-C98DA3205C09}" type="datetimeFigureOut">
               <a:rPr lang="en-US" smtClean="0"/>
               <a:pPr/>
-              <a:t>1/26/2026</a:t>
+              <a:t>1/28/2026</a:t>
             </a:fld>
             <a:endParaRPr lang="en-US"/>
           </a:p>
@@ -2444,7 +2444,7 @@
             <a:fld id="{1D8BD707-D9CF-40AE-B4C6-C98DA3205C09}" type="datetimeFigureOut">
               <a:rPr lang="en-US" smtClean="0"/>
               <a:pPr/>
-              <a:t>1/26/2026</a:t>
+              <a:t>1/28/2026</a:t>
             </a:fld>
             <a:endParaRPr lang="en-US"/>
           </a:p>
@@ -2726,7 +2726,7 @@
             <a:fld id="{1D8BD707-D9CF-40AE-B4C6-C98DA3205C09}" type="datetimeFigureOut">
               <a:rPr lang="en-US" smtClean="0"/>
               <a:pPr/>
-              <a:t>1/26/2026</a:t>
+              <a:t>1/28/2026</a:t>
             </a:fld>
             <a:endParaRPr lang="en-US"/>
           </a:p>
@@ -3142,7 +3142,7 @@
             <a:fld id="{1D8BD707-D9CF-40AE-B4C6-C98DA3205C09}" type="datetimeFigureOut">
               <a:rPr lang="en-US" smtClean="0"/>
               <a:pPr/>
-              <a:t>1/26/2026</a:t>
+              <a:t>1/28/2026</a:t>
             </a:fld>
             <a:endParaRPr lang="en-US"/>
           </a:p>
@@ -3256,7 +3256,7 @@
             <a:fld id="{1D8BD707-D9CF-40AE-B4C6-C98DA3205C09}" type="datetimeFigureOut">
               <a:rPr lang="en-US" smtClean="0"/>
               <a:pPr/>
-              <a:t>1/26/2026</a:t>
+              <a:t>1/28/2026</a:t>
             </a:fld>
             <a:endParaRPr lang="en-US"/>
           </a:p>
@@ -3348,7 +3348,7 @@
             <a:fld id="{1D8BD707-D9CF-40AE-B4C6-C98DA3205C09}" type="datetimeFigureOut">
               <a:rPr lang="en-US" smtClean="0"/>
               <a:pPr/>
-              <a:t>1/26/2026</a:t>
+              <a:t>1/28/2026</a:t>
             </a:fld>
             <a:endParaRPr lang="en-US"/>
           </a:p>
@@ -3620,7 +3620,7 @@
             <a:fld id="{1D8BD707-D9CF-40AE-B4C6-C98DA3205C09}" type="datetimeFigureOut">
               <a:rPr lang="en-US" smtClean="0"/>
               <a:pPr/>
-              <a:t>1/26/2026</a:t>
+              <a:t>1/28/2026</a:t>
             </a:fld>
             <a:endParaRPr lang="en-US"/>
           </a:p>
@@ -3869,7 +3869,7 @@
             <a:fld id="{1D8BD707-D9CF-40AE-B4C6-C98DA3205C09}" type="datetimeFigureOut">
               <a:rPr lang="en-US" smtClean="0"/>
               <a:pPr/>
-              <a:t>1/26/2026</a:t>
+              <a:t>1/28/2026</a:t>
             </a:fld>
             <a:endParaRPr lang="en-US"/>
           </a:p>
@@ -4077,7 +4077,7 @@
             <a:fld id="{1D8BD707-D9CF-40AE-B4C6-C98DA3205C09}" type="datetimeFigureOut">
               <a:rPr lang="en-US" smtClean="0"/>
               <a:pPr/>
-              <a:t>1/26/2026</a:t>
+              <a:t>1/28/2026</a:t>
             </a:fld>
             <a:endParaRPr lang="en-US"/>
           </a:p>
@@ -13795,7 +13795,7 @@
           <p:nvPr>
             <p:extLst>
               <p:ext uri="{D42A27DB-BD31-4B8C-83A1-F6EECF244321}">
-                <p14:modId xmlns:p14="http://schemas.microsoft.com/office/powerpoint/2010/main" val="3401584854"/>
+                <p14:modId xmlns:p14="http://schemas.microsoft.com/office/powerpoint/2010/main" val="3915165607"/>
               </p:ext>
             </p:extLst>
           </p:nvPr>
@@ -14949,7 +14949,7 @@
                         <a:rPr lang="it-IT" sz="2800" u="none" strike="noStrike" dirty="0">
                           <a:effectLst/>
                         </a:rPr>
-                        <a:t>55h</a:t>
+                        <a:t>46h</a:t>
                       </a:r>
                       <a:endParaRPr lang="it-IT" sz="2800" b="0" i="0" u="none" strike="noStrike" dirty="0">
                         <a:solidFill>
@@ -15406,10 +15406,10 @@
                         <a:buNone/>
                       </a:pPr>
                       <a:r>
-                        <a:rPr lang="it-IT" sz="2800" u="none" strike="noStrike" dirty="0">
+                        <a:rPr lang="it-IT" sz="2800" u="none" strike="noStrike">
                           <a:effectLst/>
                         </a:rPr>
-                        <a:t>157h</a:t>
+                        <a:t>292h</a:t>
                       </a:r>
                       <a:endParaRPr lang="it-IT" sz="2800" b="0" i="0" u="none" strike="noStrike" dirty="0">
                         <a:solidFill>
